--- a/02-PROFESORADO/03-PRESENTACIONES/POR-SESION/h1/S210-variables-presentacion.pptx
+++ b/02-PROFESORADO/03-PRESENTACIONES/POR-SESION/h1/S210-variables-presentacion.pptx
@@ -11,6 +11,8 @@
     <p:sldId id="259" r:id="rId10"/>
     <p:sldId id="260" r:id="rId11"/>
     <p:sldId id="261" r:id="rId12"/>
+    <p:sldId id="262" r:id="rId13"/>
+    <p:sldId id="263" r:id="rId14"/>
   </p:sldIdLst>
   <p:sldSz cx="12191695" cy="6858000" type="screen4x3"/>
   <p:notesSz cx="6858000" cy="9144000"/>
@@ -3145,7 +3147,7 @@
         <p:spPr>
           <a:xfrm>
             <a:off x="0" y="0"/>
-            <a:ext cx="228600" cy="6858000"/>
+            <a:ext cx="256032" cy="6858000"/>
           </a:xfrm>
           <a:prstGeom prst="rect">
             <a:avLst/>
@@ -3187,8 +3189,8 @@
         </p:nvSpPr>
         <p:spPr>
           <a:xfrm>
-            <a:off x="640080" y="566928"/>
-            <a:ext cx="1828800" cy="566928"/>
+            <a:off x="658368" y="566928"/>
+            <a:ext cx="1874519" cy="566928"/>
           </a:xfrm>
           <a:prstGeom prst="roundRect">
             <a:avLst/>
@@ -3197,7 +3199,9 @@
             <a:srgbClr val="2F5BA8"/>
           </a:solidFill>
           <a:ln>
-            <a:noFill/>
+            <a:solidFill>
+              <a:srgbClr val="2F5BA8"/>
+            </a:solidFill>
           </a:ln>
         </p:spPr>
         <p:style>
@@ -3230,8 +3234,8 @@
         </p:nvSpPr>
         <p:spPr>
           <a:xfrm>
-            <a:off x="713232" y="676656"/>
-            <a:ext cx="1682496" cy="256032"/>
+            <a:off x="731520" y="685800"/>
+            <a:ext cx="1719072" cy="228600"/>
           </a:xfrm>
           <a:prstGeom prst="rect">
             <a:avLst/>
@@ -3239,7 +3243,7 @@
           <a:noFill/>
         </p:spPr>
         <p:txBody>
-          <a:bodyPr wrap="square" lIns="36576" rIns="36576" tIns="27432" bIns="27432">
+          <a:bodyPr wrap="square" lIns="45720" rIns="45720" tIns="36576" bIns="36576" anchor="t">
             <a:spAutoFit/>
           </a:bodyPr>
           <a:lstStyle/>
@@ -3266,8 +3270,8 @@
         </p:nvSpPr>
         <p:spPr>
           <a:xfrm>
-            <a:off x="658368" y="1536192"/>
-            <a:ext cx="10789920" cy="1645920"/>
+            <a:off x="685800" y="1481328"/>
+            <a:ext cx="10789920" cy="1691640"/>
           </a:xfrm>
           <a:prstGeom prst="rect">
             <a:avLst/>
@@ -3275,7 +3279,7 @@
           <a:noFill/>
         </p:spPr>
         <p:txBody>
-          <a:bodyPr wrap="square" lIns="36576" rIns="36576" tIns="27432" bIns="27432">
+          <a:bodyPr wrap="square" lIns="45720" rIns="45720" tIns="36576" bIns="36576" anchor="t">
             <a:spAutoFit/>
           </a:bodyPr>
           <a:lstStyle/>
@@ -3302,8 +3306,8 @@
         </p:nvSpPr>
         <p:spPr>
           <a:xfrm>
-            <a:off x="685800" y="3822191"/>
-            <a:ext cx="6766560" cy="384048"/>
+            <a:off x="713232" y="3703320"/>
+            <a:ext cx="10424160" cy="411480"/>
           </a:xfrm>
           <a:prstGeom prst="rect">
             <a:avLst/>
@@ -3311,7 +3315,7 @@
           <a:noFill/>
         </p:spPr>
         <p:txBody>
-          <a:bodyPr wrap="square" lIns="36576" rIns="36576" tIns="27432" bIns="27432">
+          <a:bodyPr wrap="square" lIns="45720" rIns="45720" tIns="36576" bIns="36576" anchor="t">
             <a:spAutoFit/>
           </a:bodyPr>
           <a:lstStyle/>
@@ -3325,7 +3329,7 @@
               </a:defRPr>
             </a:pPr>
             <a:r>
-              <a:t>H1  ·  45 minutos</a:t>
+              <a:t>H1 · 45 minutos</a:t>
             </a:r>
           </a:p>
         </p:txBody>
@@ -3338,8 +3342,8 @@
         </p:nvSpPr>
         <p:spPr>
           <a:xfrm>
-            <a:off x="685800" y="5074920"/>
-            <a:ext cx="10241280" cy="640080"/>
+            <a:off x="713232" y="4315968"/>
+            <a:ext cx="10241280" cy="502920"/>
           </a:xfrm>
           <a:prstGeom prst="rect">
             <a:avLst/>
@@ -3347,13 +3351,13 @@
           <a:noFill/>
         </p:spPr>
         <p:txBody>
-          <a:bodyPr wrap="square" lIns="36576" rIns="36576" tIns="27432" bIns="27432">
+          <a:bodyPr wrap="square" lIns="45720" rIns="45720" tIns="36576" bIns="36576" anchor="t">
             <a:spAutoFit/>
           </a:bodyPr>
           <a:lstStyle/>
           <a:p>
             <a:pPr algn="l">
-              <a:defRPr sz="2400" b="0">
+              <a:defRPr sz="1900" b="0">
                 <a:solidFill>
                   <a:srgbClr val="FFFFFF"/>
                 </a:solidFill>
@@ -3361,7 +3365,7 @@
               </a:defRPr>
             </a:pPr>
             <a:r>
-              <a:t>Hoy construiremos una evidencia que puedas comprobar y explicar.</a:t>
+              <a:t>Fase HEXA: Planificar — organizar el trabajo</a:t>
             </a:r>
           </a:p>
         </p:txBody>
@@ -3374,7 +3378,7 @@
         </p:nvSpPr>
         <p:spPr>
           <a:xfrm>
-            <a:off x="685800" y="6272784"/>
+            <a:off x="713232" y="6272784"/>
             <a:ext cx="10607040" cy="201168"/>
           </a:xfrm>
           <a:prstGeom prst="rect">
@@ -3383,7 +3387,7 @@
           <a:noFill/>
         </p:spPr>
         <p:txBody>
-          <a:bodyPr wrap="square" lIns="36576" rIns="36576" tIns="27432" bIns="27432">
+          <a:bodyPr wrap="square" lIns="45720" rIns="45720" tIns="36576" bIns="36576" anchor="t">
             <a:spAutoFit/>
           </a:bodyPr>
           <a:lstStyle/>
@@ -3514,8 +3518,8 @@
         </p:nvSpPr>
         <p:spPr>
           <a:xfrm>
-            <a:off x="502920" y="310896"/>
-            <a:ext cx="5029200" cy="256032"/>
+            <a:off x="502920" y="274320"/>
+            <a:ext cx="5486400" cy="256032"/>
           </a:xfrm>
           <a:prstGeom prst="rect">
             <a:avLst/>
@@ -3523,7 +3527,7 @@
           <a:noFill/>
         </p:spPr>
         <p:txBody>
-          <a:bodyPr wrap="square" lIns="36576" rIns="36576" tIns="27432" bIns="27432">
+          <a:bodyPr wrap="square" lIns="45720" rIns="45720" tIns="36576" bIns="36576" anchor="t">
             <a:spAutoFit/>
           </a:bodyPr>
           <a:lstStyle/>
@@ -3550,7 +3554,7 @@
         </p:nvSpPr>
         <p:spPr>
           <a:xfrm>
-            <a:off x="502920" y="621792"/>
+            <a:off x="502920" y="603504"/>
             <a:ext cx="11064240" cy="530352"/>
           </a:xfrm>
           <a:prstGeom prst="rect">
@@ -3559,7 +3563,7 @@
           <a:noFill/>
         </p:spPr>
         <p:txBody>
-          <a:bodyPr wrap="square" lIns="36576" rIns="36576" tIns="27432" bIns="27432">
+          <a:bodyPr wrap="square" lIns="45720" rIns="45720" tIns="36576" bIns="36576" anchor="t">
             <a:spAutoFit/>
           </a:bodyPr>
           <a:lstStyle/>
@@ -3573,7 +3577,7 @@
               </a:defRPr>
             </a:pPr>
             <a:r>
-              <a:t>Qué vamos a conseguir</a:t>
+              <a:t>Qué debe conseguirse</a:t>
             </a:r>
           </a:p>
         </p:txBody>
@@ -3638,7 +3642,7 @@
           <a:noFill/>
         </p:spPr>
         <p:txBody>
-          <a:bodyPr wrap="square" lIns="36576" rIns="36576" tIns="27432" bIns="27432">
+          <a:bodyPr wrap="square" lIns="45720" rIns="45720" tIns="36576" bIns="36576" anchor="t">
             <a:spAutoFit/>
           </a:bodyPr>
           <a:lstStyle/>
@@ -3665,8 +3669,8 @@
         </p:nvSpPr>
         <p:spPr>
           <a:xfrm>
-            <a:off x="594360" y="1417320"/>
-            <a:ext cx="5349240" cy="4343400"/>
+            <a:off x="594360" y="1389888"/>
+            <a:ext cx="5184648" cy="4297680"/>
           </a:xfrm>
           <a:prstGeom prst="roundRect">
             <a:avLst/>
@@ -3676,7 +3680,7 @@
           </a:solidFill>
           <a:ln>
             <a:solidFill>
-              <a:srgbClr val="EBEEF2"/>
+              <a:srgbClr val="E5E9EF"/>
             </a:solidFill>
           </a:ln>
         </p:spPr>
@@ -3711,7 +3715,7 @@
         <p:spPr>
           <a:xfrm>
             <a:off x="822960" y="1618488"/>
-            <a:ext cx="438912" cy="411480"/>
+            <a:ext cx="4727448" cy="3840480"/>
           </a:xfrm>
           <a:prstGeom prst="rect">
             <a:avLst/>
@@ -3719,107 +3723,35 @@
           <a:noFill/>
         </p:spPr>
         <p:txBody>
-          <a:bodyPr wrap="square" lIns="36576" rIns="36576" tIns="27432" bIns="27432">
+          <a:bodyPr wrap="square" lIns="45720" rIns="45720" tIns="36576" bIns="36576" anchor="t">
             <a:spAutoFit/>
           </a:bodyPr>
           <a:lstStyle/>
           <a:p>
-            <a:pPr algn="ctr">
-              <a:defRPr sz="2400" b="1">
-                <a:solidFill>
-                  <a:srgbClr val="2F5BA8"/>
+            <a:pPr algn="l">
+              <a:defRPr sz="2100" b="1">
+                <a:solidFill>
+                  <a:srgbClr val="1C2330"/>
                 </a:solidFill>
                 <a:latin typeface="Aptos"/>
               </a:defRPr>
             </a:pPr>
             <a:r>
-              <a:t>01</a:t>
-            </a:r>
-          </a:p>
-        </p:txBody>
-      </p:sp>
-      <p:sp>
-        <p:nvSpPr>
-          <p:cNvPr id="10" name="TextBox 9"/>
-          <p:cNvSpPr txBox="1"/>
-          <p:nvPr/>
-        </p:nvSpPr>
-        <p:spPr>
-          <a:xfrm>
-            <a:off x="1344168" y="1645920"/>
-            <a:ext cx="4389120" cy="365760"/>
-          </a:xfrm>
-          <a:prstGeom prst="rect">
-            <a:avLst/>
-          </a:prstGeom>
-          <a:noFill/>
-        </p:spPr>
-        <p:txBody>
-          <a:bodyPr wrap="square" lIns="36576" rIns="36576" tIns="27432" bIns="27432">
-            <a:spAutoFit/>
-          </a:bodyPr>
-          <a:lstStyle/>
-          <a:p>
-            <a:pPr algn="l">
-              <a:defRPr sz="1700" b="1">
-                <a:solidFill>
-                  <a:srgbClr val="2F5BA8"/>
-                </a:solidFill>
-                <a:latin typeface="Aptos"/>
-              </a:defRPr>
-            </a:pPr>
-            <a:r>
-              <a:t>Hoy vas a…</a:t>
-            </a:r>
-          </a:p>
-        </p:txBody>
-      </p:sp>
-      <p:sp>
-        <p:nvSpPr>
-          <p:cNvPr id="11" name="TextBox 10"/>
-          <p:cNvSpPr txBox="1"/>
-          <p:nvPr/>
-        </p:nvSpPr>
-        <p:spPr>
-          <a:xfrm>
-            <a:off x="868680" y="2286000"/>
-            <a:ext cx="4800600" cy="3246120"/>
-          </a:xfrm>
-          <a:prstGeom prst="rect">
-            <a:avLst/>
-          </a:prstGeom>
-          <a:noFill/>
-        </p:spPr>
-        <p:txBody>
-          <a:bodyPr wrap="square" lIns="36576" rIns="36576" tIns="27432" bIns="27432">
-            <a:spAutoFit/>
-          </a:bodyPr>
-          <a:lstStyle/>
-          <a:p>
-            <a:pPr algn="l">
-              <a:defRPr sz="2200" b="0">
-                <a:solidFill>
-                  <a:srgbClr val="1C2330"/>
-                </a:solidFill>
-                <a:latin typeface="Aptos"/>
-              </a:defRPr>
-            </a:pPr>
-            <a:r>
-              <a:t>Guardar datos en variables.</a:t>
-            </a:r>
-          </a:p>
-        </p:txBody>
-      </p:sp>
-      <p:sp>
-        <p:nvSpPr>
-          <p:cNvPr id="12" name="Rounded Rectangle 11"/>
+              <a:t>Objetivo: Guardar datos en variables.</a:t>
+            </a:r>
+          </a:p>
+        </p:txBody>
+      </p:sp>
+      <p:sp>
+        <p:nvSpPr>
+          <p:cNvPr id="10" name="Rounded Rectangle 9"/>
           <p:cNvSpPr/>
           <p:nvPr/>
         </p:nvSpPr>
         <p:spPr>
           <a:xfrm>
-            <a:off x="6236208" y="1417320"/>
-            <a:ext cx="5349240" cy="4343400"/>
+            <a:off x="6035040" y="1389888"/>
+            <a:ext cx="5184648" cy="4297680"/>
           </a:xfrm>
           <a:prstGeom prst="roundRect">
             <a:avLst/>
@@ -3829,7 +3761,7 @@
           </a:solidFill>
           <a:ln>
             <a:solidFill>
-              <a:srgbClr val="EBEEF2"/>
+              <a:srgbClr val="E5E9EF"/>
             </a:solidFill>
           </a:ln>
         </p:spPr>
@@ -3857,14 +3789,14 @@
       </p:sp>
       <p:sp>
         <p:nvSpPr>
-          <p:cNvPr id="13" name="TextBox 12"/>
+          <p:cNvPr id="11" name="TextBox 10"/>
           <p:cNvSpPr txBox="1"/>
           <p:nvPr/>
         </p:nvSpPr>
         <p:spPr>
           <a:xfrm>
-            <a:off x="6464808" y="1618488"/>
-            <a:ext cx="438912" cy="411480"/>
+            <a:off x="6263640" y="1618488"/>
+            <a:ext cx="4727448" cy="3840480"/>
           </a:xfrm>
           <a:prstGeom prst="rect">
             <a:avLst/>
@@ -3872,93 +3804,21 @@
           <a:noFill/>
         </p:spPr>
         <p:txBody>
-          <a:bodyPr wrap="square" lIns="36576" rIns="36576" tIns="27432" bIns="27432">
+          <a:bodyPr wrap="square" lIns="45720" rIns="45720" tIns="36576" bIns="36576" anchor="t">
             <a:spAutoFit/>
           </a:bodyPr>
           <a:lstStyle/>
           <a:p>
-            <a:pPr algn="ctr">
-              <a:defRPr sz="2400" b="1">
-                <a:solidFill>
-                  <a:srgbClr val="2F5BA8"/>
+            <a:pPr algn="l">
+              <a:defRPr sz="2100" b="1">
+                <a:solidFill>
+                  <a:srgbClr val="1C2330"/>
                 </a:solidFill>
                 <a:latin typeface="Aptos"/>
               </a:defRPr>
             </a:pPr>
             <a:r>
-              <a:t>02</a:t>
-            </a:r>
-          </a:p>
-        </p:txBody>
-      </p:sp>
-      <p:sp>
-        <p:nvSpPr>
-          <p:cNvPr id="14" name="TextBox 13"/>
-          <p:cNvSpPr txBox="1"/>
-          <p:nvPr/>
-        </p:nvSpPr>
-        <p:spPr>
-          <a:xfrm>
-            <a:off x="6986016" y="1645920"/>
-            <a:ext cx="4389120" cy="365760"/>
-          </a:xfrm>
-          <a:prstGeom prst="rect">
-            <a:avLst/>
-          </a:prstGeom>
-          <a:noFill/>
-        </p:spPr>
-        <p:txBody>
-          <a:bodyPr wrap="square" lIns="36576" rIns="36576" tIns="27432" bIns="27432">
-            <a:spAutoFit/>
-          </a:bodyPr>
-          <a:lstStyle/>
-          <a:p>
-            <a:pPr algn="l">
-              <a:defRPr sz="1700" b="1">
-                <a:solidFill>
-                  <a:srgbClr val="2F5BA8"/>
-                </a:solidFill>
-                <a:latin typeface="Aptos"/>
-              </a:defRPr>
-            </a:pPr>
-            <a:r>
-              <a:t>Debe quedar…</a:t>
-            </a:r>
-          </a:p>
-        </p:txBody>
-      </p:sp>
-      <p:sp>
-        <p:nvSpPr>
-          <p:cNvPr id="15" name="TextBox 14"/>
-          <p:cNvSpPr txBox="1"/>
-          <p:nvPr/>
-        </p:nvSpPr>
-        <p:spPr>
-          <a:xfrm>
-            <a:off x="6510528" y="2286000"/>
-            <a:ext cx="4800600" cy="3246120"/>
-          </a:xfrm>
-          <a:prstGeom prst="rect">
-            <a:avLst/>
-          </a:prstGeom>
-          <a:noFill/>
-        </p:spPr>
-        <p:txBody>
-          <a:bodyPr wrap="square" lIns="36576" rIns="36576" tIns="27432" bIns="27432">
-            <a:spAutoFit/>
-          </a:bodyPr>
-          <a:lstStyle/>
-          <a:p>
-            <a:pPr algn="l">
-              <a:defRPr sz="2200" b="0">
-                <a:solidFill>
-                  <a:srgbClr val="1C2330"/>
-                </a:solidFill>
-                <a:latin typeface="Aptos"/>
-              </a:defRPr>
-            </a:pPr>
-            <a:r>
-              <a:t>Código con variable usada correctamente.</a:t>
+              <a:t>Evidencia: Código con variable usada correctamente.</a:t>
             </a:r>
           </a:p>
         </p:txBody>
@@ -4075,8 +3935,8 @@
         </p:nvSpPr>
         <p:spPr>
           <a:xfrm>
-            <a:off x="502920" y="310896"/>
-            <a:ext cx="5029200" cy="256032"/>
+            <a:off x="502920" y="274320"/>
+            <a:ext cx="5486400" cy="256032"/>
           </a:xfrm>
           <a:prstGeom prst="rect">
             <a:avLst/>
@@ -4084,7 +3944,7 @@
           <a:noFill/>
         </p:spPr>
         <p:txBody>
-          <a:bodyPr wrap="square" lIns="36576" rIns="36576" tIns="27432" bIns="27432">
+          <a:bodyPr wrap="square" lIns="45720" rIns="45720" tIns="36576" bIns="36576" anchor="t">
             <a:spAutoFit/>
           </a:bodyPr>
           <a:lstStyle/>
@@ -4098,7 +3958,7 @@
               </a:defRPr>
             </a:pPr>
             <a:r>
-              <a:t>PASO A PASO</a:t>
+              <a:t>RITMO DE LA SESIÓN</a:t>
             </a:r>
           </a:p>
         </p:txBody>
@@ -4111,7 +3971,7 @@
         </p:nvSpPr>
         <p:spPr>
           <a:xfrm>
-            <a:off x="502920" y="621792"/>
+            <a:off x="502920" y="603504"/>
             <a:ext cx="11064240" cy="530352"/>
           </a:xfrm>
           <a:prstGeom prst="rect">
@@ -4120,7 +3980,7 @@
           <a:noFill/>
         </p:spPr>
         <p:txBody>
-          <a:bodyPr wrap="square" lIns="36576" rIns="36576" tIns="27432" bIns="27432">
+          <a:bodyPr wrap="square" lIns="45720" rIns="45720" tIns="36576" bIns="36576" anchor="t">
             <a:spAutoFit/>
           </a:bodyPr>
           <a:lstStyle/>
@@ -4134,7 +3994,7 @@
               </a:defRPr>
             </a:pPr>
             <a:r>
-              <a:t>Ruta de trabajo</a:t>
+              <a:t>Secuencia de aula</a:t>
             </a:r>
           </a:p>
         </p:txBody>
@@ -4199,7 +4059,7 @@
           <a:noFill/>
         </p:spPr>
         <p:txBody>
-          <a:bodyPr wrap="square" lIns="36576" rIns="36576" tIns="27432" bIns="27432">
+          <a:bodyPr wrap="square" lIns="45720" rIns="45720" tIns="36576" bIns="36576" anchor="t">
             <a:spAutoFit/>
           </a:bodyPr>
           <a:lstStyle/>
@@ -4226,8 +4086,8 @@
         </p:nvSpPr>
         <p:spPr>
           <a:xfrm>
-            <a:off x="685800" y="1325880"/>
-            <a:ext cx="502920" cy="502920"/>
+            <a:off x="658368" y="1280160"/>
+            <a:ext cx="475488" cy="475488"/>
           </a:xfrm>
           <a:prstGeom prst="ellipse">
             <a:avLst/>
@@ -4269,8 +4129,8 @@
         </p:nvSpPr>
         <p:spPr>
           <a:xfrm>
-            <a:off x="685800" y="1435607"/>
-            <a:ext cx="502920" cy="201168"/>
+            <a:off x="658368" y="1380744"/>
+            <a:ext cx="475488" cy="201168"/>
           </a:xfrm>
           <a:prstGeom prst="rect">
             <a:avLst/>
@@ -4278,13 +4138,13 @@
           <a:noFill/>
         </p:spPr>
         <p:txBody>
-          <a:bodyPr wrap="square" lIns="36576" rIns="36576" tIns="27432" bIns="27432">
+          <a:bodyPr wrap="square" lIns="45720" rIns="45720" tIns="36576" bIns="36576" anchor="t">
             <a:spAutoFit/>
           </a:bodyPr>
           <a:lstStyle/>
           <a:p>
             <a:pPr algn="ctr">
-              <a:defRPr sz="1400" b="1">
+              <a:defRPr sz="1300" b="1">
                 <a:solidFill>
                   <a:srgbClr val="FFFFFF"/>
                 </a:solidFill>
@@ -4305,8 +4165,8 @@
         </p:nvSpPr>
         <p:spPr>
           <a:xfrm>
-            <a:off x="1417320" y="1344168"/>
-            <a:ext cx="9875520" cy="548640"/>
+            <a:off x="1389888" y="1261872"/>
+            <a:ext cx="10058400" cy="772668"/>
           </a:xfrm>
           <a:prstGeom prst="rect">
             <a:avLst/>
@@ -4314,13 +4174,13 @@
           <a:noFill/>
         </p:spPr>
         <p:txBody>
-          <a:bodyPr wrap="square" lIns="36576" rIns="36576" tIns="27432" bIns="27432">
+          <a:bodyPr wrap="square" lIns="45720" rIns="45720" tIns="36576" bIns="36576" anchor="t">
             <a:spAutoFit/>
           </a:bodyPr>
           <a:lstStyle/>
           <a:p>
             <a:pPr algn="l">
-              <a:defRPr sz="2000" b="0">
+              <a:defRPr sz="1400" b="0">
                 <a:solidFill>
                   <a:srgbClr val="1C2330"/>
                 </a:solidFill>
@@ -4328,7 +4188,7 @@
               </a:defRPr>
             </a:pPr>
             <a:r>
-              <a:t>Lee el objetivo y escribe con tus palabras qué debe quedar terminado.</a:t>
+              <a:t>0–5 min — Presentar objetivo, producto y evidencia de hoy.</a:t>
             </a:r>
           </a:p>
         </p:txBody>
@@ -4341,8 +4201,8 @@
         </p:nvSpPr>
         <p:spPr>
           <a:xfrm>
-            <a:off x="685800" y="2258568"/>
-            <a:ext cx="502920" cy="502920"/>
+            <a:off x="658368" y="2125979"/>
+            <a:ext cx="475488" cy="475488"/>
           </a:xfrm>
           <a:prstGeom prst="ellipse">
             <a:avLst/>
@@ -4384,8 +4244,8 @@
         </p:nvSpPr>
         <p:spPr>
           <a:xfrm>
-            <a:off x="685800" y="2368296"/>
-            <a:ext cx="502920" cy="201168"/>
+            <a:off x="658368" y="2226563"/>
+            <a:ext cx="475488" cy="201168"/>
           </a:xfrm>
           <a:prstGeom prst="rect">
             <a:avLst/>
@@ -4393,13 +4253,13 @@
           <a:noFill/>
         </p:spPr>
         <p:txBody>
-          <a:bodyPr wrap="square" lIns="36576" rIns="36576" tIns="27432" bIns="27432">
+          <a:bodyPr wrap="square" lIns="45720" rIns="45720" tIns="36576" bIns="36576" anchor="t">
             <a:spAutoFit/>
           </a:bodyPr>
           <a:lstStyle/>
           <a:p>
             <a:pPr algn="ctr">
-              <a:defRPr sz="1400" b="1">
+              <a:defRPr sz="1300" b="1">
                 <a:solidFill>
                   <a:srgbClr val="FFFFFF"/>
                 </a:solidFill>
@@ -4420,8 +4280,8 @@
         </p:nvSpPr>
         <p:spPr>
           <a:xfrm>
-            <a:off x="1417320" y="2276856"/>
-            <a:ext cx="9875520" cy="548640"/>
+            <a:off x="1389888" y="2107691"/>
+            <a:ext cx="10058400" cy="772668"/>
           </a:xfrm>
           <a:prstGeom prst="rect">
             <a:avLst/>
@@ -4429,13 +4289,13 @@
           <a:noFill/>
         </p:spPr>
         <p:txBody>
-          <a:bodyPr wrap="square" lIns="36576" rIns="36576" tIns="27432" bIns="27432">
+          <a:bodyPr wrap="square" lIns="45720" rIns="45720" tIns="36576" bIns="36576" anchor="t">
             <a:spAutoFit/>
           </a:bodyPr>
           <a:lstStyle/>
           <a:p>
             <a:pPr algn="l">
-              <a:defRPr sz="2000" b="0">
+              <a:defRPr sz="1400" b="0">
                 <a:solidFill>
                   <a:srgbClr val="1C2330"/>
                 </a:solidFill>
@@ -4443,7 +4303,7 @@
               </a:defRPr>
             </a:pPr>
             <a:r>
-              <a:t>Atiende al ejemplo breve y anota una predicción, duda o decisión.</a:t>
+              <a:t>5–13 min — Explicación breve: Una variable guarda un dato que puede usarse varias veces.</a:t>
             </a:r>
           </a:p>
         </p:txBody>
@@ -4456,8 +4316,8 @@
         </p:nvSpPr>
         <p:spPr>
           <a:xfrm>
-            <a:off x="685800" y="3191256"/>
-            <a:ext cx="502920" cy="502920"/>
+            <a:off x="658368" y="2971799"/>
+            <a:ext cx="475488" cy="475488"/>
           </a:xfrm>
           <a:prstGeom prst="ellipse">
             <a:avLst/>
@@ -4499,8 +4359,8 @@
         </p:nvSpPr>
         <p:spPr>
           <a:xfrm>
-            <a:off x="685800" y="3300984"/>
-            <a:ext cx="502920" cy="201168"/>
+            <a:off x="658368" y="3072383"/>
+            <a:ext cx="475488" cy="201168"/>
           </a:xfrm>
           <a:prstGeom prst="rect">
             <a:avLst/>
@@ -4508,13 +4368,13 @@
           <a:noFill/>
         </p:spPr>
         <p:txBody>
-          <a:bodyPr wrap="square" lIns="36576" rIns="36576" tIns="27432" bIns="27432">
+          <a:bodyPr wrap="square" lIns="45720" rIns="45720" tIns="36576" bIns="36576" anchor="t">
             <a:spAutoFit/>
           </a:bodyPr>
           <a:lstStyle/>
           <a:p>
             <a:pPr algn="ctr">
-              <a:defRPr sz="1400" b="1">
+              <a:defRPr sz="1300" b="1">
                 <a:solidFill>
                   <a:srgbClr val="FFFFFF"/>
                 </a:solidFill>
@@ -4535,8 +4395,8 @@
         </p:nvSpPr>
         <p:spPr>
           <a:xfrm>
-            <a:off x="1417320" y="3209544"/>
-            <a:ext cx="9875520" cy="548640"/>
+            <a:off x="1389888" y="2953511"/>
+            <a:ext cx="10058400" cy="772668"/>
           </a:xfrm>
           <a:prstGeom prst="rect">
             <a:avLst/>
@@ -4544,13 +4404,13 @@
           <a:noFill/>
         </p:spPr>
         <p:txBody>
-          <a:bodyPr wrap="square" lIns="36576" rIns="36576" tIns="27432" bIns="27432">
+          <a:bodyPr wrap="square" lIns="45720" rIns="45720" tIns="36576" bIns="36576" anchor="t">
             <a:spAutoFit/>
           </a:bodyPr>
           <a:lstStyle/>
           <a:p>
             <a:pPr algn="l">
-              <a:defRPr sz="2000" b="0">
+              <a:defRPr sz="1400" b="0">
                 <a:solidFill>
                   <a:srgbClr val="1C2330"/>
                 </a:solidFill>
@@ -4558,7 +4418,7 @@
               </a:defRPr>
             </a:pPr>
             <a:r>
-              <a:t>Realiza esta tarea: Crear variable userName con un valor fijo y usarla en varios mensajes.</a:t>
+              <a:t>13–18 min — Demostración o ejemplo: Cambia el valor de userName y muestra cómo afecta a varios mensajes.</a:t>
             </a:r>
           </a:p>
         </p:txBody>
@@ -4571,8 +4431,8 @@
         </p:nvSpPr>
         <p:spPr>
           <a:xfrm>
-            <a:off x="685800" y="4123944"/>
-            <a:ext cx="502920" cy="502920"/>
+            <a:off x="658368" y="3817620"/>
+            <a:ext cx="475488" cy="475488"/>
           </a:xfrm>
           <a:prstGeom prst="ellipse">
             <a:avLst/>
@@ -4614,8 +4474,8 @@
         </p:nvSpPr>
         <p:spPr>
           <a:xfrm>
-            <a:off x="685800" y="4233672"/>
-            <a:ext cx="502920" cy="201168"/>
+            <a:off x="658368" y="3918204"/>
+            <a:ext cx="475488" cy="201168"/>
           </a:xfrm>
           <a:prstGeom prst="rect">
             <a:avLst/>
@@ -4623,13 +4483,13 @@
           <a:noFill/>
         </p:spPr>
         <p:txBody>
-          <a:bodyPr wrap="square" lIns="36576" rIns="36576" tIns="27432" bIns="27432">
+          <a:bodyPr wrap="square" lIns="45720" rIns="45720" tIns="36576" bIns="36576" anchor="t">
             <a:spAutoFit/>
           </a:bodyPr>
           <a:lstStyle/>
           <a:p>
             <a:pPr algn="ctr">
-              <a:defRPr sz="1400" b="1">
+              <a:defRPr sz="1300" b="1">
                 <a:solidFill>
                   <a:srgbClr val="FFFFFF"/>
                 </a:solidFill>
@@ -4650,8 +4510,8 @@
         </p:nvSpPr>
         <p:spPr>
           <a:xfrm>
-            <a:off x="1417320" y="4142231"/>
-            <a:ext cx="9875520" cy="548640"/>
+            <a:off x="1389888" y="3799332"/>
+            <a:ext cx="10058400" cy="772668"/>
           </a:xfrm>
           <a:prstGeom prst="rect">
             <a:avLst/>
@@ -4659,13 +4519,13 @@
           <a:noFill/>
         </p:spPr>
         <p:txBody>
-          <a:bodyPr wrap="square" lIns="36576" rIns="36576" tIns="27432" bIns="27432">
+          <a:bodyPr wrap="square" lIns="45720" rIns="45720" tIns="36576" bIns="36576" anchor="t">
             <a:spAutoFit/>
           </a:bodyPr>
           <a:lstStyle/>
           <a:p>
             <a:pPr algn="l">
-              <a:defRPr sz="2000" b="0">
+              <a:defRPr sz="1400" b="0">
                 <a:solidFill>
                   <a:srgbClr val="1C2330"/>
                 </a:solidFill>
@@ -4673,7 +4533,7 @@
               </a:defRPr>
             </a:pPr>
             <a:r>
-              <a:t>Comprueba el resultado con una prueba observable; no basta con decir “funciona”.</a:t>
+              <a:t>18–35 min — Trabajo del alumnado: Crear variable userName con un valor fijo y usarla en varios mensajes.</a:t>
             </a:r>
           </a:p>
         </p:txBody>
@@ -4686,8 +4546,8 @@
         </p:nvSpPr>
         <p:spPr>
           <a:xfrm>
-            <a:off x="685800" y="5056631"/>
-            <a:ext cx="502920" cy="502920"/>
+            <a:off x="658368" y="4663440"/>
+            <a:ext cx="475488" cy="475488"/>
           </a:xfrm>
           <a:prstGeom prst="ellipse">
             <a:avLst/>
@@ -4729,8 +4589,8 @@
         </p:nvSpPr>
         <p:spPr>
           <a:xfrm>
-            <a:off x="685800" y="5166359"/>
-            <a:ext cx="502920" cy="201168"/>
+            <a:off x="658368" y="4764024"/>
+            <a:ext cx="475488" cy="201168"/>
           </a:xfrm>
           <a:prstGeom prst="rect">
             <a:avLst/>
@@ -4738,13 +4598,13 @@
           <a:noFill/>
         </p:spPr>
         <p:txBody>
-          <a:bodyPr wrap="square" lIns="36576" rIns="36576" tIns="27432" bIns="27432">
+          <a:bodyPr wrap="square" lIns="45720" rIns="45720" tIns="36576" bIns="36576" anchor="t">
             <a:spAutoFit/>
           </a:bodyPr>
           <a:lstStyle/>
           <a:p>
             <a:pPr algn="ctr">
-              <a:defRPr sz="1400" b="1">
+              <a:defRPr sz="1300" b="1">
                 <a:solidFill>
                   <a:srgbClr val="FFFFFF"/>
                 </a:solidFill>
@@ -4765,8 +4625,8 @@
         </p:nvSpPr>
         <p:spPr>
           <a:xfrm>
-            <a:off x="1417320" y="5074919"/>
-            <a:ext cx="9875520" cy="548640"/>
+            <a:off x="1389888" y="4645152"/>
+            <a:ext cx="10058400" cy="772668"/>
           </a:xfrm>
           <a:prstGeom prst="rect">
             <a:avLst/>
@@ -4774,13 +4634,13 @@
           <a:noFill/>
         </p:spPr>
         <p:txBody>
-          <a:bodyPr wrap="square" lIns="36576" rIns="36576" tIns="27432" bIns="27432">
+          <a:bodyPr wrap="square" lIns="45720" rIns="45720" tIns="36576" bIns="36576" anchor="t">
             <a:spAutoFit/>
           </a:bodyPr>
           <a:lstStyle/>
           <a:p>
             <a:pPr algn="l">
-              <a:defRPr sz="2000" b="0">
+              <a:defRPr sz="1400" b="0">
                 <a:solidFill>
                   <a:srgbClr val="1C2330"/>
                 </a:solidFill>
@@ -4788,7 +4648,122 @@
               </a:defRPr>
             </a:pPr>
             <a:r>
-              <a:t>Guarda o entrega la evidencia indicada y prepárate para explicarla.</a:t>
+              <a:t>35–40 min — Comprobar la evidencia con una explicación o prueba breve.</a:t>
+            </a:r>
+          </a:p>
+        </p:txBody>
+      </p:sp>
+      <p:sp>
+        <p:nvSpPr>
+          <p:cNvPr id="23" name="Oval 22"/>
+          <p:cNvSpPr/>
+          <p:nvPr/>
+        </p:nvSpPr>
+        <p:spPr>
+          <a:xfrm>
+            <a:off x="658368" y="5509259"/>
+            <a:ext cx="475488" cy="475488"/>
+          </a:xfrm>
+          <a:prstGeom prst="ellipse">
+            <a:avLst/>
+          </a:prstGeom>
+          <a:solidFill>
+            <a:srgbClr val="2F5BA8"/>
+          </a:solidFill>
+          <a:ln>
+            <a:noFill/>
+          </a:ln>
+        </p:spPr>
+        <p:style>
+          <a:lnRef idx="1">
+            <a:schemeClr val="accent1"/>
+          </a:lnRef>
+          <a:fillRef idx="3">
+            <a:schemeClr val="accent1"/>
+          </a:fillRef>
+          <a:effectRef idx="2">
+            <a:schemeClr val="accent1"/>
+          </a:effectRef>
+          <a:fontRef idx="minor">
+            <a:schemeClr val="lt1"/>
+          </a:fontRef>
+        </p:style>
+        <p:txBody>
+          <a:bodyPr rtlCol="0" anchor="ctr"/>
+          <a:lstStyle/>
+          <a:p>
+            <a:pPr algn="ctr"/>
+          </a:p>
+        </p:txBody>
+      </p:sp>
+      <p:sp>
+        <p:nvSpPr>
+          <p:cNvPr id="24" name="TextBox 23"/>
+          <p:cNvSpPr txBox="1"/>
+          <p:nvPr/>
+        </p:nvSpPr>
+        <p:spPr>
+          <a:xfrm>
+            <a:off x="658368" y="5609844"/>
+            <a:ext cx="475488" cy="201168"/>
+          </a:xfrm>
+          <a:prstGeom prst="rect">
+            <a:avLst/>
+          </a:prstGeom>
+          <a:noFill/>
+        </p:spPr>
+        <p:txBody>
+          <a:bodyPr wrap="square" lIns="45720" rIns="45720" tIns="36576" bIns="36576" anchor="t">
+            <a:spAutoFit/>
+          </a:bodyPr>
+          <a:lstStyle/>
+          <a:p>
+            <a:pPr algn="ctr">
+              <a:defRPr sz="1300" b="1">
+                <a:solidFill>
+                  <a:srgbClr val="FFFFFF"/>
+                </a:solidFill>
+                <a:latin typeface="Aptos"/>
+              </a:defRPr>
+            </a:pPr>
+            <a:r>
+              <a:t>6</a:t>
+            </a:r>
+          </a:p>
+        </p:txBody>
+      </p:sp>
+      <p:sp>
+        <p:nvSpPr>
+          <p:cNvPr id="25" name="TextBox 24"/>
+          <p:cNvSpPr txBox="1"/>
+          <p:nvPr/>
+        </p:nvSpPr>
+        <p:spPr>
+          <a:xfrm>
+            <a:off x="1389888" y="5490972"/>
+            <a:ext cx="10058400" cy="772668"/>
+          </a:xfrm>
+          <a:prstGeom prst="rect">
+            <a:avLst/>
+          </a:prstGeom>
+          <a:noFill/>
+        </p:spPr>
+        <p:txBody>
+          <a:bodyPr wrap="square" lIns="45720" rIns="45720" tIns="36576" bIns="36576" anchor="t">
+            <a:spAutoFit/>
+          </a:bodyPr>
+          <a:lstStyle/>
+          <a:p>
+            <a:pPr algn="l">
+              <a:defRPr sz="1400" b="0">
+                <a:solidFill>
+                  <a:srgbClr val="1C2330"/>
+                </a:solidFill>
+                <a:latin typeface="Aptos"/>
+              </a:defRPr>
+            </a:pPr>
+            <a:r>
+              <a:t>40–45 min — Cierre: ¿qué cambia si modifico el valor de la variable?</a:t>
             </a:r>
           </a:p>
         </p:txBody>
@@ -4905,8 +4880,8 @@
         </p:nvSpPr>
         <p:spPr>
           <a:xfrm>
-            <a:off x="502920" y="310896"/>
-            <a:ext cx="5029200" cy="256032"/>
+            <a:off x="502920" y="274320"/>
+            <a:ext cx="5486400" cy="256032"/>
           </a:xfrm>
           <a:prstGeom prst="rect">
             <a:avLst/>
@@ -4914,7 +4889,7 @@
           <a:noFill/>
         </p:spPr>
         <p:txBody>
-          <a:bodyPr wrap="square" lIns="36576" rIns="36576" tIns="27432" bIns="27432">
+          <a:bodyPr wrap="square" lIns="45720" rIns="45720" tIns="36576" bIns="36576" anchor="t">
             <a:spAutoFit/>
           </a:bodyPr>
           <a:lstStyle/>
@@ -4928,7 +4903,7 @@
               </a:defRPr>
             </a:pPr>
             <a:r>
-              <a:t>COMPRENDER Y APLICAR</a:t>
+              <a:t>COMPRENDER Y TRANSFERIR</a:t>
             </a:r>
           </a:p>
         </p:txBody>
@@ -4941,7 +4916,7 @@
         </p:nvSpPr>
         <p:spPr>
           <a:xfrm>
-            <a:off x="502920" y="621792"/>
+            <a:off x="502920" y="603504"/>
             <a:ext cx="11064240" cy="530352"/>
           </a:xfrm>
           <a:prstGeom prst="rect">
@@ -4950,7 +4925,7 @@
           <a:noFill/>
         </p:spPr>
         <p:txBody>
-          <a:bodyPr wrap="square" lIns="36576" rIns="36576" tIns="27432" bIns="27432">
+          <a:bodyPr wrap="square" lIns="45720" rIns="45720" tIns="36576" bIns="36576" anchor="t">
             <a:spAutoFit/>
           </a:bodyPr>
           <a:lstStyle/>
@@ -4964,7 +4939,7 @@
               </a:defRPr>
             </a:pPr>
             <a:r>
-              <a:t>Claves para avanzar</a:t>
+              <a:t>Idea clave y puesta en práctica</a:t>
             </a:r>
           </a:p>
         </p:txBody>
@@ -5029,7 +5004,7 @@
           <a:noFill/>
         </p:spPr>
         <p:txBody>
-          <a:bodyPr wrap="square" lIns="36576" rIns="36576" tIns="27432" bIns="27432">
+          <a:bodyPr wrap="square" lIns="45720" rIns="45720" tIns="36576" bIns="36576" anchor="t">
             <a:spAutoFit/>
           </a:bodyPr>
           <a:lstStyle/>
@@ -5056,8 +5031,8 @@
         </p:nvSpPr>
         <p:spPr>
           <a:xfrm>
-            <a:off x="594360" y="1325880"/>
-            <a:ext cx="5257800" cy="4526280"/>
+            <a:off x="621792" y="1325880"/>
+            <a:ext cx="5285232" cy="4736592"/>
           </a:xfrm>
           <a:prstGeom prst="roundRect">
             <a:avLst/>
@@ -5067,7 +5042,7 @@
           </a:solidFill>
           <a:ln>
             <a:solidFill>
-              <a:srgbClr val="EBEEF2"/>
+              <a:srgbClr val="E5E9EF"/>
             </a:solidFill>
           </a:ln>
         </p:spPr>
@@ -5095,25 +5070,98 @@
       </p:sp>
       <p:sp>
         <p:nvSpPr>
-          <p:cNvPr id="9" name="Rounded Rectangle 8"/>
+          <p:cNvPr id="9" name="TextBox 8"/>
+          <p:cNvSpPr txBox="1"/>
+          <p:nvPr/>
+        </p:nvSpPr>
+        <p:spPr>
+          <a:xfrm>
+            <a:off x="932688" y="1627632"/>
+            <a:ext cx="2011680" cy="329184"/>
+          </a:xfrm>
+          <a:prstGeom prst="rect">
+            <a:avLst/>
+          </a:prstGeom>
+          <a:noFill/>
+        </p:spPr>
+        <p:txBody>
+          <a:bodyPr wrap="square" lIns="45720" rIns="45720" tIns="36576" bIns="36576" anchor="t">
+            <a:spAutoFit/>
+          </a:bodyPr>
+          <a:lstStyle/>
+          <a:p>
+            <a:pPr algn="l">
+              <a:defRPr sz="1300" b="1">
+                <a:solidFill>
+                  <a:srgbClr val="2F5BA8"/>
+                </a:solidFill>
+                <a:latin typeface="Aptos"/>
+              </a:defRPr>
+            </a:pPr>
+            <a:r>
+              <a:t>IDEA CLAVE</a:t>
+            </a:r>
+          </a:p>
+        </p:txBody>
+      </p:sp>
+      <p:sp>
+        <p:nvSpPr>
+          <p:cNvPr id="10" name="TextBox 9"/>
+          <p:cNvSpPr txBox="1"/>
+          <p:nvPr/>
+        </p:nvSpPr>
+        <p:spPr>
+          <a:xfrm>
+            <a:off x="932688" y="2176272"/>
+            <a:ext cx="4617720" cy="3429000"/>
+          </a:xfrm>
+          <a:prstGeom prst="rect">
+            <a:avLst/>
+          </a:prstGeom>
+          <a:noFill/>
+        </p:spPr>
+        <p:txBody>
+          <a:bodyPr wrap="square" lIns="73152" rIns="45720" tIns="36576">
+            <a:spAutoFit/>
+          </a:bodyPr>
+          <a:lstStyle/>
+          <a:p>
+            <a:pPr>
+              <a:spcAft>
+                <a:spcPts val="900"/>
+              </a:spcAft>
+              <a:defRPr sz="2300">
+                <a:solidFill>
+                  <a:srgbClr val="1C2330"/>
+                </a:solidFill>
+                <a:latin typeface="Aptos"/>
+              </a:defRPr>
+            </a:pPr>
+            <a:r>
+              <a:t>•  Tipo, nombre, valor y uso de una variable String.</a:t>
+            </a:r>
+          </a:p>
+        </p:txBody>
+      </p:sp>
+      <p:sp>
+        <p:nvSpPr>
+          <p:cNvPr id="11" name="Rounded Rectangle 10"/>
           <p:cNvSpPr/>
           <p:nvPr/>
         </p:nvSpPr>
         <p:spPr>
           <a:xfrm>
             <a:off x="6172200" y="1325880"/>
-            <a:ext cx="5413248" cy="4526280"/>
+            <a:ext cx="5394960" cy="4736592"/>
           </a:xfrm>
           <a:prstGeom prst="roundRect">
             <a:avLst/>
           </a:prstGeom>
           <a:solidFill>
-            <a:srgbClr val="FFFFFF"/>
+            <a:srgbClr val="121824"/>
           </a:solidFill>
           <a:ln>
-            <a:solidFill>
-              <a:srgbClr val="EBEEF2"/>
-            </a:solidFill>
+            <a:noFill/>
           </a:ln>
         </p:spPr>
         <p:style>
@@ -5140,14 +5188,14 @@
       </p:sp>
       <p:sp>
         <p:nvSpPr>
-          <p:cNvPr id="10" name="TextBox 9"/>
+          <p:cNvPr id="12" name="TextBox 11"/>
           <p:cNvSpPr txBox="1"/>
           <p:nvPr/>
         </p:nvSpPr>
         <p:spPr>
           <a:xfrm>
-            <a:off x="868680" y="1600200"/>
-            <a:ext cx="4663440" cy="365760"/>
+            <a:off x="6492240" y="1627632"/>
+            <a:ext cx="2194560" cy="329184"/>
           </a:xfrm>
           <a:prstGeom prst="rect">
             <a:avLst/>
@@ -5155,13 +5203,13 @@
           <a:noFill/>
         </p:spPr>
         <p:txBody>
-          <a:bodyPr wrap="square" lIns="36576" rIns="36576" tIns="27432" bIns="27432">
+          <a:bodyPr wrap="square" lIns="45720" rIns="45720" tIns="36576" bIns="36576" anchor="t">
             <a:spAutoFit/>
           </a:bodyPr>
           <a:lstStyle/>
           <a:p>
             <a:pPr algn="l">
-              <a:defRPr sz="1600" b="1">
+              <a:defRPr sz="1300" b="1">
                 <a:solidFill>
                   <a:srgbClr val="2F5BA8"/>
                 </a:solidFill>
@@ -5169,21 +5217,21 @@
               </a:defRPr>
             </a:pPr>
             <a:r>
-              <a:t>IDEAS CLAVE</a:t>
-            </a:r>
-          </a:p>
-        </p:txBody>
-      </p:sp>
-      <p:sp>
-        <p:nvSpPr>
-          <p:cNvPr id="11" name="TextBox 10"/>
+              <a:t>EN PRÁCTICA</a:t>
+            </a:r>
+          </a:p>
+        </p:txBody>
+      </p:sp>
+      <p:sp>
+        <p:nvSpPr>
+          <p:cNvPr id="13" name="TextBox 12"/>
           <p:cNvSpPr txBox="1"/>
           <p:nvPr/>
         </p:nvSpPr>
         <p:spPr>
           <a:xfrm>
-            <a:off x="868680" y="2121408"/>
-            <a:ext cx="4572000" cy="3337560"/>
+            <a:off x="6492240" y="2176272"/>
+            <a:ext cx="4617720" cy="3429000"/>
           </a:xfrm>
           <a:prstGeom prst="rect">
             <a:avLst/>
@@ -5198,118 +5246,11 @@
           <a:p>
             <a:pPr>
               <a:spcAft>
-                <a:spcPts val="1000"/>
+                <a:spcPts val="900"/>
               </a:spcAft>
-              <a:defRPr sz="1800">
-                <a:solidFill>
-                  <a:srgbClr val="1C2330"/>
-                </a:solidFill>
-                <a:latin typeface="Aptos"/>
-              </a:defRPr>
-            </a:pPr>
-            <a:r>
-              <a:t>•  Tipo, nombre, valor y uso de una variable String.</a:t>
-            </a:r>
-          </a:p>
-          <a:p>
-            <a:pPr>
-              <a:spcAft>
-                <a:spcPts val="1000"/>
-              </a:spcAft>
-              <a:defRPr sz="1800">
-                <a:solidFill>
-                  <a:srgbClr val="1C2330"/>
-                </a:solidFill>
-                <a:latin typeface="Aptos"/>
-              </a:defRPr>
-            </a:pPr>
-            <a:r>
-              <a:t>•  Guion breve sugerido:</a:t>
-            </a:r>
-          </a:p>
-          <a:p>
-            <a:pPr>
-              <a:spcAft>
-                <a:spcPts val="1000"/>
-              </a:spcAft>
-              <a:defRPr sz="1800">
-                <a:solidFill>
-                  <a:srgbClr val="1C2330"/>
-                </a:solidFill>
-                <a:latin typeface="Aptos"/>
-              </a:defRPr>
-            </a:pPr>
-            <a:r>
-              <a:t>•  &gt; Hoy necesitamos comprender y practicar lo justo para producir una evidencia verificable. Primero observaremos un ejemplo, después trabajaréis y al final cada pers…</a:t>
-            </a:r>
-          </a:p>
-        </p:txBody>
-      </p:sp>
-      <p:sp>
-        <p:nvSpPr>
-          <p:cNvPr id="12" name="TextBox 11"/>
-          <p:cNvSpPr txBox="1"/>
-          <p:nvPr/>
-        </p:nvSpPr>
-        <p:spPr>
-          <a:xfrm>
-            <a:off x="6446520" y="1600200"/>
-            <a:ext cx="4572000" cy="365760"/>
-          </a:xfrm>
-          <a:prstGeom prst="rect">
-            <a:avLst/>
-          </a:prstGeom>
-          <a:noFill/>
-        </p:spPr>
-        <p:txBody>
-          <a:bodyPr wrap="square" lIns="36576" rIns="36576" tIns="27432" bIns="27432">
-            <a:spAutoFit/>
-          </a:bodyPr>
-          <a:lstStyle/>
-          <a:p>
-            <a:pPr algn="l">
-              <a:defRPr sz="1600" b="1">
-                <a:solidFill>
-                  <a:srgbClr val="2F5BA8"/>
-                </a:solidFill>
-                <a:latin typeface="Aptos"/>
-              </a:defRPr>
-            </a:pPr>
-            <a:r>
-              <a:t>ACTIVIDAD CENTRAL</a:t>
-            </a:r>
-          </a:p>
-        </p:txBody>
-      </p:sp>
-      <p:sp>
-        <p:nvSpPr>
-          <p:cNvPr id="13" name="TextBox 12"/>
-          <p:cNvSpPr txBox="1"/>
-          <p:nvPr/>
-        </p:nvSpPr>
-        <p:spPr>
-          <a:xfrm>
-            <a:off x="6446520" y="2121408"/>
-            <a:ext cx="4617720" cy="3337560"/>
-          </a:xfrm>
-          <a:prstGeom prst="rect">
-            <a:avLst/>
-          </a:prstGeom>
-          <a:noFill/>
-        </p:spPr>
-        <p:txBody>
-          <a:bodyPr wrap="square" lIns="73152" rIns="45720" tIns="36576">
-            <a:spAutoFit/>
-          </a:bodyPr>
-          <a:lstStyle/>
-          <a:p>
-            <a:pPr>
-              <a:spcAft>
-                <a:spcPts val="1000"/>
-              </a:spcAft>
-              <a:defRPr sz="1800">
-                <a:solidFill>
-                  <a:srgbClr val="1C2330"/>
+              <a:defRPr sz="2300">
+                <a:solidFill>
+                  <a:srgbClr val="FFFFFF"/>
                 </a:solidFill>
                 <a:latin typeface="Aptos"/>
               </a:defRPr>
@@ -5432,8 +5373,8 @@
         </p:nvSpPr>
         <p:spPr>
           <a:xfrm>
-            <a:off x="502920" y="310896"/>
-            <a:ext cx="5029200" cy="256032"/>
+            <a:off x="502920" y="274320"/>
+            <a:ext cx="5486400" cy="256032"/>
           </a:xfrm>
           <a:prstGeom prst="rect">
             <a:avLst/>
@@ -5441,7 +5382,7 @@
           <a:noFill/>
         </p:spPr>
         <p:txBody>
-          <a:bodyPr wrap="square" lIns="36576" rIns="36576" tIns="27432" bIns="27432">
+          <a:bodyPr wrap="square" lIns="45720" rIns="45720" tIns="36576" bIns="36576" anchor="t">
             <a:spAutoFit/>
           </a:bodyPr>
           <a:lstStyle/>
@@ -5455,7 +5396,7 @@
               </a:defRPr>
             </a:pPr>
             <a:r>
-              <a:t>EVIDENCIA MÍNIMA</a:t>
+              <a:t>APLICAR Y DECIDIR</a:t>
             </a:r>
           </a:p>
         </p:txBody>
@@ -5468,7 +5409,7 @@
         </p:nvSpPr>
         <p:spPr>
           <a:xfrm>
-            <a:off x="502920" y="621792"/>
+            <a:off x="502920" y="603504"/>
             <a:ext cx="11064240" cy="530352"/>
           </a:xfrm>
           <a:prstGeom prst="rect">
@@ -5477,7 +5418,7 @@
           <a:noFill/>
         </p:spPr>
         <p:txBody>
-          <a:bodyPr wrap="square" lIns="36576" rIns="36576" tIns="27432" bIns="27432">
+          <a:bodyPr wrap="square" lIns="45720" rIns="45720" tIns="36576" bIns="36576" anchor="t">
             <a:spAutoFit/>
           </a:bodyPr>
           <a:lstStyle/>
@@ -5491,7 +5432,7 @@
               </a:defRPr>
             </a:pPr>
             <a:r>
-              <a:t>Antes de salir, comprueba</a:t>
+              <a:t>Actividad central</a:t>
             </a:r>
           </a:p>
         </p:txBody>
@@ -5556,7 +5497,7 @@
           <a:noFill/>
         </p:spPr>
         <p:txBody>
-          <a:bodyPr wrap="square" lIns="36576" rIns="36576" tIns="27432" bIns="27432">
+          <a:bodyPr wrap="square" lIns="45720" rIns="45720" tIns="36576" bIns="36576" anchor="t">
             <a:spAutoFit/>
           </a:bodyPr>
           <a:lstStyle/>
@@ -5583,8 +5524,8 @@
         </p:nvSpPr>
         <p:spPr>
           <a:xfrm>
-            <a:off x="713232" y="1371600"/>
-            <a:ext cx="420624" cy="420624"/>
+            <a:off x="658368" y="1307592"/>
+            <a:ext cx="10835640" cy="2226564"/>
           </a:xfrm>
           <a:prstGeom prst="roundRect">
             <a:avLst/>
@@ -5594,7 +5535,7 @@
           </a:solidFill>
           <a:ln>
             <a:solidFill>
-              <a:srgbClr val="2F5BA8"/>
+              <a:srgbClr val="E5E9EF"/>
             </a:solidFill>
           </a:ln>
         </p:spPr>
@@ -5628,8 +5569,8 @@
         </p:nvSpPr>
         <p:spPr>
           <a:xfrm>
-            <a:off x="1389888" y="1362456"/>
-            <a:ext cx="9784080" cy="594360"/>
+            <a:off x="850392" y="1453895"/>
+            <a:ext cx="685800" cy="384048"/>
           </a:xfrm>
           <a:prstGeom prst="rect">
             <a:avLst/>
@@ -5637,12 +5578,48 @@
           <a:noFill/>
         </p:spPr>
         <p:txBody>
-          <a:bodyPr wrap="square" lIns="36576" rIns="36576" tIns="27432" bIns="27432">
+          <a:bodyPr wrap="square" lIns="45720" rIns="45720" tIns="36576" bIns="36576" anchor="t">
             <a:spAutoFit/>
           </a:bodyPr>
           <a:lstStyle/>
           <a:p>
             <a:pPr algn="l">
+              <a:defRPr sz="1200" b="1">
+                <a:solidFill>
+                  <a:srgbClr val="2F5BA8"/>
+                </a:solidFill>
+                <a:latin typeface="Aptos"/>
+              </a:defRPr>
+            </a:pPr>
+            <a:r>
+              <a:t>PASO 1</a:t>
+            </a:r>
+          </a:p>
+        </p:txBody>
+      </p:sp>
+      <p:sp>
+        <p:nvSpPr>
+          <p:cNvPr id="10" name="TextBox 9"/>
+          <p:cNvSpPr txBox="1"/>
+          <p:nvPr/>
+        </p:nvSpPr>
+        <p:spPr>
+          <a:xfrm>
+            <a:off x="1664208" y="1417319"/>
+            <a:ext cx="9464040" cy="2007108"/>
+          </a:xfrm>
+          <a:prstGeom prst="rect">
+            <a:avLst/>
+          </a:prstGeom>
+          <a:noFill/>
+        </p:spPr>
+        <p:txBody>
+          <a:bodyPr wrap="square" lIns="45720" rIns="45720" tIns="36576" bIns="36576" anchor="t">
+            <a:spAutoFit/>
+          </a:bodyPr>
+          <a:lstStyle/>
+          <a:p>
+            <a:pPr algn="l">
               <a:defRPr sz="2000" b="0">
                 <a:solidFill>
                   <a:srgbClr val="1C2330"/>
@@ -5651,21 +5628,21 @@
               </a:defRPr>
             </a:pPr>
             <a:r>
-              <a:t>He producido o actualizado: Código con variable usada correctamente.</a:t>
-            </a:r>
-          </a:p>
-        </p:txBody>
-      </p:sp>
-      <p:sp>
-        <p:nvSpPr>
-          <p:cNvPr id="10" name="Rounded Rectangle 9"/>
+              <a:t>Crear y usar userName.</a:t>
+            </a:r>
+          </a:p>
+        </p:txBody>
+      </p:sp>
+      <p:sp>
+        <p:nvSpPr>
+          <p:cNvPr id="11" name="Rounded Rectangle 10"/>
           <p:cNvSpPr/>
           <p:nvPr/>
         </p:nvSpPr>
         <p:spPr>
           <a:xfrm>
-            <a:off x="713232" y="2267712"/>
-            <a:ext cx="420624" cy="420624"/>
+            <a:off x="658368" y="3776472"/>
+            <a:ext cx="10835640" cy="2226564"/>
           </a:xfrm>
           <a:prstGeom prst="roundRect">
             <a:avLst/>
@@ -5675,7 +5652,7 @@
           </a:solidFill>
           <a:ln>
             <a:solidFill>
-              <a:srgbClr val="2F5BA8"/>
+              <a:srgbClr val="E5E9EF"/>
             </a:solidFill>
           </a:ln>
         </p:spPr>
@@ -5703,14 +5680,14 @@
       </p:sp>
       <p:sp>
         <p:nvSpPr>
-          <p:cNvPr id="11" name="TextBox 10"/>
+          <p:cNvPr id="12" name="TextBox 11"/>
           <p:cNvSpPr txBox="1"/>
           <p:nvPr/>
         </p:nvSpPr>
         <p:spPr>
           <a:xfrm>
-            <a:off x="1389888" y="2258568"/>
-            <a:ext cx="9784080" cy="594360"/>
+            <a:off x="850392" y="3922776"/>
+            <a:ext cx="685800" cy="384048"/>
           </a:xfrm>
           <a:prstGeom prst="rect">
             <a:avLst/>
@@ -5718,67 +5695,22 @@
           <a:noFill/>
         </p:spPr>
         <p:txBody>
-          <a:bodyPr wrap="square" lIns="36576" rIns="36576" tIns="27432" bIns="27432">
+          <a:bodyPr wrap="square" lIns="45720" rIns="45720" tIns="36576" bIns="36576" anchor="t">
             <a:spAutoFit/>
           </a:bodyPr>
           <a:lstStyle/>
           <a:p>
             <a:pPr algn="l">
-              <a:defRPr sz="2000" b="0">
-                <a:solidFill>
-                  <a:srgbClr val="1C2330"/>
+              <a:defRPr sz="1200" b="1">
+                <a:solidFill>
+                  <a:srgbClr val="2F5BA8"/>
                 </a:solidFill>
                 <a:latin typeface="Aptos"/>
               </a:defRPr>
             </a:pPr>
             <a:r>
-              <a:t>Puedo señalar dónde está.</a:t>
-            </a:r>
-          </a:p>
-        </p:txBody>
-      </p:sp>
-      <p:sp>
-        <p:nvSpPr>
-          <p:cNvPr id="12" name="Rounded Rectangle 11"/>
-          <p:cNvSpPr/>
-          <p:nvPr/>
-        </p:nvSpPr>
-        <p:spPr>
-          <a:xfrm>
-            <a:off x="713232" y="3163824"/>
-            <a:ext cx="420624" cy="420624"/>
-          </a:xfrm>
-          <a:prstGeom prst="roundRect">
-            <a:avLst/>
-          </a:prstGeom>
-          <a:solidFill>
-            <a:srgbClr val="FFFFFF"/>
-          </a:solidFill>
-          <a:ln>
-            <a:solidFill>
-              <a:srgbClr val="2F5BA8"/>
-            </a:solidFill>
-          </a:ln>
-        </p:spPr>
-        <p:style>
-          <a:lnRef idx="1">
-            <a:schemeClr val="accent1"/>
-          </a:lnRef>
-          <a:fillRef idx="3">
-            <a:schemeClr val="accent1"/>
-          </a:fillRef>
-          <a:effectRef idx="2">
-            <a:schemeClr val="accent1"/>
-          </a:effectRef>
-          <a:fontRef idx="minor">
-            <a:schemeClr val="lt1"/>
-          </a:fontRef>
-        </p:style>
-        <p:txBody>
-          <a:bodyPr rtlCol="0" anchor="ctr"/>
-          <a:lstStyle/>
-          <a:p>
-            <a:pPr algn="ctr"/>
+              <a:t>PASO 2</a:t>
+            </a:r>
           </a:p>
         </p:txBody>
       </p:sp>
@@ -5790,8 +5722,8 @@
         </p:nvSpPr>
         <p:spPr>
           <a:xfrm>
-            <a:off x="1389888" y="3154680"/>
-            <a:ext cx="9784080" cy="594360"/>
+            <a:off x="1664208" y="3886200"/>
+            <a:ext cx="9464040" cy="2007108"/>
           </a:xfrm>
           <a:prstGeom prst="rect">
             <a:avLst/>
@@ -5799,7 +5731,7 @@
           <a:noFill/>
         </p:spPr>
         <p:txBody>
-          <a:bodyPr wrap="square" lIns="36576" rIns="36576" tIns="27432" bIns="27432">
+          <a:bodyPr wrap="square" lIns="45720" rIns="45720" tIns="36576" bIns="36576" anchor="t">
             <a:spAutoFit/>
           </a:bodyPr>
           <a:lstStyle/>
@@ -5813,205 +5745,7 @@
               </a:defRPr>
             </a:pPr>
             <a:r>
-              <a:t>Puedo explicar una decisión tomada.</a:t>
-            </a:r>
-          </a:p>
-        </p:txBody>
-      </p:sp>
-      <p:sp>
-        <p:nvSpPr>
-          <p:cNvPr id="14" name="Rounded Rectangle 13"/>
-          <p:cNvSpPr/>
-          <p:nvPr/>
-        </p:nvSpPr>
-        <p:spPr>
-          <a:xfrm>
-            <a:off x="713232" y="4059935"/>
-            <a:ext cx="420624" cy="420624"/>
-          </a:xfrm>
-          <a:prstGeom prst="roundRect">
-            <a:avLst/>
-          </a:prstGeom>
-          <a:solidFill>
-            <a:srgbClr val="FFFFFF"/>
-          </a:solidFill>
-          <a:ln>
-            <a:solidFill>
-              <a:srgbClr val="2F5BA8"/>
-            </a:solidFill>
-          </a:ln>
-        </p:spPr>
-        <p:style>
-          <a:lnRef idx="1">
-            <a:schemeClr val="accent1"/>
-          </a:lnRef>
-          <a:fillRef idx="3">
-            <a:schemeClr val="accent1"/>
-          </a:fillRef>
-          <a:effectRef idx="2">
-            <a:schemeClr val="accent1"/>
-          </a:effectRef>
-          <a:fontRef idx="minor">
-            <a:schemeClr val="lt1"/>
-          </a:fontRef>
-        </p:style>
-        <p:txBody>
-          <a:bodyPr rtlCol="0" anchor="ctr"/>
-          <a:lstStyle/>
-          <a:p>
-            <a:pPr algn="ctr"/>
-          </a:p>
-        </p:txBody>
-      </p:sp>
-      <p:sp>
-        <p:nvSpPr>
-          <p:cNvPr id="15" name="TextBox 14"/>
-          <p:cNvSpPr txBox="1"/>
-          <p:nvPr/>
-        </p:nvSpPr>
-        <p:spPr>
-          <a:xfrm>
-            <a:off x="1389888" y="4050791"/>
-            <a:ext cx="9784080" cy="594360"/>
-          </a:xfrm>
-          <a:prstGeom prst="rect">
-            <a:avLst/>
-          </a:prstGeom>
-          <a:noFill/>
-        </p:spPr>
-        <p:txBody>
-          <a:bodyPr wrap="square" lIns="36576" rIns="36576" tIns="27432" bIns="27432">
-            <a:spAutoFit/>
-          </a:bodyPr>
-          <a:lstStyle/>
-          <a:p>
-            <a:pPr algn="l">
-              <a:defRPr sz="2000" b="0">
-                <a:solidFill>
-                  <a:srgbClr val="1C2330"/>
-                </a:solidFill>
-                <a:latin typeface="Aptos"/>
-              </a:defRPr>
-            </a:pPr>
-            <a:r>
-              <a:t>Puedo mostrar una prueba o comprobación.</a:t>
-            </a:r>
-          </a:p>
-        </p:txBody>
-      </p:sp>
-      <p:sp>
-        <p:nvSpPr>
-          <p:cNvPr id="16" name="Rounded Rectangle 15"/>
-          <p:cNvSpPr/>
-          <p:nvPr/>
-        </p:nvSpPr>
-        <p:spPr>
-          <a:xfrm>
-            <a:off x="713232" y="4956048"/>
-            <a:ext cx="420624" cy="420624"/>
-          </a:xfrm>
-          <a:prstGeom prst="roundRect">
-            <a:avLst/>
-          </a:prstGeom>
-          <a:solidFill>
-            <a:srgbClr val="FFFFFF"/>
-          </a:solidFill>
-          <a:ln>
-            <a:solidFill>
-              <a:srgbClr val="2F5BA8"/>
-            </a:solidFill>
-          </a:ln>
-        </p:spPr>
-        <p:style>
-          <a:lnRef idx="1">
-            <a:schemeClr val="accent1"/>
-          </a:lnRef>
-          <a:fillRef idx="3">
-            <a:schemeClr val="accent1"/>
-          </a:fillRef>
-          <a:effectRef idx="2">
-            <a:schemeClr val="accent1"/>
-          </a:effectRef>
-          <a:fontRef idx="minor">
-            <a:schemeClr val="lt1"/>
-          </a:fontRef>
-        </p:style>
-        <p:txBody>
-          <a:bodyPr rtlCol="0" anchor="ctr"/>
-          <a:lstStyle/>
-          <a:p>
-            <a:pPr algn="ctr"/>
-          </a:p>
-        </p:txBody>
-      </p:sp>
-      <p:sp>
-        <p:nvSpPr>
-          <p:cNvPr id="17" name="TextBox 16"/>
-          <p:cNvSpPr txBox="1"/>
-          <p:nvPr/>
-        </p:nvSpPr>
-        <p:spPr>
-          <a:xfrm>
-            <a:off x="1389888" y="4946904"/>
-            <a:ext cx="9784080" cy="594360"/>
-          </a:xfrm>
-          <a:prstGeom prst="rect">
-            <a:avLst/>
-          </a:prstGeom>
-          <a:noFill/>
-        </p:spPr>
-        <p:txBody>
-          <a:bodyPr wrap="square" lIns="36576" rIns="36576" tIns="27432" bIns="27432">
-            <a:spAutoFit/>
-          </a:bodyPr>
-          <a:lstStyle/>
-          <a:p>
-            <a:pPr algn="l">
-              <a:defRPr sz="2000" b="0">
-                <a:solidFill>
-                  <a:srgbClr val="1C2330"/>
-                </a:solidFill>
-                <a:latin typeface="Aptos"/>
-              </a:defRPr>
-            </a:pPr>
-            <a:r>
-              <a:t>He registrado mi aportación individual si el trabajo era de equipo.</a:t>
-            </a:r>
-          </a:p>
-        </p:txBody>
-      </p:sp>
-      <p:sp>
-        <p:nvSpPr>
-          <p:cNvPr id="18" name="TextBox 17"/>
-          <p:cNvSpPr txBox="1"/>
-          <p:nvPr/>
-        </p:nvSpPr>
-        <p:spPr>
-          <a:xfrm>
-            <a:off x="731520" y="5925312"/>
-            <a:ext cx="10789920" cy="274320"/>
-          </a:xfrm>
-          <a:prstGeom prst="rect">
-            <a:avLst/>
-          </a:prstGeom>
-          <a:noFill/>
-        </p:spPr>
-        <p:txBody>
-          <a:bodyPr wrap="square" lIns="36576" rIns="36576" tIns="27432" bIns="27432">
-            <a:spAutoFit/>
-          </a:bodyPr>
-          <a:lstStyle/>
-          <a:p>
-            <a:pPr algn="l">
-              <a:defRPr sz="1200" b="0">
-                <a:solidFill>
-                  <a:srgbClr val="586270"/>
-                </a:solidFill>
-                <a:latin typeface="Aptos"/>
-              </a:defRPr>
-            </a:pPr>
-            <a:r>
-              <a:t>Necesitas: Un ordenador por estudiante o pareja, con JDK e IntelliJ disponibles y el proyecto del hito accesible.</a:t>
+              <a:t>Comprueba y registra la evidencia: Código con variable usada correctamente.</a:t>
             </a:r>
           </a:p>
         </p:txBody>
@@ -6128,8 +5862,8 @@
         </p:nvSpPr>
         <p:spPr>
           <a:xfrm>
-            <a:off x="502920" y="310896"/>
-            <a:ext cx="5029200" cy="256032"/>
+            <a:off x="502920" y="274320"/>
+            <a:ext cx="5486400" cy="256032"/>
           </a:xfrm>
           <a:prstGeom prst="rect">
             <a:avLst/>
@@ -6137,7 +5871,7 @@
           <a:noFill/>
         </p:spPr>
         <p:txBody>
-          <a:bodyPr wrap="square" lIns="36576" rIns="36576" tIns="27432" bIns="27432">
+          <a:bodyPr wrap="square" lIns="45720" rIns="45720" tIns="36576" bIns="36576" anchor="t">
             <a:spAutoFit/>
           </a:bodyPr>
           <a:lstStyle/>
@@ -6151,7 +5885,7 @@
               </a:defRPr>
             </a:pPr>
             <a:r>
-              <a:t>COMPRUEBA Y EXPLICA</a:t>
+              <a:t>COMPROBAR</a:t>
             </a:r>
           </a:p>
         </p:txBody>
@@ -6164,7 +5898,7 @@
         </p:nvSpPr>
         <p:spPr>
           <a:xfrm>
-            <a:off x="502920" y="621792"/>
+            <a:off x="502920" y="603504"/>
             <a:ext cx="11064240" cy="530352"/>
           </a:xfrm>
           <a:prstGeom prst="rect">
@@ -6173,7 +5907,7 @@
           <a:noFill/>
         </p:spPr>
         <p:txBody>
-          <a:bodyPr wrap="square" lIns="36576" rIns="36576" tIns="27432" bIns="27432">
+          <a:bodyPr wrap="square" lIns="45720" rIns="45720" tIns="36576" bIns="36576" anchor="t">
             <a:spAutoFit/>
           </a:bodyPr>
           <a:lstStyle/>
@@ -6187,7 +5921,7 @@
               </a:defRPr>
             </a:pPr>
             <a:r>
-              <a:t>Cierre de la sesión</a:t>
+              <a:t>Evidencia y comprobación</a:t>
             </a:r>
           </a:p>
         </p:txBody>
@@ -6252,7 +5986,7 @@
           <a:noFill/>
         </p:spPr>
         <p:txBody>
-          <a:bodyPr wrap="square" lIns="36576" rIns="36576" tIns="27432" bIns="27432">
+          <a:bodyPr wrap="square" lIns="45720" rIns="45720" tIns="36576" bIns="36576" anchor="t">
             <a:spAutoFit/>
           </a:bodyPr>
           <a:lstStyle/>
@@ -6279,10 +6013,476 @@
         </p:nvSpPr>
         <p:spPr>
           <a:xfrm>
-            <a:off x="621792" y="1298448"/>
-            <a:ext cx="10927080" cy="1965960"/>
+            <a:off x="713232" y="1298448"/>
+            <a:ext cx="420624" cy="420624"/>
           </a:xfrm>
           <a:prstGeom prst="roundRect">
+            <a:avLst/>
+          </a:prstGeom>
+          <a:solidFill>
+            <a:srgbClr val="FFFFFF"/>
+          </a:solidFill>
+          <a:ln>
+            <a:solidFill>
+              <a:srgbClr val="2F5BA8"/>
+            </a:solidFill>
+          </a:ln>
+        </p:spPr>
+        <p:style>
+          <a:lnRef idx="1">
+            <a:schemeClr val="accent1"/>
+          </a:lnRef>
+          <a:fillRef idx="3">
+            <a:schemeClr val="accent1"/>
+          </a:fillRef>
+          <a:effectRef idx="2">
+            <a:schemeClr val="accent1"/>
+          </a:effectRef>
+          <a:fontRef idx="minor">
+            <a:schemeClr val="lt1"/>
+          </a:fontRef>
+        </p:style>
+        <p:txBody>
+          <a:bodyPr rtlCol="0" anchor="ctr"/>
+          <a:lstStyle/>
+          <a:p>
+            <a:pPr algn="ctr"/>
+          </a:p>
+        </p:txBody>
+      </p:sp>
+      <p:sp>
+        <p:nvSpPr>
+          <p:cNvPr id="9" name="TextBox 8"/>
+          <p:cNvSpPr txBox="1"/>
+          <p:nvPr/>
+        </p:nvSpPr>
+        <p:spPr>
+          <a:xfrm>
+            <a:off x="1389888" y="1280160"/>
+            <a:ext cx="9829800" cy="960120"/>
+          </a:xfrm>
+          <a:prstGeom prst="rect">
+            <a:avLst/>
+          </a:prstGeom>
+          <a:noFill/>
+        </p:spPr>
+        <p:txBody>
+          <a:bodyPr wrap="square" lIns="45720" rIns="45720" tIns="36576" bIns="36576" anchor="t">
+            <a:spAutoFit/>
+          </a:bodyPr>
+          <a:lstStyle/>
+          <a:p>
+            <a:pPr algn="l">
+              <a:defRPr sz="1900" b="0">
+                <a:solidFill>
+                  <a:srgbClr val="1C2330"/>
+                </a:solidFill>
+                <a:latin typeface="Aptos"/>
+              </a:defRPr>
+            </a:pPr>
+            <a:r>
+              <a:t>He producido o actualizado: Código con variable usada correctamente.</a:t>
+            </a:r>
+          </a:p>
+        </p:txBody>
+      </p:sp>
+      <p:sp>
+        <p:nvSpPr>
+          <p:cNvPr id="10" name="Rounded Rectangle 9"/>
+          <p:cNvSpPr/>
+          <p:nvPr/>
+        </p:nvSpPr>
+        <p:spPr>
+          <a:xfrm>
+            <a:off x="713232" y="2295144"/>
+            <a:ext cx="420624" cy="420624"/>
+          </a:xfrm>
+          <a:prstGeom prst="roundRect">
+            <a:avLst/>
+          </a:prstGeom>
+          <a:solidFill>
+            <a:srgbClr val="FFFFFF"/>
+          </a:solidFill>
+          <a:ln>
+            <a:solidFill>
+              <a:srgbClr val="2F5BA8"/>
+            </a:solidFill>
+          </a:ln>
+        </p:spPr>
+        <p:style>
+          <a:lnRef idx="1">
+            <a:schemeClr val="accent1"/>
+          </a:lnRef>
+          <a:fillRef idx="3">
+            <a:schemeClr val="accent1"/>
+          </a:fillRef>
+          <a:effectRef idx="2">
+            <a:schemeClr val="accent1"/>
+          </a:effectRef>
+          <a:fontRef idx="minor">
+            <a:schemeClr val="lt1"/>
+          </a:fontRef>
+        </p:style>
+        <p:txBody>
+          <a:bodyPr rtlCol="0" anchor="ctr"/>
+          <a:lstStyle/>
+          <a:p>
+            <a:pPr algn="ctr"/>
+          </a:p>
+        </p:txBody>
+      </p:sp>
+      <p:sp>
+        <p:nvSpPr>
+          <p:cNvPr id="11" name="TextBox 10"/>
+          <p:cNvSpPr txBox="1"/>
+          <p:nvPr/>
+        </p:nvSpPr>
+        <p:spPr>
+          <a:xfrm>
+            <a:off x="1389888" y="2276856"/>
+            <a:ext cx="9829800" cy="960120"/>
+          </a:xfrm>
+          <a:prstGeom prst="rect">
+            <a:avLst/>
+          </a:prstGeom>
+          <a:noFill/>
+        </p:spPr>
+        <p:txBody>
+          <a:bodyPr wrap="square" lIns="45720" rIns="45720" tIns="36576" bIns="36576" anchor="t">
+            <a:spAutoFit/>
+          </a:bodyPr>
+          <a:lstStyle/>
+          <a:p>
+            <a:pPr algn="l">
+              <a:defRPr sz="1900" b="0">
+                <a:solidFill>
+                  <a:srgbClr val="1C2330"/>
+                </a:solidFill>
+                <a:latin typeface="Aptos"/>
+              </a:defRPr>
+            </a:pPr>
+            <a:r>
+              <a:t>Puedo señalar dónde está.</a:t>
+            </a:r>
+          </a:p>
+        </p:txBody>
+      </p:sp>
+      <p:sp>
+        <p:nvSpPr>
+          <p:cNvPr id="12" name="Rounded Rectangle 11"/>
+          <p:cNvSpPr/>
+          <p:nvPr/>
+        </p:nvSpPr>
+        <p:spPr>
+          <a:xfrm>
+            <a:off x="713232" y="3291839"/>
+            <a:ext cx="420624" cy="420624"/>
+          </a:xfrm>
+          <a:prstGeom prst="roundRect">
+            <a:avLst/>
+          </a:prstGeom>
+          <a:solidFill>
+            <a:srgbClr val="FFFFFF"/>
+          </a:solidFill>
+          <a:ln>
+            <a:solidFill>
+              <a:srgbClr val="2F5BA8"/>
+            </a:solidFill>
+          </a:ln>
+        </p:spPr>
+        <p:style>
+          <a:lnRef idx="1">
+            <a:schemeClr val="accent1"/>
+          </a:lnRef>
+          <a:fillRef idx="3">
+            <a:schemeClr val="accent1"/>
+          </a:fillRef>
+          <a:effectRef idx="2">
+            <a:schemeClr val="accent1"/>
+          </a:effectRef>
+          <a:fontRef idx="minor">
+            <a:schemeClr val="lt1"/>
+          </a:fontRef>
+        </p:style>
+        <p:txBody>
+          <a:bodyPr rtlCol="0" anchor="ctr"/>
+          <a:lstStyle/>
+          <a:p>
+            <a:pPr algn="ctr"/>
+          </a:p>
+        </p:txBody>
+      </p:sp>
+      <p:sp>
+        <p:nvSpPr>
+          <p:cNvPr id="13" name="TextBox 12"/>
+          <p:cNvSpPr txBox="1"/>
+          <p:nvPr/>
+        </p:nvSpPr>
+        <p:spPr>
+          <a:xfrm>
+            <a:off x="1389888" y="3273551"/>
+            <a:ext cx="9829800" cy="960120"/>
+          </a:xfrm>
+          <a:prstGeom prst="rect">
+            <a:avLst/>
+          </a:prstGeom>
+          <a:noFill/>
+        </p:spPr>
+        <p:txBody>
+          <a:bodyPr wrap="square" lIns="45720" rIns="45720" tIns="36576" bIns="36576" anchor="t">
+            <a:spAutoFit/>
+          </a:bodyPr>
+          <a:lstStyle/>
+          <a:p>
+            <a:pPr algn="l">
+              <a:defRPr sz="1900" b="0">
+                <a:solidFill>
+                  <a:srgbClr val="1C2330"/>
+                </a:solidFill>
+                <a:latin typeface="Aptos"/>
+              </a:defRPr>
+            </a:pPr>
+            <a:r>
+              <a:t>Puedo explicar una decisión tomada.</a:t>
+            </a:r>
+          </a:p>
+        </p:txBody>
+      </p:sp>
+      <p:sp>
+        <p:nvSpPr>
+          <p:cNvPr id="14" name="Rounded Rectangle 13"/>
+          <p:cNvSpPr/>
+          <p:nvPr/>
+        </p:nvSpPr>
+        <p:spPr>
+          <a:xfrm>
+            <a:off x="713232" y="4288536"/>
+            <a:ext cx="420624" cy="420624"/>
+          </a:xfrm>
+          <a:prstGeom prst="roundRect">
+            <a:avLst/>
+          </a:prstGeom>
+          <a:solidFill>
+            <a:srgbClr val="FFFFFF"/>
+          </a:solidFill>
+          <a:ln>
+            <a:solidFill>
+              <a:srgbClr val="2F5BA8"/>
+            </a:solidFill>
+          </a:ln>
+        </p:spPr>
+        <p:style>
+          <a:lnRef idx="1">
+            <a:schemeClr val="accent1"/>
+          </a:lnRef>
+          <a:fillRef idx="3">
+            <a:schemeClr val="accent1"/>
+          </a:fillRef>
+          <a:effectRef idx="2">
+            <a:schemeClr val="accent1"/>
+          </a:effectRef>
+          <a:fontRef idx="minor">
+            <a:schemeClr val="lt1"/>
+          </a:fontRef>
+        </p:style>
+        <p:txBody>
+          <a:bodyPr rtlCol="0" anchor="ctr"/>
+          <a:lstStyle/>
+          <a:p>
+            <a:pPr algn="ctr"/>
+          </a:p>
+        </p:txBody>
+      </p:sp>
+      <p:sp>
+        <p:nvSpPr>
+          <p:cNvPr id="15" name="TextBox 14"/>
+          <p:cNvSpPr txBox="1"/>
+          <p:nvPr/>
+        </p:nvSpPr>
+        <p:spPr>
+          <a:xfrm>
+            <a:off x="1389888" y="4270248"/>
+            <a:ext cx="9829800" cy="960120"/>
+          </a:xfrm>
+          <a:prstGeom prst="rect">
+            <a:avLst/>
+          </a:prstGeom>
+          <a:noFill/>
+        </p:spPr>
+        <p:txBody>
+          <a:bodyPr wrap="square" lIns="45720" rIns="45720" tIns="36576" bIns="36576" anchor="t">
+            <a:spAutoFit/>
+          </a:bodyPr>
+          <a:lstStyle/>
+          <a:p>
+            <a:pPr algn="l">
+              <a:defRPr sz="1900" b="0">
+                <a:solidFill>
+                  <a:srgbClr val="1C2330"/>
+                </a:solidFill>
+                <a:latin typeface="Aptos"/>
+              </a:defRPr>
+            </a:pPr>
+            <a:r>
+              <a:t>Puedo mostrar una prueba o comprobación.</a:t>
+            </a:r>
+          </a:p>
+        </p:txBody>
+      </p:sp>
+      <p:sp>
+        <p:nvSpPr>
+          <p:cNvPr id="16" name="Rounded Rectangle 15"/>
+          <p:cNvSpPr/>
+          <p:nvPr/>
+        </p:nvSpPr>
+        <p:spPr>
+          <a:xfrm>
+            <a:off x="713232" y="5285231"/>
+            <a:ext cx="420624" cy="420624"/>
+          </a:xfrm>
+          <a:prstGeom prst="roundRect">
+            <a:avLst/>
+          </a:prstGeom>
+          <a:solidFill>
+            <a:srgbClr val="FFFFFF"/>
+          </a:solidFill>
+          <a:ln>
+            <a:solidFill>
+              <a:srgbClr val="2F5BA8"/>
+            </a:solidFill>
+          </a:ln>
+        </p:spPr>
+        <p:style>
+          <a:lnRef idx="1">
+            <a:schemeClr val="accent1"/>
+          </a:lnRef>
+          <a:fillRef idx="3">
+            <a:schemeClr val="accent1"/>
+          </a:fillRef>
+          <a:effectRef idx="2">
+            <a:schemeClr val="accent1"/>
+          </a:effectRef>
+          <a:fontRef idx="minor">
+            <a:schemeClr val="lt1"/>
+          </a:fontRef>
+        </p:style>
+        <p:txBody>
+          <a:bodyPr rtlCol="0" anchor="ctr"/>
+          <a:lstStyle/>
+          <a:p>
+            <a:pPr algn="ctr"/>
+          </a:p>
+        </p:txBody>
+      </p:sp>
+      <p:sp>
+        <p:nvSpPr>
+          <p:cNvPr id="17" name="TextBox 16"/>
+          <p:cNvSpPr txBox="1"/>
+          <p:nvPr/>
+        </p:nvSpPr>
+        <p:spPr>
+          <a:xfrm>
+            <a:off x="1389888" y="5266944"/>
+            <a:ext cx="9829800" cy="960120"/>
+          </a:xfrm>
+          <a:prstGeom prst="rect">
+            <a:avLst/>
+          </a:prstGeom>
+          <a:noFill/>
+        </p:spPr>
+        <p:txBody>
+          <a:bodyPr wrap="square" lIns="45720" rIns="45720" tIns="36576" bIns="36576" anchor="t">
+            <a:spAutoFit/>
+          </a:bodyPr>
+          <a:lstStyle/>
+          <a:p>
+            <a:pPr algn="l">
+              <a:defRPr sz="1900" b="0">
+                <a:solidFill>
+                  <a:srgbClr val="1C2330"/>
+                </a:solidFill>
+                <a:latin typeface="Aptos"/>
+              </a:defRPr>
+            </a:pPr>
+            <a:r>
+              <a:t>He registrado mi aportación individual si el trabajo era de equipo.</a:t>
+            </a:r>
+          </a:p>
+        </p:txBody>
+      </p:sp>
+    </p:spTree>
+  </p:cSld>
+  <p:clrMapOvr>
+    <a:masterClrMapping/>
+  </p:clrMapOvr>
+</p:sld>
+</file>
+
+<file path=ppt/slides/slide7.xml><?xml version="1.0" encoding="utf-8"?>
+<p:sld xmlns:a="http://schemas.openxmlformats.org/drawingml/2006/main" xmlns:p="http://schemas.openxmlformats.org/presentationml/2006/main" xmlns:r="http://schemas.openxmlformats.org/officeDocument/2006/relationships">
+  <p:cSld>
+    <p:spTree>
+      <p:nvGrpSpPr>
+        <p:cNvPr id="1" name=""/>
+        <p:cNvGrpSpPr/>
+        <p:nvPr/>
+      </p:nvGrpSpPr>
+      <p:grpSpPr/>
+      <p:sp>
+        <p:nvSpPr>
+          <p:cNvPr id="2" name="Rectangle 1"/>
+          <p:cNvSpPr/>
+          <p:nvPr/>
+        </p:nvSpPr>
+        <p:spPr>
+          <a:xfrm>
+            <a:off x="0" y="0"/>
+            <a:ext cx="12191695" cy="6858000"/>
+          </a:xfrm>
+          <a:prstGeom prst="rect">
+            <a:avLst/>
+          </a:prstGeom>
+          <a:solidFill>
+            <a:srgbClr val="F9F7F2"/>
+          </a:solidFill>
+          <a:ln>
+            <a:noFill/>
+          </a:ln>
+        </p:spPr>
+        <p:style>
+          <a:lnRef idx="1">
+            <a:schemeClr val="accent1"/>
+          </a:lnRef>
+          <a:fillRef idx="3">
+            <a:schemeClr val="accent1"/>
+          </a:fillRef>
+          <a:effectRef idx="2">
+            <a:schemeClr val="accent1"/>
+          </a:effectRef>
+          <a:fontRef idx="minor">
+            <a:schemeClr val="lt1"/>
+          </a:fontRef>
+        </p:style>
+        <p:txBody>
+          <a:bodyPr rtlCol="0" anchor="ctr"/>
+          <a:lstStyle/>
+          <a:p>
+            <a:pPr algn="ctr"/>
+          </a:p>
+        </p:txBody>
+      </p:sp>
+      <p:sp>
+        <p:nvSpPr>
+          <p:cNvPr id="3" name="Rectangle 2"/>
+          <p:cNvSpPr/>
+          <p:nvPr/>
+        </p:nvSpPr>
+        <p:spPr>
+          <a:xfrm>
+            <a:off x="0" y="0"/>
+            <a:ext cx="164592" cy="6858000"/>
+          </a:xfrm>
+          <a:prstGeom prst="rect">
             <a:avLst/>
           </a:prstGeom>
           <a:solidFill>
@@ -6316,14 +6516,14 @@
       </p:sp>
       <p:sp>
         <p:nvSpPr>
-          <p:cNvPr id="9" name="TextBox 8"/>
+          <p:cNvPr id="4" name="TextBox 3"/>
           <p:cNvSpPr txBox="1"/>
           <p:nvPr/>
         </p:nvSpPr>
         <p:spPr>
           <a:xfrm>
-            <a:off x="960120" y="1618488"/>
-            <a:ext cx="10195560" cy="320040"/>
+            <a:off x="502920" y="274320"/>
+            <a:ext cx="5486400" cy="256032"/>
           </a:xfrm>
           <a:prstGeom prst="rect">
             <a:avLst/>
@@ -6331,35 +6531,35 @@
           <a:noFill/>
         </p:spPr>
         <p:txBody>
-          <a:bodyPr wrap="square" lIns="36576" rIns="36576" tIns="27432" bIns="27432">
+          <a:bodyPr wrap="square" lIns="45720" rIns="45720" tIns="36576" bIns="36576" anchor="t">
             <a:spAutoFit/>
           </a:bodyPr>
           <a:lstStyle/>
           <a:p>
             <a:pPr algn="l">
-              <a:defRPr sz="1400" b="1">
-                <a:solidFill>
-                  <a:srgbClr val="FFFFFF"/>
+              <a:defRPr sz="1000" b="1">
+                <a:solidFill>
+                  <a:srgbClr val="2F5BA8"/>
                 </a:solidFill>
                 <a:latin typeface="Aptos"/>
               </a:defRPr>
             </a:pPr>
             <a:r>
-              <a:t>PREGUNTA DE SALIDA</a:t>
-            </a:r>
-          </a:p>
-        </p:txBody>
-      </p:sp>
-      <p:sp>
-        <p:nvSpPr>
-          <p:cNvPr id="10" name="TextBox 9"/>
+              <a:t>LÍMITES QUE PROTEGEN EL APRENDIZAJE</a:t>
+            </a:r>
+          </a:p>
+        </p:txBody>
+      </p:sp>
+      <p:sp>
+        <p:nvSpPr>
+          <p:cNvPr id="5" name="TextBox 4"/>
           <p:cNvSpPr txBox="1"/>
           <p:nvPr/>
         </p:nvSpPr>
         <p:spPr>
           <a:xfrm>
-            <a:off x="960120" y="2057400"/>
-            <a:ext cx="10058400" cy="822960"/>
+            <a:off x="502920" y="603504"/>
+            <a:ext cx="11064240" cy="530352"/>
           </a:xfrm>
           <a:prstGeom prst="rect">
             <a:avLst/>
@@ -6367,35 +6567,78 @@
           <a:noFill/>
         </p:spPr>
         <p:txBody>
-          <a:bodyPr wrap="square" lIns="36576" rIns="36576" tIns="27432" bIns="27432">
+          <a:bodyPr wrap="square" lIns="45720" rIns="45720" tIns="36576" bIns="36576" anchor="t">
             <a:spAutoFit/>
           </a:bodyPr>
           <a:lstStyle/>
           <a:p>
             <a:pPr algn="l">
-              <a:defRPr sz="2700" b="1">
-                <a:solidFill>
-                  <a:srgbClr val="FFFFFF"/>
+              <a:defRPr sz="2800" b="1">
+                <a:solidFill>
+                  <a:srgbClr val="1C2330"/>
                 </a:solidFill>
                 <a:latin typeface="Aptos"/>
               </a:defRPr>
             </a:pPr>
             <a:r>
-              <a:t>Pregunta: ¿qué cambia si modifico el valor de la variable?</a:t>
-            </a:r>
-          </a:p>
-        </p:txBody>
-      </p:sp>
-      <p:sp>
-        <p:nvSpPr>
-          <p:cNvPr id="11" name="TextBox 10"/>
+              <a:t>Seguridad y uso responsable</a:t>
+            </a:r>
+          </a:p>
+        </p:txBody>
+      </p:sp>
+      <p:sp>
+        <p:nvSpPr>
+          <p:cNvPr id="6" name="Rectangle 5"/>
+          <p:cNvSpPr/>
+          <p:nvPr/>
+        </p:nvSpPr>
+        <p:spPr>
+          <a:xfrm>
+            <a:off x="0" y="6601968"/>
+            <a:ext cx="12191695" cy="256032"/>
+          </a:xfrm>
+          <a:prstGeom prst="rect">
+            <a:avLst/>
+          </a:prstGeom>
+          <a:solidFill>
+            <a:srgbClr val="2F5BA8"/>
+          </a:solidFill>
+          <a:ln>
+            <a:noFill/>
+          </a:ln>
+        </p:spPr>
+        <p:style>
+          <a:lnRef idx="1">
+            <a:schemeClr val="accent1"/>
+          </a:lnRef>
+          <a:fillRef idx="3">
+            <a:schemeClr val="accent1"/>
+          </a:fillRef>
+          <a:effectRef idx="2">
+            <a:schemeClr val="accent1"/>
+          </a:effectRef>
+          <a:fontRef idx="minor">
+            <a:schemeClr val="lt1"/>
+          </a:fontRef>
+        </p:style>
+        <p:txBody>
+          <a:bodyPr rtlCol="0" anchor="ctr"/>
+          <a:lstStyle/>
+          <a:p>
+            <a:pPr algn="ctr"/>
+          </a:p>
+        </p:txBody>
+      </p:sp>
+      <p:sp>
+        <p:nvSpPr>
+          <p:cNvPr id="7" name="TextBox 6"/>
           <p:cNvSpPr txBox="1"/>
           <p:nvPr/>
         </p:nvSpPr>
         <p:spPr>
           <a:xfrm>
-            <a:off x="713232" y="3703320"/>
-            <a:ext cx="3749039" cy="320040"/>
+            <a:off x="411480" y="6629400"/>
+            <a:ext cx="11247120" cy="164592"/>
           </a:xfrm>
           <a:prstGeom prst="rect">
             <a:avLst/>
@@ -6403,106 +6646,35 @@
           <a:noFill/>
         </p:spPr>
         <p:txBody>
-          <a:bodyPr wrap="square" lIns="36576" rIns="36576" tIns="27432" bIns="27432">
+          <a:bodyPr wrap="square" lIns="45720" rIns="45720" tIns="36576" bIns="36576" anchor="t">
             <a:spAutoFit/>
           </a:bodyPr>
           <a:lstStyle/>
           <a:p>
             <a:pPr algn="l">
-              <a:defRPr sz="1500" b="1">
-                <a:solidFill>
-                  <a:srgbClr val="2F5BA8"/>
+              <a:defRPr sz="900" b="0">
+                <a:solidFill>
+                  <a:srgbClr val="FFFFFF"/>
                 </a:solidFill>
                 <a:latin typeface="Aptos"/>
               </a:defRPr>
             </a:pPr>
             <a:r>
-              <a:t>RECUERDA</a:t>
-            </a:r>
-          </a:p>
-        </p:txBody>
-      </p:sp>
-      <p:sp>
-        <p:nvSpPr>
-          <p:cNvPr id="12" name="TextBox 11"/>
-          <p:cNvSpPr txBox="1"/>
-          <p:nvPr/>
-        </p:nvSpPr>
-        <p:spPr>
-          <a:xfrm>
-            <a:off x="713232" y="4114800"/>
-            <a:ext cx="6583680" cy="1691640"/>
-          </a:xfrm>
-          <a:prstGeom prst="rect">
-            <a:avLst/>
-          </a:prstGeom>
-          <a:noFill/>
-        </p:spPr>
-        <p:txBody>
-          <a:bodyPr wrap="square" lIns="73152" rIns="45720" tIns="36576">
-            <a:spAutoFit/>
-          </a:bodyPr>
-          <a:lstStyle/>
-          <a:p>
-            <a:pPr>
-              <a:spcAft>
-                <a:spcPts val="1000"/>
-              </a:spcAft>
-              <a:defRPr sz="1700">
-                <a:solidFill>
-                  <a:srgbClr val="1C2330"/>
-                </a:solidFill>
-                <a:latin typeface="Aptos"/>
-              </a:defRPr>
-            </a:pPr>
-            <a:r>
-              <a:t>•  Trabaja únicamente con datos ficticios.</a:t>
-            </a:r>
-          </a:p>
-          <a:p>
-            <a:pPr>
-              <a:spcAft>
-                <a:spcPts val="1000"/>
-              </a:spcAft>
-              <a:defRPr sz="1700">
-                <a:solidFill>
-                  <a:srgbClr val="1C2330"/>
-                </a:solidFill>
-                <a:latin typeface="Aptos"/>
-              </a:defRPr>
-            </a:pPr>
-            <a:r>
-              <a:t>•  No escribas contraseñas, tokens, claves API ni datos personales.</a:t>
-            </a:r>
-          </a:p>
-          <a:p>
-            <a:pPr>
-              <a:spcAft>
-                <a:spcPts val="1000"/>
-              </a:spcAft>
-              <a:defRPr sz="1700">
-                <a:solidFill>
-                  <a:srgbClr val="1C2330"/>
-                </a:solidFill>
-                <a:latin typeface="Aptos"/>
-              </a:defRPr>
-            </a:pPr>
-            <a:r>
-              <a:t>•  Si utilizas IA en un uso permitido, registra qué pediste, qué recibiste, qué cambiaste y cómo lo comprobaste.</a:t>
-            </a:r>
-          </a:p>
-        </p:txBody>
-      </p:sp>
-      <p:sp>
-        <p:nvSpPr>
-          <p:cNvPr id="13" name="Rounded Rectangle 12"/>
+              <a:t>MiniJarvis · 1.º DAW · Sesión 210 · H1</a:t>
+            </a:r>
+          </a:p>
+        </p:txBody>
+      </p:sp>
+      <p:sp>
+        <p:nvSpPr>
+          <p:cNvPr id="8" name="Rounded Rectangle 7"/>
           <p:cNvSpPr/>
           <p:nvPr/>
         </p:nvSpPr>
         <p:spPr>
           <a:xfrm>
-            <a:off x="7726679" y="3794760"/>
-            <a:ext cx="3703320" cy="1600200"/>
+            <a:off x="621792" y="1298448"/>
+            <a:ext cx="5230368" cy="2176272"/>
           </a:xfrm>
           <a:prstGeom prst="roundRect">
             <a:avLst/>
@@ -6512,7 +6684,7 @@
           </a:solidFill>
           <a:ln>
             <a:solidFill>
-              <a:srgbClr val="EBEEF2"/>
+              <a:srgbClr val="E5E9EF"/>
             </a:solidFill>
           </a:ln>
         </p:spPr>
@@ -6540,14 +6712,57 @@
       </p:sp>
       <p:sp>
         <p:nvSpPr>
-          <p:cNvPr id="14" name="TextBox 13"/>
+          <p:cNvPr id="9" name="Rounded Rectangle 8"/>
+          <p:cNvSpPr/>
+          <p:nvPr/>
+        </p:nvSpPr>
+        <p:spPr>
+          <a:xfrm>
+            <a:off x="841248" y="1527048"/>
+            <a:ext cx="237744" cy="1719072"/>
+          </a:xfrm>
+          <a:prstGeom prst="roundRect">
+            <a:avLst/>
+          </a:prstGeom>
+          <a:solidFill>
+            <a:srgbClr val="247E5C"/>
+          </a:solidFill>
+          <a:ln>
+            <a:noFill/>
+          </a:ln>
+        </p:spPr>
+        <p:style>
+          <a:lnRef idx="1">
+            <a:schemeClr val="accent1"/>
+          </a:lnRef>
+          <a:fillRef idx="3">
+            <a:schemeClr val="accent1"/>
+          </a:fillRef>
+          <a:effectRef idx="2">
+            <a:schemeClr val="accent1"/>
+          </a:effectRef>
+          <a:fontRef idx="minor">
+            <a:schemeClr val="lt1"/>
+          </a:fontRef>
+        </p:style>
+        <p:txBody>
+          <a:bodyPr rtlCol="0" anchor="ctr"/>
+          <a:lstStyle/>
+          <a:p>
+            <a:pPr algn="ctr"/>
+          </a:p>
+        </p:txBody>
+      </p:sp>
+      <p:sp>
+        <p:nvSpPr>
+          <p:cNvPr id="10" name="TextBox 9"/>
           <p:cNvSpPr txBox="1"/>
           <p:nvPr/>
         </p:nvSpPr>
         <p:spPr>
           <a:xfrm>
-            <a:off x="8028431" y="4087368"/>
-            <a:ext cx="3063240" cy="868680"/>
+            <a:off x="1280160" y="1527048"/>
+            <a:ext cx="4224528" cy="1783080"/>
           </a:xfrm>
           <a:prstGeom prst="rect">
             <a:avLst/>
@@ -6555,13 +6770,793 @@
           <a:noFill/>
         </p:spPr>
         <p:txBody>
-          <a:bodyPr wrap="square" lIns="36576" rIns="36576" tIns="27432" bIns="27432">
+          <a:bodyPr wrap="square" lIns="45720" rIns="45720" tIns="36576" bIns="36576" anchor="t">
             <a:spAutoFit/>
           </a:bodyPr>
           <a:lstStyle/>
           <a:p>
+            <a:pPr algn="l">
+              <a:defRPr sz="1900" b="0">
+                <a:solidFill>
+                  <a:srgbClr val="1C2330"/>
+                </a:solidFill>
+                <a:latin typeface="Aptos"/>
+              </a:defRPr>
+            </a:pPr>
+            <a:r>
+              <a:t>Trabaja únicamente con datos ficticios.</a:t>
+            </a:r>
+          </a:p>
+        </p:txBody>
+      </p:sp>
+      <p:sp>
+        <p:nvSpPr>
+          <p:cNvPr id="11" name="Rounded Rectangle 10"/>
+          <p:cNvSpPr/>
+          <p:nvPr/>
+        </p:nvSpPr>
+        <p:spPr>
+          <a:xfrm>
+            <a:off x="6126479" y="1298448"/>
+            <a:ext cx="5230368" cy="2176272"/>
+          </a:xfrm>
+          <a:prstGeom prst="roundRect">
+            <a:avLst/>
+          </a:prstGeom>
+          <a:solidFill>
+            <a:srgbClr val="FFFFFF"/>
+          </a:solidFill>
+          <a:ln>
+            <a:solidFill>
+              <a:srgbClr val="E5E9EF"/>
+            </a:solidFill>
+          </a:ln>
+        </p:spPr>
+        <p:style>
+          <a:lnRef idx="1">
+            <a:schemeClr val="accent1"/>
+          </a:lnRef>
+          <a:fillRef idx="3">
+            <a:schemeClr val="accent1"/>
+          </a:fillRef>
+          <a:effectRef idx="2">
+            <a:schemeClr val="accent1"/>
+          </a:effectRef>
+          <a:fontRef idx="minor">
+            <a:schemeClr val="lt1"/>
+          </a:fontRef>
+        </p:style>
+        <p:txBody>
+          <a:bodyPr rtlCol="0" anchor="ctr"/>
+          <a:lstStyle/>
+          <a:p>
+            <a:pPr algn="ctr"/>
+          </a:p>
+        </p:txBody>
+      </p:sp>
+      <p:sp>
+        <p:nvSpPr>
+          <p:cNvPr id="12" name="Rounded Rectangle 11"/>
+          <p:cNvSpPr/>
+          <p:nvPr/>
+        </p:nvSpPr>
+        <p:spPr>
+          <a:xfrm>
+            <a:off x="6345936" y="1527048"/>
+            <a:ext cx="237744" cy="1719072"/>
+          </a:xfrm>
+          <a:prstGeom prst="roundRect">
+            <a:avLst/>
+          </a:prstGeom>
+          <a:solidFill>
+            <a:srgbClr val="C07020"/>
+          </a:solidFill>
+          <a:ln>
+            <a:noFill/>
+          </a:ln>
+        </p:spPr>
+        <p:style>
+          <a:lnRef idx="1">
+            <a:schemeClr val="accent1"/>
+          </a:lnRef>
+          <a:fillRef idx="3">
+            <a:schemeClr val="accent1"/>
+          </a:fillRef>
+          <a:effectRef idx="2">
+            <a:schemeClr val="accent1"/>
+          </a:effectRef>
+          <a:fontRef idx="minor">
+            <a:schemeClr val="lt1"/>
+          </a:fontRef>
+        </p:style>
+        <p:txBody>
+          <a:bodyPr rtlCol="0" anchor="ctr"/>
+          <a:lstStyle/>
+          <a:p>
+            <a:pPr algn="ctr"/>
+          </a:p>
+        </p:txBody>
+      </p:sp>
+      <p:sp>
+        <p:nvSpPr>
+          <p:cNvPr id="13" name="TextBox 12"/>
+          <p:cNvSpPr txBox="1"/>
+          <p:nvPr/>
+        </p:nvSpPr>
+        <p:spPr>
+          <a:xfrm>
+            <a:off x="6784847" y="1527048"/>
+            <a:ext cx="4224528" cy="1783080"/>
+          </a:xfrm>
+          <a:prstGeom prst="rect">
+            <a:avLst/>
+          </a:prstGeom>
+          <a:noFill/>
+        </p:spPr>
+        <p:txBody>
+          <a:bodyPr wrap="square" lIns="45720" rIns="45720" tIns="36576" bIns="36576" anchor="t">
+            <a:spAutoFit/>
+          </a:bodyPr>
+          <a:lstStyle/>
+          <a:p>
+            <a:pPr algn="l">
+              <a:defRPr sz="1900" b="0">
+                <a:solidFill>
+                  <a:srgbClr val="1C2330"/>
+                </a:solidFill>
+                <a:latin typeface="Aptos"/>
+              </a:defRPr>
+            </a:pPr>
+            <a:r>
+              <a:t>No escribas contraseñas, tokens, claves API ni datos personales.</a:t>
+            </a:r>
+          </a:p>
+        </p:txBody>
+      </p:sp>
+      <p:sp>
+        <p:nvSpPr>
+          <p:cNvPr id="14" name="Rounded Rectangle 13"/>
+          <p:cNvSpPr/>
+          <p:nvPr/>
+        </p:nvSpPr>
+        <p:spPr>
+          <a:xfrm>
+            <a:off x="621792" y="3675887"/>
+            <a:ext cx="5230368" cy="2176272"/>
+          </a:xfrm>
+          <a:prstGeom prst="roundRect">
+            <a:avLst/>
+          </a:prstGeom>
+          <a:solidFill>
+            <a:srgbClr val="FFFFFF"/>
+          </a:solidFill>
+          <a:ln>
+            <a:solidFill>
+              <a:srgbClr val="E5E9EF"/>
+            </a:solidFill>
+          </a:ln>
+        </p:spPr>
+        <p:style>
+          <a:lnRef idx="1">
+            <a:schemeClr val="accent1"/>
+          </a:lnRef>
+          <a:fillRef idx="3">
+            <a:schemeClr val="accent1"/>
+          </a:fillRef>
+          <a:effectRef idx="2">
+            <a:schemeClr val="accent1"/>
+          </a:effectRef>
+          <a:fontRef idx="minor">
+            <a:schemeClr val="lt1"/>
+          </a:fontRef>
+        </p:style>
+        <p:txBody>
+          <a:bodyPr rtlCol="0" anchor="ctr"/>
+          <a:lstStyle/>
+          <a:p>
+            <a:pPr algn="ctr"/>
+          </a:p>
+        </p:txBody>
+      </p:sp>
+      <p:sp>
+        <p:nvSpPr>
+          <p:cNvPr id="15" name="Rounded Rectangle 14"/>
+          <p:cNvSpPr/>
+          <p:nvPr/>
+        </p:nvSpPr>
+        <p:spPr>
+          <a:xfrm>
+            <a:off x="841248" y="3904487"/>
+            <a:ext cx="237744" cy="1719072"/>
+          </a:xfrm>
+          <a:prstGeom prst="roundRect">
+            <a:avLst/>
+          </a:prstGeom>
+          <a:solidFill>
+            <a:srgbClr val="B13A3A"/>
+          </a:solidFill>
+          <a:ln>
+            <a:noFill/>
+          </a:ln>
+        </p:spPr>
+        <p:style>
+          <a:lnRef idx="1">
+            <a:schemeClr val="accent1"/>
+          </a:lnRef>
+          <a:fillRef idx="3">
+            <a:schemeClr val="accent1"/>
+          </a:fillRef>
+          <a:effectRef idx="2">
+            <a:schemeClr val="accent1"/>
+          </a:effectRef>
+          <a:fontRef idx="minor">
+            <a:schemeClr val="lt1"/>
+          </a:fontRef>
+        </p:style>
+        <p:txBody>
+          <a:bodyPr rtlCol="0" anchor="ctr"/>
+          <a:lstStyle/>
+          <a:p>
+            <a:pPr algn="ctr"/>
+          </a:p>
+        </p:txBody>
+      </p:sp>
+      <p:sp>
+        <p:nvSpPr>
+          <p:cNvPr id="16" name="TextBox 15"/>
+          <p:cNvSpPr txBox="1"/>
+          <p:nvPr/>
+        </p:nvSpPr>
+        <p:spPr>
+          <a:xfrm>
+            <a:off x="1280160" y="3904487"/>
+            <a:ext cx="4224528" cy="1783080"/>
+          </a:xfrm>
+          <a:prstGeom prst="rect">
+            <a:avLst/>
+          </a:prstGeom>
+          <a:noFill/>
+        </p:spPr>
+        <p:txBody>
+          <a:bodyPr wrap="square" lIns="45720" rIns="45720" tIns="36576" bIns="36576" anchor="t">
+            <a:spAutoFit/>
+          </a:bodyPr>
+          <a:lstStyle/>
+          <a:p>
+            <a:pPr algn="l">
+              <a:defRPr sz="1900" b="0">
+                <a:solidFill>
+                  <a:srgbClr val="1C2330"/>
+                </a:solidFill>
+                <a:latin typeface="Aptos"/>
+              </a:defRPr>
+            </a:pPr>
+            <a:r>
+              <a:t>Si utilizas IA en un uso permitido, registra qué pediste, qué recibiste, qué cambiaste y cómo lo comprobaste.</a:t>
+            </a:r>
+          </a:p>
+        </p:txBody>
+      </p:sp>
+      <p:sp>
+        <p:nvSpPr>
+          <p:cNvPr id="17" name="Rounded Rectangle 16"/>
+          <p:cNvSpPr/>
+          <p:nvPr/>
+        </p:nvSpPr>
+        <p:spPr>
+          <a:xfrm>
+            <a:off x="6126479" y="3675887"/>
+            <a:ext cx="5230368" cy="2176272"/>
+          </a:xfrm>
+          <a:prstGeom prst="roundRect">
+            <a:avLst/>
+          </a:prstGeom>
+          <a:solidFill>
+            <a:srgbClr val="FFFFFF"/>
+          </a:solidFill>
+          <a:ln>
+            <a:solidFill>
+              <a:srgbClr val="E5E9EF"/>
+            </a:solidFill>
+          </a:ln>
+        </p:spPr>
+        <p:style>
+          <a:lnRef idx="1">
+            <a:schemeClr val="accent1"/>
+          </a:lnRef>
+          <a:fillRef idx="3">
+            <a:schemeClr val="accent1"/>
+          </a:fillRef>
+          <a:effectRef idx="2">
+            <a:schemeClr val="accent1"/>
+          </a:effectRef>
+          <a:fontRef idx="minor">
+            <a:schemeClr val="lt1"/>
+          </a:fontRef>
+        </p:style>
+        <p:txBody>
+          <a:bodyPr rtlCol="0" anchor="ctr"/>
+          <a:lstStyle/>
+          <a:p>
+            <a:pPr algn="ctr"/>
+          </a:p>
+        </p:txBody>
+      </p:sp>
+      <p:sp>
+        <p:nvSpPr>
+          <p:cNvPr id="18" name="Rounded Rectangle 17"/>
+          <p:cNvSpPr/>
+          <p:nvPr/>
+        </p:nvSpPr>
+        <p:spPr>
+          <a:xfrm>
+            <a:off x="6345936" y="3904487"/>
+            <a:ext cx="237744" cy="1719072"/>
+          </a:xfrm>
+          <a:prstGeom prst="roundRect">
+            <a:avLst/>
+          </a:prstGeom>
+          <a:solidFill>
+            <a:srgbClr val="2F5BA8"/>
+          </a:solidFill>
+          <a:ln>
+            <a:noFill/>
+          </a:ln>
+        </p:spPr>
+        <p:style>
+          <a:lnRef idx="1">
+            <a:schemeClr val="accent1"/>
+          </a:lnRef>
+          <a:fillRef idx="3">
+            <a:schemeClr val="accent1"/>
+          </a:fillRef>
+          <a:effectRef idx="2">
+            <a:schemeClr val="accent1"/>
+          </a:effectRef>
+          <a:fontRef idx="minor">
+            <a:schemeClr val="lt1"/>
+          </a:fontRef>
+        </p:style>
+        <p:txBody>
+          <a:bodyPr rtlCol="0" anchor="ctr"/>
+          <a:lstStyle/>
+          <a:p>
+            <a:pPr algn="ctr"/>
+          </a:p>
+        </p:txBody>
+      </p:sp>
+      <p:sp>
+        <p:nvSpPr>
+          <p:cNvPr id="19" name="TextBox 18"/>
+          <p:cNvSpPr txBox="1"/>
+          <p:nvPr/>
+        </p:nvSpPr>
+        <p:spPr>
+          <a:xfrm>
+            <a:off x="6784847" y="3904487"/>
+            <a:ext cx="4224528" cy="1783080"/>
+          </a:xfrm>
+          <a:prstGeom prst="rect">
+            <a:avLst/>
+          </a:prstGeom>
+          <a:noFill/>
+        </p:spPr>
+        <p:txBody>
+          <a:bodyPr wrap="square" lIns="45720" rIns="45720" tIns="36576" bIns="36576" anchor="t">
+            <a:spAutoFit/>
+          </a:bodyPr>
+          <a:lstStyle/>
+          <a:p>
+            <a:pPr algn="l">
+              <a:defRPr sz="1900" b="0">
+                <a:solidFill>
+                  <a:srgbClr val="1C2330"/>
+                </a:solidFill>
+                <a:latin typeface="Aptos"/>
+              </a:defRPr>
+            </a:pPr>
+            <a:r>
+              <a:t>Los ejemplos de Laura solo se consultan después del intento propio.</a:t>
+            </a:r>
+          </a:p>
+        </p:txBody>
+      </p:sp>
+    </p:spTree>
+  </p:cSld>
+  <p:clrMapOvr>
+    <a:masterClrMapping/>
+  </p:clrMapOvr>
+</p:sld>
+</file>
+
+<file path=ppt/slides/slide8.xml><?xml version="1.0" encoding="utf-8"?>
+<p:sld xmlns:a="http://schemas.openxmlformats.org/drawingml/2006/main" xmlns:p="http://schemas.openxmlformats.org/presentationml/2006/main" xmlns:r="http://schemas.openxmlformats.org/officeDocument/2006/relationships">
+  <p:cSld>
+    <p:spTree>
+      <p:nvGrpSpPr>
+        <p:cNvPr id="1" name=""/>
+        <p:cNvGrpSpPr/>
+        <p:nvPr/>
+      </p:nvGrpSpPr>
+      <p:grpSpPr/>
+      <p:sp>
+        <p:nvSpPr>
+          <p:cNvPr id="2" name="Rectangle 1"/>
+          <p:cNvSpPr/>
+          <p:nvPr/>
+        </p:nvSpPr>
+        <p:spPr>
+          <a:xfrm>
+            <a:off x="0" y="0"/>
+            <a:ext cx="12191695" cy="6858000"/>
+          </a:xfrm>
+          <a:prstGeom prst="rect">
+            <a:avLst/>
+          </a:prstGeom>
+          <a:solidFill>
+            <a:srgbClr val="F9F7F2"/>
+          </a:solidFill>
+          <a:ln>
+            <a:noFill/>
+          </a:ln>
+        </p:spPr>
+        <p:style>
+          <a:lnRef idx="1">
+            <a:schemeClr val="accent1"/>
+          </a:lnRef>
+          <a:fillRef idx="3">
+            <a:schemeClr val="accent1"/>
+          </a:fillRef>
+          <a:effectRef idx="2">
+            <a:schemeClr val="accent1"/>
+          </a:effectRef>
+          <a:fontRef idx="minor">
+            <a:schemeClr val="lt1"/>
+          </a:fontRef>
+        </p:style>
+        <p:txBody>
+          <a:bodyPr rtlCol="0" anchor="ctr"/>
+          <a:lstStyle/>
+          <a:p>
+            <a:pPr algn="ctr"/>
+          </a:p>
+        </p:txBody>
+      </p:sp>
+      <p:sp>
+        <p:nvSpPr>
+          <p:cNvPr id="3" name="Rectangle 2"/>
+          <p:cNvSpPr/>
+          <p:nvPr/>
+        </p:nvSpPr>
+        <p:spPr>
+          <a:xfrm>
+            <a:off x="0" y="0"/>
+            <a:ext cx="164592" cy="6858000"/>
+          </a:xfrm>
+          <a:prstGeom prst="rect">
+            <a:avLst/>
+          </a:prstGeom>
+          <a:solidFill>
+            <a:srgbClr val="2F5BA8"/>
+          </a:solidFill>
+          <a:ln>
+            <a:noFill/>
+          </a:ln>
+        </p:spPr>
+        <p:style>
+          <a:lnRef idx="1">
+            <a:schemeClr val="accent1"/>
+          </a:lnRef>
+          <a:fillRef idx="3">
+            <a:schemeClr val="accent1"/>
+          </a:fillRef>
+          <a:effectRef idx="2">
+            <a:schemeClr val="accent1"/>
+          </a:effectRef>
+          <a:fontRef idx="minor">
+            <a:schemeClr val="lt1"/>
+          </a:fontRef>
+        </p:style>
+        <p:txBody>
+          <a:bodyPr rtlCol="0" anchor="ctr"/>
+          <a:lstStyle/>
+          <a:p>
+            <a:pPr algn="ctr"/>
+          </a:p>
+        </p:txBody>
+      </p:sp>
+      <p:sp>
+        <p:nvSpPr>
+          <p:cNvPr id="4" name="TextBox 3"/>
+          <p:cNvSpPr txBox="1"/>
+          <p:nvPr/>
+        </p:nvSpPr>
+        <p:spPr>
+          <a:xfrm>
+            <a:off x="502920" y="274320"/>
+            <a:ext cx="5486400" cy="256032"/>
+          </a:xfrm>
+          <a:prstGeom prst="rect">
+            <a:avLst/>
+          </a:prstGeom>
+          <a:noFill/>
+        </p:spPr>
+        <p:txBody>
+          <a:bodyPr wrap="square" lIns="45720" rIns="45720" tIns="36576" bIns="36576" anchor="t">
+            <a:spAutoFit/>
+          </a:bodyPr>
+          <a:lstStyle/>
+          <a:p>
+            <a:pPr algn="l">
+              <a:defRPr sz="1000" b="1">
+                <a:solidFill>
+                  <a:srgbClr val="2F5BA8"/>
+                </a:solidFill>
+                <a:latin typeface="Aptos"/>
+              </a:defRPr>
+            </a:pPr>
+            <a:r>
+              <a:t>EXPLICAR Y DEFENDER</a:t>
+            </a:r>
+          </a:p>
+        </p:txBody>
+      </p:sp>
+      <p:sp>
+        <p:nvSpPr>
+          <p:cNvPr id="5" name="TextBox 4"/>
+          <p:cNvSpPr txBox="1"/>
+          <p:nvPr/>
+        </p:nvSpPr>
+        <p:spPr>
+          <a:xfrm>
+            <a:off x="502920" y="603504"/>
+            <a:ext cx="11064240" cy="530352"/>
+          </a:xfrm>
+          <a:prstGeom prst="rect">
+            <a:avLst/>
+          </a:prstGeom>
+          <a:noFill/>
+        </p:spPr>
+        <p:txBody>
+          <a:bodyPr wrap="square" lIns="45720" rIns="45720" tIns="36576" bIns="36576" anchor="t">
+            <a:spAutoFit/>
+          </a:bodyPr>
+          <a:lstStyle/>
+          <a:p>
+            <a:pPr algn="l">
+              <a:defRPr sz="2800" b="1">
+                <a:solidFill>
+                  <a:srgbClr val="1C2330"/>
+                </a:solidFill>
+                <a:latin typeface="Aptos"/>
+              </a:defRPr>
+            </a:pPr>
+            <a:r>
+              <a:t>Cierre y defensa</a:t>
+            </a:r>
+          </a:p>
+        </p:txBody>
+      </p:sp>
+      <p:sp>
+        <p:nvSpPr>
+          <p:cNvPr id="6" name="Rectangle 5"/>
+          <p:cNvSpPr/>
+          <p:nvPr/>
+        </p:nvSpPr>
+        <p:spPr>
+          <a:xfrm>
+            <a:off x="0" y="6601968"/>
+            <a:ext cx="12191695" cy="256032"/>
+          </a:xfrm>
+          <a:prstGeom prst="rect">
+            <a:avLst/>
+          </a:prstGeom>
+          <a:solidFill>
+            <a:srgbClr val="2F5BA8"/>
+          </a:solidFill>
+          <a:ln>
+            <a:noFill/>
+          </a:ln>
+        </p:spPr>
+        <p:style>
+          <a:lnRef idx="1">
+            <a:schemeClr val="accent1"/>
+          </a:lnRef>
+          <a:fillRef idx="3">
+            <a:schemeClr val="accent1"/>
+          </a:fillRef>
+          <a:effectRef idx="2">
+            <a:schemeClr val="accent1"/>
+          </a:effectRef>
+          <a:fontRef idx="minor">
+            <a:schemeClr val="lt1"/>
+          </a:fontRef>
+        </p:style>
+        <p:txBody>
+          <a:bodyPr rtlCol="0" anchor="ctr"/>
+          <a:lstStyle/>
+          <a:p>
+            <a:pPr algn="ctr"/>
+          </a:p>
+        </p:txBody>
+      </p:sp>
+      <p:sp>
+        <p:nvSpPr>
+          <p:cNvPr id="7" name="TextBox 6"/>
+          <p:cNvSpPr txBox="1"/>
+          <p:nvPr/>
+        </p:nvSpPr>
+        <p:spPr>
+          <a:xfrm>
+            <a:off x="411480" y="6629400"/>
+            <a:ext cx="11247120" cy="164592"/>
+          </a:xfrm>
+          <a:prstGeom prst="rect">
+            <a:avLst/>
+          </a:prstGeom>
+          <a:noFill/>
+        </p:spPr>
+        <p:txBody>
+          <a:bodyPr wrap="square" lIns="45720" rIns="45720" tIns="36576" bIns="36576" anchor="t">
+            <a:spAutoFit/>
+          </a:bodyPr>
+          <a:lstStyle/>
+          <a:p>
+            <a:pPr algn="l">
+              <a:defRPr sz="900" b="0">
+                <a:solidFill>
+                  <a:srgbClr val="FFFFFF"/>
+                </a:solidFill>
+                <a:latin typeface="Aptos"/>
+              </a:defRPr>
+            </a:pPr>
+            <a:r>
+              <a:t>MiniJarvis · 1.º DAW · Sesión 210 · H1</a:t>
+            </a:r>
+          </a:p>
+        </p:txBody>
+      </p:sp>
+      <p:sp>
+        <p:nvSpPr>
+          <p:cNvPr id="8" name="Rounded Rectangle 7"/>
+          <p:cNvSpPr/>
+          <p:nvPr/>
+        </p:nvSpPr>
+        <p:spPr>
+          <a:xfrm>
+            <a:off x="621792" y="1298448"/>
+            <a:ext cx="10927080" cy="1828800"/>
+          </a:xfrm>
+          <a:prstGeom prst="roundRect">
+            <a:avLst/>
+          </a:prstGeom>
+          <a:solidFill>
+            <a:srgbClr val="2F5BA8"/>
+          </a:solidFill>
+          <a:ln>
+            <a:solidFill>
+              <a:srgbClr val="2F5BA8"/>
+            </a:solidFill>
+          </a:ln>
+        </p:spPr>
+        <p:style>
+          <a:lnRef idx="1">
+            <a:schemeClr val="accent1"/>
+          </a:lnRef>
+          <a:fillRef idx="3">
+            <a:schemeClr val="accent1"/>
+          </a:fillRef>
+          <a:effectRef idx="2">
+            <a:schemeClr val="accent1"/>
+          </a:effectRef>
+          <a:fontRef idx="minor">
+            <a:schemeClr val="lt1"/>
+          </a:fontRef>
+        </p:style>
+        <p:txBody>
+          <a:bodyPr rtlCol="0" anchor="ctr"/>
+          <a:lstStyle/>
+          <a:p>
+            <a:pPr algn="ctr"/>
+          </a:p>
+        </p:txBody>
+      </p:sp>
+      <p:sp>
+        <p:nvSpPr>
+          <p:cNvPr id="9" name="TextBox 8"/>
+          <p:cNvSpPr txBox="1"/>
+          <p:nvPr/>
+        </p:nvSpPr>
+        <p:spPr>
+          <a:xfrm>
+            <a:off x="932688" y="1591056"/>
+            <a:ext cx="10241280" cy="256032"/>
+          </a:xfrm>
+          <a:prstGeom prst="rect">
+            <a:avLst/>
+          </a:prstGeom>
+          <a:noFill/>
+        </p:spPr>
+        <p:txBody>
+          <a:bodyPr wrap="square" lIns="45720" rIns="45720" tIns="36576" bIns="36576" anchor="t">
+            <a:spAutoFit/>
+          </a:bodyPr>
+          <a:lstStyle/>
+          <a:p>
+            <a:pPr algn="l">
+              <a:defRPr sz="1300" b="1">
+                <a:solidFill>
+                  <a:srgbClr val="FFFFFF"/>
+                </a:solidFill>
+                <a:latin typeface="Aptos"/>
+              </a:defRPr>
+            </a:pPr>
+            <a:r>
+              <a:t>PREGUNTA O DECISIÓN DE SALIDA</a:t>
+            </a:r>
+          </a:p>
+        </p:txBody>
+      </p:sp>
+      <p:sp>
+        <p:nvSpPr>
+          <p:cNvPr id="10" name="TextBox 9"/>
+          <p:cNvSpPr txBox="1"/>
+          <p:nvPr/>
+        </p:nvSpPr>
+        <p:spPr>
+          <a:xfrm>
+            <a:off x="932688" y="1975104"/>
+            <a:ext cx="10058400" cy="822960"/>
+          </a:xfrm>
+          <a:prstGeom prst="rect">
+            <a:avLst/>
+          </a:prstGeom>
+          <a:noFill/>
+        </p:spPr>
+        <p:txBody>
+          <a:bodyPr wrap="square" lIns="45720" rIns="45720" tIns="36576" bIns="36576" anchor="t">
+            <a:spAutoFit/>
+          </a:bodyPr>
+          <a:lstStyle/>
+          <a:p>
+            <a:pPr algn="l">
+              <a:defRPr sz="2500" b="1">
+                <a:solidFill>
+                  <a:srgbClr val="FFFFFF"/>
+                </a:solidFill>
+                <a:latin typeface="Aptos"/>
+              </a:defRPr>
+            </a:pPr>
+            <a:r>
+              <a:t>¿qué cambia si modifico el valor de la variable?</a:t>
+            </a:r>
+          </a:p>
+        </p:txBody>
+      </p:sp>
+      <p:sp>
+        <p:nvSpPr>
+          <p:cNvPr id="11" name="TextBox 10"/>
+          <p:cNvSpPr txBox="1"/>
+          <p:nvPr/>
+        </p:nvSpPr>
+        <p:spPr>
+          <a:xfrm>
+            <a:off x="749808" y="3886200"/>
+            <a:ext cx="10607040" cy="1280160"/>
+          </a:xfrm>
+          <a:prstGeom prst="rect">
+            <a:avLst/>
+          </a:prstGeom>
+          <a:noFill/>
+        </p:spPr>
+        <p:txBody>
+          <a:bodyPr wrap="square" lIns="45720" rIns="45720" tIns="36576" bIns="36576" anchor="ctr">
+            <a:spAutoFit/>
+          </a:bodyPr>
+          <a:lstStyle/>
+          <a:p>
             <a:pPr algn="ctr">
-              <a:defRPr sz="1800" b="1">
+              <a:defRPr sz="2300" b="1">
                 <a:solidFill>
                   <a:srgbClr val="247E5C"/>
                 </a:solidFill>
@@ -6569,7 +7564,7 @@
               </a:defRPr>
             </a:pPr>
             <a:r>
-              <a:t>La sesión termina cuando la evidencia existe, está comprobada y puedes defenderla.</a:t>
+              <a:t>La sesión termina cuando la evidencia existe, está comprobada y puede defenderse.</a:t>
             </a:r>
           </a:p>
         </p:txBody>

--- a/02-PROFESORADO/03-PRESENTACIONES/POR-SESION/h1/S210-variables-presentacion.pptx
+++ b/02-PROFESORADO/03-PRESENTACIONES/POR-SESION/h1/S210-variables-presentacion.pptx
@@ -6,13 +6,14 @@
   </p:sldMasterIdLst>
   <p:sldIdLst>
     <p:sldId id="256" r:id="rId7"/>
-    <p:sldId id="257" r:id="rId8"/>
-    <p:sldId id="258" r:id="rId9"/>
-    <p:sldId id="259" r:id="rId10"/>
-    <p:sldId id="260" r:id="rId11"/>
-    <p:sldId id="261" r:id="rId12"/>
-    <p:sldId id="262" r:id="rId13"/>
-    <p:sldId id="263" r:id="rId14"/>
+    <p:sldId id="257" r:id="rId9"/>
+    <p:sldId id="258" r:id="rId10"/>
+    <p:sldId id="259" r:id="rId11"/>
+    <p:sldId id="260" r:id="rId12"/>
+    <p:sldId id="261" r:id="rId13"/>
+    <p:sldId id="262" r:id="rId14"/>
+    <p:sldId id="263" r:id="rId15"/>
+    <p:sldId id="264" r:id="rId16"/>
   </p:sldIdLst>
   <p:sldSz cx="12191695" cy="6858000" type="screen4x3"/>
   <p:notesSz cx="6858000" cy="9144000"/>
@@ -112,6 +113,1336 @@
     </a:lvl9pPr>
   </p:defaultTextStyle>
 </p:presentation>
+</file>
+
+<file path=ppt/notesMasters/notesMaster1.xml><?xml version="1.0" encoding="utf-8"?>
+<p:notesMaster xmlns:a="http://schemas.openxmlformats.org/drawingml/2006/main" xmlns:p="http://schemas.openxmlformats.org/presentationml/2006/main" xmlns:r="http://schemas.openxmlformats.org/officeDocument/2006/relationships">
+  <p:cSld>
+    <p:bg>
+      <p:bgRef idx="1001">
+        <a:schemeClr val="bg1"/>
+      </p:bgRef>
+    </p:bg>
+    <p:spTree>
+      <p:nvGrpSpPr>
+        <p:cNvPr id="1" name=""/>
+        <p:cNvGrpSpPr/>
+        <p:nvPr/>
+      </p:nvGrpSpPr>
+      <p:grpSpPr>
+        <a:xfrm>
+          <a:off x="0" y="0"/>
+          <a:ext cx="0" cy="0"/>
+          <a:chOff x="0" y="0"/>
+          <a:chExt cx="0" cy="0"/>
+        </a:xfrm>
+      </p:grpSpPr>
+      <p:sp>
+        <p:nvSpPr>
+          <p:cNvPr id="2" name="Header Placeholder 1"/>
+          <p:cNvSpPr>
+            <a:spLocks noGrp="1"/>
+          </p:cNvSpPr>
+          <p:nvPr>
+            <p:ph type="hdr" sz="quarter"/>
+          </p:nvPr>
+        </p:nvSpPr>
+        <p:spPr>
+          <a:xfrm>
+            <a:off x="0" y="0"/>
+            <a:ext cx="2971800" cy="457200"/>
+          </a:xfrm>
+          <a:prstGeom prst="rect">
+            <a:avLst/>
+          </a:prstGeom>
+        </p:spPr>
+        <p:txBody>
+          <a:bodyPr vert="horz" lIns="91440" tIns="45720" rIns="91440" bIns="45720" rtlCol="0"/>
+          <a:lstStyle>
+            <a:lvl1pPr algn="l">
+              <a:defRPr sz="1200"/>
+            </a:lvl1pPr>
+          </a:lstStyle>
+          <a:p>
+            <a:endParaRPr lang="en-US"/>
+          </a:p>
+        </p:txBody>
+      </p:sp>
+      <p:sp>
+        <p:nvSpPr>
+          <p:cNvPr id="3" name="Date Placeholder 2"/>
+          <p:cNvSpPr>
+            <a:spLocks noGrp="1"/>
+          </p:cNvSpPr>
+          <p:nvPr>
+            <p:ph type="dt" idx="1"/>
+          </p:nvPr>
+        </p:nvSpPr>
+        <p:spPr>
+          <a:xfrm>
+            <a:off x="3884613" y="0"/>
+            <a:ext cx="2971800" cy="457200"/>
+          </a:xfrm>
+          <a:prstGeom prst="rect">
+            <a:avLst/>
+          </a:prstGeom>
+        </p:spPr>
+        <p:txBody>
+          <a:bodyPr vert="horz" lIns="91440" tIns="45720" rIns="91440" bIns="45720" rtlCol="0"/>
+          <a:lstStyle>
+            <a:lvl1pPr algn="r">
+              <a:defRPr sz="1200"/>
+            </a:lvl1pPr>
+          </a:lstStyle>
+          <a:p>
+            <a:fld id="{0F89C1C7-3DCD-1040-A9CF-14679D8B5DDD}" type="datetimeFigureOut">
+              <a:rPr lang="en-US" smtClean="0"/>
+              <a:t>10/17/16</a:t>
+            </a:fld>
+            <a:endParaRPr lang="en-US"/>
+          </a:p>
+        </p:txBody>
+      </p:sp>
+      <p:sp>
+        <p:nvSpPr>
+          <p:cNvPr id="4" name="Slide Image Placeholder 3"/>
+          <p:cNvSpPr>
+            <a:spLocks noGrp="1" noRot="1" noChangeAspect="1"/>
+          </p:cNvSpPr>
+          <p:nvPr>
+            <p:ph type="sldImg" idx="2"/>
+          </p:nvPr>
+        </p:nvSpPr>
+        <p:spPr>
+          <a:xfrm>
+            <a:off x="1143000" y="685800"/>
+            <a:ext cx="4572000" cy="3429000"/>
+          </a:xfrm>
+          <a:prstGeom prst="rect">
+            <a:avLst/>
+          </a:prstGeom>
+          <a:noFill/>
+          <a:ln w="12700">
+            <a:solidFill>
+              <a:prstClr val="black"/>
+            </a:solidFill>
+          </a:ln>
+        </p:spPr>
+        <p:txBody>
+          <a:bodyPr vert="horz" lIns="91440" tIns="45720" rIns="91440" bIns="45720" rtlCol="0" anchor="ctr"/>
+          <a:lstStyle/>
+          <a:p>
+            <a:endParaRPr lang="en-US"/>
+          </a:p>
+        </p:txBody>
+      </p:sp>
+      <p:sp>
+        <p:nvSpPr>
+          <p:cNvPr id="5" name="Notes Placeholder 4"/>
+          <p:cNvSpPr>
+            <a:spLocks noGrp="1"/>
+          </p:cNvSpPr>
+          <p:nvPr>
+            <p:ph type="body" sz="quarter" idx="3"/>
+          </p:nvPr>
+        </p:nvSpPr>
+        <p:spPr>
+          <a:xfrm>
+            <a:off x="685800" y="4343400"/>
+            <a:ext cx="5486400" cy="4114800"/>
+          </a:xfrm>
+          <a:prstGeom prst="rect">
+            <a:avLst/>
+          </a:prstGeom>
+        </p:spPr>
+        <p:txBody>
+          <a:bodyPr vert="horz" lIns="91440" tIns="45720" rIns="91440" bIns="45720" rtlCol="0"/>
+          <a:lstStyle/>
+          <a:p>
+            <a:pPr lvl="0"/>
+            <a:r>
+              <a:rPr lang="en-US" smtClean="0"/>
+              <a:t>Click to edit Master text styles</a:t>
+            </a:r>
+          </a:p>
+          <a:p>
+            <a:pPr lvl="1"/>
+            <a:r>
+              <a:rPr lang="en-US" smtClean="0"/>
+              <a:t>Second level</a:t>
+            </a:r>
+          </a:p>
+          <a:p>
+            <a:pPr lvl="2"/>
+            <a:r>
+              <a:rPr lang="en-US" smtClean="0"/>
+              <a:t>Third level</a:t>
+            </a:r>
+          </a:p>
+          <a:p>
+            <a:pPr lvl="3"/>
+            <a:r>
+              <a:rPr lang="en-US" smtClean="0"/>
+              <a:t>Fourth level</a:t>
+            </a:r>
+          </a:p>
+          <a:p>
+            <a:pPr lvl="4"/>
+            <a:r>
+              <a:rPr lang="en-US" smtClean="0"/>
+              <a:t>Fifth level</a:t>
+            </a:r>
+            <a:endParaRPr lang="en-US"/>
+          </a:p>
+        </p:txBody>
+      </p:sp>
+      <p:sp>
+        <p:nvSpPr>
+          <p:cNvPr id="6" name="Footer Placeholder 5"/>
+          <p:cNvSpPr>
+            <a:spLocks noGrp="1"/>
+          </p:cNvSpPr>
+          <p:nvPr>
+            <p:ph type="ftr" sz="quarter" idx="4"/>
+          </p:nvPr>
+        </p:nvSpPr>
+        <p:spPr>
+          <a:xfrm>
+            <a:off x="0" y="8685213"/>
+            <a:ext cx="2971800" cy="457200"/>
+          </a:xfrm>
+          <a:prstGeom prst="rect">
+            <a:avLst/>
+          </a:prstGeom>
+        </p:spPr>
+        <p:txBody>
+          <a:bodyPr vert="horz" lIns="91440" tIns="45720" rIns="91440" bIns="45720" rtlCol="0" anchor="b"/>
+          <a:lstStyle>
+            <a:lvl1pPr algn="l">
+              <a:defRPr sz="1200"/>
+            </a:lvl1pPr>
+          </a:lstStyle>
+          <a:p>
+            <a:endParaRPr lang="en-US"/>
+          </a:p>
+        </p:txBody>
+      </p:sp>
+      <p:sp>
+        <p:nvSpPr>
+          <p:cNvPr id="7" name="Slide Number Placeholder 6"/>
+          <p:cNvSpPr>
+            <a:spLocks noGrp="1"/>
+          </p:cNvSpPr>
+          <p:nvPr>
+            <p:ph type="sldNum" sz="quarter" idx="5"/>
+          </p:nvPr>
+        </p:nvSpPr>
+        <p:spPr>
+          <a:xfrm>
+            <a:off x="3884613" y="8685213"/>
+            <a:ext cx="2971800" cy="457200"/>
+          </a:xfrm>
+          <a:prstGeom prst="rect">
+            <a:avLst/>
+          </a:prstGeom>
+        </p:spPr>
+        <p:txBody>
+          <a:bodyPr vert="horz" lIns="91440" tIns="45720" rIns="91440" bIns="45720" rtlCol="0" anchor="b"/>
+          <a:lstStyle>
+            <a:lvl1pPr algn="r">
+              <a:defRPr sz="1200"/>
+            </a:lvl1pPr>
+          </a:lstStyle>
+          <a:p>
+            <a:fld id="{BB5E49A5-4136-284D-997B-48E1D791AD67}" type="slidenum">
+              <a:rPr lang="en-US" smtClean="0"/>
+              <a:t>‹#›</a:t>
+            </a:fld>
+            <a:endParaRPr lang="en-US"/>
+          </a:p>
+        </p:txBody>
+      </p:sp>
+    </p:spTree>
+    <p:extLst>
+      <p:ext uri="{BB962C8B-B14F-4D97-AF65-F5344CB8AC3E}">
+        <p14:creationId xmlns:p14="http://schemas.microsoft.com/office/powerpoint/2010/main" val="2623252185"/>
+      </p:ext>
+    </p:extLst>
+  </p:cSld>
+  <p:clrMap bg1="lt1" tx1="dk1" bg2="lt2" tx2="dk2" accent1="accent1" accent2="accent2" accent3="accent3" accent4="accent4" accent5="accent5" accent6="accent6" hlink="hlink" folHlink="folHlink"/>
+  <p:notesStyle>
+    <a:lvl1pPr marL="0" algn="l" defTabSz="457200" rtl="0" eaLnBrk="1" latinLnBrk="0" hangingPunct="1">
+      <a:defRPr sz="1200" kern="1200">
+        <a:solidFill>
+          <a:schemeClr val="tx1"/>
+        </a:solidFill>
+        <a:latin typeface="+mn-lt"/>
+        <a:ea typeface="+mn-ea"/>
+        <a:cs typeface="+mn-cs"/>
+      </a:defRPr>
+    </a:lvl1pPr>
+    <a:lvl2pPr marL="457200" algn="l" defTabSz="457200" rtl="0" eaLnBrk="1" latinLnBrk="0" hangingPunct="1">
+      <a:defRPr sz="1200" kern="1200">
+        <a:solidFill>
+          <a:schemeClr val="tx1"/>
+        </a:solidFill>
+        <a:latin typeface="+mn-lt"/>
+        <a:ea typeface="+mn-ea"/>
+        <a:cs typeface="+mn-cs"/>
+      </a:defRPr>
+    </a:lvl2pPr>
+    <a:lvl3pPr marL="914400" algn="l" defTabSz="457200" rtl="0" eaLnBrk="1" latinLnBrk="0" hangingPunct="1">
+      <a:defRPr sz="1200" kern="1200">
+        <a:solidFill>
+          <a:schemeClr val="tx1"/>
+        </a:solidFill>
+        <a:latin typeface="+mn-lt"/>
+        <a:ea typeface="+mn-ea"/>
+        <a:cs typeface="+mn-cs"/>
+      </a:defRPr>
+    </a:lvl3pPr>
+    <a:lvl4pPr marL="1371600" algn="l" defTabSz="457200" rtl="0" eaLnBrk="1" latinLnBrk="0" hangingPunct="1">
+      <a:defRPr sz="1200" kern="1200">
+        <a:solidFill>
+          <a:schemeClr val="tx1"/>
+        </a:solidFill>
+        <a:latin typeface="+mn-lt"/>
+        <a:ea typeface="+mn-ea"/>
+        <a:cs typeface="+mn-cs"/>
+      </a:defRPr>
+    </a:lvl4pPr>
+    <a:lvl5pPr marL="1828800" algn="l" defTabSz="457200" rtl="0" eaLnBrk="1" latinLnBrk="0" hangingPunct="1">
+      <a:defRPr sz="1200" kern="1200">
+        <a:solidFill>
+          <a:schemeClr val="tx1"/>
+        </a:solidFill>
+        <a:latin typeface="+mn-lt"/>
+        <a:ea typeface="+mn-ea"/>
+        <a:cs typeface="+mn-cs"/>
+      </a:defRPr>
+    </a:lvl5pPr>
+    <a:lvl6pPr marL="2286000" algn="l" defTabSz="457200" rtl="0" eaLnBrk="1" latinLnBrk="0" hangingPunct="1">
+      <a:defRPr sz="1200" kern="1200">
+        <a:solidFill>
+          <a:schemeClr val="tx1"/>
+        </a:solidFill>
+        <a:latin typeface="+mn-lt"/>
+        <a:ea typeface="+mn-ea"/>
+        <a:cs typeface="+mn-cs"/>
+      </a:defRPr>
+    </a:lvl6pPr>
+    <a:lvl7pPr marL="2743200" algn="l" defTabSz="457200" rtl="0" eaLnBrk="1" latinLnBrk="0" hangingPunct="1">
+      <a:defRPr sz="1200" kern="1200">
+        <a:solidFill>
+          <a:schemeClr val="tx1"/>
+        </a:solidFill>
+        <a:latin typeface="+mn-lt"/>
+        <a:ea typeface="+mn-ea"/>
+        <a:cs typeface="+mn-cs"/>
+      </a:defRPr>
+    </a:lvl7pPr>
+    <a:lvl8pPr marL="3200400" algn="l" defTabSz="457200" rtl="0" eaLnBrk="1" latinLnBrk="0" hangingPunct="1">
+      <a:defRPr sz="1200" kern="1200">
+        <a:solidFill>
+          <a:schemeClr val="tx1"/>
+        </a:solidFill>
+        <a:latin typeface="+mn-lt"/>
+        <a:ea typeface="+mn-ea"/>
+        <a:cs typeface="+mn-cs"/>
+      </a:defRPr>
+    </a:lvl8pPr>
+    <a:lvl9pPr marL="3657600" algn="l" defTabSz="457200" rtl="0" eaLnBrk="1" latinLnBrk="0" hangingPunct="1">
+      <a:defRPr sz="1200" kern="1200">
+        <a:solidFill>
+          <a:schemeClr val="tx1"/>
+        </a:solidFill>
+        <a:latin typeface="+mn-lt"/>
+        <a:ea typeface="+mn-ea"/>
+        <a:cs typeface="+mn-cs"/>
+      </a:defRPr>
+    </a:lvl9pPr>
+  </p:notesStyle>
+</p:notesMaster>
+</file>
+
+<file path=ppt/notesSlides/notesSlide1.xml><?xml version="1.0" encoding="utf-8"?>
+<p:notes xmlns:a="http://schemas.openxmlformats.org/drawingml/2006/main" xmlns:p="http://schemas.openxmlformats.org/presentationml/2006/main" xmlns:r="http://schemas.openxmlformats.org/officeDocument/2006/relationships">
+  <p:cSld>
+    <p:spTree>
+      <p:nvGrpSpPr>
+        <p:cNvPr id="1" name=""/>
+        <p:cNvGrpSpPr/>
+        <p:nvPr/>
+      </p:nvGrpSpPr>
+      <p:grpSpPr>
+        <a:xfrm>
+          <a:off x="0" y="0"/>
+          <a:ext cx="0" cy="0"/>
+          <a:chOff x="0" y="0"/>
+          <a:chExt cx="0" cy="0"/>
+        </a:xfrm>
+      </p:grpSpPr>
+      <p:sp>
+        <p:nvSpPr>
+          <p:cNvPr id="2" name="Slide Image Placeholder 1"/>
+          <p:cNvSpPr>
+            <a:spLocks noGrp="1"/>
+          </p:cNvSpPr>
+          <p:nvPr>
+            <p:ph type="sldImg" idx="2"/>
+          </p:nvPr>
+        </p:nvSpPr>
+        <p:spPr/>
+      </p:sp>
+      <p:sp>
+        <p:nvSpPr>
+          <p:cNvPr id="3" name="Notes Placeholder 2"/>
+          <p:cNvSpPr>
+            <a:spLocks noGrp="1"/>
+          </p:cNvSpPr>
+          <p:nvPr>
+            <p:ph type="body" idx="3" sz="quarter"/>
+          </p:nvPr>
+        </p:nvSpPr>
+        <p:spPr/>
+        <p:txBody>
+          <a:bodyPr/>
+          <a:lstStyle/>
+          <a:p>
+            <a:r>
+              <a:t>Objetivo docente: Planificar datos y comprender variable, tipo, nombre, declaración, inicialización y asignación.</a:t>
+            </a:r>
+          </a:p>
+          <a:p>
+            <a:r>
+              <a:t>Diapositiva 1 de 9: Variables: guardar datos con nombre y tipo</a:t>
+            </a:r>
+          </a:p>
+          <a:p>
+            <a:r>
+              <a:t>Fase HEXA: Planificar — organizar el trabajo</a:t>
+            </a:r>
+          </a:p>
+          <a:p>
+            <a:r>
+              <a:t>Presenta el producto y anticipa la evidencia: Quede evidencia individual.</a:t>
+            </a:r>
+          </a:p>
+          <a:p>
+            <a:r>
+              <a:t>Secuencia docente:</a:t>
+            </a:r>
+          </a:p>
+          <a:p>
+            <a:r>
+              <a:t>- 00:00–00:05 / D1: PLANIFICAR: Provoca la necesidad de almacenar datos.</a:t>
+            </a:r>
+          </a:p>
+          <a:p>
+            <a:r>
+              <a:t>- 00:05–00:11 / D2: PÍLDORA DOCENTE 1/4: Usa la metáfora de casilla etiquetada y conecta con RAM de Tema 1 sin profundizar en binario.</a:t>
+            </a:r>
+          </a:p>
+          <a:p>
+            <a:r>
+              <a:t>- 00:11–00:18 / D3: PÍLDORA DOCENTE 2/4: Presenta el mapa completo; para uso inmediato céntrate en int, double, boolean, char y String.</a:t>
+            </a:r>
+          </a:p>
+          <a:p>
+            <a:r>
+              <a:t>- 00:18–00:23 / D4: MICROPRÁCTICA: Pide respuesta y razón, no solo el nombre del tipo.</a:t>
+            </a:r>
+          </a:p>
+          <a:p>
+            <a:r>
+              <a:t>- 00:23–00:28 / D5: PÍLDORA DOCENTE 3/4: Conecta con identificadores de S208 y legibilidad.</a:t>
+            </a:r>
+          </a:p>
+          <a:p>
+            <a:r>
+              <a:t>- 00:28–00:33 / D6: PÍLDORA DOCENTE 4/4: Explica que el tipo se escribe al declarar, no cada vez que cambia el valor. Diferencia = de igualdad matemática.</a:t>
+            </a:r>
+          </a:p>
+          <a:p>
+            <a:r>
+              <a:t>- 00:33–00:36 / D7: PLANIFICACIÓN: Modela una fila y detente.</a:t>
+            </a:r>
+          </a:p>
+          <a:p>
+            <a:r>
+              <a:t>- 00:36–00:42 / D8: ACTIVIDAD: Circula y pregunta qué línea prueba el cambio.</a:t>
+            </a:r>
+          </a:p>
+          <a:p>
+            <a:r>
+              <a:t>- 00:42–00:45 / D9: CIERRE: Pregunta sobre su propio código.</a:t>
+            </a:r>
+          </a:p>
+          <a:p>
+            <a:r>
+              <a:t>Claves docentes:</a:t>
+            </a:r>
+          </a:p>
+          <a:p>
+            <a:r>
+              <a:t>- PÍLDORA DOCENTE 1/4: Usa la metáfora de casilla etiquetada y conecta con RAM de Tema 1 sin profundizar en binario, PÍLDORA DOCENTE 2/4: Presenta el mapa completo; para uso inmediato céntrate en int, double, boolean, char y String, PÍLDORA DOCENTE 3/4: Conecta con identificadores de S208 y legibilidad.</a:t>
+            </a:r>
+          </a:p>
+          <a:p>
+            <a:r>
+              <a:t>- PÍLDORA DOCENTE 4/4: Explica que el tipo se escribe al declarar, no cada vez que cambia el valor. Diferencia = de igualdad matemática.</a:t>
+            </a:r>
+          </a:p>
+          <a:p>
+            <a:r>
+              <a:t>Fuente docente: /mnt/compartido/Programación-26-27/Minijarvis/02-PROFESORADO/02-SESIONES/h1/S210-variables-docente.md</a:t>
+            </a:r>
+          </a:p>
+        </p:txBody>
+      </p:sp>
+      <p:sp>
+        <p:nvSpPr>
+          <p:cNvPr id="4" name="Slide Number Placeholder 3"/>
+          <p:cNvSpPr>
+            <a:spLocks noGrp="1"/>
+          </p:cNvSpPr>
+          <p:nvPr>
+            <p:ph type="sldNum" idx="5" sz="quarter"/>
+          </p:nvPr>
+        </p:nvSpPr>
+        <p:spPr/>
+      </p:sp>
+    </p:spTree>
+  </p:cSld>
+  <p:clrMapOvr>
+    <a:masterClrMapping/>
+  </p:clrMapOvr>
+</p:notes>
+</file>
+
+<file path=ppt/notesSlides/notesSlide2.xml><?xml version="1.0" encoding="utf-8"?>
+<p:notes xmlns:a="http://schemas.openxmlformats.org/drawingml/2006/main" xmlns:p="http://schemas.openxmlformats.org/presentationml/2006/main" xmlns:r="http://schemas.openxmlformats.org/officeDocument/2006/relationships">
+  <p:cSld>
+    <p:spTree>
+      <p:nvGrpSpPr>
+        <p:cNvPr id="1" name=""/>
+        <p:cNvGrpSpPr/>
+        <p:nvPr/>
+      </p:nvGrpSpPr>
+      <p:grpSpPr>
+        <a:xfrm>
+          <a:off x="0" y="0"/>
+          <a:ext cx="0" cy="0"/>
+          <a:chOff x="0" y="0"/>
+          <a:chExt cx="0" cy="0"/>
+        </a:xfrm>
+      </p:grpSpPr>
+      <p:sp>
+        <p:nvSpPr>
+          <p:cNvPr id="2" name="Slide Image Placeholder 1"/>
+          <p:cNvSpPr>
+            <a:spLocks noGrp="1"/>
+          </p:cNvSpPr>
+          <p:nvPr>
+            <p:ph type="sldImg" idx="2"/>
+          </p:nvPr>
+        </p:nvSpPr>
+        <p:spPr/>
+      </p:sp>
+      <p:sp>
+        <p:nvSpPr>
+          <p:cNvPr id="3" name="Notes Placeholder 2"/>
+          <p:cNvSpPr>
+            <a:spLocks noGrp="1"/>
+          </p:cNvSpPr>
+          <p:nvPr>
+            <p:ph type="body" idx="3" sz="quarter"/>
+          </p:nvPr>
+        </p:nvSpPr>
+        <p:spPr/>
+        <p:txBody>
+          <a:bodyPr/>
+          <a:lstStyle/>
+          <a:p>
+            <a:r>
+              <a:t>Objetivo docente: Planificar datos y comprender variable, tipo, nombre, declaración, inicialización y asignación.</a:t>
+            </a:r>
+          </a:p>
+          <a:p>
+            <a:r>
+              <a:t>Diapositiva 2 de 9: Qué debe conseguirse</a:t>
+            </a:r>
+          </a:p>
+          <a:p>
+            <a:r>
+              <a:t>Fase HEXA: Planificar — organizar el trabajo</a:t>
+            </a:r>
+          </a:p>
+          <a:p>
+            <a:r>
+              <a:t>- Objetivo: Planificar datos y comprender variable, tipo, nombre, declaración, inicialización y asignación.</a:t>
+            </a:r>
+          </a:p>
+          <a:p>
+            <a:r>
+              <a:t>- Al terminar: señala la evidencia, explica qué demuestra y reproduce la prueba.</a:t>
+            </a:r>
+          </a:p>
+          <a:p>
+            <a:r>
+              <a:t>Fuente docente: /mnt/compartido/Programación-26-27/Minijarvis/02-PROFESORADO/02-SESIONES/h1/S210-variables-docente.md</a:t>
+            </a:r>
+          </a:p>
+        </p:txBody>
+      </p:sp>
+      <p:sp>
+        <p:nvSpPr>
+          <p:cNvPr id="4" name="Slide Number Placeholder 3"/>
+          <p:cNvSpPr>
+            <a:spLocks noGrp="1"/>
+          </p:cNvSpPr>
+          <p:nvPr>
+            <p:ph type="sldNum" idx="5" sz="quarter"/>
+          </p:nvPr>
+        </p:nvSpPr>
+        <p:spPr/>
+      </p:sp>
+    </p:spTree>
+  </p:cSld>
+  <p:clrMapOvr>
+    <a:masterClrMapping/>
+  </p:clrMapOvr>
+</p:notes>
+</file>
+
+<file path=ppt/notesSlides/notesSlide3.xml><?xml version="1.0" encoding="utf-8"?>
+<p:notes xmlns:a="http://schemas.openxmlformats.org/drawingml/2006/main" xmlns:p="http://schemas.openxmlformats.org/presentationml/2006/main" xmlns:r="http://schemas.openxmlformats.org/officeDocument/2006/relationships">
+  <p:cSld>
+    <p:spTree>
+      <p:nvGrpSpPr>
+        <p:cNvPr id="1" name=""/>
+        <p:cNvGrpSpPr/>
+        <p:nvPr/>
+      </p:nvGrpSpPr>
+      <p:grpSpPr>
+        <a:xfrm>
+          <a:off x="0" y="0"/>
+          <a:ext cx="0" cy="0"/>
+          <a:chOff x="0" y="0"/>
+          <a:chExt cx="0" cy="0"/>
+        </a:xfrm>
+      </p:grpSpPr>
+      <p:sp>
+        <p:nvSpPr>
+          <p:cNvPr id="2" name="Slide Image Placeholder 1"/>
+          <p:cNvSpPr>
+            <a:spLocks noGrp="1"/>
+          </p:cNvSpPr>
+          <p:nvPr>
+            <p:ph type="sldImg" idx="2"/>
+          </p:nvPr>
+        </p:nvSpPr>
+        <p:spPr/>
+      </p:sp>
+      <p:sp>
+        <p:nvSpPr>
+          <p:cNvPr id="3" name="Notes Placeholder 2"/>
+          <p:cNvSpPr>
+            <a:spLocks noGrp="1"/>
+          </p:cNvSpPr>
+          <p:nvPr>
+            <p:ph type="body" idx="3" sz="quarter"/>
+          </p:nvPr>
+        </p:nvSpPr>
+        <p:spPr/>
+        <p:txBody>
+          <a:bodyPr/>
+          <a:lstStyle/>
+          <a:p>
+            <a:r>
+              <a:t>Objetivo docente: Planificar datos y comprender variable, tipo, nombre, declaración, inicialización y asignación.</a:t>
+            </a:r>
+          </a:p>
+          <a:p>
+            <a:r>
+              <a:t>Diapositiva 3 de 9: Ejemplo o demostración · 1</a:t>
+            </a:r>
+          </a:p>
+          <a:p>
+            <a:r>
+              <a:t>Fase HEXA: Planificar — organizar el trabajo</a:t>
+            </a:r>
+          </a:p>
+          <a:p>
+            <a:r>
+              <a:t>Modela el ejemplo sin resolver la actividad completa; pide una predicción antes de ejecutar.</a:t>
+            </a:r>
+          </a:p>
+          <a:p>
+            <a:r>
+              <a:t>- D1 · Un dato repetido, un problema — Si el curso aparece en tres mensajes y después cambia el año, ¿cuántos sitios tendrías que modificar?</a:t>
+            </a:r>
+          </a:p>
+          <a:p>
+            <a:r>
+              <a:t>- D2 · Variable = dato + nombre + memoria — IDEA: Una variable es una zona de memoria con un nombre que guarda un dato. \| EJEMPLO: int studyHours = 4;</a:t>
+            </a:r>
+          </a:p>
+          <a:p>
+            <a:r>
+              <a:t>- String userName = "Laura";</a:t>
+            </a:r>
+          </a:p>
+          <a:p>
+            <a:r>
+              <a:t>- D3 · Mapa de tipos que aparecen en Tema 1 — ENTEROS: byte / short / int / long \| DECIMALES: float / double \| OTROS: char / boolean / String</a:t>
+            </a:r>
+          </a:p>
+          <a:p>
+            <a:r>
+              <a:t>- D4 · Elige el tipo adecuado — Nombre de usuario → ?</a:t>
+            </a:r>
+          </a:p>
+          <a:p>
+            <a:r>
+              <a:t>Fuente docente: /mnt/compartido/Programación-26-27/Minijarvis/02-PROFESORADO/02-SESIONES/h1/S210-variables-docente.md</a:t>
+            </a:r>
+          </a:p>
+        </p:txBody>
+      </p:sp>
+      <p:sp>
+        <p:nvSpPr>
+          <p:cNvPr id="4" name="Slide Number Placeholder 3"/>
+          <p:cNvSpPr>
+            <a:spLocks noGrp="1"/>
+          </p:cNvSpPr>
+          <p:nvPr>
+            <p:ph type="sldNum" idx="5" sz="quarter"/>
+          </p:nvPr>
+        </p:nvSpPr>
+        <p:spPr/>
+      </p:sp>
+    </p:spTree>
+  </p:cSld>
+  <p:clrMapOvr>
+    <a:masterClrMapping/>
+  </p:clrMapOvr>
+</p:notes>
+</file>
+
+<file path=ppt/notesSlides/notesSlide4.xml><?xml version="1.0" encoding="utf-8"?>
+<p:notes xmlns:a="http://schemas.openxmlformats.org/drawingml/2006/main" xmlns:p="http://schemas.openxmlformats.org/presentationml/2006/main" xmlns:r="http://schemas.openxmlformats.org/officeDocument/2006/relationships">
+  <p:cSld>
+    <p:spTree>
+      <p:nvGrpSpPr>
+        <p:cNvPr id="1" name=""/>
+        <p:cNvGrpSpPr/>
+        <p:nvPr/>
+      </p:nvGrpSpPr>
+      <p:grpSpPr>
+        <a:xfrm>
+          <a:off x="0" y="0"/>
+          <a:ext cx="0" cy="0"/>
+          <a:chOff x="0" y="0"/>
+          <a:chExt cx="0" cy="0"/>
+        </a:xfrm>
+      </p:grpSpPr>
+      <p:sp>
+        <p:nvSpPr>
+          <p:cNvPr id="2" name="Slide Image Placeholder 1"/>
+          <p:cNvSpPr>
+            <a:spLocks noGrp="1"/>
+          </p:cNvSpPr>
+          <p:nvPr>
+            <p:ph type="sldImg" idx="2"/>
+          </p:nvPr>
+        </p:nvSpPr>
+        <p:spPr/>
+      </p:sp>
+      <p:sp>
+        <p:nvSpPr>
+          <p:cNvPr id="3" name="Notes Placeholder 2"/>
+          <p:cNvSpPr>
+            <a:spLocks noGrp="1"/>
+          </p:cNvSpPr>
+          <p:nvPr>
+            <p:ph type="body" idx="3" sz="quarter"/>
+          </p:nvPr>
+        </p:nvSpPr>
+        <p:spPr/>
+        <p:txBody>
+          <a:bodyPr/>
+          <a:lstStyle/>
+          <a:p>
+            <a:r>
+              <a:t>Objetivo docente: Planificar datos y comprender variable, tipo, nombre, declaración, inicialización y asignación.</a:t>
+            </a:r>
+          </a:p>
+          <a:p>
+            <a:r>
+              <a:t>Diapositiva 4 de 9: Ejemplo o demostración · 2</a:t>
+            </a:r>
+          </a:p>
+          <a:p>
+            <a:r>
+              <a:t>Fase HEXA: Planificar — organizar el trabajo</a:t>
+            </a:r>
+          </a:p>
+          <a:p>
+            <a:r>
+              <a:t>Modela el ejemplo sin resolver la actividad completa; pide una predicción antes de ejecutar.</a:t>
+            </a:r>
+          </a:p>
+          <a:p>
+            <a:r>
+              <a:t>- Horas de estudio → ?</a:t>
+            </a:r>
+          </a:p>
+          <a:p>
+            <a:r>
+              <a:t>- Nota media → ?</a:t>
+            </a:r>
+          </a:p>
+          <a:p>
+            <a:r>
+              <a:t>- Objetivo alcanzado → ?</a:t>
+            </a:r>
+          </a:p>
+          <a:p>
+            <a:r>
+              <a:t>Fuente docente: /mnt/compartido/Programación-26-27/Minijarvis/02-PROFESORADO/02-SESIONES/h1/S210-variables-docente.md</a:t>
+            </a:r>
+          </a:p>
+        </p:txBody>
+      </p:sp>
+      <p:sp>
+        <p:nvSpPr>
+          <p:cNvPr id="4" name="Slide Number Placeholder 3"/>
+          <p:cNvSpPr>
+            <a:spLocks noGrp="1"/>
+          </p:cNvSpPr>
+          <p:nvPr>
+            <p:ph type="sldNum" idx="5" sz="quarter"/>
+          </p:nvPr>
+        </p:nvSpPr>
+        <p:spPr/>
+      </p:sp>
+    </p:spTree>
+  </p:cSld>
+  <p:clrMapOvr>
+    <a:masterClrMapping/>
+  </p:clrMapOvr>
+</p:notes>
+</file>
+
+<file path=ppt/notesSlides/notesSlide5.xml><?xml version="1.0" encoding="utf-8"?>
+<p:notes xmlns:a="http://schemas.openxmlformats.org/drawingml/2006/main" xmlns:p="http://schemas.openxmlformats.org/presentationml/2006/main" xmlns:r="http://schemas.openxmlformats.org/officeDocument/2006/relationships">
+  <p:cSld>
+    <p:spTree>
+      <p:nvGrpSpPr>
+        <p:cNvPr id="1" name=""/>
+        <p:cNvGrpSpPr/>
+        <p:nvPr/>
+      </p:nvGrpSpPr>
+      <p:grpSpPr>
+        <a:xfrm>
+          <a:off x="0" y="0"/>
+          <a:ext cx="0" cy="0"/>
+          <a:chOff x="0" y="0"/>
+          <a:chExt cx="0" cy="0"/>
+        </a:xfrm>
+      </p:grpSpPr>
+      <p:sp>
+        <p:nvSpPr>
+          <p:cNvPr id="2" name="Slide Image Placeholder 1"/>
+          <p:cNvSpPr>
+            <a:spLocks noGrp="1"/>
+          </p:cNvSpPr>
+          <p:nvPr>
+            <p:ph type="sldImg" idx="2"/>
+          </p:nvPr>
+        </p:nvSpPr>
+        <p:spPr/>
+      </p:sp>
+      <p:sp>
+        <p:nvSpPr>
+          <p:cNvPr id="3" name="Notes Placeholder 2"/>
+          <p:cNvSpPr>
+            <a:spLocks noGrp="1"/>
+          </p:cNvSpPr>
+          <p:nvPr>
+            <p:ph type="body" idx="3" sz="quarter"/>
+          </p:nvPr>
+        </p:nvSpPr>
+        <p:spPr/>
+        <p:txBody>
+          <a:bodyPr/>
+          <a:lstStyle/>
+          <a:p>
+            <a:r>
+              <a:t>Objetivo docente: Planificar datos y comprender variable, tipo, nombre, declaración, inicialización y asignación.</a:t>
+            </a:r>
+          </a:p>
+          <a:p>
+            <a:r>
+              <a:t>Diapositiva 5 de 9: Actividad central · 1</a:t>
+            </a:r>
+          </a:p>
+          <a:p>
+            <a:r>
+              <a:t>Fase HEXA: Planificar — organizar el trabajo</a:t>
+            </a:r>
+          </a:p>
+          <a:p>
+            <a:r>
+              <a:t>Entrega la consigna, observa decisiones y pide una prueba reproducible.</a:t>
+            </a:r>
+          </a:p>
+          <a:p>
+            <a:r>
+              <a:t>- Predice antes de ejecutar cuando haya código.</a:t>
+            </a:r>
+          </a:p>
+          <a:p>
+            <a:r>
+              <a:t>- Realiza la micropráctica o modificación prevista.</a:t>
+            </a:r>
+          </a:p>
+          <a:p>
+            <a:r>
+              <a:t>- Prueba el caso normal y, cuando exista una decisión o conversión, también el caso alternativo o erróneo.</a:t>
+            </a:r>
+          </a:p>
+          <a:p>
+            <a:r>
+              <a:t>- Conserva el código o resultado en el repositorio o espacio indicado.</a:t>
+            </a:r>
+          </a:p>
+          <a:p>
+            <a:r>
+              <a:t>Fuente docente: /mnt/compartido/Programación-26-27/Minijarvis/02-PROFESORADO/02-SESIONES/h1/S210-variables-docente.md</a:t>
+            </a:r>
+          </a:p>
+        </p:txBody>
+      </p:sp>
+      <p:sp>
+        <p:nvSpPr>
+          <p:cNvPr id="4" name="Slide Number Placeholder 3"/>
+          <p:cNvSpPr>
+            <a:spLocks noGrp="1"/>
+          </p:cNvSpPr>
+          <p:nvPr>
+            <p:ph type="sldNum" idx="5" sz="quarter"/>
+          </p:nvPr>
+        </p:nvSpPr>
+        <p:spPr/>
+      </p:sp>
+    </p:spTree>
+  </p:cSld>
+  <p:clrMapOvr>
+    <a:masterClrMapping/>
+  </p:clrMapOvr>
+</p:notes>
+</file>
+
+<file path=ppt/notesSlides/notesSlide6.xml><?xml version="1.0" encoding="utf-8"?>
+<p:notes xmlns:a="http://schemas.openxmlformats.org/drawingml/2006/main" xmlns:p="http://schemas.openxmlformats.org/presentationml/2006/main" xmlns:r="http://schemas.openxmlformats.org/officeDocument/2006/relationships">
+  <p:cSld>
+    <p:spTree>
+      <p:nvGrpSpPr>
+        <p:cNvPr id="1" name=""/>
+        <p:cNvGrpSpPr/>
+        <p:nvPr/>
+      </p:nvGrpSpPr>
+      <p:grpSpPr>
+        <a:xfrm>
+          <a:off x="0" y="0"/>
+          <a:ext cx="0" cy="0"/>
+          <a:chOff x="0" y="0"/>
+          <a:chExt cx="0" cy="0"/>
+        </a:xfrm>
+      </p:grpSpPr>
+      <p:sp>
+        <p:nvSpPr>
+          <p:cNvPr id="2" name="Slide Image Placeholder 1"/>
+          <p:cNvSpPr>
+            <a:spLocks noGrp="1"/>
+          </p:cNvSpPr>
+          <p:nvPr>
+            <p:ph type="sldImg" idx="2"/>
+          </p:nvPr>
+        </p:nvSpPr>
+        <p:spPr/>
+      </p:sp>
+      <p:sp>
+        <p:nvSpPr>
+          <p:cNvPr id="3" name="Notes Placeholder 2"/>
+          <p:cNvSpPr>
+            <a:spLocks noGrp="1"/>
+          </p:cNvSpPr>
+          <p:nvPr>
+            <p:ph type="body" idx="3" sz="quarter"/>
+          </p:nvPr>
+        </p:nvSpPr>
+        <p:spPr/>
+        <p:txBody>
+          <a:bodyPr/>
+          <a:lstStyle/>
+          <a:p>
+            <a:r>
+              <a:t>Objetivo docente: Planificar datos y comprender variable, tipo, nombre, declaración, inicialización y asignación.</a:t>
+            </a:r>
+          </a:p>
+          <a:p>
+            <a:r>
+              <a:t>Diapositiva 6 de 9: Actividad central · 2</a:t>
+            </a:r>
+          </a:p>
+          <a:p>
+            <a:r>
+              <a:t>Fase HEXA: Planificar — organizar el trabajo</a:t>
+            </a:r>
+          </a:p>
+          <a:p>
+            <a:r>
+              <a:t>Entrega la consigna, observa decisiones y pide una prueba reproducible.</a:t>
+            </a:r>
+          </a:p>
+          <a:p>
+            <a:r>
+              <a:t>- Registra una sola entrada en el diario individual; no crees un informe paralelo.</a:t>
+            </a:r>
+          </a:p>
+          <a:p>
+            <a:r>
+              <a:t>- ¿Qué puedes señalar, explicar y probar al terminar este checkpoint?</a:t>
+            </a:r>
+          </a:p>
+          <a:p>
+            <a:r>
+              <a:t>Fuente docente: /mnt/compartido/Programación-26-27/Minijarvis/02-PROFESORADO/02-SESIONES/h1/S210-variables-docente.md</a:t>
+            </a:r>
+          </a:p>
+        </p:txBody>
+      </p:sp>
+      <p:sp>
+        <p:nvSpPr>
+          <p:cNvPr id="4" name="Slide Number Placeholder 3"/>
+          <p:cNvSpPr>
+            <a:spLocks noGrp="1"/>
+          </p:cNvSpPr>
+          <p:nvPr>
+            <p:ph type="sldNum" idx="5" sz="quarter"/>
+          </p:nvPr>
+        </p:nvSpPr>
+        <p:spPr/>
+      </p:sp>
+    </p:spTree>
+  </p:cSld>
+  <p:clrMapOvr>
+    <a:masterClrMapping/>
+  </p:clrMapOvr>
+</p:notes>
+</file>
+
+<file path=ppt/notesSlides/notesSlide7.xml><?xml version="1.0" encoding="utf-8"?>
+<p:notes xmlns:a="http://schemas.openxmlformats.org/drawingml/2006/main" xmlns:p="http://schemas.openxmlformats.org/presentationml/2006/main" xmlns:r="http://schemas.openxmlformats.org/officeDocument/2006/relationships">
+  <p:cSld>
+    <p:spTree>
+      <p:nvGrpSpPr>
+        <p:cNvPr id="1" name=""/>
+        <p:cNvGrpSpPr/>
+        <p:nvPr/>
+      </p:nvGrpSpPr>
+      <p:grpSpPr>
+        <a:xfrm>
+          <a:off x="0" y="0"/>
+          <a:ext cx="0" cy="0"/>
+          <a:chOff x="0" y="0"/>
+          <a:chExt cx="0" cy="0"/>
+        </a:xfrm>
+      </p:grpSpPr>
+      <p:sp>
+        <p:nvSpPr>
+          <p:cNvPr id="2" name="Slide Image Placeholder 1"/>
+          <p:cNvSpPr>
+            <a:spLocks noGrp="1"/>
+          </p:cNvSpPr>
+          <p:nvPr>
+            <p:ph type="sldImg" idx="2"/>
+          </p:nvPr>
+        </p:nvSpPr>
+        <p:spPr/>
+      </p:sp>
+      <p:sp>
+        <p:nvSpPr>
+          <p:cNvPr id="3" name="Notes Placeholder 2"/>
+          <p:cNvSpPr>
+            <a:spLocks noGrp="1"/>
+          </p:cNvSpPr>
+          <p:nvPr>
+            <p:ph type="body" idx="3" sz="quarter"/>
+          </p:nvPr>
+        </p:nvSpPr>
+        <p:spPr/>
+        <p:txBody>
+          <a:bodyPr/>
+          <a:lstStyle/>
+          <a:p>
+            <a:r>
+              <a:t>Objetivo docente: Planificar datos y comprender variable, tipo, nombre, declaración, inicialización y asignación.</a:t>
+            </a:r>
+          </a:p>
+          <a:p>
+            <a:r>
+              <a:t>Diapositiva 7 de 9: Evidencia y comprobación</a:t>
+            </a:r>
+          </a:p>
+          <a:p>
+            <a:r>
+              <a:t>Fase HEXA: Planificar — organizar el trabajo</a:t>
+            </a:r>
+          </a:p>
+          <a:p>
+            <a:r>
+              <a:t>Comprueba la evidencia en su fuente canónica: Quede evidencia individual.</a:t>
+            </a:r>
+          </a:p>
+          <a:p>
+            <a:r>
+              <a:t>- conserva el código o la prueba en el lugar indicado por la sesión;</a:t>
+            </a:r>
+          </a:p>
+          <a:p>
+            <a:r>
+              <a:t>- añade una sola entrada al diario individual con prueba, bloqueo y siguiente paso;</a:t>
+            </a:r>
+          </a:p>
+          <a:p>
+            <a:r>
+              <a:t>- no copies la misma reflexión en otro documento; el Site personal seleccionará evidencias al cerrar H1.</a:t>
+            </a:r>
+          </a:p>
+          <a:p>
+            <a:r>
+              <a:t>Fuente docente: /mnt/compartido/Programación-26-27/Minijarvis/02-PROFESORADO/02-SESIONES/h1/S210-variables-docente.md</a:t>
+            </a:r>
+          </a:p>
+        </p:txBody>
+      </p:sp>
+      <p:sp>
+        <p:nvSpPr>
+          <p:cNvPr id="4" name="Slide Number Placeholder 3"/>
+          <p:cNvSpPr>
+            <a:spLocks noGrp="1"/>
+          </p:cNvSpPr>
+          <p:nvPr>
+            <p:ph type="sldNum" idx="5" sz="quarter"/>
+          </p:nvPr>
+        </p:nvSpPr>
+        <p:spPr/>
+      </p:sp>
+    </p:spTree>
+  </p:cSld>
+  <p:clrMapOvr>
+    <a:masterClrMapping/>
+  </p:clrMapOvr>
+</p:notes>
+</file>
+
+<file path=ppt/notesSlides/notesSlide8.xml><?xml version="1.0" encoding="utf-8"?>
+<p:notes xmlns:a="http://schemas.openxmlformats.org/drawingml/2006/main" xmlns:p="http://schemas.openxmlformats.org/presentationml/2006/main" xmlns:r="http://schemas.openxmlformats.org/officeDocument/2006/relationships">
+  <p:cSld>
+    <p:spTree>
+      <p:nvGrpSpPr>
+        <p:cNvPr id="1" name=""/>
+        <p:cNvGrpSpPr/>
+        <p:nvPr/>
+      </p:nvGrpSpPr>
+      <p:grpSpPr>
+        <a:xfrm>
+          <a:off x="0" y="0"/>
+          <a:ext cx="0" cy="0"/>
+          <a:chOff x="0" y="0"/>
+          <a:chExt cx="0" cy="0"/>
+        </a:xfrm>
+      </p:grpSpPr>
+      <p:sp>
+        <p:nvSpPr>
+          <p:cNvPr id="2" name="Slide Image Placeholder 1"/>
+          <p:cNvSpPr>
+            <a:spLocks noGrp="1"/>
+          </p:cNvSpPr>
+          <p:nvPr>
+            <p:ph type="sldImg" idx="2"/>
+          </p:nvPr>
+        </p:nvSpPr>
+        <p:spPr/>
+      </p:sp>
+      <p:sp>
+        <p:nvSpPr>
+          <p:cNvPr id="3" name="Notes Placeholder 2"/>
+          <p:cNvSpPr>
+            <a:spLocks noGrp="1"/>
+          </p:cNvSpPr>
+          <p:nvPr>
+            <p:ph type="body" idx="3" sz="quarter"/>
+          </p:nvPr>
+        </p:nvSpPr>
+        <p:spPr/>
+        <p:txBody>
+          <a:bodyPr/>
+          <a:lstStyle/>
+          <a:p>
+            <a:r>
+              <a:t>Objetivo docente: Planificar datos y comprender variable, tipo, nombre, declaración, inicialización y asignación.</a:t>
+            </a:r>
+          </a:p>
+          <a:p>
+            <a:r>
+              <a:t>Diapositiva 8 de 9: Seguridad y uso responsable</a:t>
+            </a:r>
+          </a:p>
+          <a:p>
+            <a:r>
+              <a:t>Fase HEXA: Planificar — organizar el trabajo</a:t>
+            </a:r>
+          </a:p>
+          <a:p>
+            <a:r>
+              <a:t>Recuerda estos límites antes de que el alumnado comparta o publique:</a:t>
+            </a:r>
+          </a:p>
+          <a:p>
+            <a:r>
+              <a:t>- Usa datos ficticios y no publiques credenciales ni información personal.</a:t>
+            </a:r>
+          </a:p>
+          <a:p>
+            <a:r>
+              <a:t>- Si utilizas IA de forma sustantiva, registra propósito, propuesta, cambios propios y validación en el registro de IA del hito.</a:t>
+            </a:r>
+          </a:p>
+          <a:p>
+            <a:r>
+              <a:t>Fuente docente: /mnt/compartido/Programación-26-27/Minijarvis/02-PROFESORADO/02-SESIONES/h1/S210-variables-docente.md</a:t>
+            </a:r>
+          </a:p>
+        </p:txBody>
+      </p:sp>
+      <p:sp>
+        <p:nvSpPr>
+          <p:cNvPr id="4" name="Slide Number Placeholder 3"/>
+          <p:cNvSpPr>
+            <a:spLocks noGrp="1"/>
+          </p:cNvSpPr>
+          <p:nvPr>
+            <p:ph type="sldNum" idx="5" sz="quarter"/>
+          </p:nvPr>
+        </p:nvSpPr>
+        <p:spPr/>
+      </p:sp>
+    </p:spTree>
+  </p:cSld>
+  <p:clrMapOvr>
+    <a:masterClrMapping/>
+  </p:clrMapOvr>
+</p:notes>
+</file>
+
+<file path=ppt/notesSlides/notesSlide9.xml><?xml version="1.0" encoding="utf-8"?>
+<p:notes xmlns:a="http://schemas.openxmlformats.org/drawingml/2006/main" xmlns:p="http://schemas.openxmlformats.org/presentationml/2006/main" xmlns:r="http://schemas.openxmlformats.org/officeDocument/2006/relationships">
+  <p:cSld>
+    <p:spTree>
+      <p:nvGrpSpPr>
+        <p:cNvPr id="1" name=""/>
+        <p:cNvGrpSpPr/>
+        <p:nvPr/>
+      </p:nvGrpSpPr>
+      <p:grpSpPr>
+        <a:xfrm>
+          <a:off x="0" y="0"/>
+          <a:ext cx="0" cy="0"/>
+          <a:chOff x="0" y="0"/>
+          <a:chExt cx="0" cy="0"/>
+        </a:xfrm>
+      </p:grpSpPr>
+      <p:sp>
+        <p:nvSpPr>
+          <p:cNvPr id="2" name="Slide Image Placeholder 1"/>
+          <p:cNvSpPr>
+            <a:spLocks noGrp="1"/>
+          </p:cNvSpPr>
+          <p:nvPr>
+            <p:ph type="sldImg" idx="2"/>
+          </p:nvPr>
+        </p:nvSpPr>
+        <p:spPr/>
+      </p:sp>
+      <p:sp>
+        <p:nvSpPr>
+          <p:cNvPr id="3" name="Notes Placeholder 2"/>
+          <p:cNvSpPr>
+            <a:spLocks noGrp="1"/>
+          </p:cNvSpPr>
+          <p:nvPr>
+            <p:ph type="body" idx="3" sz="quarter"/>
+          </p:nvPr>
+        </p:nvSpPr>
+        <p:spPr/>
+        <p:txBody>
+          <a:bodyPr/>
+          <a:lstStyle/>
+          <a:p>
+            <a:r>
+              <a:t>Objetivo docente: Planificar datos y comprender variable, tipo, nombre, declaración, inicialización y asignación.</a:t>
+            </a:r>
+          </a:p>
+          <a:p>
+            <a:r>
+              <a:t>Diapositiva 9 de 9: Cierre y defensa</a:t>
+            </a:r>
+          </a:p>
+          <a:p>
+            <a:r>
+              <a:t>Fase HEXA: Planificar — organizar el trabajo</a:t>
+            </a:r>
+          </a:p>
+          <a:p>
+            <a:r>
+              <a:t>Cierra con explicación individual, prueba observable y siguiente paso concreto.</a:t>
+            </a:r>
+          </a:p>
+          <a:p>
+            <a:r>
+              <a:t>- ¿Qué puedes señalar, explicar y probar al terminar este checkpoint?</a:t>
+            </a:r>
+          </a:p>
+          <a:p>
+            <a:r>
+              <a:t>Fuente docente: /mnt/compartido/Programación-26-27/Minijarvis/02-PROFESORADO/02-SESIONES/h1/S210-variables-docente.md</a:t>
+            </a:r>
+          </a:p>
+        </p:txBody>
+      </p:sp>
+      <p:sp>
+        <p:nvSpPr>
+          <p:cNvPr id="4" name="Slide Number Placeholder 3"/>
+          <p:cNvSpPr>
+            <a:spLocks noGrp="1"/>
+          </p:cNvSpPr>
+          <p:nvPr>
+            <p:ph type="sldNum" idx="5" sz="quarter"/>
+          </p:nvPr>
+        </p:nvSpPr>
+        <p:spPr/>
+      </p:sp>
+    </p:spTree>
+  </p:cSld>
+  <p:clrMapOvr>
+    <a:masterClrMapping/>
+  </p:clrMapOvr>
+</p:notes>
 </file>
 
 <file path=ppt/slideLayouts/slideLayout1.xml><?xml version="1.0" encoding="utf-8"?>
@@ -3293,7 +4624,7 @@
               </a:defRPr>
             </a:pPr>
             <a:r>
-              <a:t>Variables</a:t>
+              <a:t>Variables: guardar datos con nombre y tipo</a:t>
             </a:r>
           </a:p>
         </p:txBody>
@@ -3329,7 +4660,7 @@
               </a:defRPr>
             </a:pPr>
             <a:r>
-              <a:t>H1 · 45 minutos</a:t>
+              <a:t>H1 — Primer MiniJarvis · Fase HEXA: Planificar — organizar el trabajo</a:t>
             </a:r>
           </a:p>
         </p:txBody>
@@ -3378,6 +4709,42 @@
         </p:nvSpPr>
         <p:spPr>
           <a:xfrm>
+            <a:off x="713232" y="4965192"/>
+            <a:ext cx="10241280" cy="594360"/>
+          </a:xfrm>
+          <a:prstGeom prst="rect">
+            <a:avLst/>
+          </a:prstGeom>
+          <a:noFill/>
+        </p:spPr>
+        <p:txBody>
+          <a:bodyPr wrap="square" lIns="45720" rIns="45720" tIns="36576" bIns="36576" anchor="t">
+            <a:spAutoFit/>
+          </a:bodyPr>
+          <a:lstStyle/>
+          <a:p>
+            <a:pPr algn="l">
+              <a:defRPr sz="1700" b="0">
+                <a:solidFill>
+                  <a:srgbClr val="D2D9E4"/>
+                </a:solidFill>
+                <a:latin typeface="Aptos"/>
+              </a:defRPr>
+            </a:pPr>
+            <a:r>
+              <a:t>Individual con contraste por parejas o equipo cuando la práctica lo requiera</a:t>
+            </a:r>
+          </a:p>
+        </p:txBody>
+      </p:sp>
+      <p:sp>
+        <p:nvSpPr>
+          <p:cNvPr id="10" name="TextBox 9"/>
+          <p:cNvSpPr txBox="1"/>
+          <p:nvPr/>
+        </p:nvSpPr>
+        <p:spPr>
+          <a:xfrm>
             <a:off x="713232" y="6272784"/>
             <a:ext cx="10607040" cy="201168"/>
           </a:xfrm>
@@ -3401,7 +4768,7 @@
               </a:defRPr>
             </a:pPr>
             <a:r>
-              <a:t>MINIJARVIS · PROGRAMACIÓN + ENTORNOS DE DESARROLLO</a:t>
+              <a:t>MINIJARVIS · PROGRAMACIÓN</a:t>
             </a:r>
           </a:p>
         </p:txBody>
@@ -3656,7 +5023,7 @@
               </a:defRPr>
             </a:pPr>
             <a:r>
-              <a:t>MiniJarvis · 1.º DAW · Sesión 210 · H1</a:t>
+              <a:t>MiniJarvis · 1.º DAW · Sesión 210 · H1 — Primer MiniJarvis</a:t>
             </a:r>
           </a:p>
         </p:txBody>
@@ -3737,7 +5104,7 @@
               </a:defRPr>
             </a:pPr>
             <a:r>
-              <a:t>Objetivo: Guardar datos en variables.</a:t>
+              <a:t>Objetivo: Planificar datos y comprender variable, tipo, nombre, declaración, inicialización y asignación.</a:t>
             </a:r>
           </a:p>
         </p:txBody>
@@ -3818,7 +5185,7 @@
               </a:defRPr>
             </a:pPr>
             <a:r>
-              <a:t>Evidencia: Código con variable usada correctamente.</a:t>
+              <a:t>Al terminar: señala la evidencia, explica qué demuestra y reproduce la prueba.</a:t>
             </a:r>
           </a:p>
         </p:txBody>
@@ -3958,7 +5325,7 @@
               </a:defRPr>
             </a:pPr>
             <a:r>
-              <a:t>RITMO DE LA SESIÓN</a:t>
+              <a:t>OBSERVAR ANTES DE ACTUAR</a:t>
             </a:r>
           </a:p>
         </p:txBody>
@@ -3994,7 +5361,7 @@
               </a:defRPr>
             </a:pPr>
             <a:r>
-              <a:t>Secuencia de aula</a:t>
+              <a:t>Ejemplo o demostración · 1</a:t>
             </a:r>
           </a:p>
         </p:txBody>
@@ -4073,27 +5440,27 @@
               </a:defRPr>
             </a:pPr>
             <a:r>
-              <a:t>MiniJarvis · 1.º DAW · Sesión 210 · H1</a:t>
-            </a:r>
-          </a:p>
-        </p:txBody>
-      </p:sp>
-      <p:sp>
-        <p:nvSpPr>
-          <p:cNvPr id="8" name="Oval 7"/>
+              <a:t>MiniJarvis · 1.º DAW · Sesión 210 · H1 — Primer MiniJarvis</a:t>
+            </a:r>
+          </a:p>
+        </p:txBody>
+      </p:sp>
+      <p:sp>
+        <p:nvSpPr>
+          <p:cNvPr id="8" name="Rounded Rectangle 7"/>
           <p:cNvSpPr/>
           <p:nvPr/>
         </p:nvSpPr>
         <p:spPr>
           <a:xfrm>
-            <a:off x="658368" y="1280160"/>
-            <a:ext cx="475488" cy="475488"/>
-          </a:xfrm>
-          <a:prstGeom prst="ellipse">
+            <a:off x="621792" y="1353312"/>
+            <a:ext cx="10927080" cy="4526280"/>
+          </a:xfrm>
+          <a:prstGeom prst="roundRect">
             <a:avLst/>
           </a:prstGeom>
           <a:solidFill>
-            <a:srgbClr val="2F5BA8"/>
+            <a:srgbClr val="121824"/>
           </a:solidFill>
           <a:ln>
             <a:noFill/>
@@ -4129,8 +5496,8 @@
         </p:nvSpPr>
         <p:spPr>
           <a:xfrm>
-            <a:off x="658368" y="1380744"/>
-            <a:ext cx="475488" cy="201168"/>
+            <a:off x="932688" y="1627632"/>
+            <a:ext cx="2057400" cy="411480"/>
           </a:xfrm>
           <a:prstGeom prst="rect">
             <a:avLst/>
@@ -4143,8 +5510,47 @@
           </a:bodyPr>
           <a:lstStyle/>
           <a:p>
-            <a:pPr algn="ctr">
+            <a:pPr algn="l">
               <a:defRPr sz="1300" b="1">
+                <a:solidFill>
+                  <a:srgbClr val="2F5BA8"/>
+                </a:solidFill>
+                <a:latin typeface="Aptos"/>
+              </a:defRPr>
+            </a:pPr>
+            <a:r>
+              <a:t>DEMOSTRACIÓN</a:t>
+            </a:r>
+          </a:p>
+        </p:txBody>
+      </p:sp>
+      <p:sp>
+        <p:nvSpPr>
+          <p:cNvPr id="10" name="TextBox 9"/>
+          <p:cNvSpPr txBox="1"/>
+          <p:nvPr/>
+        </p:nvSpPr>
+        <p:spPr>
+          <a:xfrm>
+            <a:off x="932688" y="2212848"/>
+            <a:ext cx="9966960" cy="3246120"/>
+          </a:xfrm>
+          <a:prstGeom prst="rect">
+            <a:avLst/>
+          </a:prstGeom>
+          <a:noFill/>
+        </p:spPr>
+        <p:txBody>
+          <a:bodyPr wrap="square" lIns="73152" rIns="45720" tIns="36576">
+            <a:spAutoFit/>
+          </a:bodyPr>
+          <a:lstStyle/>
+          <a:p>
+            <a:pPr>
+              <a:spcAft>
+                <a:spcPts val="900"/>
+              </a:spcAft>
+              <a:defRPr sz="1700">
                 <a:solidFill>
                   <a:srgbClr val="FFFFFF"/>
                 </a:solidFill>
@@ -4152,114 +5558,15 @@
               </a:defRPr>
             </a:pPr>
             <a:r>
-              <a:t>1</a:t>
-            </a:r>
-          </a:p>
-        </p:txBody>
-      </p:sp>
-      <p:sp>
-        <p:nvSpPr>
-          <p:cNvPr id="10" name="TextBox 9"/>
-          <p:cNvSpPr txBox="1"/>
-          <p:nvPr/>
-        </p:nvSpPr>
-        <p:spPr>
-          <a:xfrm>
-            <a:off x="1389888" y="1261872"/>
-            <a:ext cx="10058400" cy="772668"/>
-          </a:xfrm>
-          <a:prstGeom prst="rect">
-            <a:avLst/>
-          </a:prstGeom>
-          <a:noFill/>
-        </p:spPr>
-        <p:txBody>
-          <a:bodyPr wrap="square" lIns="45720" rIns="45720" tIns="36576" bIns="36576" anchor="t">
-            <a:spAutoFit/>
-          </a:bodyPr>
-          <a:lstStyle/>
-          <a:p>
-            <a:pPr algn="l">
-              <a:defRPr sz="1400" b="0">
-                <a:solidFill>
-                  <a:srgbClr val="1C2330"/>
-                </a:solidFill>
-                <a:latin typeface="Aptos"/>
-              </a:defRPr>
-            </a:pPr>
-            <a:r>
-              <a:t>0–5 min — Presentar objetivo, producto y evidencia de hoy.</a:t>
-            </a:r>
-          </a:p>
-        </p:txBody>
-      </p:sp>
-      <p:sp>
-        <p:nvSpPr>
-          <p:cNvPr id="11" name="Oval 10"/>
-          <p:cNvSpPr/>
-          <p:nvPr/>
-        </p:nvSpPr>
-        <p:spPr>
-          <a:xfrm>
-            <a:off x="658368" y="2125979"/>
-            <a:ext cx="475488" cy="475488"/>
-          </a:xfrm>
-          <a:prstGeom prst="ellipse">
-            <a:avLst/>
-          </a:prstGeom>
-          <a:solidFill>
-            <a:srgbClr val="2F5BA8"/>
-          </a:solidFill>
-          <a:ln>
-            <a:noFill/>
-          </a:ln>
-        </p:spPr>
-        <p:style>
-          <a:lnRef idx="1">
-            <a:schemeClr val="accent1"/>
-          </a:lnRef>
-          <a:fillRef idx="3">
-            <a:schemeClr val="accent1"/>
-          </a:fillRef>
-          <a:effectRef idx="2">
-            <a:schemeClr val="accent1"/>
-          </a:effectRef>
-          <a:fontRef idx="minor">
-            <a:schemeClr val="lt1"/>
-          </a:fontRef>
-        </p:style>
-        <p:txBody>
-          <a:bodyPr rtlCol="0" anchor="ctr"/>
-          <a:lstStyle/>
-          <a:p>
-            <a:pPr algn="ctr"/>
-          </a:p>
-        </p:txBody>
-      </p:sp>
-      <p:sp>
-        <p:nvSpPr>
-          <p:cNvPr id="12" name="TextBox 11"/>
-          <p:cNvSpPr txBox="1"/>
-          <p:nvPr/>
-        </p:nvSpPr>
-        <p:spPr>
-          <a:xfrm>
-            <a:off x="658368" y="2226563"/>
-            <a:ext cx="475488" cy="201168"/>
-          </a:xfrm>
-          <a:prstGeom prst="rect">
-            <a:avLst/>
-          </a:prstGeom>
-          <a:noFill/>
-        </p:spPr>
-        <p:txBody>
-          <a:bodyPr wrap="square" lIns="45720" rIns="45720" tIns="36576" bIns="36576" anchor="t">
-            <a:spAutoFit/>
-          </a:bodyPr>
-          <a:lstStyle/>
-          <a:p>
-            <a:pPr algn="ctr">
-              <a:defRPr sz="1300" b="1">
+              <a:t>•  D1 · Un dato repetido, un problema — Si el curso aparece en tres mensajes y después cambia el año, ¿cuántos sitios tendrías que modificar?</a:t>
+            </a:r>
+          </a:p>
+          <a:p>
+            <a:pPr>
+              <a:spcAft>
+                <a:spcPts val="900"/>
+              </a:spcAft>
+              <a:defRPr sz="1700">
                 <a:solidFill>
                   <a:srgbClr val="FFFFFF"/>
                 </a:solidFill>
@@ -4267,114 +5574,15 @@
               </a:defRPr>
             </a:pPr>
             <a:r>
-              <a:t>2</a:t>
-            </a:r>
-          </a:p>
-        </p:txBody>
-      </p:sp>
-      <p:sp>
-        <p:nvSpPr>
-          <p:cNvPr id="13" name="TextBox 12"/>
-          <p:cNvSpPr txBox="1"/>
-          <p:nvPr/>
-        </p:nvSpPr>
-        <p:spPr>
-          <a:xfrm>
-            <a:off x="1389888" y="2107691"/>
-            <a:ext cx="10058400" cy="772668"/>
-          </a:xfrm>
-          <a:prstGeom prst="rect">
-            <a:avLst/>
-          </a:prstGeom>
-          <a:noFill/>
-        </p:spPr>
-        <p:txBody>
-          <a:bodyPr wrap="square" lIns="45720" rIns="45720" tIns="36576" bIns="36576" anchor="t">
-            <a:spAutoFit/>
-          </a:bodyPr>
-          <a:lstStyle/>
-          <a:p>
-            <a:pPr algn="l">
-              <a:defRPr sz="1400" b="0">
-                <a:solidFill>
-                  <a:srgbClr val="1C2330"/>
-                </a:solidFill>
-                <a:latin typeface="Aptos"/>
-              </a:defRPr>
-            </a:pPr>
-            <a:r>
-              <a:t>5–13 min — Explicación breve: Una variable guarda un dato que puede usarse varias veces.</a:t>
-            </a:r>
-          </a:p>
-        </p:txBody>
-      </p:sp>
-      <p:sp>
-        <p:nvSpPr>
-          <p:cNvPr id="14" name="Oval 13"/>
-          <p:cNvSpPr/>
-          <p:nvPr/>
-        </p:nvSpPr>
-        <p:spPr>
-          <a:xfrm>
-            <a:off x="658368" y="2971799"/>
-            <a:ext cx="475488" cy="475488"/>
-          </a:xfrm>
-          <a:prstGeom prst="ellipse">
-            <a:avLst/>
-          </a:prstGeom>
-          <a:solidFill>
-            <a:srgbClr val="2F5BA8"/>
-          </a:solidFill>
-          <a:ln>
-            <a:noFill/>
-          </a:ln>
-        </p:spPr>
-        <p:style>
-          <a:lnRef idx="1">
-            <a:schemeClr val="accent1"/>
-          </a:lnRef>
-          <a:fillRef idx="3">
-            <a:schemeClr val="accent1"/>
-          </a:fillRef>
-          <a:effectRef idx="2">
-            <a:schemeClr val="accent1"/>
-          </a:effectRef>
-          <a:fontRef idx="minor">
-            <a:schemeClr val="lt1"/>
-          </a:fontRef>
-        </p:style>
-        <p:txBody>
-          <a:bodyPr rtlCol="0" anchor="ctr"/>
-          <a:lstStyle/>
-          <a:p>
-            <a:pPr algn="ctr"/>
-          </a:p>
-        </p:txBody>
-      </p:sp>
-      <p:sp>
-        <p:nvSpPr>
-          <p:cNvPr id="15" name="TextBox 14"/>
-          <p:cNvSpPr txBox="1"/>
-          <p:nvPr/>
-        </p:nvSpPr>
-        <p:spPr>
-          <a:xfrm>
-            <a:off x="658368" y="3072383"/>
-            <a:ext cx="475488" cy="201168"/>
-          </a:xfrm>
-          <a:prstGeom prst="rect">
-            <a:avLst/>
-          </a:prstGeom>
-          <a:noFill/>
-        </p:spPr>
-        <p:txBody>
-          <a:bodyPr wrap="square" lIns="45720" rIns="45720" tIns="36576" bIns="36576" anchor="t">
-            <a:spAutoFit/>
-          </a:bodyPr>
-          <a:lstStyle/>
-          <a:p>
-            <a:pPr algn="ctr">
-              <a:defRPr sz="1300" b="1">
+              <a:t>•  D2 · Variable = dato + nombre + memoria — IDEA: Una variable es una zona de memoria con un nombre que guarda un dato. \| EJEMPLO: int studyHours = 4;</a:t>
+            </a:r>
+          </a:p>
+          <a:p>
+            <a:pPr>
+              <a:spcAft>
+                <a:spcPts val="900"/>
+              </a:spcAft>
+              <a:defRPr sz="1700">
                 <a:solidFill>
                   <a:srgbClr val="FFFFFF"/>
                 </a:solidFill>
@@ -4382,114 +5590,15 @@
               </a:defRPr>
             </a:pPr>
             <a:r>
-              <a:t>3</a:t>
-            </a:r>
-          </a:p>
-        </p:txBody>
-      </p:sp>
-      <p:sp>
-        <p:nvSpPr>
-          <p:cNvPr id="16" name="TextBox 15"/>
-          <p:cNvSpPr txBox="1"/>
-          <p:nvPr/>
-        </p:nvSpPr>
-        <p:spPr>
-          <a:xfrm>
-            <a:off x="1389888" y="2953511"/>
-            <a:ext cx="10058400" cy="772668"/>
-          </a:xfrm>
-          <a:prstGeom prst="rect">
-            <a:avLst/>
-          </a:prstGeom>
-          <a:noFill/>
-        </p:spPr>
-        <p:txBody>
-          <a:bodyPr wrap="square" lIns="45720" rIns="45720" tIns="36576" bIns="36576" anchor="t">
-            <a:spAutoFit/>
-          </a:bodyPr>
-          <a:lstStyle/>
-          <a:p>
-            <a:pPr algn="l">
-              <a:defRPr sz="1400" b="0">
-                <a:solidFill>
-                  <a:srgbClr val="1C2330"/>
-                </a:solidFill>
-                <a:latin typeface="Aptos"/>
-              </a:defRPr>
-            </a:pPr>
-            <a:r>
-              <a:t>13–18 min — Demostración o ejemplo: Cambia el valor de userName y muestra cómo afecta a varios mensajes.</a:t>
-            </a:r>
-          </a:p>
-        </p:txBody>
-      </p:sp>
-      <p:sp>
-        <p:nvSpPr>
-          <p:cNvPr id="17" name="Oval 16"/>
-          <p:cNvSpPr/>
-          <p:nvPr/>
-        </p:nvSpPr>
-        <p:spPr>
-          <a:xfrm>
-            <a:off x="658368" y="3817620"/>
-            <a:ext cx="475488" cy="475488"/>
-          </a:xfrm>
-          <a:prstGeom prst="ellipse">
-            <a:avLst/>
-          </a:prstGeom>
-          <a:solidFill>
-            <a:srgbClr val="2F5BA8"/>
-          </a:solidFill>
-          <a:ln>
-            <a:noFill/>
-          </a:ln>
-        </p:spPr>
-        <p:style>
-          <a:lnRef idx="1">
-            <a:schemeClr val="accent1"/>
-          </a:lnRef>
-          <a:fillRef idx="3">
-            <a:schemeClr val="accent1"/>
-          </a:fillRef>
-          <a:effectRef idx="2">
-            <a:schemeClr val="accent1"/>
-          </a:effectRef>
-          <a:fontRef idx="minor">
-            <a:schemeClr val="lt1"/>
-          </a:fontRef>
-        </p:style>
-        <p:txBody>
-          <a:bodyPr rtlCol="0" anchor="ctr"/>
-          <a:lstStyle/>
-          <a:p>
-            <a:pPr algn="ctr"/>
-          </a:p>
-        </p:txBody>
-      </p:sp>
-      <p:sp>
-        <p:nvSpPr>
-          <p:cNvPr id="18" name="TextBox 17"/>
-          <p:cNvSpPr txBox="1"/>
-          <p:nvPr/>
-        </p:nvSpPr>
-        <p:spPr>
-          <a:xfrm>
-            <a:off x="658368" y="3918204"/>
-            <a:ext cx="475488" cy="201168"/>
-          </a:xfrm>
-          <a:prstGeom prst="rect">
-            <a:avLst/>
-          </a:prstGeom>
-          <a:noFill/>
-        </p:spPr>
-        <p:txBody>
-          <a:bodyPr wrap="square" lIns="45720" rIns="45720" tIns="36576" bIns="36576" anchor="t">
-            <a:spAutoFit/>
-          </a:bodyPr>
-          <a:lstStyle/>
-          <a:p>
-            <a:pPr algn="ctr">
-              <a:defRPr sz="1300" b="1">
+              <a:t>•  String userName = "Laura";</a:t>
+            </a:r>
+          </a:p>
+          <a:p>
+            <a:pPr>
+              <a:spcAft>
+                <a:spcPts val="900"/>
+              </a:spcAft>
+              <a:defRPr sz="1700">
                 <a:solidFill>
                   <a:srgbClr val="FFFFFF"/>
                 </a:solidFill>
@@ -4497,114 +5606,15 @@
               </a:defRPr>
             </a:pPr>
             <a:r>
-              <a:t>4</a:t>
-            </a:r>
-          </a:p>
-        </p:txBody>
-      </p:sp>
-      <p:sp>
-        <p:nvSpPr>
-          <p:cNvPr id="19" name="TextBox 18"/>
-          <p:cNvSpPr txBox="1"/>
-          <p:nvPr/>
-        </p:nvSpPr>
-        <p:spPr>
-          <a:xfrm>
-            <a:off x="1389888" y="3799332"/>
-            <a:ext cx="10058400" cy="772668"/>
-          </a:xfrm>
-          <a:prstGeom prst="rect">
-            <a:avLst/>
-          </a:prstGeom>
-          <a:noFill/>
-        </p:spPr>
-        <p:txBody>
-          <a:bodyPr wrap="square" lIns="45720" rIns="45720" tIns="36576" bIns="36576" anchor="t">
-            <a:spAutoFit/>
-          </a:bodyPr>
-          <a:lstStyle/>
-          <a:p>
-            <a:pPr algn="l">
-              <a:defRPr sz="1400" b="0">
-                <a:solidFill>
-                  <a:srgbClr val="1C2330"/>
-                </a:solidFill>
-                <a:latin typeface="Aptos"/>
-              </a:defRPr>
-            </a:pPr>
-            <a:r>
-              <a:t>18–35 min — Trabajo del alumnado: Crear variable userName con un valor fijo y usarla en varios mensajes.</a:t>
-            </a:r>
-          </a:p>
-        </p:txBody>
-      </p:sp>
-      <p:sp>
-        <p:nvSpPr>
-          <p:cNvPr id="20" name="Oval 19"/>
-          <p:cNvSpPr/>
-          <p:nvPr/>
-        </p:nvSpPr>
-        <p:spPr>
-          <a:xfrm>
-            <a:off x="658368" y="4663440"/>
-            <a:ext cx="475488" cy="475488"/>
-          </a:xfrm>
-          <a:prstGeom prst="ellipse">
-            <a:avLst/>
-          </a:prstGeom>
-          <a:solidFill>
-            <a:srgbClr val="2F5BA8"/>
-          </a:solidFill>
-          <a:ln>
-            <a:noFill/>
-          </a:ln>
-        </p:spPr>
-        <p:style>
-          <a:lnRef idx="1">
-            <a:schemeClr val="accent1"/>
-          </a:lnRef>
-          <a:fillRef idx="3">
-            <a:schemeClr val="accent1"/>
-          </a:fillRef>
-          <a:effectRef idx="2">
-            <a:schemeClr val="accent1"/>
-          </a:effectRef>
-          <a:fontRef idx="minor">
-            <a:schemeClr val="lt1"/>
-          </a:fontRef>
-        </p:style>
-        <p:txBody>
-          <a:bodyPr rtlCol="0" anchor="ctr"/>
-          <a:lstStyle/>
-          <a:p>
-            <a:pPr algn="ctr"/>
-          </a:p>
-        </p:txBody>
-      </p:sp>
-      <p:sp>
-        <p:nvSpPr>
-          <p:cNvPr id="21" name="TextBox 20"/>
-          <p:cNvSpPr txBox="1"/>
-          <p:nvPr/>
-        </p:nvSpPr>
-        <p:spPr>
-          <a:xfrm>
-            <a:off x="658368" y="4764024"/>
-            <a:ext cx="475488" cy="201168"/>
-          </a:xfrm>
-          <a:prstGeom prst="rect">
-            <a:avLst/>
-          </a:prstGeom>
-          <a:noFill/>
-        </p:spPr>
-        <p:txBody>
-          <a:bodyPr wrap="square" lIns="45720" rIns="45720" tIns="36576" bIns="36576" anchor="t">
-            <a:spAutoFit/>
-          </a:bodyPr>
-          <a:lstStyle/>
-          <a:p>
-            <a:pPr algn="ctr">
-              <a:defRPr sz="1300" b="1">
+              <a:t>•  D3 · Mapa de tipos que aparecen en Tema 1 — ENTEROS: byte / short / int / long \| DECIMALES: float / double \| OTROS: char / boolean / String</a:t>
+            </a:r>
+          </a:p>
+          <a:p>
+            <a:pPr>
+              <a:spcAft>
+                <a:spcPts val="900"/>
+              </a:spcAft>
+              <a:defRPr sz="1700">
                 <a:solidFill>
                   <a:srgbClr val="FFFFFF"/>
                 </a:solidFill>
@@ -4612,158 +5622,7 @@
               </a:defRPr>
             </a:pPr>
             <a:r>
-              <a:t>5</a:t>
-            </a:r>
-          </a:p>
-        </p:txBody>
-      </p:sp>
-      <p:sp>
-        <p:nvSpPr>
-          <p:cNvPr id="22" name="TextBox 21"/>
-          <p:cNvSpPr txBox="1"/>
-          <p:nvPr/>
-        </p:nvSpPr>
-        <p:spPr>
-          <a:xfrm>
-            <a:off x="1389888" y="4645152"/>
-            <a:ext cx="10058400" cy="772668"/>
-          </a:xfrm>
-          <a:prstGeom prst="rect">
-            <a:avLst/>
-          </a:prstGeom>
-          <a:noFill/>
-        </p:spPr>
-        <p:txBody>
-          <a:bodyPr wrap="square" lIns="45720" rIns="45720" tIns="36576" bIns="36576" anchor="t">
-            <a:spAutoFit/>
-          </a:bodyPr>
-          <a:lstStyle/>
-          <a:p>
-            <a:pPr algn="l">
-              <a:defRPr sz="1400" b="0">
-                <a:solidFill>
-                  <a:srgbClr val="1C2330"/>
-                </a:solidFill>
-                <a:latin typeface="Aptos"/>
-              </a:defRPr>
-            </a:pPr>
-            <a:r>
-              <a:t>35–40 min — Comprobar la evidencia con una explicación o prueba breve.</a:t>
-            </a:r>
-          </a:p>
-        </p:txBody>
-      </p:sp>
-      <p:sp>
-        <p:nvSpPr>
-          <p:cNvPr id="23" name="Oval 22"/>
-          <p:cNvSpPr/>
-          <p:nvPr/>
-        </p:nvSpPr>
-        <p:spPr>
-          <a:xfrm>
-            <a:off x="658368" y="5509259"/>
-            <a:ext cx="475488" cy="475488"/>
-          </a:xfrm>
-          <a:prstGeom prst="ellipse">
-            <a:avLst/>
-          </a:prstGeom>
-          <a:solidFill>
-            <a:srgbClr val="2F5BA8"/>
-          </a:solidFill>
-          <a:ln>
-            <a:noFill/>
-          </a:ln>
-        </p:spPr>
-        <p:style>
-          <a:lnRef idx="1">
-            <a:schemeClr val="accent1"/>
-          </a:lnRef>
-          <a:fillRef idx="3">
-            <a:schemeClr val="accent1"/>
-          </a:fillRef>
-          <a:effectRef idx="2">
-            <a:schemeClr val="accent1"/>
-          </a:effectRef>
-          <a:fontRef idx="minor">
-            <a:schemeClr val="lt1"/>
-          </a:fontRef>
-        </p:style>
-        <p:txBody>
-          <a:bodyPr rtlCol="0" anchor="ctr"/>
-          <a:lstStyle/>
-          <a:p>
-            <a:pPr algn="ctr"/>
-          </a:p>
-        </p:txBody>
-      </p:sp>
-      <p:sp>
-        <p:nvSpPr>
-          <p:cNvPr id="24" name="TextBox 23"/>
-          <p:cNvSpPr txBox="1"/>
-          <p:nvPr/>
-        </p:nvSpPr>
-        <p:spPr>
-          <a:xfrm>
-            <a:off x="658368" y="5609844"/>
-            <a:ext cx="475488" cy="201168"/>
-          </a:xfrm>
-          <a:prstGeom prst="rect">
-            <a:avLst/>
-          </a:prstGeom>
-          <a:noFill/>
-        </p:spPr>
-        <p:txBody>
-          <a:bodyPr wrap="square" lIns="45720" rIns="45720" tIns="36576" bIns="36576" anchor="t">
-            <a:spAutoFit/>
-          </a:bodyPr>
-          <a:lstStyle/>
-          <a:p>
-            <a:pPr algn="ctr">
-              <a:defRPr sz="1300" b="1">
-                <a:solidFill>
-                  <a:srgbClr val="FFFFFF"/>
-                </a:solidFill>
-                <a:latin typeface="Aptos"/>
-              </a:defRPr>
-            </a:pPr>
-            <a:r>
-              <a:t>6</a:t>
-            </a:r>
-          </a:p>
-        </p:txBody>
-      </p:sp>
-      <p:sp>
-        <p:nvSpPr>
-          <p:cNvPr id="25" name="TextBox 24"/>
-          <p:cNvSpPr txBox="1"/>
-          <p:nvPr/>
-        </p:nvSpPr>
-        <p:spPr>
-          <a:xfrm>
-            <a:off x="1389888" y="5490972"/>
-            <a:ext cx="10058400" cy="772668"/>
-          </a:xfrm>
-          <a:prstGeom prst="rect">
-            <a:avLst/>
-          </a:prstGeom>
-          <a:noFill/>
-        </p:spPr>
-        <p:txBody>
-          <a:bodyPr wrap="square" lIns="45720" rIns="45720" tIns="36576" bIns="36576" anchor="t">
-            <a:spAutoFit/>
-          </a:bodyPr>
-          <a:lstStyle/>
-          <a:p>
-            <a:pPr algn="l">
-              <a:defRPr sz="1400" b="0">
-                <a:solidFill>
-                  <a:srgbClr val="1C2330"/>
-                </a:solidFill>
-                <a:latin typeface="Aptos"/>
-              </a:defRPr>
-            </a:pPr>
-            <a:r>
-              <a:t>40–45 min — Cierre: ¿qué cambia si modifico el valor de la variable?</a:t>
+              <a:t>•  D4 · Elige el tipo adecuado — Nombre de usuario → ?</a:t>
             </a:r>
           </a:p>
         </p:txBody>
@@ -4903,7 +5762,7 @@
               </a:defRPr>
             </a:pPr>
             <a:r>
-              <a:t>COMPRENDER Y TRANSFERIR</a:t>
+              <a:t>OBSERVAR ANTES DE ACTUAR</a:t>
             </a:r>
           </a:p>
         </p:txBody>
@@ -4939,7 +5798,7 @@
               </a:defRPr>
             </a:pPr>
             <a:r>
-              <a:t>Idea clave y puesta en práctica</a:t>
+              <a:t>Ejemplo o demostración · 2</a:t>
             </a:r>
           </a:p>
         </p:txBody>
@@ -5018,7 +5877,7 @@
               </a:defRPr>
             </a:pPr>
             <a:r>
-              <a:t>MiniJarvis · 1.º DAW · Sesión 210 · H1</a:t>
+              <a:t>MiniJarvis · 1.º DAW · Sesión 210 · H1 — Primer MiniJarvis</a:t>
             </a:r>
           </a:p>
         </p:txBody>
@@ -5031,19 +5890,17 @@
         </p:nvSpPr>
         <p:spPr>
           <a:xfrm>
-            <a:off x="621792" y="1325880"/>
-            <a:ext cx="5285232" cy="4736592"/>
+            <a:off x="621792" y="1353312"/>
+            <a:ext cx="10927080" cy="4526280"/>
           </a:xfrm>
           <a:prstGeom prst="roundRect">
             <a:avLst/>
           </a:prstGeom>
           <a:solidFill>
-            <a:srgbClr val="FFFFFF"/>
+            <a:srgbClr val="121824"/>
           </a:solidFill>
           <a:ln>
-            <a:solidFill>
-              <a:srgbClr val="E5E9EF"/>
-            </a:solidFill>
+            <a:noFill/>
           </a:ln>
         </p:spPr>
         <p:style>
@@ -5077,7 +5934,7 @@
         <p:spPr>
           <a:xfrm>
             <a:off x="932688" y="1627632"/>
-            <a:ext cx="2011680" cy="329184"/>
+            <a:ext cx="2057400" cy="411480"/>
           </a:xfrm>
           <a:prstGeom prst="rect">
             <a:avLst/>
@@ -5099,7 +5956,7 @@
               </a:defRPr>
             </a:pPr>
             <a:r>
-              <a:t>IDEA CLAVE</a:t>
+              <a:t>DEMOSTRACIÓN</a:t>
             </a:r>
           </a:p>
         </p:txBody>
@@ -5112,8 +5969,8 @@
         </p:nvSpPr>
         <p:spPr>
           <a:xfrm>
-            <a:off x="932688" y="2176272"/>
-            <a:ext cx="4617720" cy="3429000"/>
+            <a:off x="932688" y="2212848"/>
+            <a:ext cx="9966960" cy="3246120"/>
           </a:xfrm>
           <a:prstGeom prst="rect">
             <a:avLst/>
@@ -5130,125 +5987,7 @@
               <a:spcAft>
                 <a:spcPts val="900"/>
               </a:spcAft>
-              <a:defRPr sz="2300">
-                <a:solidFill>
-                  <a:srgbClr val="1C2330"/>
-                </a:solidFill>
-                <a:latin typeface="Aptos"/>
-              </a:defRPr>
-            </a:pPr>
-            <a:r>
-              <a:t>•  Tipo, nombre, valor y uso de una variable String.</a:t>
-            </a:r>
-          </a:p>
-        </p:txBody>
-      </p:sp>
-      <p:sp>
-        <p:nvSpPr>
-          <p:cNvPr id="11" name="Rounded Rectangle 10"/>
-          <p:cNvSpPr/>
-          <p:nvPr/>
-        </p:nvSpPr>
-        <p:spPr>
-          <a:xfrm>
-            <a:off x="6172200" y="1325880"/>
-            <a:ext cx="5394960" cy="4736592"/>
-          </a:xfrm>
-          <a:prstGeom prst="roundRect">
-            <a:avLst/>
-          </a:prstGeom>
-          <a:solidFill>
-            <a:srgbClr val="121824"/>
-          </a:solidFill>
-          <a:ln>
-            <a:noFill/>
-          </a:ln>
-        </p:spPr>
-        <p:style>
-          <a:lnRef idx="1">
-            <a:schemeClr val="accent1"/>
-          </a:lnRef>
-          <a:fillRef idx="3">
-            <a:schemeClr val="accent1"/>
-          </a:fillRef>
-          <a:effectRef idx="2">
-            <a:schemeClr val="accent1"/>
-          </a:effectRef>
-          <a:fontRef idx="minor">
-            <a:schemeClr val="lt1"/>
-          </a:fontRef>
-        </p:style>
-        <p:txBody>
-          <a:bodyPr rtlCol="0" anchor="ctr"/>
-          <a:lstStyle/>
-          <a:p>
-            <a:pPr algn="ctr"/>
-          </a:p>
-        </p:txBody>
-      </p:sp>
-      <p:sp>
-        <p:nvSpPr>
-          <p:cNvPr id="12" name="TextBox 11"/>
-          <p:cNvSpPr txBox="1"/>
-          <p:nvPr/>
-        </p:nvSpPr>
-        <p:spPr>
-          <a:xfrm>
-            <a:off x="6492240" y="1627632"/>
-            <a:ext cx="2194560" cy="329184"/>
-          </a:xfrm>
-          <a:prstGeom prst="rect">
-            <a:avLst/>
-          </a:prstGeom>
-          <a:noFill/>
-        </p:spPr>
-        <p:txBody>
-          <a:bodyPr wrap="square" lIns="45720" rIns="45720" tIns="36576" bIns="36576" anchor="t">
-            <a:spAutoFit/>
-          </a:bodyPr>
-          <a:lstStyle/>
-          <a:p>
-            <a:pPr algn="l">
-              <a:defRPr sz="1300" b="1">
-                <a:solidFill>
-                  <a:srgbClr val="2F5BA8"/>
-                </a:solidFill>
-                <a:latin typeface="Aptos"/>
-              </a:defRPr>
-            </a:pPr>
-            <a:r>
-              <a:t>EN PRÁCTICA</a:t>
-            </a:r>
-          </a:p>
-        </p:txBody>
-      </p:sp>
-      <p:sp>
-        <p:nvSpPr>
-          <p:cNvPr id="13" name="TextBox 12"/>
-          <p:cNvSpPr txBox="1"/>
-          <p:nvPr/>
-        </p:nvSpPr>
-        <p:spPr>
-          <a:xfrm>
-            <a:off x="6492240" y="2176272"/>
-            <a:ext cx="4617720" cy="3429000"/>
-          </a:xfrm>
-          <a:prstGeom prst="rect">
-            <a:avLst/>
-          </a:prstGeom>
-          <a:noFill/>
-        </p:spPr>
-        <p:txBody>
-          <a:bodyPr wrap="square" lIns="73152" rIns="45720" tIns="36576">
-            <a:spAutoFit/>
-          </a:bodyPr>
-          <a:lstStyle/>
-          <a:p>
-            <a:pPr>
-              <a:spcAft>
-                <a:spcPts val="900"/>
-              </a:spcAft>
-              <a:defRPr sz="2300">
+              <a:defRPr sz="2200">
                 <a:solidFill>
                   <a:srgbClr val="FFFFFF"/>
                 </a:solidFill>
@@ -5256,7 +5995,39 @@
               </a:defRPr>
             </a:pPr>
             <a:r>
-              <a:t>•  Cambia el valor de userName y muestra cómo afecta a varios mensajes.</a:t>
+              <a:t>•  Horas de estudio → ?</a:t>
+            </a:r>
+          </a:p>
+          <a:p>
+            <a:pPr>
+              <a:spcAft>
+                <a:spcPts val="900"/>
+              </a:spcAft>
+              <a:defRPr sz="2200">
+                <a:solidFill>
+                  <a:srgbClr val="FFFFFF"/>
+                </a:solidFill>
+                <a:latin typeface="Aptos"/>
+              </a:defRPr>
+            </a:pPr>
+            <a:r>
+              <a:t>•  Nota media → ?</a:t>
+            </a:r>
+          </a:p>
+          <a:p>
+            <a:pPr>
+              <a:spcAft>
+                <a:spcPts val="900"/>
+              </a:spcAft>
+              <a:defRPr sz="2200">
+                <a:solidFill>
+                  <a:srgbClr val="FFFFFF"/>
+                </a:solidFill>
+                <a:latin typeface="Aptos"/>
+              </a:defRPr>
+            </a:pPr>
+            <a:r>
+              <a:t>•  Objetivo alcanzado → ?</a:t>
             </a:r>
           </a:p>
         </p:txBody>
@@ -5432,7 +6203,7 @@
               </a:defRPr>
             </a:pPr>
             <a:r>
-              <a:t>Actividad central</a:t>
+              <a:t>Actividad central · 1</a:t>
             </a:r>
           </a:p>
         </p:txBody>
@@ -5511,7 +6282,7 @@
               </a:defRPr>
             </a:pPr>
             <a:r>
-              <a:t>MiniJarvis · 1.º DAW · Sesión 210 · H1</a:t>
+              <a:t>MiniJarvis · 1.º DAW · Sesión 210 · H1 — Primer MiniJarvis</a:t>
             </a:r>
           </a:p>
         </p:txBody>
@@ -5525,7 +6296,7 @@
         <p:spPr>
           <a:xfrm>
             <a:off x="658368" y="1307592"/>
-            <a:ext cx="10835640" cy="2226564"/>
+            <a:ext cx="10835640" cy="1049274"/>
           </a:xfrm>
           <a:prstGeom prst="roundRect">
             <a:avLst/>
@@ -5606,7 +6377,7 @@
         <p:spPr>
           <a:xfrm>
             <a:off x="1664208" y="1417319"/>
-            <a:ext cx="9464040" cy="2007108"/>
+            <a:ext cx="9464040" cy="829818"/>
           </a:xfrm>
           <a:prstGeom prst="rect">
             <a:avLst/>
@@ -5628,7 +6399,7 @@
               </a:defRPr>
             </a:pPr>
             <a:r>
-              <a:t>Crear y usar userName.</a:t>
+              <a:t>Predice antes de ejecutar cuando haya código.</a:t>
             </a:r>
           </a:p>
         </p:txBody>
@@ -5641,8 +6412,8 @@
         </p:nvSpPr>
         <p:spPr>
           <a:xfrm>
-            <a:off x="658368" y="3776472"/>
-            <a:ext cx="10835640" cy="2226564"/>
+            <a:off x="658368" y="2542032"/>
+            <a:ext cx="10835640" cy="1049274"/>
           </a:xfrm>
           <a:prstGeom prst="roundRect">
             <a:avLst/>
@@ -5686,7 +6457,7 @@
         </p:nvSpPr>
         <p:spPr>
           <a:xfrm>
-            <a:off x="850392" y="3922776"/>
+            <a:off x="850392" y="2688336"/>
             <a:ext cx="685800" cy="384048"/>
           </a:xfrm>
           <a:prstGeom prst="rect">
@@ -5722,8 +6493,8 @@
         </p:nvSpPr>
         <p:spPr>
           <a:xfrm>
-            <a:off x="1664208" y="3886200"/>
-            <a:ext cx="9464040" cy="2007108"/>
+            <a:off x="1664208" y="2651760"/>
+            <a:ext cx="9464040" cy="829818"/>
           </a:xfrm>
           <a:prstGeom prst="rect">
             <a:avLst/>
@@ -5745,7 +6516,241 @@
               </a:defRPr>
             </a:pPr>
             <a:r>
-              <a:t>Comprueba y registra la evidencia: Código con variable usada correctamente.</a:t>
+              <a:t>Realiza la micropráctica o modificación prevista.</a:t>
+            </a:r>
+          </a:p>
+        </p:txBody>
+      </p:sp>
+      <p:sp>
+        <p:nvSpPr>
+          <p:cNvPr id="14" name="Rounded Rectangle 13"/>
+          <p:cNvSpPr/>
+          <p:nvPr/>
+        </p:nvSpPr>
+        <p:spPr>
+          <a:xfrm>
+            <a:off x="658368" y="3776472"/>
+            <a:ext cx="10835640" cy="1049274"/>
+          </a:xfrm>
+          <a:prstGeom prst="roundRect">
+            <a:avLst/>
+          </a:prstGeom>
+          <a:solidFill>
+            <a:srgbClr val="FFFFFF"/>
+          </a:solidFill>
+          <a:ln>
+            <a:solidFill>
+              <a:srgbClr val="E5E9EF"/>
+            </a:solidFill>
+          </a:ln>
+        </p:spPr>
+        <p:style>
+          <a:lnRef idx="1">
+            <a:schemeClr val="accent1"/>
+          </a:lnRef>
+          <a:fillRef idx="3">
+            <a:schemeClr val="accent1"/>
+          </a:fillRef>
+          <a:effectRef idx="2">
+            <a:schemeClr val="accent1"/>
+          </a:effectRef>
+          <a:fontRef idx="minor">
+            <a:schemeClr val="lt1"/>
+          </a:fontRef>
+        </p:style>
+        <p:txBody>
+          <a:bodyPr rtlCol="0" anchor="ctr"/>
+          <a:lstStyle/>
+          <a:p>
+            <a:pPr algn="ctr"/>
+          </a:p>
+        </p:txBody>
+      </p:sp>
+      <p:sp>
+        <p:nvSpPr>
+          <p:cNvPr id="15" name="TextBox 14"/>
+          <p:cNvSpPr txBox="1"/>
+          <p:nvPr/>
+        </p:nvSpPr>
+        <p:spPr>
+          <a:xfrm>
+            <a:off x="850392" y="3922776"/>
+            <a:ext cx="685800" cy="384048"/>
+          </a:xfrm>
+          <a:prstGeom prst="rect">
+            <a:avLst/>
+          </a:prstGeom>
+          <a:noFill/>
+        </p:spPr>
+        <p:txBody>
+          <a:bodyPr wrap="square" lIns="45720" rIns="45720" tIns="36576" bIns="36576" anchor="t">
+            <a:spAutoFit/>
+          </a:bodyPr>
+          <a:lstStyle/>
+          <a:p>
+            <a:pPr algn="l">
+              <a:defRPr sz="1200" b="1">
+                <a:solidFill>
+                  <a:srgbClr val="2F5BA8"/>
+                </a:solidFill>
+                <a:latin typeface="Aptos"/>
+              </a:defRPr>
+            </a:pPr>
+            <a:r>
+              <a:t>PASO 3</a:t>
+            </a:r>
+          </a:p>
+        </p:txBody>
+      </p:sp>
+      <p:sp>
+        <p:nvSpPr>
+          <p:cNvPr id="16" name="TextBox 15"/>
+          <p:cNvSpPr txBox="1"/>
+          <p:nvPr/>
+        </p:nvSpPr>
+        <p:spPr>
+          <a:xfrm>
+            <a:off x="1664208" y="3886200"/>
+            <a:ext cx="9464040" cy="829818"/>
+          </a:xfrm>
+          <a:prstGeom prst="rect">
+            <a:avLst/>
+          </a:prstGeom>
+          <a:noFill/>
+        </p:spPr>
+        <p:txBody>
+          <a:bodyPr wrap="square" lIns="45720" rIns="45720" tIns="36576" bIns="36576" anchor="t">
+            <a:spAutoFit/>
+          </a:bodyPr>
+          <a:lstStyle/>
+          <a:p>
+            <a:pPr algn="l">
+              <a:defRPr sz="2000" b="0">
+                <a:solidFill>
+                  <a:srgbClr val="1C2330"/>
+                </a:solidFill>
+                <a:latin typeface="Aptos"/>
+              </a:defRPr>
+            </a:pPr>
+            <a:r>
+              <a:t>Prueba el caso normal y, cuando exista una decisión o conversión, también el caso alternativo o erróneo.</a:t>
+            </a:r>
+          </a:p>
+        </p:txBody>
+      </p:sp>
+      <p:sp>
+        <p:nvSpPr>
+          <p:cNvPr id="17" name="Rounded Rectangle 16"/>
+          <p:cNvSpPr/>
+          <p:nvPr/>
+        </p:nvSpPr>
+        <p:spPr>
+          <a:xfrm>
+            <a:off x="658368" y="5010912"/>
+            <a:ext cx="10835640" cy="1049274"/>
+          </a:xfrm>
+          <a:prstGeom prst="roundRect">
+            <a:avLst/>
+          </a:prstGeom>
+          <a:solidFill>
+            <a:srgbClr val="FFFFFF"/>
+          </a:solidFill>
+          <a:ln>
+            <a:solidFill>
+              <a:srgbClr val="E5E9EF"/>
+            </a:solidFill>
+          </a:ln>
+        </p:spPr>
+        <p:style>
+          <a:lnRef idx="1">
+            <a:schemeClr val="accent1"/>
+          </a:lnRef>
+          <a:fillRef idx="3">
+            <a:schemeClr val="accent1"/>
+          </a:fillRef>
+          <a:effectRef idx="2">
+            <a:schemeClr val="accent1"/>
+          </a:effectRef>
+          <a:fontRef idx="minor">
+            <a:schemeClr val="lt1"/>
+          </a:fontRef>
+        </p:style>
+        <p:txBody>
+          <a:bodyPr rtlCol="0" anchor="ctr"/>
+          <a:lstStyle/>
+          <a:p>
+            <a:pPr algn="ctr"/>
+          </a:p>
+        </p:txBody>
+      </p:sp>
+      <p:sp>
+        <p:nvSpPr>
+          <p:cNvPr id="18" name="TextBox 17"/>
+          <p:cNvSpPr txBox="1"/>
+          <p:nvPr/>
+        </p:nvSpPr>
+        <p:spPr>
+          <a:xfrm>
+            <a:off x="850392" y="5157216"/>
+            <a:ext cx="685800" cy="384048"/>
+          </a:xfrm>
+          <a:prstGeom prst="rect">
+            <a:avLst/>
+          </a:prstGeom>
+          <a:noFill/>
+        </p:spPr>
+        <p:txBody>
+          <a:bodyPr wrap="square" lIns="45720" rIns="45720" tIns="36576" bIns="36576" anchor="t">
+            <a:spAutoFit/>
+          </a:bodyPr>
+          <a:lstStyle/>
+          <a:p>
+            <a:pPr algn="l">
+              <a:defRPr sz="1200" b="1">
+                <a:solidFill>
+                  <a:srgbClr val="2F5BA8"/>
+                </a:solidFill>
+                <a:latin typeface="Aptos"/>
+              </a:defRPr>
+            </a:pPr>
+            <a:r>
+              <a:t>PASO 4</a:t>
+            </a:r>
+          </a:p>
+        </p:txBody>
+      </p:sp>
+      <p:sp>
+        <p:nvSpPr>
+          <p:cNvPr id="19" name="TextBox 18"/>
+          <p:cNvSpPr txBox="1"/>
+          <p:nvPr/>
+        </p:nvSpPr>
+        <p:spPr>
+          <a:xfrm>
+            <a:off x="1664208" y="5120640"/>
+            <a:ext cx="9464040" cy="829818"/>
+          </a:xfrm>
+          <a:prstGeom prst="rect">
+            <a:avLst/>
+          </a:prstGeom>
+          <a:noFill/>
+        </p:spPr>
+        <p:txBody>
+          <a:bodyPr wrap="square" lIns="45720" rIns="45720" tIns="36576" bIns="36576" anchor="t">
+            <a:spAutoFit/>
+          </a:bodyPr>
+          <a:lstStyle/>
+          <a:p>
+            <a:pPr algn="l">
+              <a:defRPr sz="2000" b="0">
+                <a:solidFill>
+                  <a:srgbClr val="1C2330"/>
+                </a:solidFill>
+                <a:latin typeface="Aptos"/>
+              </a:defRPr>
+            </a:pPr>
+            <a:r>
+              <a:t>Conserva el código o resultado en el repositorio o espacio indicado.</a:t>
             </a:r>
           </a:p>
         </p:txBody>
@@ -5885,7 +6890,7 @@
               </a:defRPr>
             </a:pPr>
             <a:r>
-              <a:t>COMPROBAR</a:t>
+              <a:t>APLICAR Y DECIDIR</a:t>
             </a:r>
           </a:p>
         </p:txBody>
@@ -5921,7 +6926,7 @@
               </a:defRPr>
             </a:pPr>
             <a:r>
-              <a:t>Evidencia y comprobación</a:t>
+              <a:t>Actividad central · 2</a:t>
             </a:r>
           </a:p>
         </p:txBody>
@@ -6000,7 +7005,7 @@
               </a:defRPr>
             </a:pPr>
             <a:r>
-              <a:t>MiniJarvis · 1.º DAW · Sesión 210 · H1</a:t>
+              <a:t>MiniJarvis · 1.º DAW · Sesión 210 · H1 — Primer MiniJarvis</a:t>
             </a:r>
           </a:p>
         </p:txBody>
@@ -6013,8 +7018,8 @@
         </p:nvSpPr>
         <p:spPr>
           <a:xfrm>
-            <a:off x="713232" y="1298448"/>
-            <a:ext cx="420624" cy="420624"/>
+            <a:off x="658368" y="1307592"/>
+            <a:ext cx="10835640" cy="2226564"/>
           </a:xfrm>
           <a:prstGeom prst="roundRect">
             <a:avLst/>
@@ -6024,7 +7029,7 @@
           </a:solidFill>
           <a:ln>
             <a:solidFill>
-              <a:srgbClr val="2F5BA8"/>
+              <a:srgbClr val="E5E9EF"/>
             </a:solidFill>
           </a:ln>
         </p:spPr>
@@ -6058,8 +7063,8 @@
         </p:nvSpPr>
         <p:spPr>
           <a:xfrm>
-            <a:off x="1389888" y="1280160"/>
-            <a:ext cx="9829800" cy="960120"/>
+            <a:off x="850392" y="1453895"/>
+            <a:ext cx="685800" cy="384048"/>
           </a:xfrm>
           <a:prstGeom prst="rect">
             <a:avLst/>
@@ -6073,7 +7078,43 @@
           <a:lstStyle/>
           <a:p>
             <a:pPr algn="l">
-              <a:defRPr sz="1900" b="0">
+              <a:defRPr sz="1200" b="1">
+                <a:solidFill>
+                  <a:srgbClr val="2F5BA8"/>
+                </a:solidFill>
+                <a:latin typeface="Aptos"/>
+              </a:defRPr>
+            </a:pPr>
+            <a:r>
+              <a:t>PASO 6</a:t>
+            </a:r>
+          </a:p>
+        </p:txBody>
+      </p:sp>
+      <p:sp>
+        <p:nvSpPr>
+          <p:cNvPr id="10" name="TextBox 9"/>
+          <p:cNvSpPr txBox="1"/>
+          <p:nvPr/>
+        </p:nvSpPr>
+        <p:spPr>
+          <a:xfrm>
+            <a:off x="1664208" y="1417319"/>
+            <a:ext cx="9464040" cy="2007108"/>
+          </a:xfrm>
+          <a:prstGeom prst="rect">
+            <a:avLst/>
+          </a:prstGeom>
+          <a:noFill/>
+        </p:spPr>
+        <p:txBody>
+          <a:bodyPr wrap="square" lIns="45720" rIns="45720" tIns="36576" bIns="36576" anchor="t">
+            <a:spAutoFit/>
+          </a:bodyPr>
+          <a:lstStyle/>
+          <a:p>
+            <a:pPr algn="l">
+              <a:defRPr sz="2000" b="0">
                 <a:solidFill>
                   <a:srgbClr val="1C2330"/>
                 </a:solidFill>
@@ -6081,21 +7122,21 @@
               </a:defRPr>
             </a:pPr>
             <a:r>
-              <a:t>He producido o actualizado: Código con variable usada correctamente.</a:t>
-            </a:r>
-          </a:p>
-        </p:txBody>
-      </p:sp>
-      <p:sp>
-        <p:nvSpPr>
-          <p:cNvPr id="10" name="Rounded Rectangle 9"/>
+              <a:t>Registra una sola entrada en el diario individual; no crees un informe paralelo.</a:t>
+            </a:r>
+          </a:p>
+        </p:txBody>
+      </p:sp>
+      <p:sp>
+        <p:nvSpPr>
+          <p:cNvPr id="11" name="Rounded Rectangle 10"/>
           <p:cNvSpPr/>
           <p:nvPr/>
         </p:nvSpPr>
         <p:spPr>
           <a:xfrm>
-            <a:off x="713232" y="2295144"/>
-            <a:ext cx="420624" cy="420624"/>
+            <a:off x="658368" y="3776472"/>
+            <a:ext cx="10835640" cy="2226564"/>
           </a:xfrm>
           <a:prstGeom prst="roundRect">
             <a:avLst/>
@@ -6105,7 +7146,7 @@
           </a:solidFill>
           <a:ln>
             <a:solidFill>
-              <a:srgbClr val="2F5BA8"/>
+              <a:srgbClr val="E5E9EF"/>
             </a:solidFill>
           </a:ln>
         </p:spPr>
@@ -6133,14 +7174,14 @@
       </p:sp>
       <p:sp>
         <p:nvSpPr>
-          <p:cNvPr id="11" name="TextBox 10"/>
+          <p:cNvPr id="12" name="TextBox 11"/>
           <p:cNvSpPr txBox="1"/>
           <p:nvPr/>
         </p:nvSpPr>
         <p:spPr>
           <a:xfrm>
-            <a:off x="1389888" y="2276856"/>
-            <a:ext cx="9829800" cy="960120"/>
+            <a:off x="850392" y="3922776"/>
+            <a:ext cx="685800" cy="384048"/>
           </a:xfrm>
           <a:prstGeom prst="rect">
             <a:avLst/>
@@ -6154,7 +7195,43 @@
           <a:lstStyle/>
           <a:p>
             <a:pPr algn="l">
-              <a:defRPr sz="1900" b="0">
+              <a:defRPr sz="1200" b="1">
+                <a:solidFill>
+                  <a:srgbClr val="2F5BA8"/>
+                </a:solidFill>
+                <a:latin typeface="Aptos"/>
+              </a:defRPr>
+            </a:pPr>
+            <a:r>
+              <a:t>PASO 7</a:t>
+            </a:r>
+          </a:p>
+        </p:txBody>
+      </p:sp>
+      <p:sp>
+        <p:nvSpPr>
+          <p:cNvPr id="13" name="TextBox 12"/>
+          <p:cNvSpPr txBox="1"/>
+          <p:nvPr/>
+        </p:nvSpPr>
+        <p:spPr>
+          <a:xfrm>
+            <a:off x="1664208" y="3886200"/>
+            <a:ext cx="9464040" cy="2007108"/>
+          </a:xfrm>
+          <a:prstGeom prst="rect">
+            <a:avLst/>
+          </a:prstGeom>
+          <a:noFill/>
+        </p:spPr>
+        <p:txBody>
+          <a:bodyPr wrap="square" lIns="45720" rIns="45720" tIns="36576" bIns="36576" anchor="t">
+            <a:spAutoFit/>
+          </a:bodyPr>
+          <a:lstStyle/>
+          <a:p>
+            <a:pPr algn="l">
+              <a:defRPr sz="2000" b="0">
                 <a:solidFill>
                   <a:srgbClr val="1C2330"/>
                 </a:solidFill>
@@ -6162,250 +7239,7 @@
               </a:defRPr>
             </a:pPr>
             <a:r>
-              <a:t>Puedo señalar dónde está.</a:t>
-            </a:r>
-          </a:p>
-        </p:txBody>
-      </p:sp>
-      <p:sp>
-        <p:nvSpPr>
-          <p:cNvPr id="12" name="Rounded Rectangle 11"/>
-          <p:cNvSpPr/>
-          <p:nvPr/>
-        </p:nvSpPr>
-        <p:spPr>
-          <a:xfrm>
-            <a:off x="713232" y="3291839"/>
-            <a:ext cx="420624" cy="420624"/>
-          </a:xfrm>
-          <a:prstGeom prst="roundRect">
-            <a:avLst/>
-          </a:prstGeom>
-          <a:solidFill>
-            <a:srgbClr val="FFFFFF"/>
-          </a:solidFill>
-          <a:ln>
-            <a:solidFill>
-              <a:srgbClr val="2F5BA8"/>
-            </a:solidFill>
-          </a:ln>
-        </p:spPr>
-        <p:style>
-          <a:lnRef idx="1">
-            <a:schemeClr val="accent1"/>
-          </a:lnRef>
-          <a:fillRef idx="3">
-            <a:schemeClr val="accent1"/>
-          </a:fillRef>
-          <a:effectRef idx="2">
-            <a:schemeClr val="accent1"/>
-          </a:effectRef>
-          <a:fontRef idx="minor">
-            <a:schemeClr val="lt1"/>
-          </a:fontRef>
-        </p:style>
-        <p:txBody>
-          <a:bodyPr rtlCol="0" anchor="ctr"/>
-          <a:lstStyle/>
-          <a:p>
-            <a:pPr algn="ctr"/>
-          </a:p>
-        </p:txBody>
-      </p:sp>
-      <p:sp>
-        <p:nvSpPr>
-          <p:cNvPr id="13" name="TextBox 12"/>
-          <p:cNvSpPr txBox="1"/>
-          <p:nvPr/>
-        </p:nvSpPr>
-        <p:spPr>
-          <a:xfrm>
-            <a:off x="1389888" y="3273551"/>
-            <a:ext cx="9829800" cy="960120"/>
-          </a:xfrm>
-          <a:prstGeom prst="rect">
-            <a:avLst/>
-          </a:prstGeom>
-          <a:noFill/>
-        </p:spPr>
-        <p:txBody>
-          <a:bodyPr wrap="square" lIns="45720" rIns="45720" tIns="36576" bIns="36576" anchor="t">
-            <a:spAutoFit/>
-          </a:bodyPr>
-          <a:lstStyle/>
-          <a:p>
-            <a:pPr algn="l">
-              <a:defRPr sz="1900" b="0">
-                <a:solidFill>
-                  <a:srgbClr val="1C2330"/>
-                </a:solidFill>
-                <a:latin typeface="Aptos"/>
-              </a:defRPr>
-            </a:pPr>
-            <a:r>
-              <a:t>Puedo explicar una decisión tomada.</a:t>
-            </a:r>
-          </a:p>
-        </p:txBody>
-      </p:sp>
-      <p:sp>
-        <p:nvSpPr>
-          <p:cNvPr id="14" name="Rounded Rectangle 13"/>
-          <p:cNvSpPr/>
-          <p:nvPr/>
-        </p:nvSpPr>
-        <p:spPr>
-          <a:xfrm>
-            <a:off x="713232" y="4288536"/>
-            <a:ext cx="420624" cy="420624"/>
-          </a:xfrm>
-          <a:prstGeom prst="roundRect">
-            <a:avLst/>
-          </a:prstGeom>
-          <a:solidFill>
-            <a:srgbClr val="FFFFFF"/>
-          </a:solidFill>
-          <a:ln>
-            <a:solidFill>
-              <a:srgbClr val="2F5BA8"/>
-            </a:solidFill>
-          </a:ln>
-        </p:spPr>
-        <p:style>
-          <a:lnRef idx="1">
-            <a:schemeClr val="accent1"/>
-          </a:lnRef>
-          <a:fillRef idx="3">
-            <a:schemeClr val="accent1"/>
-          </a:fillRef>
-          <a:effectRef idx="2">
-            <a:schemeClr val="accent1"/>
-          </a:effectRef>
-          <a:fontRef idx="minor">
-            <a:schemeClr val="lt1"/>
-          </a:fontRef>
-        </p:style>
-        <p:txBody>
-          <a:bodyPr rtlCol="0" anchor="ctr"/>
-          <a:lstStyle/>
-          <a:p>
-            <a:pPr algn="ctr"/>
-          </a:p>
-        </p:txBody>
-      </p:sp>
-      <p:sp>
-        <p:nvSpPr>
-          <p:cNvPr id="15" name="TextBox 14"/>
-          <p:cNvSpPr txBox="1"/>
-          <p:nvPr/>
-        </p:nvSpPr>
-        <p:spPr>
-          <a:xfrm>
-            <a:off x="1389888" y="4270248"/>
-            <a:ext cx="9829800" cy="960120"/>
-          </a:xfrm>
-          <a:prstGeom prst="rect">
-            <a:avLst/>
-          </a:prstGeom>
-          <a:noFill/>
-        </p:spPr>
-        <p:txBody>
-          <a:bodyPr wrap="square" lIns="45720" rIns="45720" tIns="36576" bIns="36576" anchor="t">
-            <a:spAutoFit/>
-          </a:bodyPr>
-          <a:lstStyle/>
-          <a:p>
-            <a:pPr algn="l">
-              <a:defRPr sz="1900" b="0">
-                <a:solidFill>
-                  <a:srgbClr val="1C2330"/>
-                </a:solidFill>
-                <a:latin typeface="Aptos"/>
-              </a:defRPr>
-            </a:pPr>
-            <a:r>
-              <a:t>Puedo mostrar una prueba o comprobación.</a:t>
-            </a:r>
-          </a:p>
-        </p:txBody>
-      </p:sp>
-      <p:sp>
-        <p:nvSpPr>
-          <p:cNvPr id="16" name="Rounded Rectangle 15"/>
-          <p:cNvSpPr/>
-          <p:nvPr/>
-        </p:nvSpPr>
-        <p:spPr>
-          <a:xfrm>
-            <a:off x="713232" y="5285231"/>
-            <a:ext cx="420624" cy="420624"/>
-          </a:xfrm>
-          <a:prstGeom prst="roundRect">
-            <a:avLst/>
-          </a:prstGeom>
-          <a:solidFill>
-            <a:srgbClr val="FFFFFF"/>
-          </a:solidFill>
-          <a:ln>
-            <a:solidFill>
-              <a:srgbClr val="2F5BA8"/>
-            </a:solidFill>
-          </a:ln>
-        </p:spPr>
-        <p:style>
-          <a:lnRef idx="1">
-            <a:schemeClr val="accent1"/>
-          </a:lnRef>
-          <a:fillRef idx="3">
-            <a:schemeClr val="accent1"/>
-          </a:fillRef>
-          <a:effectRef idx="2">
-            <a:schemeClr val="accent1"/>
-          </a:effectRef>
-          <a:fontRef idx="minor">
-            <a:schemeClr val="lt1"/>
-          </a:fontRef>
-        </p:style>
-        <p:txBody>
-          <a:bodyPr rtlCol="0" anchor="ctr"/>
-          <a:lstStyle/>
-          <a:p>
-            <a:pPr algn="ctr"/>
-          </a:p>
-        </p:txBody>
-      </p:sp>
-      <p:sp>
-        <p:nvSpPr>
-          <p:cNvPr id="17" name="TextBox 16"/>
-          <p:cNvSpPr txBox="1"/>
-          <p:nvPr/>
-        </p:nvSpPr>
-        <p:spPr>
-          <a:xfrm>
-            <a:off x="1389888" y="5266944"/>
-            <a:ext cx="9829800" cy="960120"/>
-          </a:xfrm>
-          <a:prstGeom prst="rect">
-            <a:avLst/>
-          </a:prstGeom>
-          <a:noFill/>
-        </p:spPr>
-        <p:txBody>
-          <a:bodyPr wrap="square" lIns="45720" rIns="45720" tIns="36576" bIns="36576" anchor="t">
-            <a:spAutoFit/>
-          </a:bodyPr>
-          <a:lstStyle/>
-          <a:p>
-            <a:pPr algn="l">
-              <a:defRPr sz="1900" b="0">
-                <a:solidFill>
-                  <a:srgbClr val="1C2330"/>
-                </a:solidFill>
-                <a:latin typeface="Aptos"/>
-              </a:defRPr>
-            </a:pPr>
-            <a:r>
-              <a:t>He registrado mi aportación individual si el trabajo era de equipo.</a:t>
+              <a:t>¿Qué puedes señalar, explicar y probar al terminar este checkpoint?</a:t>
             </a:r>
           </a:p>
         </p:txBody>
@@ -6545,7 +7379,7 @@
               </a:defRPr>
             </a:pPr>
             <a:r>
-              <a:t>LÍMITES QUE PROTEGEN EL APRENDIZAJE</a:t>
+              <a:t>COMPROBAR</a:t>
             </a:r>
           </a:p>
         </p:txBody>
@@ -6581,7 +7415,7 @@
               </a:defRPr>
             </a:pPr>
             <a:r>
-              <a:t>Seguridad y uso responsable</a:t>
+              <a:t>Evidencia y comprobación</a:t>
             </a:r>
           </a:p>
         </p:txBody>
@@ -6660,7 +7494,7 @@
               </a:defRPr>
             </a:pPr>
             <a:r>
-              <a:t>MiniJarvis · 1.º DAW · Sesión 210 · H1</a:t>
+              <a:t>MiniJarvis · 1.º DAW · Sesión 210 · H1 — Primer MiniJarvis</a:t>
             </a:r>
           </a:p>
         </p:txBody>
@@ -6673,8 +7507,8 @@
         </p:nvSpPr>
         <p:spPr>
           <a:xfrm>
-            <a:off x="621792" y="1298448"/>
-            <a:ext cx="5230368" cy="2176272"/>
+            <a:off x="713232" y="1298448"/>
+            <a:ext cx="420624" cy="420624"/>
           </a:xfrm>
           <a:prstGeom prst="roundRect">
             <a:avLst/>
@@ -6684,7 +7518,7 @@
           </a:solidFill>
           <a:ln>
             <a:solidFill>
-              <a:srgbClr val="E5E9EF"/>
+              <a:srgbClr val="2F5BA8"/>
             </a:solidFill>
           </a:ln>
         </p:spPr>
@@ -6712,57 +7546,14 @@
       </p:sp>
       <p:sp>
         <p:nvSpPr>
-          <p:cNvPr id="9" name="Rounded Rectangle 8"/>
-          <p:cNvSpPr/>
-          <p:nvPr/>
-        </p:nvSpPr>
-        <p:spPr>
-          <a:xfrm>
-            <a:off x="841248" y="1527048"/>
-            <a:ext cx="237744" cy="1719072"/>
-          </a:xfrm>
-          <a:prstGeom prst="roundRect">
-            <a:avLst/>
-          </a:prstGeom>
-          <a:solidFill>
-            <a:srgbClr val="247E5C"/>
-          </a:solidFill>
-          <a:ln>
-            <a:noFill/>
-          </a:ln>
-        </p:spPr>
-        <p:style>
-          <a:lnRef idx="1">
-            <a:schemeClr val="accent1"/>
-          </a:lnRef>
-          <a:fillRef idx="3">
-            <a:schemeClr val="accent1"/>
-          </a:fillRef>
-          <a:effectRef idx="2">
-            <a:schemeClr val="accent1"/>
-          </a:effectRef>
-          <a:fontRef idx="minor">
-            <a:schemeClr val="lt1"/>
-          </a:fontRef>
-        </p:style>
-        <p:txBody>
-          <a:bodyPr rtlCol="0" anchor="ctr"/>
-          <a:lstStyle/>
-          <a:p>
-            <a:pPr algn="ctr"/>
-          </a:p>
-        </p:txBody>
-      </p:sp>
-      <p:sp>
-        <p:nvSpPr>
-          <p:cNvPr id="10" name="TextBox 9"/>
+          <p:cNvPr id="9" name="TextBox 8"/>
           <p:cNvSpPr txBox="1"/>
           <p:nvPr/>
         </p:nvSpPr>
         <p:spPr>
           <a:xfrm>
-            <a:off x="1280160" y="1527048"/>
-            <a:ext cx="4224528" cy="1783080"/>
+            <a:off x="1389888" y="1280160"/>
+            <a:ext cx="9829800" cy="1624584"/>
           </a:xfrm>
           <a:prstGeom prst="rect">
             <a:avLst/>
@@ -6784,21 +7575,21 @@
               </a:defRPr>
             </a:pPr>
             <a:r>
-              <a:t>Trabaja únicamente con datos ficticios.</a:t>
-            </a:r>
-          </a:p>
-        </p:txBody>
-      </p:sp>
-      <p:sp>
-        <p:nvSpPr>
-          <p:cNvPr id="11" name="Rounded Rectangle 10"/>
+              <a:t>conserva el código o la prueba en el lugar indicado por la sesión;</a:t>
+            </a:r>
+          </a:p>
+        </p:txBody>
+      </p:sp>
+      <p:sp>
+        <p:nvSpPr>
+          <p:cNvPr id="10" name="Rounded Rectangle 9"/>
           <p:cNvSpPr/>
           <p:nvPr/>
         </p:nvSpPr>
         <p:spPr>
           <a:xfrm>
-            <a:off x="6126479" y="1298448"/>
-            <a:ext cx="5230368" cy="2176272"/>
+            <a:off x="713232" y="2959607"/>
+            <a:ext cx="420624" cy="420624"/>
           </a:xfrm>
           <a:prstGeom prst="roundRect">
             <a:avLst/>
@@ -6808,7 +7599,7 @@
           </a:solidFill>
           <a:ln>
             <a:solidFill>
-              <a:srgbClr val="E5E9EF"/>
+              <a:srgbClr val="2F5BA8"/>
             </a:solidFill>
           </a:ln>
         </p:spPr>
@@ -6836,57 +7627,14 @@
       </p:sp>
       <p:sp>
         <p:nvSpPr>
-          <p:cNvPr id="12" name="Rounded Rectangle 11"/>
-          <p:cNvSpPr/>
-          <p:nvPr/>
-        </p:nvSpPr>
-        <p:spPr>
-          <a:xfrm>
-            <a:off x="6345936" y="1527048"/>
-            <a:ext cx="237744" cy="1719072"/>
-          </a:xfrm>
-          <a:prstGeom prst="roundRect">
-            <a:avLst/>
-          </a:prstGeom>
-          <a:solidFill>
-            <a:srgbClr val="C07020"/>
-          </a:solidFill>
-          <a:ln>
-            <a:noFill/>
-          </a:ln>
-        </p:spPr>
-        <p:style>
-          <a:lnRef idx="1">
-            <a:schemeClr val="accent1"/>
-          </a:lnRef>
-          <a:fillRef idx="3">
-            <a:schemeClr val="accent1"/>
-          </a:fillRef>
-          <a:effectRef idx="2">
-            <a:schemeClr val="accent1"/>
-          </a:effectRef>
-          <a:fontRef idx="minor">
-            <a:schemeClr val="lt1"/>
-          </a:fontRef>
-        </p:style>
-        <p:txBody>
-          <a:bodyPr rtlCol="0" anchor="ctr"/>
-          <a:lstStyle/>
-          <a:p>
-            <a:pPr algn="ctr"/>
-          </a:p>
-        </p:txBody>
-      </p:sp>
-      <p:sp>
-        <p:nvSpPr>
-          <p:cNvPr id="13" name="TextBox 12"/>
+          <p:cNvPr id="11" name="TextBox 10"/>
           <p:cNvSpPr txBox="1"/>
           <p:nvPr/>
         </p:nvSpPr>
         <p:spPr>
           <a:xfrm>
-            <a:off x="6784847" y="1527048"/>
-            <a:ext cx="4224528" cy="1783080"/>
+            <a:off x="1389888" y="2941319"/>
+            <a:ext cx="9829800" cy="1624584"/>
           </a:xfrm>
           <a:prstGeom prst="rect">
             <a:avLst/>
@@ -6908,21 +7656,21 @@
               </a:defRPr>
             </a:pPr>
             <a:r>
-              <a:t>No escribas contraseñas, tokens, claves API ni datos personales.</a:t>
-            </a:r>
-          </a:p>
-        </p:txBody>
-      </p:sp>
-      <p:sp>
-        <p:nvSpPr>
-          <p:cNvPr id="14" name="Rounded Rectangle 13"/>
+              <a:t>añade una sola entrada al diario individual con prueba, bloqueo y siguiente paso;</a:t>
+            </a:r>
+          </a:p>
+        </p:txBody>
+      </p:sp>
+      <p:sp>
+        <p:nvSpPr>
+          <p:cNvPr id="12" name="Rounded Rectangle 11"/>
           <p:cNvSpPr/>
           <p:nvPr/>
         </p:nvSpPr>
         <p:spPr>
           <a:xfrm>
-            <a:off x="621792" y="3675887"/>
-            <a:ext cx="5230368" cy="2176272"/>
+            <a:off x="713232" y="4620767"/>
+            <a:ext cx="420624" cy="420624"/>
           </a:xfrm>
           <a:prstGeom prst="roundRect">
             <a:avLst/>
@@ -6932,7 +7680,7 @@
           </a:solidFill>
           <a:ln>
             <a:solidFill>
-              <a:srgbClr val="E5E9EF"/>
+              <a:srgbClr val="2F5BA8"/>
             </a:solidFill>
           </a:ln>
         </p:spPr>
@@ -6960,57 +7708,14 @@
       </p:sp>
       <p:sp>
         <p:nvSpPr>
-          <p:cNvPr id="15" name="Rounded Rectangle 14"/>
-          <p:cNvSpPr/>
-          <p:nvPr/>
-        </p:nvSpPr>
-        <p:spPr>
-          <a:xfrm>
-            <a:off x="841248" y="3904487"/>
-            <a:ext cx="237744" cy="1719072"/>
-          </a:xfrm>
-          <a:prstGeom prst="roundRect">
-            <a:avLst/>
-          </a:prstGeom>
-          <a:solidFill>
-            <a:srgbClr val="B13A3A"/>
-          </a:solidFill>
-          <a:ln>
-            <a:noFill/>
-          </a:ln>
-        </p:spPr>
-        <p:style>
-          <a:lnRef idx="1">
-            <a:schemeClr val="accent1"/>
-          </a:lnRef>
-          <a:fillRef idx="3">
-            <a:schemeClr val="accent1"/>
-          </a:fillRef>
-          <a:effectRef idx="2">
-            <a:schemeClr val="accent1"/>
-          </a:effectRef>
-          <a:fontRef idx="minor">
-            <a:schemeClr val="lt1"/>
-          </a:fontRef>
-        </p:style>
-        <p:txBody>
-          <a:bodyPr rtlCol="0" anchor="ctr"/>
-          <a:lstStyle/>
-          <a:p>
-            <a:pPr algn="ctr"/>
-          </a:p>
-        </p:txBody>
-      </p:sp>
-      <p:sp>
-        <p:nvSpPr>
-          <p:cNvPr id="16" name="TextBox 15"/>
+          <p:cNvPr id="13" name="TextBox 12"/>
           <p:cNvSpPr txBox="1"/>
           <p:nvPr/>
         </p:nvSpPr>
         <p:spPr>
           <a:xfrm>
-            <a:off x="1280160" y="3904487"/>
-            <a:ext cx="4224528" cy="1783080"/>
+            <a:off x="1389888" y="4602480"/>
+            <a:ext cx="9829800" cy="1624584"/>
           </a:xfrm>
           <a:prstGeom prst="rect">
             <a:avLst/>
@@ -7032,131 +7737,7 @@
               </a:defRPr>
             </a:pPr>
             <a:r>
-              <a:t>Si utilizas IA en un uso permitido, registra qué pediste, qué recibiste, qué cambiaste y cómo lo comprobaste.</a:t>
-            </a:r>
-          </a:p>
-        </p:txBody>
-      </p:sp>
-      <p:sp>
-        <p:nvSpPr>
-          <p:cNvPr id="17" name="Rounded Rectangle 16"/>
-          <p:cNvSpPr/>
-          <p:nvPr/>
-        </p:nvSpPr>
-        <p:spPr>
-          <a:xfrm>
-            <a:off x="6126479" y="3675887"/>
-            <a:ext cx="5230368" cy="2176272"/>
-          </a:xfrm>
-          <a:prstGeom prst="roundRect">
-            <a:avLst/>
-          </a:prstGeom>
-          <a:solidFill>
-            <a:srgbClr val="FFFFFF"/>
-          </a:solidFill>
-          <a:ln>
-            <a:solidFill>
-              <a:srgbClr val="E5E9EF"/>
-            </a:solidFill>
-          </a:ln>
-        </p:spPr>
-        <p:style>
-          <a:lnRef idx="1">
-            <a:schemeClr val="accent1"/>
-          </a:lnRef>
-          <a:fillRef idx="3">
-            <a:schemeClr val="accent1"/>
-          </a:fillRef>
-          <a:effectRef idx="2">
-            <a:schemeClr val="accent1"/>
-          </a:effectRef>
-          <a:fontRef idx="minor">
-            <a:schemeClr val="lt1"/>
-          </a:fontRef>
-        </p:style>
-        <p:txBody>
-          <a:bodyPr rtlCol="0" anchor="ctr"/>
-          <a:lstStyle/>
-          <a:p>
-            <a:pPr algn="ctr"/>
-          </a:p>
-        </p:txBody>
-      </p:sp>
-      <p:sp>
-        <p:nvSpPr>
-          <p:cNvPr id="18" name="Rounded Rectangle 17"/>
-          <p:cNvSpPr/>
-          <p:nvPr/>
-        </p:nvSpPr>
-        <p:spPr>
-          <a:xfrm>
-            <a:off x="6345936" y="3904487"/>
-            <a:ext cx="237744" cy="1719072"/>
-          </a:xfrm>
-          <a:prstGeom prst="roundRect">
-            <a:avLst/>
-          </a:prstGeom>
-          <a:solidFill>
-            <a:srgbClr val="2F5BA8"/>
-          </a:solidFill>
-          <a:ln>
-            <a:noFill/>
-          </a:ln>
-        </p:spPr>
-        <p:style>
-          <a:lnRef idx="1">
-            <a:schemeClr val="accent1"/>
-          </a:lnRef>
-          <a:fillRef idx="3">
-            <a:schemeClr val="accent1"/>
-          </a:fillRef>
-          <a:effectRef idx="2">
-            <a:schemeClr val="accent1"/>
-          </a:effectRef>
-          <a:fontRef idx="minor">
-            <a:schemeClr val="lt1"/>
-          </a:fontRef>
-        </p:style>
-        <p:txBody>
-          <a:bodyPr rtlCol="0" anchor="ctr"/>
-          <a:lstStyle/>
-          <a:p>
-            <a:pPr algn="ctr"/>
-          </a:p>
-        </p:txBody>
-      </p:sp>
-      <p:sp>
-        <p:nvSpPr>
-          <p:cNvPr id="19" name="TextBox 18"/>
-          <p:cNvSpPr txBox="1"/>
-          <p:nvPr/>
-        </p:nvSpPr>
-        <p:spPr>
-          <a:xfrm>
-            <a:off x="6784847" y="3904487"/>
-            <a:ext cx="4224528" cy="1783080"/>
-          </a:xfrm>
-          <a:prstGeom prst="rect">
-            <a:avLst/>
-          </a:prstGeom>
-          <a:noFill/>
-        </p:spPr>
-        <p:txBody>
-          <a:bodyPr wrap="square" lIns="45720" rIns="45720" tIns="36576" bIns="36576" anchor="t">
-            <a:spAutoFit/>
-          </a:bodyPr>
-          <a:lstStyle/>
-          <a:p>
-            <a:pPr algn="l">
-              <a:defRPr sz="1900" b="0">
-                <a:solidFill>
-                  <a:srgbClr val="1C2330"/>
-                </a:solidFill>
-                <a:latin typeface="Aptos"/>
-              </a:defRPr>
-            </a:pPr>
-            <a:r>
-              <a:t>Los ejemplos de Laura solo se consultan después del intento propio.</a:t>
+              <a:t>no copies la misma reflexión en otro documento; el Site personal seleccionará evidencias al cerrar H1.</a:t>
             </a:r>
           </a:p>
         </p:txBody>
@@ -7296,7 +7877,7 @@
               </a:defRPr>
             </a:pPr>
             <a:r>
-              <a:t>EXPLICAR Y DEFENDER</a:t>
+              <a:t>LÍMITES QUE PROTEGEN EL APRENDIZAJE</a:t>
             </a:r>
           </a:p>
         </p:txBody>
@@ -7332,7 +7913,7 @@
               </a:defRPr>
             </a:pPr>
             <a:r>
-              <a:t>Cierre y defensa</a:t>
+              <a:t>Seguridad y uso responsable</a:t>
             </a:r>
           </a:p>
         </p:txBody>
@@ -7411,7 +7992,510 @@
               </a:defRPr>
             </a:pPr>
             <a:r>
-              <a:t>MiniJarvis · 1.º DAW · Sesión 210 · H1</a:t>
+              <a:t>MiniJarvis · 1.º DAW · Sesión 210 · H1 — Primer MiniJarvis</a:t>
+            </a:r>
+          </a:p>
+        </p:txBody>
+      </p:sp>
+      <p:sp>
+        <p:nvSpPr>
+          <p:cNvPr id="8" name="Rounded Rectangle 7"/>
+          <p:cNvSpPr/>
+          <p:nvPr/>
+        </p:nvSpPr>
+        <p:spPr>
+          <a:xfrm>
+            <a:off x="621792" y="1298448"/>
+            <a:ext cx="5230368" cy="4553712"/>
+          </a:xfrm>
+          <a:prstGeom prst="roundRect">
+            <a:avLst/>
+          </a:prstGeom>
+          <a:solidFill>
+            <a:srgbClr val="FFFFFF"/>
+          </a:solidFill>
+          <a:ln>
+            <a:solidFill>
+              <a:srgbClr val="E5E9EF"/>
+            </a:solidFill>
+          </a:ln>
+        </p:spPr>
+        <p:style>
+          <a:lnRef idx="1">
+            <a:schemeClr val="accent1"/>
+          </a:lnRef>
+          <a:fillRef idx="3">
+            <a:schemeClr val="accent1"/>
+          </a:fillRef>
+          <a:effectRef idx="2">
+            <a:schemeClr val="accent1"/>
+          </a:effectRef>
+          <a:fontRef idx="minor">
+            <a:schemeClr val="lt1"/>
+          </a:fontRef>
+        </p:style>
+        <p:txBody>
+          <a:bodyPr rtlCol="0" anchor="ctr"/>
+          <a:lstStyle/>
+          <a:p>
+            <a:pPr algn="ctr"/>
+          </a:p>
+        </p:txBody>
+      </p:sp>
+      <p:sp>
+        <p:nvSpPr>
+          <p:cNvPr id="9" name="Rounded Rectangle 8"/>
+          <p:cNvSpPr/>
+          <p:nvPr/>
+        </p:nvSpPr>
+        <p:spPr>
+          <a:xfrm>
+            <a:off x="841248" y="1527048"/>
+            <a:ext cx="237744" cy="4096512"/>
+          </a:xfrm>
+          <a:prstGeom prst="roundRect">
+            <a:avLst/>
+          </a:prstGeom>
+          <a:solidFill>
+            <a:srgbClr val="247E5C"/>
+          </a:solidFill>
+          <a:ln>
+            <a:noFill/>
+          </a:ln>
+        </p:spPr>
+        <p:style>
+          <a:lnRef idx="1">
+            <a:schemeClr val="accent1"/>
+          </a:lnRef>
+          <a:fillRef idx="3">
+            <a:schemeClr val="accent1"/>
+          </a:fillRef>
+          <a:effectRef idx="2">
+            <a:schemeClr val="accent1"/>
+          </a:effectRef>
+          <a:fontRef idx="minor">
+            <a:schemeClr val="lt1"/>
+          </a:fontRef>
+        </p:style>
+        <p:txBody>
+          <a:bodyPr rtlCol="0" anchor="ctr"/>
+          <a:lstStyle/>
+          <a:p>
+            <a:pPr algn="ctr"/>
+          </a:p>
+        </p:txBody>
+      </p:sp>
+      <p:sp>
+        <p:nvSpPr>
+          <p:cNvPr id="10" name="TextBox 9"/>
+          <p:cNvSpPr txBox="1"/>
+          <p:nvPr/>
+        </p:nvSpPr>
+        <p:spPr>
+          <a:xfrm>
+            <a:off x="1280160" y="1527048"/>
+            <a:ext cx="4224528" cy="4160520"/>
+          </a:xfrm>
+          <a:prstGeom prst="rect">
+            <a:avLst/>
+          </a:prstGeom>
+          <a:noFill/>
+        </p:spPr>
+        <p:txBody>
+          <a:bodyPr wrap="square" lIns="45720" rIns="45720" tIns="36576" bIns="36576" anchor="t">
+            <a:spAutoFit/>
+          </a:bodyPr>
+          <a:lstStyle/>
+          <a:p>
+            <a:pPr algn="l">
+              <a:defRPr sz="1900" b="0">
+                <a:solidFill>
+                  <a:srgbClr val="1C2330"/>
+                </a:solidFill>
+                <a:latin typeface="Aptos"/>
+              </a:defRPr>
+            </a:pPr>
+            <a:r>
+              <a:t>Usa datos ficticios y no publiques credenciales ni información personal.</a:t>
+            </a:r>
+          </a:p>
+        </p:txBody>
+      </p:sp>
+      <p:sp>
+        <p:nvSpPr>
+          <p:cNvPr id="11" name="Rounded Rectangle 10"/>
+          <p:cNvSpPr/>
+          <p:nvPr/>
+        </p:nvSpPr>
+        <p:spPr>
+          <a:xfrm>
+            <a:off x="6126479" y="1298448"/>
+            <a:ext cx="5230368" cy="4553712"/>
+          </a:xfrm>
+          <a:prstGeom prst="roundRect">
+            <a:avLst/>
+          </a:prstGeom>
+          <a:solidFill>
+            <a:srgbClr val="FFFFFF"/>
+          </a:solidFill>
+          <a:ln>
+            <a:solidFill>
+              <a:srgbClr val="E5E9EF"/>
+            </a:solidFill>
+          </a:ln>
+        </p:spPr>
+        <p:style>
+          <a:lnRef idx="1">
+            <a:schemeClr val="accent1"/>
+          </a:lnRef>
+          <a:fillRef idx="3">
+            <a:schemeClr val="accent1"/>
+          </a:fillRef>
+          <a:effectRef idx="2">
+            <a:schemeClr val="accent1"/>
+          </a:effectRef>
+          <a:fontRef idx="minor">
+            <a:schemeClr val="lt1"/>
+          </a:fontRef>
+        </p:style>
+        <p:txBody>
+          <a:bodyPr rtlCol="0" anchor="ctr"/>
+          <a:lstStyle/>
+          <a:p>
+            <a:pPr algn="ctr"/>
+          </a:p>
+        </p:txBody>
+      </p:sp>
+      <p:sp>
+        <p:nvSpPr>
+          <p:cNvPr id="12" name="Rounded Rectangle 11"/>
+          <p:cNvSpPr/>
+          <p:nvPr/>
+        </p:nvSpPr>
+        <p:spPr>
+          <a:xfrm>
+            <a:off x="6345936" y="1527048"/>
+            <a:ext cx="237744" cy="4096512"/>
+          </a:xfrm>
+          <a:prstGeom prst="roundRect">
+            <a:avLst/>
+          </a:prstGeom>
+          <a:solidFill>
+            <a:srgbClr val="C07020"/>
+          </a:solidFill>
+          <a:ln>
+            <a:noFill/>
+          </a:ln>
+        </p:spPr>
+        <p:style>
+          <a:lnRef idx="1">
+            <a:schemeClr val="accent1"/>
+          </a:lnRef>
+          <a:fillRef idx="3">
+            <a:schemeClr val="accent1"/>
+          </a:fillRef>
+          <a:effectRef idx="2">
+            <a:schemeClr val="accent1"/>
+          </a:effectRef>
+          <a:fontRef idx="minor">
+            <a:schemeClr val="lt1"/>
+          </a:fontRef>
+        </p:style>
+        <p:txBody>
+          <a:bodyPr rtlCol="0" anchor="ctr"/>
+          <a:lstStyle/>
+          <a:p>
+            <a:pPr algn="ctr"/>
+          </a:p>
+        </p:txBody>
+      </p:sp>
+      <p:sp>
+        <p:nvSpPr>
+          <p:cNvPr id="13" name="TextBox 12"/>
+          <p:cNvSpPr txBox="1"/>
+          <p:nvPr/>
+        </p:nvSpPr>
+        <p:spPr>
+          <a:xfrm>
+            <a:off x="6784847" y="1527048"/>
+            <a:ext cx="4224528" cy="4160520"/>
+          </a:xfrm>
+          <a:prstGeom prst="rect">
+            <a:avLst/>
+          </a:prstGeom>
+          <a:noFill/>
+        </p:spPr>
+        <p:txBody>
+          <a:bodyPr wrap="square" lIns="45720" rIns="45720" tIns="36576" bIns="36576" anchor="t">
+            <a:spAutoFit/>
+          </a:bodyPr>
+          <a:lstStyle/>
+          <a:p>
+            <a:pPr algn="l">
+              <a:defRPr sz="1900" b="0">
+                <a:solidFill>
+                  <a:srgbClr val="1C2330"/>
+                </a:solidFill>
+                <a:latin typeface="Aptos"/>
+              </a:defRPr>
+            </a:pPr>
+            <a:r>
+              <a:t>Si utilizas IA de forma sustantiva, registra propósito, propuesta, cambios propios y validación en el registro de IA del hito.</a:t>
+            </a:r>
+          </a:p>
+        </p:txBody>
+      </p:sp>
+    </p:spTree>
+  </p:cSld>
+  <p:clrMapOvr>
+    <a:masterClrMapping/>
+  </p:clrMapOvr>
+</p:sld>
+</file>
+
+<file path=ppt/slides/slide9.xml><?xml version="1.0" encoding="utf-8"?>
+<p:sld xmlns:a="http://schemas.openxmlformats.org/drawingml/2006/main" xmlns:p="http://schemas.openxmlformats.org/presentationml/2006/main" xmlns:r="http://schemas.openxmlformats.org/officeDocument/2006/relationships">
+  <p:cSld>
+    <p:spTree>
+      <p:nvGrpSpPr>
+        <p:cNvPr id="1" name=""/>
+        <p:cNvGrpSpPr/>
+        <p:nvPr/>
+      </p:nvGrpSpPr>
+      <p:grpSpPr/>
+      <p:sp>
+        <p:nvSpPr>
+          <p:cNvPr id="2" name="Rectangle 1"/>
+          <p:cNvSpPr/>
+          <p:nvPr/>
+        </p:nvSpPr>
+        <p:spPr>
+          <a:xfrm>
+            <a:off x="0" y="0"/>
+            <a:ext cx="12191695" cy="6858000"/>
+          </a:xfrm>
+          <a:prstGeom prst="rect">
+            <a:avLst/>
+          </a:prstGeom>
+          <a:solidFill>
+            <a:srgbClr val="F9F7F2"/>
+          </a:solidFill>
+          <a:ln>
+            <a:noFill/>
+          </a:ln>
+        </p:spPr>
+        <p:style>
+          <a:lnRef idx="1">
+            <a:schemeClr val="accent1"/>
+          </a:lnRef>
+          <a:fillRef idx="3">
+            <a:schemeClr val="accent1"/>
+          </a:fillRef>
+          <a:effectRef idx="2">
+            <a:schemeClr val="accent1"/>
+          </a:effectRef>
+          <a:fontRef idx="minor">
+            <a:schemeClr val="lt1"/>
+          </a:fontRef>
+        </p:style>
+        <p:txBody>
+          <a:bodyPr rtlCol="0" anchor="ctr"/>
+          <a:lstStyle/>
+          <a:p>
+            <a:pPr algn="ctr"/>
+          </a:p>
+        </p:txBody>
+      </p:sp>
+      <p:sp>
+        <p:nvSpPr>
+          <p:cNvPr id="3" name="Rectangle 2"/>
+          <p:cNvSpPr/>
+          <p:nvPr/>
+        </p:nvSpPr>
+        <p:spPr>
+          <a:xfrm>
+            <a:off x="0" y="0"/>
+            <a:ext cx="164592" cy="6858000"/>
+          </a:xfrm>
+          <a:prstGeom prst="rect">
+            <a:avLst/>
+          </a:prstGeom>
+          <a:solidFill>
+            <a:srgbClr val="2F5BA8"/>
+          </a:solidFill>
+          <a:ln>
+            <a:noFill/>
+          </a:ln>
+        </p:spPr>
+        <p:style>
+          <a:lnRef idx="1">
+            <a:schemeClr val="accent1"/>
+          </a:lnRef>
+          <a:fillRef idx="3">
+            <a:schemeClr val="accent1"/>
+          </a:fillRef>
+          <a:effectRef idx="2">
+            <a:schemeClr val="accent1"/>
+          </a:effectRef>
+          <a:fontRef idx="minor">
+            <a:schemeClr val="lt1"/>
+          </a:fontRef>
+        </p:style>
+        <p:txBody>
+          <a:bodyPr rtlCol="0" anchor="ctr"/>
+          <a:lstStyle/>
+          <a:p>
+            <a:pPr algn="ctr"/>
+          </a:p>
+        </p:txBody>
+      </p:sp>
+      <p:sp>
+        <p:nvSpPr>
+          <p:cNvPr id="4" name="TextBox 3"/>
+          <p:cNvSpPr txBox="1"/>
+          <p:nvPr/>
+        </p:nvSpPr>
+        <p:spPr>
+          <a:xfrm>
+            <a:off x="502920" y="274320"/>
+            <a:ext cx="5486400" cy="256032"/>
+          </a:xfrm>
+          <a:prstGeom prst="rect">
+            <a:avLst/>
+          </a:prstGeom>
+          <a:noFill/>
+        </p:spPr>
+        <p:txBody>
+          <a:bodyPr wrap="square" lIns="45720" rIns="45720" tIns="36576" bIns="36576" anchor="t">
+            <a:spAutoFit/>
+          </a:bodyPr>
+          <a:lstStyle/>
+          <a:p>
+            <a:pPr algn="l">
+              <a:defRPr sz="1000" b="1">
+                <a:solidFill>
+                  <a:srgbClr val="2F5BA8"/>
+                </a:solidFill>
+                <a:latin typeface="Aptos"/>
+              </a:defRPr>
+            </a:pPr>
+            <a:r>
+              <a:t>EXPLICAR Y DEFENDER</a:t>
+            </a:r>
+          </a:p>
+        </p:txBody>
+      </p:sp>
+      <p:sp>
+        <p:nvSpPr>
+          <p:cNvPr id="5" name="TextBox 4"/>
+          <p:cNvSpPr txBox="1"/>
+          <p:nvPr/>
+        </p:nvSpPr>
+        <p:spPr>
+          <a:xfrm>
+            <a:off x="502920" y="603504"/>
+            <a:ext cx="11064240" cy="530352"/>
+          </a:xfrm>
+          <a:prstGeom prst="rect">
+            <a:avLst/>
+          </a:prstGeom>
+          <a:noFill/>
+        </p:spPr>
+        <p:txBody>
+          <a:bodyPr wrap="square" lIns="45720" rIns="45720" tIns="36576" bIns="36576" anchor="t">
+            <a:spAutoFit/>
+          </a:bodyPr>
+          <a:lstStyle/>
+          <a:p>
+            <a:pPr algn="l">
+              <a:defRPr sz="2800" b="1">
+                <a:solidFill>
+                  <a:srgbClr val="1C2330"/>
+                </a:solidFill>
+                <a:latin typeface="Aptos"/>
+              </a:defRPr>
+            </a:pPr>
+            <a:r>
+              <a:t>Cierre y defensa</a:t>
+            </a:r>
+          </a:p>
+        </p:txBody>
+      </p:sp>
+      <p:sp>
+        <p:nvSpPr>
+          <p:cNvPr id="6" name="Rectangle 5"/>
+          <p:cNvSpPr/>
+          <p:nvPr/>
+        </p:nvSpPr>
+        <p:spPr>
+          <a:xfrm>
+            <a:off x="0" y="6601968"/>
+            <a:ext cx="12191695" cy="256032"/>
+          </a:xfrm>
+          <a:prstGeom prst="rect">
+            <a:avLst/>
+          </a:prstGeom>
+          <a:solidFill>
+            <a:srgbClr val="2F5BA8"/>
+          </a:solidFill>
+          <a:ln>
+            <a:noFill/>
+          </a:ln>
+        </p:spPr>
+        <p:style>
+          <a:lnRef idx="1">
+            <a:schemeClr val="accent1"/>
+          </a:lnRef>
+          <a:fillRef idx="3">
+            <a:schemeClr val="accent1"/>
+          </a:fillRef>
+          <a:effectRef idx="2">
+            <a:schemeClr val="accent1"/>
+          </a:effectRef>
+          <a:fontRef idx="minor">
+            <a:schemeClr val="lt1"/>
+          </a:fontRef>
+        </p:style>
+        <p:txBody>
+          <a:bodyPr rtlCol="0" anchor="ctr"/>
+          <a:lstStyle/>
+          <a:p>
+            <a:pPr algn="ctr"/>
+          </a:p>
+        </p:txBody>
+      </p:sp>
+      <p:sp>
+        <p:nvSpPr>
+          <p:cNvPr id="7" name="TextBox 6"/>
+          <p:cNvSpPr txBox="1"/>
+          <p:nvPr/>
+        </p:nvSpPr>
+        <p:spPr>
+          <a:xfrm>
+            <a:off x="411480" y="6629400"/>
+            <a:ext cx="11247120" cy="164592"/>
+          </a:xfrm>
+          <a:prstGeom prst="rect">
+            <a:avLst/>
+          </a:prstGeom>
+          <a:noFill/>
+        </p:spPr>
+        <p:txBody>
+          <a:bodyPr wrap="square" lIns="45720" rIns="45720" tIns="36576" bIns="36576" anchor="t">
+            <a:spAutoFit/>
+          </a:bodyPr>
+          <a:lstStyle/>
+          <a:p>
+            <a:pPr algn="l">
+              <a:defRPr sz="900" b="0">
+                <a:solidFill>
+                  <a:srgbClr val="FFFFFF"/>
+                </a:solidFill>
+                <a:latin typeface="Aptos"/>
+              </a:defRPr>
+            </a:pPr>
+            <a:r>
+              <a:t>MiniJarvis · 1.º DAW · Sesión 210 · H1 — Primer MiniJarvis</a:t>
             </a:r>
           </a:p>
         </p:txBody>
@@ -7528,7 +8612,7 @@
               </a:defRPr>
             </a:pPr>
             <a:r>
-              <a:t>¿qué cambia si modifico el valor de la variable?</a:t>
+              <a:t>¿Qué puedes señalar, explicar y probar al terminar este checkpoint?</a:t>
             </a:r>
           </a:p>
         </p:txBody>
@@ -7895,4 +8979,324 @@
   </a:objectDefaults>
   <a:extraClrSchemeLst/>
 </a:theme>
+</file>
+
+<file path=ppt/theme/theme2.xml><?xml version="1.0" encoding="utf-8"?>
+<a:theme xmlns:a="http://schemas.openxmlformats.org/drawingml/2006/main" name="Office Theme">
+  <a:themeElements>
+    <a:clrScheme name="Office">
+      <a:dk1>
+        <a:sysClr val="windowText" lastClr="000000"/>
+      </a:dk1>
+      <a:lt1>
+        <a:sysClr val="window" lastClr="FFFFFF"/>
+      </a:lt1>
+      <a:dk2>
+        <a:srgbClr val="1F497D"/>
+      </a:dk2>
+      <a:lt2>
+        <a:srgbClr val="EEECE1"/>
+      </a:lt2>
+      <a:accent1>
+        <a:srgbClr val="4F81BD"/>
+      </a:accent1>
+      <a:accent2>
+        <a:srgbClr val="C0504D"/>
+      </a:accent2>
+      <a:accent3>
+        <a:srgbClr val="9BBB59"/>
+      </a:accent3>
+      <a:accent4>
+        <a:srgbClr val="8064A2"/>
+      </a:accent4>
+      <a:accent5>
+        <a:srgbClr val="4BACC6"/>
+      </a:accent5>
+      <a:accent6>
+        <a:srgbClr val="F79646"/>
+      </a:accent6>
+      <a:hlink>
+        <a:srgbClr val="0000FF"/>
+      </a:hlink>
+      <a:folHlink>
+        <a:srgbClr val="800080"/>
+      </a:folHlink>
+    </a:clrScheme>
+    <a:fontScheme name="Office">
+      <a:majorFont>
+        <a:latin typeface="Calibri"/>
+        <a:ea typeface=""/>
+        <a:cs typeface=""/>
+        <a:font script="Jpan" typeface="ＭＳ Ｐゴシック"/>
+        <a:font script="Hang" typeface="맑은 고딕"/>
+        <a:font script="Hans" typeface="宋体"/>
+        <a:font script="Hant" typeface="新細明體"/>
+        <a:font script="Arab" typeface="Times New Roman"/>
+        <a:font script="Hebr" typeface="Times New Roman"/>
+        <a:font script="Thai" typeface="Angsana New"/>
+        <a:font script="Ethi" typeface="Nyala"/>
+        <a:font script="Beng" typeface="Vrinda"/>
+        <a:font script="Gujr" typeface="Shruti"/>
+        <a:font script="Khmr" typeface="MoolBoran"/>
+        <a:font script="Knda" typeface="Tunga"/>
+        <a:font script="Guru" typeface="Raavi"/>
+        <a:font script="Cans" typeface="Euphemia"/>
+        <a:font script="Cher" typeface="Plantagenet Cherokee"/>
+        <a:font script="Yiii" typeface="Microsoft Yi Baiti"/>
+        <a:font script="Tibt" typeface="Microsoft Himalaya"/>
+        <a:font script="Thaa" typeface="MV Boli"/>
+        <a:font script="Deva" typeface="Mangal"/>
+        <a:font script="Telu" typeface="Gautami"/>
+        <a:font script="Taml" typeface="Latha"/>
+        <a:font script="Syrc" typeface="Estrangelo Edessa"/>
+        <a:font script="Orya" typeface="Kalinga"/>
+        <a:font script="Mlym" typeface="Kartika"/>
+        <a:font script="Laoo" typeface="DokChampa"/>
+        <a:font script="Sinh" typeface="Iskoola Pota"/>
+        <a:font script="Mong" typeface="Mongolian Baiti"/>
+        <a:font script="Viet" typeface="Times New Roman"/>
+        <a:font script="Uigh" typeface="Microsoft Uighur"/>
+        <a:font script="Geor" typeface="Sylfaen"/>
+      </a:majorFont>
+      <a:minorFont>
+        <a:latin typeface="Calibri"/>
+        <a:ea typeface=""/>
+        <a:cs typeface=""/>
+        <a:font script="Jpan" typeface="ＭＳ Ｐゴシック"/>
+        <a:font script="Hang" typeface="맑은 고딕"/>
+        <a:font script="Hans" typeface="宋体"/>
+        <a:font script="Hant" typeface="新細明體"/>
+        <a:font script="Arab" typeface="Arial"/>
+        <a:font script="Hebr" typeface="Arial"/>
+        <a:font script="Thai" typeface="Cordia New"/>
+        <a:font script="Ethi" typeface="Nyala"/>
+        <a:font script="Beng" typeface="Vrinda"/>
+        <a:font script="Gujr" typeface="Shruti"/>
+        <a:font script="Khmr" typeface="DaunPenh"/>
+        <a:font script="Knda" typeface="Tunga"/>
+        <a:font script="Guru" typeface="Raavi"/>
+        <a:font script="Cans" typeface="Euphemia"/>
+        <a:font script="Cher" typeface="Plantagenet Cherokee"/>
+        <a:font script="Yiii" typeface="Microsoft Yi Baiti"/>
+        <a:font script="Tibt" typeface="Microsoft Himalaya"/>
+        <a:font script="Thaa" typeface="MV Boli"/>
+        <a:font script="Deva" typeface="Mangal"/>
+        <a:font script="Telu" typeface="Gautami"/>
+        <a:font script="Taml" typeface="Latha"/>
+        <a:font script="Syrc" typeface="Estrangelo Edessa"/>
+        <a:font script="Orya" typeface="Kalinga"/>
+        <a:font script="Mlym" typeface="Kartika"/>
+        <a:font script="Laoo" typeface="DokChampa"/>
+        <a:font script="Sinh" typeface="Iskoola Pota"/>
+        <a:font script="Mong" typeface="Mongolian Baiti"/>
+        <a:font script="Viet" typeface="Arial"/>
+        <a:font script="Uigh" typeface="Microsoft Uighur"/>
+        <a:font script="Geor" typeface="Sylfaen"/>
+      </a:minorFont>
+    </a:fontScheme>
+    <a:fmtScheme name="Office">
+      <a:fillStyleLst>
+        <a:solidFill>
+          <a:schemeClr val="phClr"/>
+        </a:solidFill>
+        <a:gradFill rotWithShape="1">
+          <a:gsLst>
+            <a:gs pos="0">
+              <a:schemeClr val="phClr">
+                <a:tint val="50000"/>
+                <a:satMod val="300000"/>
+              </a:schemeClr>
+            </a:gs>
+            <a:gs pos="35000">
+              <a:schemeClr val="phClr">
+                <a:tint val="37000"/>
+                <a:satMod val="300000"/>
+              </a:schemeClr>
+            </a:gs>
+            <a:gs pos="100000">
+              <a:schemeClr val="phClr">
+                <a:tint val="15000"/>
+                <a:satMod val="350000"/>
+              </a:schemeClr>
+            </a:gs>
+          </a:gsLst>
+          <a:lin ang="16200000" scaled="1"/>
+        </a:gradFill>
+        <a:gradFill rotWithShape="1">
+          <a:gsLst>
+            <a:gs pos="0">
+              <a:schemeClr val="phClr">
+                <a:tint val="100000"/>
+                <a:shade val="100000"/>
+                <a:satMod val="130000"/>
+              </a:schemeClr>
+            </a:gs>
+            <a:gs pos="100000">
+              <a:schemeClr val="phClr">
+                <a:tint val="50000"/>
+                <a:shade val="100000"/>
+                <a:satMod val="350000"/>
+              </a:schemeClr>
+            </a:gs>
+          </a:gsLst>
+          <a:lin ang="16200000" scaled="0"/>
+        </a:gradFill>
+      </a:fillStyleLst>
+      <a:lnStyleLst>
+        <a:ln w="9525" cap="flat" cmpd="sng" algn="ctr">
+          <a:solidFill>
+            <a:schemeClr val="phClr">
+              <a:shade val="95000"/>
+              <a:satMod val="105000"/>
+            </a:schemeClr>
+          </a:solidFill>
+          <a:prstDash val="solid"/>
+        </a:ln>
+        <a:ln w="25400" cap="flat" cmpd="sng" algn="ctr">
+          <a:solidFill>
+            <a:schemeClr val="phClr"/>
+          </a:solidFill>
+          <a:prstDash val="solid"/>
+        </a:ln>
+        <a:ln w="38100" cap="flat" cmpd="sng" algn="ctr">
+          <a:solidFill>
+            <a:schemeClr val="phClr"/>
+          </a:solidFill>
+          <a:prstDash val="solid"/>
+        </a:ln>
+      </a:lnStyleLst>
+      <a:effectStyleLst>
+        <a:effectStyle>
+          <a:effectLst>
+            <a:outerShdw blurRad="40000" dist="20000" dir="5400000" rotWithShape="0">
+              <a:srgbClr val="000000">
+                <a:alpha val="38000"/>
+              </a:srgbClr>
+            </a:outerShdw>
+          </a:effectLst>
+        </a:effectStyle>
+        <a:effectStyle>
+          <a:effectLst>
+            <a:outerShdw blurRad="40000" dist="23000" dir="5400000" rotWithShape="0">
+              <a:srgbClr val="000000">
+                <a:alpha val="35000"/>
+              </a:srgbClr>
+            </a:outerShdw>
+          </a:effectLst>
+        </a:effectStyle>
+        <a:effectStyle>
+          <a:effectLst>
+            <a:outerShdw blurRad="40000" dist="23000" dir="5400000" rotWithShape="0">
+              <a:srgbClr val="000000">
+                <a:alpha val="35000"/>
+              </a:srgbClr>
+            </a:outerShdw>
+          </a:effectLst>
+          <a:scene3d>
+            <a:camera prst="orthographicFront">
+              <a:rot lat="0" lon="0" rev="0"/>
+            </a:camera>
+            <a:lightRig rig="threePt" dir="t">
+              <a:rot lat="0" lon="0" rev="1200000"/>
+            </a:lightRig>
+          </a:scene3d>
+          <a:sp3d>
+            <a:bevelT w="63500" h="25400"/>
+          </a:sp3d>
+        </a:effectStyle>
+      </a:effectStyleLst>
+      <a:bgFillStyleLst>
+        <a:solidFill>
+          <a:schemeClr val="phClr"/>
+        </a:solidFill>
+        <a:gradFill rotWithShape="1">
+          <a:gsLst>
+            <a:gs pos="0">
+              <a:schemeClr val="phClr">
+                <a:tint val="40000"/>
+                <a:satMod val="350000"/>
+              </a:schemeClr>
+            </a:gs>
+            <a:gs pos="40000">
+              <a:schemeClr val="phClr">
+                <a:tint val="45000"/>
+                <a:shade val="99000"/>
+                <a:satMod val="350000"/>
+              </a:schemeClr>
+            </a:gs>
+            <a:gs pos="100000">
+              <a:schemeClr val="phClr">
+                <a:shade val="20000"/>
+                <a:satMod val="255000"/>
+              </a:schemeClr>
+            </a:gs>
+          </a:gsLst>
+          <a:path path="circle">
+            <a:fillToRect l="50000" t="-80000" r="50000" b="180000"/>
+          </a:path>
+        </a:gradFill>
+        <a:gradFill rotWithShape="1">
+          <a:gsLst>
+            <a:gs pos="0">
+              <a:schemeClr val="phClr">
+                <a:tint val="80000"/>
+                <a:satMod val="300000"/>
+              </a:schemeClr>
+            </a:gs>
+            <a:gs pos="100000">
+              <a:schemeClr val="phClr">
+                <a:shade val="30000"/>
+                <a:satMod val="200000"/>
+              </a:schemeClr>
+            </a:gs>
+          </a:gsLst>
+          <a:path path="circle">
+            <a:fillToRect l="50000" t="50000" r="50000" b="50000"/>
+          </a:path>
+        </a:gradFill>
+      </a:bgFillStyleLst>
+    </a:fmtScheme>
+  </a:themeElements>
+  <a:objectDefaults>
+    <a:spDef>
+      <a:spPr/>
+      <a:bodyPr/>
+      <a:lstStyle/>
+      <a:style>
+        <a:lnRef idx="1">
+          <a:schemeClr val="accent1"/>
+        </a:lnRef>
+        <a:fillRef idx="3">
+          <a:schemeClr val="accent1"/>
+        </a:fillRef>
+        <a:effectRef idx="2">
+          <a:schemeClr val="accent1"/>
+        </a:effectRef>
+        <a:fontRef idx="minor">
+          <a:schemeClr val="lt1"/>
+        </a:fontRef>
+      </a:style>
+    </a:spDef>
+    <a:lnDef>
+      <a:spPr/>
+      <a:bodyPr/>
+      <a:lstStyle/>
+      <a:style>
+        <a:lnRef idx="2">
+          <a:schemeClr val="accent1"/>
+        </a:lnRef>
+        <a:fillRef idx="0">
+          <a:schemeClr val="accent1"/>
+        </a:fillRef>
+        <a:effectRef idx="1">
+          <a:schemeClr val="accent1"/>
+        </a:effectRef>
+        <a:fontRef idx="minor">
+          <a:schemeClr val="tx1"/>
+        </a:fontRef>
+      </a:style>
+    </a:lnDef>
+  </a:objectDefaults>
+  <a:extraClrSchemeLst/>
+</a:theme>
 </file>
--- a/02-PROFESORADO/03-PRESENTACIONES/POR-SESION/h1/S210-variables-presentacion.pptx
+++ b/02-PROFESORADO/03-PRESENTACIONES/POR-SESION/h1/S210-variables-presentacion.pptx
@@ -670,7 +670,7 @@
           </a:p>
           <a:p>
             <a:r>
-              <a:t>Diapositiva 2 de 9: Qué debe conseguirse</a:t>
+              <a:t>Diapositiva 2 de 9: Qué aprenderás y cómo lo demostrarás</a:t>
             </a:r>
           </a:p>
           <a:p>
@@ -685,7 +685,7 @@
           </a:p>
           <a:p>
             <a:r>
-              <a:t>- Al terminar: señala la evidencia, explica qué demuestra y reproduce la prueba.</a:t>
+              <a:t>- Comprobación: Quede evidencia individual.</a:t>
             </a:r>
           </a:p>
           <a:p>
@@ -765,7 +765,7 @@
           </a:p>
           <a:p>
             <a:r>
-              <a:t>Diapositiva 3 de 9: Ejemplo o demostración · 1</a:t>
+              <a:t>Diapositiva 3 de 9: Variable = tipo + nombre + valor</a:t>
             </a:r>
           </a:p>
           <a:p>
@@ -775,32 +775,37 @@
           </a:p>
           <a:p>
             <a:r>
-              <a:t>Modela el ejemplo sin resolver la actividad completa; pide una predicción antes de ejecutar.</a:t>
-            </a:r>
-          </a:p>
-          <a:p>
-            <a:r>
-              <a:t>- D1 · Un dato repetido, un problema — Si el curso aparece en tres mensajes y después cambia el año, ¿cuántos sitios tendrías que modificar?</a:t>
-            </a:r>
-          </a:p>
-          <a:p>
-            <a:r>
-              <a:t>- D2 · Variable = dato + nombre + memoria — IDEA: Una variable es una zona de memoria con un nombre que guarda un dato. \| EJEMPLO: int studyHours = 4;</a:t>
-            </a:r>
-          </a:p>
-          <a:p>
-            <a:r>
-              <a:t>- String userName = "Laura";</a:t>
-            </a:r>
-          </a:p>
-          <a:p>
-            <a:r>
-              <a:t>- D3 · Mapa de tipos que aparecen en Tema 1 — ENTEROS: byte / short / int / long \| DECIMALES: float / double \| OTROS: char / boolean / String</a:t>
-            </a:r>
-          </a:p>
-          <a:p>
-            <a:r>
-              <a:t>- D4 · Elige el tipo adecuado — Nombre de usuario → ?</a:t>
+              <a:t>Explica con predicción y ejemplo mínimo; comprueba comprensión antes de continuar.</a:t>
+            </a:r>
+          </a:p>
+          <a:p>
+            <a:r>
+              <a:t>- int · números enteros</a:t>
+            </a:r>
+          </a:p>
+          <a:p>
+            <a:r>
+              <a:t>- double · números con decimales</a:t>
+            </a:r>
+          </a:p>
+          <a:p>
+            <a:r>
+              <a:t>- boolean · true o false</a:t>
+            </a:r>
+          </a:p>
+          <a:p>
+            <a:r>
+              <a:t>- char · un carácter con comillas simples</a:t>
+            </a:r>
+          </a:p>
+          <a:p>
+            <a:r>
+              <a:t>- String · texto con comillas dobles</a:t>
+            </a:r>
+          </a:p>
+          <a:p>
+            <a:r>
+              <a:t>- Elige el tipo por los valores y operaciones que necesitarás.</a:t>
             </a:r>
           </a:p>
           <a:p>
@@ -880,7 +885,7 @@
           </a:p>
           <a:p>
             <a:r>
-              <a:t>Diapositiva 4 de 9: Ejemplo o demostración · 2</a:t>
+              <a:t>Diapositiva 4 de 9: Declarar, inicializar y asignar</a:t>
             </a:r>
           </a:p>
           <a:p>
@@ -890,22 +895,37 @@
           </a:p>
           <a:p>
             <a:r>
-              <a:t>Modela el ejemplo sin resolver la actividad completa; pide una predicción antes de ejecutar.</a:t>
-            </a:r>
-          </a:p>
-          <a:p>
-            <a:r>
-              <a:t>- Horas de estudio → ?</a:t>
-            </a:r>
-          </a:p>
-          <a:p>
-            <a:r>
-              <a:t>- Nota media → ?</a:t>
-            </a:r>
-          </a:p>
-          <a:p>
-            <a:r>
-              <a:t>- Objetivo alcanzado → ?</a:t>
+              <a:t>Explica con predicción y ejemplo mínimo; comprueba comprensión antes de continuar.</a:t>
+            </a:r>
+          </a:p>
+          <a:p>
+            <a:r>
+              <a:t>- int studyHours;       // declaración</a:t>
+            </a:r>
+          </a:p>
+          <a:p>
+            <a:r>
+              <a:t>studyHours = 4;       // inicialización</a:t>
+            </a:r>
+          </a:p>
+          <a:p>
+            <a:r>
+              <a:t>studyHours = 5;       // nueva asignación</a:t>
+            </a:r>
+          </a:p>
+          <a:p>
+            <a:r>
+              <a:t>System.out.println(studyHours);</a:t>
+            </a:r>
+          </a:p>
+          <a:p>
+            <a:r>
+              <a:t>- Salida esperada: 5</a:t>
+            </a:r>
+          </a:p>
+          <a:p>
+            <a:r>
+              <a:t>- No se repite int al cambiar el valor: la variable ya existe.</a:t>
             </a:r>
           </a:p>
           <a:p>
@@ -985,7 +1005,7 @@
           </a:p>
           <a:p>
             <a:r>
-              <a:t>Diapositiva 5 de 9: Actividad central · 1</a:t>
+              <a:t>Diapositiva 5 de 9: Un nombre válido no siempre es bueno</a:t>
             </a:r>
           </a:p>
           <a:p>
@@ -995,27 +1015,32 @@
           </a:p>
           <a:p>
             <a:r>
-              <a:t>Entrega la consigna, observa decisiones y pide una prueba reproducible.</a:t>
-            </a:r>
-          </a:p>
-          <a:p>
-            <a:r>
-              <a:t>- Predice antes de ejecutar cuando haya código.</a:t>
-            </a:r>
-          </a:p>
-          <a:p>
-            <a:r>
-              <a:t>- Realiza la micropráctica o modificación prevista.</a:t>
-            </a:r>
-          </a:p>
-          <a:p>
-            <a:r>
-              <a:t>- Prueba el caso normal y, cuando exista una decisión o conversión, también el caso alternativo o erróneo.</a:t>
-            </a:r>
-          </a:p>
-          <a:p>
-            <a:r>
-              <a:t>- Conserva el código o resultado en el repositorio o espacio indicado.</a:t>
+              <a:t>Explica con predicción y ejemplo mínimo; comprueba comprensión antes de continuar.</a:t>
+            </a:r>
+          </a:p>
+          <a:p>
+            <a:r>
+              <a:t>- VAGO · String x = "Laura";</a:t>
+            </a:r>
+          </a:p>
+          <a:p>
+            <a:r>
+              <a:t>int n = 4;</a:t>
+            </a:r>
+          </a:p>
+          <a:p>
+            <a:r>
+              <a:t>- CLARO · String userName = "Laura";</a:t>
+            </a:r>
+          </a:p>
+          <a:p>
+            <a:r>
+              <a:t>int studyHours = 4;</a:t>
+            </a:r>
+          </a:p>
+          <a:p>
+            <a:r>
+              <a:t>- Usa lowerCamelCase y evita espacios, palabras reservadas y nombres que empiezan por número.</a:t>
             </a:r>
           </a:p>
           <a:p>
@@ -1095,7 +1120,7 @@
           </a:p>
           <a:p>
             <a:r>
-              <a:t>Diapositiva 6 de 9: Actividad central · 2</a:t>
+              <a:t>Diapositiva 6 de 9: Planifica los datos de MiniJarvis</a:t>
             </a:r>
           </a:p>
           <a:p>
@@ -1110,12 +1135,22 @@
           </a:p>
           <a:p>
             <a:r>
-              <a:t>- Registra una sola entrada en el diario individual; no crees un informe paralelo.</a:t>
-            </a:r>
-          </a:p>
-          <a:p>
-            <a:r>
-              <a:t>- ¿Qué puedes señalar, explicar y probar al terminar este checkpoint?</a:t>
+              <a:t>- Anota dato, tipo, nombre, si cambia y dónde se usa.</a:t>
+            </a:r>
+          </a:p>
+          <a:p>
+            <a:r>
+              <a:t>- Implementa al menos dos variables del plan.</a:t>
+            </a:r>
+          </a:p>
+          <a:p>
+            <a:r>
+              <a:t>- Muestra una, cambia su valor y vuelve a mostrarla.</a:t>
+            </a:r>
+          </a:p>
+          <a:p>
+            <a:r>
+              <a:t>- Comprueba que no has creado variables sin uso.</a:t>
             </a:r>
           </a:p>
           <a:p>
@@ -1195,7 +1230,7 @@
           </a:p>
           <a:p>
             <a:r>
-              <a:t>Diapositiva 7 de 9: Evidencia y comprobación</a:t>
+              <a:t>Diapositiva 7 de 9: Microdefensa de una variable</a:t>
             </a:r>
           </a:p>
           <a:p>
@@ -1210,17 +1245,22 @@
           </a:p>
           <a:p>
             <a:r>
-              <a:t>- conserva el código o la prueba en el lugar indicado por la sesión;</a:t>
-            </a:r>
-          </a:p>
-          <a:p>
-            <a:r>
-              <a:t>- añade una sola entrada al diario individual con prueba, bloqueo y siguiente paso;</a:t>
-            </a:r>
-          </a:p>
-          <a:p>
-            <a:r>
-              <a:t>- no copies la misma reflexión en otro documento; el Site personal seleccionará evidencias al cerrar H1.</a:t>
+              <a:t>- Puedo señalar tipo, nombre y valor inicial.</a:t>
+            </a:r>
+          </a:p>
+          <a:p>
+            <a:r>
+              <a:t>- Distingo declaración, inicialización y asignación posterior.</a:t>
+            </a:r>
+          </a:p>
+          <a:p>
+            <a:r>
+              <a:t>- La salida demuestra el valor antes o después del cambio.</a:t>
+            </a:r>
+          </a:p>
+          <a:p>
+            <a:r>
+              <a:t>- El nombre elegido explica el dato que guarda.</a:t>
             </a:r>
           </a:p>
           <a:p>
@@ -1300,7 +1340,7 @@
           </a:p>
           <a:p>
             <a:r>
-              <a:t>Diapositiva 8 de 9: Seguridad y uso responsable</a:t>
+              <a:t>Diapositiva 8 de 9: Comprobación final</a:t>
             </a:r>
           </a:p>
           <a:p>
@@ -1310,17 +1350,12 @@
           </a:p>
           <a:p>
             <a:r>
-              <a:t>Recuerda estos límites antes de que el alumnado comparta o publique:</a:t>
-            </a:r>
-          </a:p>
-          <a:p>
-            <a:r>
-              <a:t>- Usa datos ficticios y no publiques credenciales ni información personal.</a:t>
-            </a:r>
-          </a:p>
-          <a:p>
-            <a:r>
-              <a:t>- Si utilizas IA de forma sustantiva, registra propósito, propuesta, cambios propios y validación en el registro de IA del hito.</a:t>
+              <a:t>Cierra con explicación individual, prueba observable y siguiente paso concreto.</a:t>
+            </a:r>
+          </a:p>
+          <a:p>
+            <a:r>
+              <a:t>- Explica por qué studyHours = studyHours + 1 no es una igualdad matemática.</a:t>
             </a:r>
           </a:p>
           <a:p>
@@ -1400,7 +1435,7 @@
           </a:p>
           <a:p>
             <a:r>
-              <a:t>Diapositiva 9 de 9: Cierre y defensa</a:t>
+              <a:t>Diapositiva 9 de 9: Fuentes utilizadas</a:t>
             </a:r>
           </a:p>
           <a:p>
@@ -1410,12 +1445,22 @@
           </a:p>
           <a:p>
             <a:r>
-              <a:t>Cierra con explicación individual, prueba observable y siguiente paso concreto.</a:t>
-            </a:r>
-          </a:p>
-          <a:p>
-            <a:r>
-              <a:t>- ¿Qué puedes señalar, explicar y probar al terminar este checkpoint?</a:t>
+              <a:t>Indica al alumnado dónde ampliar el contenido y qué fragmentos se han adaptado.</a:t>
+            </a:r>
+          </a:p>
+          <a:p>
+            <a:r>
+              <a:t>- Libro: capítulo 02 · Tema 1: variables y tipos</a:t>
+            </a:r>
+          </a:p>
+          <a:p>
+            <a:r>
+              <a:t>- Fichas S206-S215 y píldoras H1</a:t>
+            </a:r>
+          </a:p>
+          <a:p>
+            <a:r>
+              <a:t>- Ejemplos revisados y adaptados a MiniJarvis; no se copian errores ni capturas antiguas del PDF.</a:t>
             </a:r>
           </a:p>
           <a:p>
@@ -4660,7 +4705,7 @@
               </a:defRPr>
             </a:pPr>
             <a:r>
-              <a:t>H1 — Primer MiniJarvis · Fase HEXA: Planificar — organizar el trabajo</a:t>
+              <a:t>H1 — Primer MiniJarvis</a:t>
             </a:r>
           </a:p>
         </p:txBody>
@@ -4944,7 +4989,7 @@
               </a:defRPr>
             </a:pPr>
             <a:r>
-              <a:t>Qué debe conseguirse</a:t>
+              <a:t>Qué aprenderás y cómo lo demostrarás</a:t>
             </a:r>
           </a:p>
         </p:txBody>
@@ -5185,7 +5230,7 @@
               </a:defRPr>
             </a:pPr>
             <a:r>
-              <a:t>Al terminar: señala la evidencia, explica qué demuestra y reproduce la prueba.</a:t>
+              <a:t>Comprobación: Quede evidencia individual.</a:t>
             </a:r>
           </a:p>
         </p:txBody>
@@ -5325,7 +5370,7 @@
               </a:defRPr>
             </a:pPr>
             <a:r>
-              <a:t>OBSERVAR ANTES DE ACTUAR</a:t>
+              <a:t>COMPRENDER</a:t>
             </a:r>
           </a:p>
         </p:txBody>
@@ -5361,7 +5406,7 @@
               </a:defRPr>
             </a:pPr>
             <a:r>
-              <a:t>Ejemplo o demostración · 1</a:t>
+              <a:t>Variable = tipo + nombre + valor</a:t>
             </a:r>
           </a:p>
         </p:txBody>
@@ -5453,17 +5498,19 @@
         </p:nvSpPr>
         <p:spPr>
           <a:xfrm>
-            <a:off x="621792" y="1353312"/>
-            <a:ext cx="10927080" cy="4526280"/>
+            <a:off x="566928" y="1261872"/>
+            <a:ext cx="3398520" cy="2199132"/>
           </a:xfrm>
           <a:prstGeom prst="roundRect">
             <a:avLst/>
           </a:prstGeom>
           <a:solidFill>
-            <a:srgbClr val="121824"/>
+            <a:srgbClr val="FFFFFF"/>
           </a:solidFill>
           <a:ln>
-            <a:noFill/>
+            <a:solidFill>
+              <a:srgbClr val="E5E9EF"/>
+            </a:solidFill>
           </a:ln>
         </p:spPr>
         <p:style>
@@ -5496,8 +5543,8 @@
         </p:nvSpPr>
         <p:spPr>
           <a:xfrm>
-            <a:off x="932688" y="1627632"/>
-            <a:ext cx="2057400" cy="411480"/>
+            <a:off x="768096" y="1426463"/>
+            <a:ext cx="384048" cy="347472"/>
           </a:xfrm>
           <a:prstGeom prst="rect">
             <a:avLst/>
@@ -5511,7 +5558,7 @@
           <a:lstStyle/>
           <a:p>
             <a:pPr algn="l">
-              <a:defRPr sz="1300" b="1">
+              <a:defRPr sz="1500" b="1">
                 <a:solidFill>
                   <a:srgbClr val="2F5BA8"/>
                 </a:solidFill>
@@ -5519,7 +5566,7 @@
               </a:defRPr>
             </a:pPr>
             <a:r>
-              <a:t>DEMOSTRACIÓN</a:t>
+              <a:t>01</a:t>
             </a:r>
           </a:p>
         </p:txBody>
@@ -5532,8 +5579,8 @@
         </p:nvSpPr>
         <p:spPr>
           <a:xfrm>
-            <a:off x="932688" y="2212848"/>
-            <a:ext cx="9966960" cy="3246120"/>
+            <a:off x="1225295" y="1426463"/>
+            <a:ext cx="2621280" cy="1961388"/>
           </a:xfrm>
           <a:prstGeom prst="rect">
             <a:avLst/>
@@ -5541,88 +5588,606 @@
           <a:noFill/>
         </p:spPr>
         <p:txBody>
-          <a:bodyPr wrap="square" lIns="73152" rIns="45720" tIns="36576">
+          <a:bodyPr wrap="square" lIns="45720" rIns="45720" tIns="36576" bIns="36576" anchor="t">
             <a:spAutoFit/>
           </a:bodyPr>
           <a:lstStyle/>
           <a:p>
-            <a:pPr>
-              <a:spcAft>
-                <a:spcPts val="900"/>
-              </a:spcAft>
-              <a:defRPr sz="1700">
+            <a:pPr algn="l">
+              <a:defRPr sz="1800" b="0">
                 <a:solidFill>
-                  <a:srgbClr val="FFFFFF"/>
+                  <a:srgbClr val="1C2330"/>
                 </a:solidFill>
                 <a:latin typeface="Aptos"/>
               </a:defRPr>
             </a:pPr>
             <a:r>
-              <a:t>•  D1 · Un dato repetido, un problema — Si el curso aparece en tres mensajes y después cambia el año, ¿cuántos sitios tendrías que modificar?</a:t>
-            </a:r>
-          </a:p>
-          <a:p>
-            <a:pPr>
-              <a:spcAft>
-                <a:spcPts val="900"/>
-              </a:spcAft>
-              <a:defRPr sz="1700">
+              <a:t>int · números enteros</a:t>
+            </a:r>
+          </a:p>
+        </p:txBody>
+      </p:sp>
+      <p:sp>
+        <p:nvSpPr>
+          <p:cNvPr id="11" name="Rounded Rectangle 10"/>
+          <p:cNvSpPr/>
+          <p:nvPr/>
+        </p:nvSpPr>
+        <p:spPr>
+          <a:xfrm>
+            <a:off x="4194048" y="1261872"/>
+            <a:ext cx="3398520" cy="2199132"/>
+          </a:xfrm>
+          <a:prstGeom prst="roundRect">
+            <a:avLst/>
+          </a:prstGeom>
+          <a:solidFill>
+            <a:srgbClr val="FFFFFF"/>
+          </a:solidFill>
+          <a:ln>
+            <a:solidFill>
+              <a:srgbClr val="E5E9EF"/>
+            </a:solidFill>
+          </a:ln>
+        </p:spPr>
+        <p:style>
+          <a:lnRef idx="1">
+            <a:schemeClr val="accent1"/>
+          </a:lnRef>
+          <a:fillRef idx="3">
+            <a:schemeClr val="accent1"/>
+          </a:fillRef>
+          <a:effectRef idx="2">
+            <a:schemeClr val="accent1"/>
+          </a:effectRef>
+          <a:fontRef idx="minor">
+            <a:schemeClr val="lt1"/>
+          </a:fontRef>
+        </p:style>
+        <p:txBody>
+          <a:bodyPr rtlCol="0" anchor="ctr"/>
+          <a:lstStyle/>
+          <a:p>
+            <a:pPr algn="ctr"/>
+          </a:p>
+        </p:txBody>
+      </p:sp>
+      <p:sp>
+        <p:nvSpPr>
+          <p:cNvPr id="12" name="TextBox 11"/>
+          <p:cNvSpPr txBox="1"/>
+          <p:nvPr/>
+        </p:nvSpPr>
+        <p:spPr>
+          <a:xfrm>
+            <a:off x="4395216" y="1426463"/>
+            <a:ext cx="384048" cy="347472"/>
+          </a:xfrm>
+          <a:prstGeom prst="rect">
+            <a:avLst/>
+          </a:prstGeom>
+          <a:noFill/>
+        </p:spPr>
+        <p:txBody>
+          <a:bodyPr wrap="square" lIns="45720" rIns="45720" tIns="36576" bIns="36576" anchor="t">
+            <a:spAutoFit/>
+          </a:bodyPr>
+          <a:lstStyle/>
+          <a:p>
+            <a:pPr algn="l">
+              <a:defRPr sz="1500" b="1">
                 <a:solidFill>
-                  <a:srgbClr val="FFFFFF"/>
+                  <a:srgbClr val="2F5BA8"/>
                 </a:solidFill>
                 <a:latin typeface="Aptos"/>
               </a:defRPr>
             </a:pPr>
             <a:r>
-              <a:t>•  D2 · Variable = dato + nombre + memoria — IDEA: Una variable es una zona de memoria con un nombre que guarda un dato. \| EJEMPLO: int studyHours = 4;</a:t>
-            </a:r>
-          </a:p>
-          <a:p>
-            <a:pPr>
-              <a:spcAft>
-                <a:spcPts val="900"/>
-              </a:spcAft>
-              <a:defRPr sz="1700">
+              <a:t>02</a:t>
+            </a:r>
+          </a:p>
+        </p:txBody>
+      </p:sp>
+      <p:sp>
+        <p:nvSpPr>
+          <p:cNvPr id="13" name="TextBox 12"/>
+          <p:cNvSpPr txBox="1"/>
+          <p:nvPr/>
+        </p:nvSpPr>
+        <p:spPr>
+          <a:xfrm>
+            <a:off x="4852416" y="1426463"/>
+            <a:ext cx="2621280" cy="1961388"/>
+          </a:xfrm>
+          <a:prstGeom prst="rect">
+            <a:avLst/>
+          </a:prstGeom>
+          <a:noFill/>
+        </p:spPr>
+        <p:txBody>
+          <a:bodyPr wrap="square" lIns="45720" rIns="45720" tIns="36576" bIns="36576" anchor="t">
+            <a:spAutoFit/>
+          </a:bodyPr>
+          <a:lstStyle/>
+          <a:p>
+            <a:pPr algn="l">
+              <a:defRPr sz="1800" b="0">
                 <a:solidFill>
-                  <a:srgbClr val="FFFFFF"/>
+                  <a:srgbClr val="1C2330"/>
                 </a:solidFill>
                 <a:latin typeface="Aptos"/>
               </a:defRPr>
             </a:pPr>
             <a:r>
-              <a:t>•  String userName = "Laura";</a:t>
-            </a:r>
-          </a:p>
-          <a:p>
-            <a:pPr>
-              <a:spcAft>
-                <a:spcPts val="900"/>
-              </a:spcAft>
-              <a:defRPr sz="1700">
+              <a:t>double · números con decimales</a:t>
+            </a:r>
+          </a:p>
+        </p:txBody>
+      </p:sp>
+      <p:sp>
+        <p:nvSpPr>
+          <p:cNvPr id="14" name="Rounded Rectangle 13"/>
+          <p:cNvSpPr/>
+          <p:nvPr/>
+        </p:nvSpPr>
+        <p:spPr>
+          <a:xfrm>
+            <a:off x="7821167" y="1261872"/>
+            <a:ext cx="3398520" cy="2199132"/>
+          </a:xfrm>
+          <a:prstGeom prst="roundRect">
+            <a:avLst/>
+          </a:prstGeom>
+          <a:solidFill>
+            <a:srgbClr val="FFFFFF"/>
+          </a:solidFill>
+          <a:ln>
+            <a:solidFill>
+              <a:srgbClr val="E5E9EF"/>
+            </a:solidFill>
+          </a:ln>
+        </p:spPr>
+        <p:style>
+          <a:lnRef idx="1">
+            <a:schemeClr val="accent1"/>
+          </a:lnRef>
+          <a:fillRef idx="3">
+            <a:schemeClr val="accent1"/>
+          </a:fillRef>
+          <a:effectRef idx="2">
+            <a:schemeClr val="accent1"/>
+          </a:effectRef>
+          <a:fontRef idx="minor">
+            <a:schemeClr val="lt1"/>
+          </a:fontRef>
+        </p:style>
+        <p:txBody>
+          <a:bodyPr rtlCol="0" anchor="ctr"/>
+          <a:lstStyle/>
+          <a:p>
+            <a:pPr algn="ctr"/>
+          </a:p>
+        </p:txBody>
+      </p:sp>
+      <p:sp>
+        <p:nvSpPr>
+          <p:cNvPr id="15" name="TextBox 14"/>
+          <p:cNvSpPr txBox="1"/>
+          <p:nvPr/>
+        </p:nvSpPr>
+        <p:spPr>
+          <a:xfrm>
+            <a:off x="8022336" y="1426463"/>
+            <a:ext cx="384048" cy="347472"/>
+          </a:xfrm>
+          <a:prstGeom prst="rect">
+            <a:avLst/>
+          </a:prstGeom>
+          <a:noFill/>
+        </p:spPr>
+        <p:txBody>
+          <a:bodyPr wrap="square" lIns="45720" rIns="45720" tIns="36576" bIns="36576" anchor="t">
+            <a:spAutoFit/>
+          </a:bodyPr>
+          <a:lstStyle/>
+          <a:p>
+            <a:pPr algn="l">
+              <a:defRPr sz="1500" b="1">
                 <a:solidFill>
-                  <a:srgbClr val="FFFFFF"/>
+                  <a:srgbClr val="2F5BA8"/>
                 </a:solidFill>
                 <a:latin typeface="Aptos"/>
               </a:defRPr>
             </a:pPr>
             <a:r>
-              <a:t>•  D3 · Mapa de tipos que aparecen en Tema 1 — ENTEROS: byte / short / int / long \| DECIMALES: float / double \| OTROS: char / boolean / String</a:t>
-            </a:r>
-          </a:p>
-          <a:p>
-            <a:pPr>
-              <a:spcAft>
-                <a:spcPts val="900"/>
-              </a:spcAft>
-              <a:defRPr sz="1700">
+              <a:t>03</a:t>
+            </a:r>
+          </a:p>
+        </p:txBody>
+      </p:sp>
+      <p:sp>
+        <p:nvSpPr>
+          <p:cNvPr id="16" name="TextBox 15"/>
+          <p:cNvSpPr txBox="1"/>
+          <p:nvPr/>
+        </p:nvSpPr>
+        <p:spPr>
+          <a:xfrm>
+            <a:off x="8479536" y="1426463"/>
+            <a:ext cx="2621280" cy="1961388"/>
+          </a:xfrm>
+          <a:prstGeom prst="rect">
+            <a:avLst/>
+          </a:prstGeom>
+          <a:noFill/>
+        </p:spPr>
+        <p:txBody>
+          <a:bodyPr wrap="square" lIns="45720" rIns="45720" tIns="36576" bIns="36576" anchor="t">
+            <a:spAutoFit/>
+          </a:bodyPr>
+          <a:lstStyle/>
+          <a:p>
+            <a:pPr algn="l">
+              <a:defRPr sz="1800" b="0">
                 <a:solidFill>
-                  <a:srgbClr val="FFFFFF"/>
+                  <a:srgbClr val="1C2330"/>
                 </a:solidFill>
                 <a:latin typeface="Aptos"/>
               </a:defRPr>
             </a:pPr>
             <a:r>
-              <a:t>•  D4 · Elige el tipo adecuado — Nombre de usuario → ?</a:t>
+              <a:t>boolean · true o false</a:t>
+            </a:r>
+          </a:p>
+        </p:txBody>
+      </p:sp>
+      <p:sp>
+        <p:nvSpPr>
+          <p:cNvPr id="17" name="Rounded Rectangle 16"/>
+          <p:cNvSpPr/>
+          <p:nvPr/>
+        </p:nvSpPr>
+        <p:spPr>
+          <a:xfrm>
+            <a:off x="566928" y="3662172"/>
+            <a:ext cx="3398520" cy="2199132"/>
+          </a:xfrm>
+          <a:prstGeom prst="roundRect">
+            <a:avLst/>
+          </a:prstGeom>
+          <a:solidFill>
+            <a:srgbClr val="FFFFFF"/>
+          </a:solidFill>
+          <a:ln>
+            <a:solidFill>
+              <a:srgbClr val="E5E9EF"/>
+            </a:solidFill>
+          </a:ln>
+        </p:spPr>
+        <p:style>
+          <a:lnRef idx="1">
+            <a:schemeClr val="accent1"/>
+          </a:lnRef>
+          <a:fillRef idx="3">
+            <a:schemeClr val="accent1"/>
+          </a:fillRef>
+          <a:effectRef idx="2">
+            <a:schemeClr val="accent1"/>
+          </a:effectRef>
+          <a:fontRef idx="minor">
+            <a:schemeClr val="lt1"/>
+          </a:fontRef>
+        </p:style>
+        <p:txBody>
+          <a:bodyPr rtlCol="0" anchor="ctr"/>
+          <a:lstStyle/>
+          <a:p>
+            <a:pPr algn="ctr"/>
+          </a:p>
+        </p:txBody>
+      </p:sp>
+      <p:sp>
+        <p:nvSpPr>
+          <p:cNvPr id="18" name="TextBox 17"/>
+          <p:cNvSpPr txBox="1"/>
+          <p:nvPr/>
+        </p:nvSpPr>
+        <p:spPr>
+          <a:xfrm>
+            <a:off x="768096" y="3826763"/>
+            <a:ext cx="384048" cy="347472"/>
+          </a:xfrm>
+          <a:prstGeom prst="rect">
+            <a:avLst/>
+          </a:prstGeom>
+          <a:noFill/>
+        </p:spPr>
+        <p:txBody>
+          <a:bodyPr wrap="square" lIns="45720" rIns="45720" tIns="36576" bIns="36576" anchor="t">
+            <a:spAutoFit/>
+          </a:bodyPr>
+          <a:lstStyle/>
+          <a:p>
+            <a:pPr algn="l">
+              <a:defRPr sz="1500" b="1">
+                <a:solidFill>
+                  <a:srgbClr val="2F5BA8"/>
+                </a:solidFill>
+                <a:latin typeface="Aptos"/>
+              </a:defRPr>
+            </a:pPr>
+            <a:r>
+              <a:t>04</a:t>
+            </a:r>
+          </a:p>
+        </p:txBody>
+      </p:sp>
+      <p:sp>
+        <p:nvSpPr>
+          <p:cNvPr id="19" name="TextBox 18"/>
+          <p:cNvSpPr txBox="1"/>
+          <p:nvPr/>
+        </p:nvSpPr>
+        <p:spPr>
+          <a:xfrm>
+            <a:off x="1225295" y="3826763"/>
+            <a:ext cx="2621280" cy="1961388"/>
+          </a:xfrm>
+          <a:prstGeom prst="rect">
+            <a:avLst/>
+          </a:prstGeom>
+          <a:noFill/>
+        </p:spPr>
+        <p:txBody>
+          <a:bodyPr wrap="square" lIns="45720" rIns="45720" tIns="36576" bIns="36576" anchor="t">
+            <a:spAutoFit/>
+          </a:bodyPr>
+          <a:lstStyle/>
+          <a:p>
+            <a:pPr algn="l">
+              <a:defRPr sz="1800" b="0">
+                <a:solidFill>
+                  <a:srgbClr val="1C2330"/>
+                </a:solidFill>
+                <a:latin typeface="Aptos"/>
+              </a:defRPr>
+            </a:pPr>
+            <a:r>
+              <a:t>char · un carácter con comillas simples</a:t>
+            </a:r>
+          </a:p>
+        </p:txBody>
+      </p:sp>
+      <p:sp>
+        <p:nvSpPr>
+          <p:cNvPr id="20" name="Rounded Rectangle 19"/>
+          <p:cNvSpPr/>
+          <p:nvPr/>
+        </p:nvSpPr>
+        <p:spPr>
+          <a:xfrm>
+            <a:off x="4194048" y="3662172"/>
+            <a:ext cx="3398520" cy="2199132"/>
+          </a:xfrm>
+          <a:prstGeom prst="roundRect">
+            <a:avLst/>
+          </a:prstGeom>
+          <a:solidFill>
+            <a:srgbClr val="FFFFFF"/>
+          </a:solidFill>
+          <a:ln>
+            <a:solidFill>
+              <a:srgbClr val="E5E9EF"/>
+            </a:solidFill>
+          </a:ln>
+        </p:spPr>
+        <p:style>
+          <a:lnRef idx="1">
+            <a:schemeClr val="accent1"/>
+          </a:lnRef>
+          <a:fillRef idx="3">
+            <a:schemeClr val="accent1"/>
+          </a:fillRef>
+          <a:effectRef idx="2">
+            <a:schemeClr val="accent1"/>
+          </a:effectRef>
+          <a:fontRef idx="minor">
+            <a:schemeClr val="lt1"/>
+          </a:fontRef>
+        </p:style>
+        <p:txBody>
+          <a:bodyPr rtlCol="0" anchor="ctr"/>
+          <a:lstStyle/>
+          <a:p>
+            <a:pPr algn="ctr"/>
+          </a:p>
+        </p:txBody>
+      </p:sp>
+      <p:sp>
+        <p:nvSpPr>
+          <p:cNvPr id="21" name="TextBox 20"/>
+          <p:cNvSpPr txBox="1"/>
+          <p:nvPr/>
+        </p:nvSpPr>
+        <p:spPr>
+          <a:xfrm>
+            <a:off x="4395216" y="3826763"/>
+            <a:ext cx="384048" cy="347472"/>
+          </a:xfrm>
+          <a:prstGeom prst="rect">
+            <a:avLst/>
+          </a:prstGeom>
+          <a:noFill/>
+        </p:spPr>
+        <p:txBody>
+          <a:bodyPr wrap="square" lIns="45720" rIns="45720" tIns="36576" bIns="36576" anchor="t">
+            <a:spAutoFit/>
+          </a:bodyPr>
+          <a:lstStyle/>
+          <a:p>
+            <a:pPr algn="l">
+              <a:defRPr sz="1500" b="1">
+                <a:solidFill>
+                  <a:srgbClr val="2F5BA8"/>
+                </a:solidFill>
+                <a:latin typeface="Aptos"/>
+              </a:defRPr>
+            </a:pPr>
+            <a:r>
+              <a:t>05</a:t>
+            </a:r>
+          </a:p>
+        </p:txBody>
+      </p:sp>
+      <p:sp>
+        <p:nvSpPr>
+          <p:cNvPr id="22" name="TextBox 21"/>
+          <p:cNvSpPr txBox="1"/>
+          <p:nvPr/>
+        </p:nvSpPr>
+        <p:spPr>
+          <a:xfrm>
+            <a:off x="4852416" y="3826763"/>
+            <a:ext cx="2621280" cy="1961388"/>
+          </a:xfrm>
+          <a:prstGeom prst="rect">
+            <a:avLst/>
+          </a:prstGeom>
+          <a:noFill/>
+        </p:spPr>
+        <p:txBody>
+          <a:bodyPr wrap="square" lIns="45720" rIns="45720" tIns="36576" bIns="36576" anchor="t">
+            <a:spAutoFit/>
+          </a:bodyPr>
+          <a:lstStyle/>
+          <a:p>
+            <a:pPr algn="l">
+              <a:defRPr sz="1800" b="0">
+                <a:solidFill>
+                  <a:srgbClr val="1C2330"/>
+                </a:solidFill>
+                <a:latin typeface="Aptos"/>
+              </a:defRPr>
+            </a:pPr>
+            <a:r>
+              <a:t>String · texto con comillas dobles</a:t>
+            </a:r>
+          </a:p>
+        </p:txBody>
+      </p:sp>
+      <p:sp>
+        <p:nvSpPr>
+          <p:cNvPr id="23" name="Rounded Rectangle 22"/>
+          <p:cNvSpPr/>
+          <p:nvPr/>
+        </p:nvSpPr>
+        <p:spPr>
+          <a:xfrm>
+            <a:off x="7821167" y="3662172"/>
+            <a:ext cx="3398520" cy="2199132"/>
+          </a:xfrm>
+          <a:prstGeom prst="roundRect">
+            <a:avLst/>
+          </a:prstGeom>
+          <a:solidFill>
+            <a:srgbClr val="FFFFFF"/>
+          </a:solidFill>
+          <a:ln>
+            <a:solidFill>
+              <a:srgbClr val="E5E9EF"/>
+            </a:solidFill>
+          </a:ln>
+        </p:spPr>
+        <p:style>
+          <a:lnRef idx="1">
+            <a:schemeClr val="accent1"/>
+          </a:lnRef>
+          <a:fillRef idx="3">
+            <a:schemeClr val="accent1"/>
+          </a:fillRef>
+          <a:effectRef idx="2">
+            <a:schemeClr val="accent1"/>
+          </a:effectRef>
+          <a:fontRef idx="minor">
+            <a:schemeClr val="lt1"/>
+          </a:fontRef>
+        </p:style>
+        <p:txBody>
+          <a:bodyPr rtlCol="0" anchor="ctr"/>
+          <a:lstStyle/>
+          <a:p>
+            <a:pPr algn="ctr"/>
+          </a:p>
+        </p:txBody>
+      </p:sp>
+      <p:sp>
+        <p:nvSpPr>
+          <p:cNvPr id="24" name="TextBox 23"/>
+          <p:cNvSpPr txBox="1"/>
+          <p:nvPr/>
+        </p:nvSpPr>
+        <p:spPr>
+          <a:xfrm>
+            <a:off x="8022336" y="3826763"/>
+            <a:ext cx="384048" cy="347472"/>
+          </a:xfrm>
+          <a:prstGeom prst="rect">
+            <a:avLst/>
+          </a:prstGeom>
+          <a:noFill/>
+        </p:spPr>
+        <p:txBody>
+          <a:bodyPr wrap="square" lIns="45720" rIns="45720" tIns="36576" bIns="36576" anchor="t">
+            <a:spAutoFit/>
+          </a:bodyPr>
+          <a:lstStyle/>
+          <a:p>
+            <a:pPr algn="l">
+              <a:defRPr sz="1500" b="1">
+                <a:solidFill>
+                  <a:srgbClr val="2F5BA8"/>
+                </a:solidFill>
+                <a:latin typeface="Aptos"/>
+              </a:defRPr>
+            </a:pPr>
+            <a:r>
+              <a:t>06</a:t>
+            </a:r>
+          </a:p>
+        </p:txBody>
+      </p:sp>
+      <p:sp>
+        <p:nvSpPr>
+          <p:cNvPr id="25" name="TextBox 24"/>
+          <p:cNvSpPr txBox="1"/>
+          <p:nvPr/>
+        </p:nvSpPr>
+        <p:spPr>
+          <a:xfrm>
+            <a:off x="8479536" y="3826763"/>
+            <a:ext cx="2621280" cy="1961388"/>
+          </a:xfrm>
+          <a:prstGeom prst="rect">
+            <a:avLst/>
+          </a:prstGeom>
+          <a:noFill/>
+        </p:spPr>
+        <p:txBody>
+          <a:bodyPr wrap="square" lIns="45720" rIns="45720" tIns="36576" bIns="36576" anchor="t">
+            <a:spAutoFit/>
+          </a:bodyPr>
+          <a:lstStyle/>
+          <a:p>
+            <a:pPr algn="l">
+              <a:defRPr sz="1800" b="0">
+                <a:solidFill>
+                  <a:srgbClr val="1C2330"/>
+                </a:solidFill>
+                <a:latin typeface="Aptos"/>
+              </a:defRPr>
+            </a:pPr>
+            <a:r>
+              <a:t>Elige el tipo por los valores y operaciones que necesitarás.</a:t>
             </a:r>
           </a:p>
         </p:txBody>
@@ -5762,7 +6327,7 @@
               </a:defRPr>
             </a:pPr>
             <a:r>
-              <a:t>OBSERVAR ANTES DE ACTUAR</a:t>
+              <a:t>CÓDIGO EXPLICADO</a:t>
             </a:r>
           </a:p>
         </p:txBody>
@@ -5798,7 +6363,7 @@
               </a:defRPr>
             </a:pPr>
             <a:r>
-              <a:t>Ejemplo o demostración · 2</a:t>
+              <a:t>Declarar, inicializar y asignar</a:t>
             </a:r>
           </a:p>
         </p:txBody>
@@ -5890,8 +6455,8 @@
         </p:nvSpPr>
         <p:spPr>
           <a:xfrm>
-            <a:off x="621792" y="1353312"/>
-            <a:ext cx="10927080" cy="4526280"/>
+            <a:off x="621792" y="1325880"/>
+            <a:ext cx="7315200" cy="4709160"/>
           </a:xfrm>
           <a:prstGeom prst="roundRect">
             <a:avLst/>
@@ -5900,7 +6465,9 @@
             <a:srgbClr val="121824"/>
           </a:solidFill>
           <a:ln>
-            <a:noFill/>
+            <a:solidFill>
+              <a:srgbClr val="121824"/>
+            </a:solidFill>
           </a:ln>
         </p:spPr>
         <p:style>
@@ -5933,8 +6500,104 @@
         </p:nvSpPr>
         <p:spPr>
           <a:xfrm>
-            <a:off x="932688" y="1627632"/>
-            <a:ext cx="2057400" cy="411480"/>
+            <a:off x="822960" y="1572768"/>
+            <a:ext cx="6903720" cy="4251960"/>
+          </a:xfrm>
+          <a:prstGeom prst="rect">
+            <a:avLst/>
+          </a:prstGeom>
+          <a:noFill/>
+        </p:spPr>
+        <p:txBody>
+          <a:bodyPr wrap="none" lIns="164592" rIns="164592" tIns="109728" bIns="109728">
+            <a:spAutoFit/>
+          </a:bodyPr>
+          <a:lstStyle/>
+          <a:p>
+            <a:pPr>
+              <a:spcAft>
+                <a:spcPts val="0"/>
+              </a:spcAft>
+              <a:defRPr sz="1800">
+                <a:solidFill>
+                  <a:srgbClr val="FFFFFF"/>
+                </a:solidFill>
+                <a:latin typeface="Liberation Mono"/>
+              </a:defRPr>
+            </a:pPr>
+            <a:r>
+              <a:t>int studyHours;       // declaración</a:t>
+            </a:r>
+            <a:br/>
+            <a:r>
+              <a:t>studyHours = 4;       // inicialización</a:t>
+            </a:r>
+            <a:br/>
+            <a:r>
+              <a:t>studyHours = 5;       // nueva asignación</a:t>
+            </a:r>
+            <a:br/>
+            <a:r>
+              <a:t>System.out.println(studyHours);</a:t>
+            </a:r>
+          </a:p>
+        </p:txBody>
+      </p:sp>
+      <p:sp>
+        <p:nvSpPr>
+          <p:cNvPr id="10" name="Rounded Rectangle 9"/>
+          <p:cNvSpPr/>
+          <p:nvPr/>
+        </p:nvSpPr>
+        <p:spPr>
+          <a:xfrm>
+            <a:off x="8156448" y="1325880"/>
+            <a:ext cx="3401568" cy="4709160"/>
+          </a:xfrm>
+          <a:prstGeom prst="roundRect">
+            <a:avLst/>
+          </a:prstGeom>
+          <a:solidFill>
+            <a:srgbClr val="FFFFFF"/>
+          </a:solidFill>
+          <a:ln>
+            <a:solidFill>
+              <a:srgbClr val="E5E9EF"/>
+            </a:solidFill>
+          </a:ln>
+        </p:spPr>
+        <p:style>
+          <a:lnRef idx="1">
+            <a:schemeClr val="accent1"/>
+          </a:lnRef>
+          <a:fillRef idx="3">
+            <a:schemeClr val="accent1"/>
+          </a:fillRef>
+          <a:effectRef idx="2">
+            <a:schemeClr val="accent1"/>
+          </a:effectRef>
+          <a:fontRef idx="minor">
+            <a:schemeClr val="lt1"/>
+          </a:fontRef>
+        </p:style>
+        <p:txBody>
+          <a:bodyPr rtlCol="0" anchor="ctr"/>
+          <a:lstStyle/>
+          <a:p>
+            <a:pPr algn="ctr"/>
+          </a:p>
+        </p:txBody>
+      </p:sp>
+      <p:sp>
+        <p:nvSpPr>
+          <p:cNvPr id="11" name="TextBox 10"/>
+          <p:cNvSpPr txBox="1"/>
+          <p:nvPr/>
+        </p:nvSpPr>
+        <p:spPr>
+          <a:xfrm>
+            <a:off x="8412480" y="1627632"/>
+            <a:ext cx="2880360" cy="320040"/>
           </a:xfrm>
           <a:prstGeom prst="rect">
             <a:avLst/>
@@ -5948,7 +6611,7 @@
           <a:lstStyle/>
           <a:p>
             <a:pPr algn="l">
-              <a:defRPr sz="1300" b="1">
+              <a:defRPr sz="1200" b="1">
                 <a:solidFill>
                   <a:srgbClr val="2F5BA8"/>
                 </a:solidFill>
@@ -5956,21 +6619,21 @@
               </a:defRPr>
             </a:pPr>
             <a:r>
-              <a:t>DEMOSTRACIÓN</a:t>
-            </a:r>
-          </a:p>
-        </p:txBody>
-      </p:sp>
-      <p:sp>
-        <p:nvSpPr>
-          <p:cNvPr id="10" name="TextBox 9"/>
+              <a:t>LEE Y PREDICE</a:t>
+            </a:r>
+          </a:p>
+        </p:txBody>
+      </p:sp>
+      <p:sp>
+        <p:nvSpPr>
+          <p:cNvPr id="12" name="TextBox 11"/>
           <p:cNvSpPr txBox="1"/>
           <p:nvPr/>
         </p:nvSpPr>
         <p:spPr>
           <a:xfrm>
-            <a:off x="932688" y="2212848"/>
-            <a:ext cx="9966960" cy="3246120"/>
+            <a:off x="8394192" y="2103120"/>
+            <a:ext cx="2788920" cy="3474720"/>
           </a:xfrm>
           <a:prstGeom prst="rect">
             <a:avLst/>
@@ -5987,15 +6650,15 @@
               <a:spcAft>
                 <a:spcPts val="900"/>
               </a:spcAft>
-              <a:defRPr sz="2200">
+              <a:defRPr sz="1700">
                 <a:solidFill>
-                  <a:srgbClr val="FFFFFF"/>
+                  <a:srgbClr val="1C2330"/>
                 </a:solidFill>
                 <a:latin typeface="Aptos"/>
               </a:defRPr>
             </a:pPr>
             <a:r>
-              <a:t>•  Horas de estudio → ?</a:t>
+              <a:t>•  Salida esperada: 5</a:t>
             </a:r>
           </a:p>
           <a:p>
@@ -6003,31 +6666,15 @@
               <a:spcAft>
                 <a:spcPts val="900"/>
               </a:spcAft>
-              <a:defRPr sz="2200">
+              <a:defRPr sz="1700">
                 <a:solidFill>
-                  <a:srgbClr val="FFFFFF"/>
+                  <a:srgbClr val="1C2330"/>
                 </a:solidFill>
                 <a:latin typeface="Aptos"/>
               </a:defRPr>
             </a:pPr>
             <a:r>
-              <a:t>•  Nota media → ?</a:t>
-            </a:r>
-          </a:p>
-          <a:p>
-            <a:pPr>
-              <a:spcAft>
-                <a:spcPts val="900"/>
-              </a:spcAft>
-              <a:defRPr sz="2200">
-                <a:solidFill>
-                  <a:srgbClr val="FFFFFF"/>
-                </a:solidFill>
-                <a:latin typeface="Aptos"/>
-              </a:defRPr>
-            </a:pPr>
-            <a:r>
-              <a:t>•  Objetivo alcanzado → ?</a:t>
+              <a:t>•  No se repite int al cambiar el valor: la variable ya existe.</a:t>
             </a:r>
           </a:p>
         </p:txBody>
@@ -6167,7 +6814,7 @@
               </a:defRPr>
             </a:pPr>
             <a:r>
-              <a:t>APLICAR Y DECIDIR</a:t>
+              <a:t>CONTRASTAR PARA DECIDIR</a:t>
             </a:r>
           </a:p>
         </p:txBody>
@@ -6203,7 +6850,7 @@
               </a:defRPr>
             </a:pPr>
             <a:r>
-              <a:t>Actividad central · 1</a:t>
+              <a:t>Un nombre válido no siempre es bueno</a:t>
             </a:r>
           </a:p>
         </p:txBody>
@@ -6295,8 +6942,8 @@
         </p:nvSpPr>
         <p:spPr>
           <a:xfrm>
-            <a:off x="658368" y="1307592"/>
-            <a:ext cx="10835640" cy="1049274"/>
+            <a:off x="621792" y="1325880"/>
+            <a:ext cx="5230368" cy="3401568"/>
           </a:xfrm>
           <a:prstGeom prst="roundRect">
             <a:avLst/>
@@ -6306,7 +6953,7 @@
           </a:solidFill>
           <a:ln>
             <a:solidFill>
-              <a:srgbClr val="E5E9EF"/>
+              <a:srgbClr val="445B80"/>
             </a:solidFill>
           </a:ln>
         </p:spPr>
@@ -6334,14 +6981,59 @@
       </p:sp>
       <p:sp>
         <p:nvSpPr>
-          <p:cNvPr id="9" name="TextBox 8"/>
+          <p:cNvPr id="9" name="Rounded Rectangle 8"/>
+          <p:cNvSpPr/>
+          <p:nvPr/>
+        </p:nvSpPr>
+        <p:spPr>
+          <a:xfrm>
+            <a:off x="850392" y="1572768"/>
+            <a:ext cx="566928" cy="475488"/>
+          </a:xfrm>
+          <a:prstGeom prst="roundRect">
+            <a:avLst/>
+          </a:prstGeom>
+          <a:solidFill>
+            <a:srgbClr val="445B80"/>
+          </a:solidFill>
+          <a:ln>
+            <a:solidFill>
+              <a:srgbClr val="445B80"/>
+            </a:solidFill>
+          </a:ln>
+        </p:spPr>
+        <p:style>
+          <a:lnRef idx="1">
+            <a:schemeClr val="accent1"/>
+          </a:lnRef>
+          <a:fillRef idx="3">
+            <a:schemeClr val="accent1"/>
+          </a:fillRef>
+          <a:effectRef idx="2">
+            <a:schemeClr val="accent1"/>
+          </a:effectRef>
+          <a:fontRef idx="minor">
+            <a:schemeClr val="lt1"/>
+          </a:fontRef>
+        </p:style>
+        <p:txBody>
+          <a:bodyPr rtlCol="0" anchor="ctr"/>
+          <a:lstStyle/>
+          <a:p>
+            <a:pPr algn="ctr"/>
+          </a:p>
+        </p:txBody>
+      </p:sp>
+      <p:sp>
+        <p:nvSpPr>
+          <p:cNvPr id="10" name="TextBox 9"/>
           <p:cNvSpPr txBox="1"/>
           <p:nvPr/>
         </p:nvSpPr>
         <p:spPr>
           <a:xfrm>
-            <a:off x="850392" y="1453895"/>
-            <a:ext cx="685800" cy="384048"/>
+            <a:off x="850392" y="1682496"/>
+            <a:ext cx="566928" cy="182880"/>
           </a:xfrm>
           <a:prstGeom prst="rect">
             <a:avLst/>
@@ -6354,30 +7046,30 @@
           </a:bodyPr>
           <a:lstStyle/>
           <a:p>
-            <a:pPr algn="l">
-              <a:defRPr sz="1200" b="1">
+            <a:pPr algn="ctr">
+              <a:defRPr sz="1300" b="1">
                 <a:solidFill>
-                  <a:srgbClr val="2F5BA8"/>
+                  <a:srgbClr val="FFFFFF"/>
                 </a:solidFill>
                 <a:latin typeface="Aptos"/>
               </a:defRPr>
             </a:pPr>
             <a:r>
-              <a:t>PASO 1</a:t>
-            </a:r>
-          </a:p>
-        </p:txBody>
-      </p:sp>
-      <p:sp>
-        <p:nvSpPr>
-          <p:cNvPr id="10" name="TextBox 9"/>
+              <a:t>A</a:t>
+            </a:r>
+          </a:p>
+        </p:txBody>
+      </p:sp>
+      <p:sp>
+        <p:nvSpPr>
+          <p:cNvPr id="11" name="TextBox 10"/>
           <p:cNvSpPr txBox="1"/>
           <p:nvPr/>
         </p:nvSpPr>
         <p:spPr>
           <a:xfrm>
-            <a:off x="1664208" y="1417319"/>
-            <a:ext cx="9464040" cy="829818"/>
+            <a:off x="896112" y="2304288"/>
+            <a:ext cx="4663440" cy="2011680"/>
           </a:xfrm>
           <a:prstGeom prst="rect">
             <a:avLst/>
@@ -6385,35 +7077,42 @@
           <a:noFill/>
         </p:spPr>
         <p:txBody>
-          <a:bodyPr wrap="square" lIns="45720" rIns="45720" tIns="36576" bIns="36576" anchor="t">
+          <a:bodyPr wrap="none" lIns="164592" rIns="164592" tIns="109728" bIns="109728">
             <a:spAutoFit/>
           </a:bodyPr>
           <a:lstStyle/>
           <a:p>
-            <a:pPr algn="l">
-              <a:defRPr sz="2000" b="0">
+            <a:pPr>
+              <a:spcAft>
+                <a:spcPts val="0"/>
+              </a:spcAft>
+              <a:defRPr sz="1600">
                 <a:solidFill>
                   <a:srgbClr val="1C2330"/>
                 </a:solidFill>
-                <a:latin typeface="Aptos"/>
+                <a:latin typeface="Liberation Mono"/>
               </a:defRPr>
             </a:pPr>
             <a:r>
-              <a:t>Predice antes de ejecutar cuando haya código.</a:t>
-            </a:r>
-          </a:p>
-        </p:txBody>
-      </p:sp>
-      <p:sp>
-        <p:nvSpPr>
-          <p:cNvPr id="11" name="Rounded Rectangle 10"/>
+              <a:t>VAGO · String x = "Laura";</a:t>
+            </a:r>
+            <a:br/>
+            <a:r>
+              <a:t>int n = 4;</a:t>
+            </a:r>
+          </a:p>
+        </p:txBody>
+      </p:sp>
+      <p:sp>
+        <p:nvSpPr>
+          <p:cNvPr id="12" name="Rounded Rectangle 11"/>
           <p:cNvSpPr/>
           <p:nvPr/>
         </p:nvSpPr>
         <p:spPr>
           <a:xfrm>
-            <a:off x="658368" y="2542032"/>
-            <a:ext cx="10835640" cy="1049274"/>
+            <a:off x="6153912" y="1325880"/>
+            <a:ext cx="5230368" cy="3401568"/>
           </a:xfrm>
           <a:prstGeom prst="roundRect">
             <a:avLst/>
@@ -6423,7 +7122,7 @@
           </a:solidFill>
           <a:ln>
             <a:solidFill>
-              <a:srgbClr val="E5E9EF"/>
+              <a:srgbClr val="2F5BA8"/>
             </a:solidFill>
           </a:ln>
         </p:spPr>
@@ -6451,96 +7150,24 @@
       </p:sp>
       <p:sp>
         <p:nvSpPr>
-          <p:cNvPr id="12" name="TextBox 11"/>
-          <p:cNvSpPr txBox="1"/>
-          <p:nvPr/>
-        </p:nvSpPr>
-        <p:spPr>
-          <a:xfrm>
-            <a:off x="850392" y="2688336"/>
-            <a:ext cx="685800" cy="384048"/>
-          </a:xfrm>
-          <a:prstGeom prst="rect">
-            <a:avLst/>
-          </a:prstGeom>
-          <a:noFill/>
-        </p:spPr>
-        <p:txBody>
-          <a:bodyPr wrap="square" lIns="45720" rIns="45720" tIns="36576" bIns="36576" anchor="t">
-            <a:spAutoFit/>
-          </a:bodyPr>
-          <a:lstStyle/>
-          <a:p>
-            <a:pPr algn="l">
-              <a:defRPr sz="1200" b="1">
-                <a:solidFill>
-                  <a:srgbClr val="2F5BA8"/>
-                </a:solidFill>
-                <a:latin typeface="Aptos"/>
-              </a:defRPr>
-            </a:pPr>
-            <a:r>
-              <a:t>PASO 2</a:t>
-            </a:r>
-          </a:p>
-        </p:txBody>
-      </p:sp>
-      <p:sp>
-        <p:nvSpPr>
-          <p:cNvPr id="13" name="TextBox 12"/>
-          <p:cNvSpPr txBox="1"/>
-          <p:nvPr/>
-        </p:nvSpPr>
-        <p:spPr>
-          <a:xfrm>
-            <a:off x="1664208" y="2651760"/>
-            <a:ext cx="9464040" cy="829818"/>
-          </a:xfrm>
-          <a:prstGeom prst="rect">
-            <a:avLst/>
-          </a:prstGeom>
-          <a:noFill/>
-        </p:spPr>
-        <p:txBody>
-          <a:bodyPr wrap="square" lIns="45720" rIns="45720" tIns="36576" bIns="36576" anchor="t">
-            <a:spAutoFit/>
-          </a:bodyPr>
-          <a:lstStyle/>
-          <a:p>
-            <a:pPr algn="l">
-              <a:defRPr sz="2000" b="0">
-                <a:solidFill>
-                  <a:srgbClr val="1C2330"/>
-                </a:solidFill>
-                <a:latin typeface="Aptos"/>
-              </a:defRPr>
-            </a:pPr>
-            <a:r>
-              <a:t>Realiza la micropráctica o modificación prevista.</a:t>
-            </a:r>
-          </a:p>
-        </p:txBody>
-      </p:sp>
-      <p:sp>
-        <p:nvSpPr>
-          <p:cNvPr id="14" name="Rounded Rectangle 13"/>
+          <p:cNvPr id="13" name="Rounded Rectangle 12"/>
           <p:cNvSpPr/>
           <p:nvPr/>
         </p:nvSpPr>
         <p:spPr>
           <a:xfrm>
-            <a:off x="658368" y="3776472"/>
-            <a:ext cx="10835640" cy="1049274"/>
+            <a:off x="6382512" y="1572768"/>
+            <a:ext cx="566928" cy="475488"/>
           </a:xfrm>
           <a:prstGeom prst="roundRect">
             <a:avLst/>
           </a:prstGeom>
           <a:solidFill>
-            <a:srgbClr val="FFFFFF"/>
+            <a:srgbClr val="2F5BA8"/>
           </a:solidFill>
           <a:ln>
             <a:solidFill>
-              <a:srgbClr val="E5E9EF"/>
+              <a:srgbClr val="2F5BA8"/>
             </a:solidFill>
           </a:ln>
         </p:spPr>
@@ -6568,14 +7195,14 @@
       </p:sp>
       <p:sp>
         <p:nvSpPr>
-          <p:cNvPr id="15" name="TextBox 14"/>
+          <p:cNvPr id="14" name="TextBox 13"/>
           <p:cNvSpPr txBox="1"/>
           <p:nvPr/>
         </p:nvSpPr>
         <p:spPr>
           <a:xfrm>
-            <a:off x="850392" y="3922776"/>
-            <a:ext cx="685800" cy="384048"/>
+            <a:off x="6382512" y="1682496"/>
+            <a:ext cx="566928" cy="182880"/>
           </a:xfrm>
           <a:prstGeom prst="rect">
             <a:avLst/>
@@ -6588,30 +7215,30 @@
           </a:bodyPr>
           <a:lstStyle/>
           <a:p>
-            <a:pPr algn="l">
-              <a:defRPr sz="1200" b="1">
+            <a:pPr algn="ctr">
+              <a:defRPr sz="1300" b="1">
                 <a:solidFill>
-                  <a:srgbClr val="2F5BA8"/>
+                  <a:srgbClr val="FFFFFF"/>
                 </a:solidFill>
                 <a:latin typeface="Aptos"/>
               </a:defRPr>
             </a:pPr>
             <a:r>
-              <a:t>PASO 3</a:t>
-            </a:r>
-          </a:p>
-        </p:txBody>
-      </p:sp>
-      <p:sp>
-        <p:nvSpPr>
-          <p:cNvPr id="16" name="TextBox 15"/>
+              <a:t>B</a:t>
+            </a:r>
+          </a:p>
+        </p:txBody>
+      </p:sp>
+      <p:sp>
+        <p:nvSpPr>
+          <p:cNvPr id="15" name="TextBox 14"/>
           <p:cNvSpPr txBox="1"/>
           <p:nvPr/>
         </p:nvSpPr>
         <p:spPr>
           <a:xfrm>
-            <a:off x="1664208" y="3886200"/>
-            <a:ext cx="9464040" cy="829818"/>
+            <a:off x="6428232" y="2304288"/>
+            <a:ext cx="4663440" cy="2011680"/>
           </a:xfrm>
           <a:prstGeom prst="rect">
             <a:avLst/>
@@ -6619,45 +7246,52 @@
           <a:noFill/>
         </p:spPr>
         <p:txBody>
-          <a:bodyPr wrap="square" lIns="45720" rIns="45720" tIns="36576" bIns="36576" anchor="t">
+          <a:bodyPr wrap="none" lIns="164592" rIns="164592" tIns="109728" bIns="109728">
             <a:spAutoFit/>
           </a:bodyPr>
           <a:lstStyle/>
           <a:p>
-            <a:pPr algn="l">
-              <a:defRPr sz="2000" b="0">
+            <a:pPr>
+              <a:spcAft>
+                <a:spcPts val="0"/>
+              </a:spcAft>
+              <a:defRPr sz="1600">
                 <a:solidFill>
                   <a:srgbClr val="1C2330"/>
                 </a:solidFill>
-                <a:latin typeface="Aptos"/>
+                <a:latin typeface="Liberation Mono"/>
               </a:defRPr>
             </a:pPr>
             <a:r>
-              <a:t>Prueba el caso normal y, cuando exista una decisión o conversión, también el caso alternativo o erróneo.</a:t>
-            </a:r>
-          </a:p>
-        </p:txBody>
-      </p:sp>
-      <p:sp>
-        <p:nvSpPr>
-          <p:cNvPr id="17" name="Rounded Rectangle 16"/>
+              <a:t>CLARO · String userName = "Laura";</a:t>
+            </a:r>
+            <a:br/>
+            <a:r>
+              <a:t>int studyHours = 4;</a:t>
+            </a:r>
+          </a:p>
+        </p:txBody>
+      </p:sp>
+      <p:sp>
+        <p:nvSpPr>
+          <p:cNvPr id="16" name="Rounded Rectangle 15"/>
           <p:cNvSpPr/>
           <p:nvPr/>
         </p:nvSpPr>
         <p:spPr>
           <a:xfrm>
-            <a:off x="658368" y="5010912"/>
-            <a:ext cx="10835640" cy="1049274"/>
+            <a:off x="621792" y="5010912"/>
+            <a:ext cx="10762488" cy="932688"/>
           </a:xfrm>
           <a:prstGeom prst="roundRect">
             <a:avLst/>
           </a:prstGeom>
           <a:solidFill>
-            <a:srgbClr val="FFFFFF"/>
+            <a:srgbClr val="121824"/>
           </a:solidFill>
           <a:ln>
             <a:solidFill>
-              <a:srgbClr val="E5E9EF"/>
+              <a:srgbClr val="121824"/>
             </a:solidFill>
           </a:ln>
         </p:spPr>
@@ -6685,14 +7319,14 @@
       </p:sp>
       <p:sp>
         <p:nvSpPr>
-          <p:cNvPr id="18" name="TextBox 17"/>
+          <p:cNvPr id="17" name="TextBox 16"/>
           <p:cNvSpPr txBox="1"/>
           <p:nvPr/>
         </p:nvSpPr>
         <p:spPr>
           <a:xfrm>
-            <a:off x="850392" y="5157216"/>
-            <a:ext cx="685800" cy="384048"/>
+            <a:off x="896112" y="5230368"/>
+            <a:ext cx="10204704" cy="475488"/>
           </a:xfrm>
           <a:prstGeom prst="rect">
             <a:avLst/>
@@ -6705,52 +7339,16 @@
           </a:bodyPr>
           <a:lstStyle/>
           <a:p>
-            <a:pPr algn="l">
-              <a:defRPr sz="1200" b="1">
+            <a:pPr algn="ctr">
+              <a:defRPr sz="1700" b="1">
                 <a:solidFill>
-                  <a:srgbClr val="2F5BA8"/>
+                  <a:srgbClr val="FFFFFF"/>
                 </a:solidFill>
                 <a:latin typeface="Aptos"/>
               </a:defRPr>
             </a:pPr>
             <a:r>
-              <a:t>PASO 4</a:t>
-            </a:r>
-          </a:p>
-        </p:txBody>
-      </p:sp>
-      <p:sp>
-        <p:nvSpPr>
-          <p:cNvPr id="19" name="TextBox 18"/>
-          <p:cNvSpPr txBox="1"/>
-          <p:nvPr/>
-        </p:nvSpPr>
-        <p:spPr>
-          <a:xfrm>
-            <a:off x="1664208" y="5120640"/>
-            <a:ext cx="9464040" cy="829818"/>
-          </a:xfrm>
-          <a:prstGeom prst="rect">
-            <a:avLst/>
-          </a:prstGeom>
-          <a:noFill/>
-        </p:spPr>
-        <p:txBody>
-          <a:bodyPr wrap="square" lIns="45720" rIns="45720" tIns="36576" bIns="36576" anchor="t">
-            <a:spAutoFit/>
-          </a:bodyPr>
-          <a:lstStyle/>
-          <a:p>
-            <a:pPr algn="l">
-              <a:defRPr sz="2000" b="0">
-                <a:solidFill>
-                  <a:srgbClr val="1C2330"/>
-                </a:solidFill>
-                <a:latin typeface="Aptos"/>
-              </a:defRPr>
-            </a:pPr>
-            <a:r>
-              <a:t>Conserva el código o resultado en el repositorio o espacio indicado.</a:t>
+              <a:t>Usa lowerCamelCase y evita espacios, palabras reservadas y nombres que empiezan por número.</a:t>
             </a:r>
           </a:p>
         </p:txBody>
@@ -6926,7 +7524,7 @@
               </a:defRPr>
             </a:pPr>
             <a:r>
-              <a:t>Actividad central · 2</a:t>
+              <a:t>Planifica los datos de MiniJarvis</a:t>
             </a:r>
           </a:p>
         </p:txBody>
@@ -7019,7 +7617,7 @@
         <p:spPr>
           <a:xfrm>
             <a:off x="658368" y="1307592"/>
-            <a:ext cx="10835640" cy="2226564"/>
+            <a:ext cx="10835640" cy="1049274"/>
           </a:xfrm>
           <a:prstGeom prst="roundRect">
             <a:avLst/>
@@ -7086,7 +7684,7 @@
               </a:defRPr>
             </a:pPr>
             <a:r>
-              <a:t>PASO 6</a:t>
+              <a:t>PASO 1</a:t>
             </a:r>
           </a:p>
         </p:txBody>
@@ -7100,7 +7698,7 @@
         <p:spPr>
           <a:xfrm>
             <a:off x="1664208" y="1417319"/>
-            <a:ext cx="9464040" cy="2007108"/>
+            <a:ext cx="9464040" cy="829818"/>
           </a:xfrm>
           <a:prstGeom prst="rect">
             <a:avLst/>
@@ -7122,7 +7720,7 @@
               </a:defRPr>
             </a:pPr>
             <a:r>
-              <a:t>Registra una sola entrada en el diario individual; no crees un informe paralelo.</a:t>
+              <a:t>Anota dato, tipo, nombre, si cambia y dónde se usa.</a:t>
             </a:r>
           </a:p>
         </p:txBody>
@@ -7135,8 +7733,8 @@
         </p:nvSpPr>
         <p:spPr>
           <a:xfrm>
-            <a:off x="658368" y="3776472"/>
-            <a:ext cx="10835640" cy="2226564"/>
+            <a:off x="658368" y="2542032"/>
+            <a:ext cx="10835640" cy="1049274"/>
           </a:xfrm>
           <a:prstGeom prst="roundRect">
             <a:avLst/>
@@ -7180,7 +7778,7 @@
         </p:nvSpPr>
         <p:spPr>
           <a:xfrm>
-            <a:off x="850392" y="3922776"/>
+            <a:off x="850392" y="2688336"/>
             <a:ext cx="685800" cy="384048"/>
           </a:xfrm>
           <a:prstGeom prst="rect">
@@ -7203,7 +7801,7 @@
               </a:defRPr>
             </a:pPr>
             <a:r>
-              <a:t>PASO 7</a:t>
+              <a:t>PASO 2</a:t>
             </a:r>
           </a:p>
         </p:txBody>
@@ -7216,8 +7814,8 @@
         </p:nvSpPr>
         <p:spPr>
           <a:xfrm>
-            <a:off x="1664208" y="3886200"/>
-            <a:ext cx="9464040" cy="2007108"/>
+            <a:off x="1664208" y="2651760"/>
+            <a:ext cx="9464040" cy="829818"/>
           </a:xfrm>
           <a:prstGeom prst="rect">
             <a:avLst/>
@@ -7239,7 +7837,241 @@
               </a:defRPr>
             </a:pPr>
             <a:r>
-              <a:t>¿Qué puedes señalar, explicar y probar al terminar este checkpoint?</a:t>
+              <a:t>Implementa al menos dos variables del plan.</a:t>
+            </a:r>
+          </a:p>
+        </p:txBody>
+      </p:sp>
+      <p:sp>
+        <p:nvSpPr>
+          <p:cNvPr id="14" name="Rounded Rectangle 13"/>
+          <p:cNvSpPr/>
+          <p:nvPr/>
+        </p:nvSpPr>
+        <p:spPr>
+          <a:xfrm>
+            <a:off x="658368" y="3776472"/>
+            <a:ext cx="10835640" cy="1049274"/>
+          </a:xfrm>
+          <a:prstGeom prst="roundRect">
+            <a:avLst/>
+          </a:prstGeom>
+          <a:solidFill>
+            <a:srgbClr val="FFFFFF"/>
+          </a:solidFill>
+          <a:ln>
+            <a:solidFill>
+              <a:srgbClr val="E5E9EF"/>
+            </a:solidFill>
+          </a:ln>
+        </p:spPr>
+        <p:style>
+          <a:lnRef idx="1">
+            <a:schemeClr val="accent1"/>
+          </a:lnRef>
+          <a:fillRef idx="3">
+            <a:schemeClr val="accent1"/>
+          </a:fillRef>
+          <a:effectRef idx="2">
+            <a:schemeClr val="accent1"/>
+          </a:effectRef>
+          <a:fontRef idx="minor">
+            <a:schemeClr val="lt1"/>
+          </a:fontRef>
+        </p:style>
+        <p:txBody>
+          <a:bodyPr rtlCol="0" anchor="ctr"/>
+          <a:lstStyle/>
+          <a:p>
+            <a:pPr algn="ctr"/>
+          </a:p>
+        </p:txBody>
+      </p:sp>
+      <p:sp>
+        <p:nvSpPr>
+          <p:cNvPr id="15" name="TextBox 14"/>
+          <p:cNvSpPr txBox="1"/>
+          <p:nvPr/>
+        </p:nvSpPr>
+        <p:spPr>
+          <a:xfrm>
+            <a:off x="850392" y="3922776"/>
+            <a:ext cx="685800" cy="384048"/>
+          </a:xfrm>
+          <a:prstGeom prst="rect">
+            <a:avLst/>
+          </a:prstGeom>
+          <a:noFill/>
+        </p:spPr>
+        <p:txBody>
+          <a:bodyPr wrap="square" lIns="45720" rIns="45720" tIns="36576" bIns="36576" anchor="t">
+            <a:spAutoFit/>
+          </a:bodyPr>
+          <a:lstStyle/>
+          <a:p>
+            <a:pPr algn="l">
+              <a:defRPr sz="1200" b="1">
+                <a:solidFill>
+                  <a:srgbClr val="2F5BA8"/>
+                </a:solidFill>
+                <a:latin typeface="Aptos"/>
+              </a:defRPr>
+            </a:pPr>
+            <a:r>
+              <a:t>PASO 3</a:t>
+            </a:r>
+          </a:p>
+        </p:txBody>
+      </p:sp>
+      <p:sp>
+        <p:nvSpPr>
+          <p:cNvPr id="16" name="TextBox 15"/>
+          <p:cNvSpPr txBox="1"/>
+          <p:nvPr/>
+        </p:nvSpPr>
+        <p:spPr>
+          <a:xfrm>
+            <a:off x="1664208" y="3886200"/>
+            <a:ext cx="9464040" cy="829818"/>
+          </a:xfrm>
+          <a:prstGeom prst="rect">
+            <a:avLst/>
+          </a:prstGeom>
+          <a:noFill/>
+        </p:spPr>
+        <p:txBody>
+          <a:bodyPr wrap="square" lIns="45720" rIns="45720" tIns="36576" bIns="36576" anchor="t">
+            <a:spAutoFit/>
+          </a:bodyPr>
+          <a:lstStyle/>
+          <a:p>
+            <a:pPr algn="l">
+              <a:defRPr sz="2000" b="0">
+                <a:solidFill>
+                  <a:srgbClr val="1C2330"/>
+                </a:solidFill>
+                <a:latin typeface="Aptos"/>
+              </a:defRPr>
+            </a:pPr>
+            <a:r>
+              <a:t>Muestra una, cambia su valor y vuelve a mostrarla.</a:t>
+            </a:r>
+          </a:p>
+        </p:txBody>
+      </p:sp>
+      <p:sp>
+        <p:nvSpPr>
+          <p:cNvPr id="17" name="Rounded Rectangle 16"/>
+          <p:cNvSpPr/>
+          <p:nvPr/>
+        </p:nvSpPr>
+        <p:spPr>
+          <a:xfrm>
+            <a:off x="658368" y="5010912"/>
+            <a:ext cx="10835640" cy="1049274"/>
+          </a:xfrm>
+          <a:prstGeom prst="roundRect">
+            <a:avLst/>
+          </a:prstGeom>
+          <a:solidFill>
+            <a:srgbClr val="FFFFFF"/>
+          </a:solidFill>
+          <a:ln>
+            <a:solidFill>
+              <a:srgbClr val="E5E9EF"/>
+            </a:solidFill>
+          </a:ln>
+        </p:spPr>
+        <p:style>
+          <a:lnRef idx="1">
+            <a:schemeClr val="accent1"/>
+          </a:lnRef>
+          <a:fillRef idx="3">
+            <a:schemeClr val="accent1"/>
+          </a:fillRef>
+          <a:effectRef idx="2">
+            <a:schemeClr val="accent1"/>
+          </a:effectRef>
+          <a:fontRef idx="minor">
+            <a:schemeClr val="lt1"/>
+          </a:fontRef>
+        </p:style>
+        <p:txBody>
+          <a:bodyPr rtlCol="0" anchor="ctr"/>
+          <a:lstStyle/>
+          <a:p>
+            <a:pPr algn="ctr"/>
+          </a:p>
+        </p:txBody>
+      </p:sp>
+      <p:sp>
+        <p:nvSpPr>
+          <p:cNvPr id="18" name="TextBox 17"/>
+          <p:cNvSpPr txBox="1"/>
+          <p:nvPr/>
+        </p:nvSpPr>
+        <p:spPr>
+          <a:xfrm>
+            <a:off x="850392" y="5157216"/>
+            <a:ext cx="685800" cy="384048"/>
+          </a:xfrm>
+          <a:prstGeom prst="rect">
+            <a:avLst/>
+          </a:prstGeom>
+          <a:noFill/>
+        </p:spPr>
+        <p:txBody>
+          <a:bodyPr wrap="square" lIns="45720" rIns="45720" tIns="36576" bIns="36576" anchor="t">
+            <a:spAutoFit/>
+          </a:bodyPr>
+          <a:lstStyle/>
+          <a:p>
+            <a:pPr algn="l">
+              <a:defRPr sz="1200" b="1">
+                <a:solidFill>
+                  <a:srgbClr val="2F5BA8"/>
+                </a:solidFill>
+                <a:latin typeface="Aptos"/>
+              </a:defRPr>
+            </a:pPr>
+            <a:r>
+              <a:t>PASO 4</a:t>
+            </a:r>
+          </a:p>
+        </p:txBody>
+      </p:sp>
+      <p:sp>
+        <p:nvSpPr>
+          <p:cNvPr id="19" name="TextBox 18"/>
+          <p:cNvSpPr txBox="1"/>
+          <p:nvPr/>
+        </p:nvSpPr>
+        <p:spPr>
+          <a:xfrm>
+            <a:off x="1664208" y="5120640"/>
+            <a:ext cx="9464040" cy="829818"/>
+          </a:xfrm>
+          <a:prstGeom prst="rect">
+            <a:avLst/>
+          </a:prstGeom>
+          <a:noFill/>
+        </p:spPr>
+        <p:txBody>
+          <a:bodyPr wrap="square" lIns="45720" rIns="45720" tIns="36576" bIns="36576" anchor="t">
+            <a:spAutoFit/>
+          </a:bodyPr>
+          <a:lstStyle/>
+          <a:p>
+            <a:pPr algn="l">
+              <a:defRPr sz="2000" b="0">
+                <a:solidFill>
+                  <a:srgbClr val="1C2330"/>
+                </a:solidFill>
+                <a:latin typeface="Aptos"/>
+              </a:defRPr>
+            </a:pPr>
+            <a:r>
+              <a:t>Comprueba que no has creado variables sin uso.</a:t>
             </a:r>
           </a:p>
         </p:txBody>
@@ -7415,7 +8247,7 @@
               </a:defRPr>
             </a:pPr>
             <a:r>
-              <a:t>Evidencia y comprobación</a:t>
+              <a:t>Microdefensa de una variable</a:t>
             </a:r>
           </a:p>
         </p:txBody>
@@ -7553,7 +8385,7 @@
         <p:spPr>
           <a:xfrm>
             <a:off x="1389888" y="1280160"/>
-            <a:ext cx="9829800" cy="1624584"/>
+            <a:ext cx="9829800" cy="1209294"/>
           </a:xfrm>
           <a:prstGeom prst="rect">
             <a:avLst/>
@@ -7575,7 +8407,7 @@
               </a:defRPr>
             </a:pPr>
             <a:r>
-              <a:t>conserva el código o la prueba en el lugar indicado por la sesión;</a:t>
+              <a:t>Puedo señalar tipo, nombre y valor inicial.</a:t>
             </a:r>
           </a:p>
         </p:txBody>
@@ -7588,7 +8420,7 @@
         </p:nvSpPr>
         <p:spPr>
           <a:xfrm>
-            <a:off x="713232" y="2959607"/>
+            <a:off x="713232" y="2544318"/>
             <a:ext cx="420624" cy="420624"/>
           </a:xfrm>
           <a:prstGeom prst="roundRect">
@@ -7633,8 +8465,8 @@
         </p:nvSpPr>
         <p:spPr>
           <a:xfrm>
-            <a:off x="1389888" y="2941319"/>
-            <a:ext cx="9829800" cy="1624584"/>
+            <a:off x="1389888" y="2526029"/>
+            <a:ext cx="9829800" cy="1209294"/>
           </a:xfrm>
           <a:prstGeom prst="rect">
             <a:avLst/>
@@ -7656,7 +8488,7 @@
               </a:defRPr>
             </a:pPr>
             <a:r>
-              <a:t>añade una sola entrada al diario individual con prueba, bloqueo y siguiente paso;</a:t>
+              <a:t>Distingo declaración, inicialización y asignación posterior.</a:t>
             </a:r>
           </a:p>
         </p:txBody>
@@ -7669,7 +8501,7 @@
         </p:nvSpPr>
         <p:spPr>
           <a:xfrm>
-            <a:off x="713232" y="4620767"/>
+            <a:off x="713232" y="3790187"/>
             <a:ext cx="420624" cy="420624"/>
           </a:xfrm>
           <a:prstGeom prst="roundRect">
@@ -7714,8 +8546,8 @@
         </p:nvSpPr>
         <p:spPr>
           <a:xfrm>
-            <a:off x="1389888" y="4602480"/>
-            <a:ext cx="9829800" cy="1624584"/>
+            <a:off x="1389888" y="3771900"/>
+            <a:ext cx="9829800" cy="1209294"/>
           </a:xfrm>
           <a:prstGeom prst="rect">
             <a:avLst/>
@@ -7737,7 +8569,88 @@
               </a:defRPr>
             </a:pPr>
             <a:r>
-              <a:t>no copies la misma reflexión en otro documento; el Site personal seleccionará evidencias al cerrar H1.</a:t>
+              <a:t>La salida demuestra el valor antes o después del cambio.</a:t>
+            </a:r>
+          </a:p>
+        </p:txBody>
+      </p:sp>
+      <p:sp>
+        <p:nvSpPr>
+          <p:cNvPr id="14" name="Rounded Rectangle 13"/>
+          <p:cNvSpPr/>
+          <p:nvPr/>
+        </p:nvSpPr>
+        <p:spPr>
+          <a:xfrm>
+            <a:off x="713232" y="5036057"/>
+            <a:ext cx="420624" cy="420624"/>
+          </a:xfrm>
+          <a:prstGeom prst="roundRect">
+            <a:avLst/>
+          </a:prstGeom>
+          <a:solidFill>
+            <a:srgbClr val="FFFFFF"/>
+          </a:solidFill>
+          <a:ln>
+            <a:solidFill>
+              <a:srgbClr val="2F5BA8"/>
+            </a:solidFill>
+          </a:ln>
+        </p:spPr>
+        <p:style>
+          <a:lnRef idx="1">
+            <a:schemeClr val="accent1"/>
+          </a:lnRef>
+          <a:fillRef idx="3">
+            <a:schemeClr val="accent1"/>
+          </a:fillRef>
+          <a:effectRef idx="2">
+            <a:schemeClr val="accent1"/>
+          </a:effectRef>
+          <a:fontRef idx="minor">
+            <a:schemeClr val="lt1"/>
+          </a:fontRef>
+        </p:style>
+        <p:txBody>
+          <a:bodyPr rtlCol="0" anchor="ctr"/>
+          <a:lstStyle/>
+          <a:p>
+            <a:pPr algn="ctr"/>
+          </a:p>
+        </p:txBody>
+      </p:sp>
+      <p:sp>
+        <p:nvSpPr>
+          <p:cNvPr id="15" name="TextBox 14"/>
+          <p:cNvSpPr txBox="1"/>
+          <p:nvPr/>
+        </p:nvSpPr>
+        <p:spPr>
+          <a:xfrm>
+            <a:off x="1389888" y="5017770"/>
+            <a:ext cx="9829800" cy="1209294"/>
+          </a:xfrm>
+          <a:prstGeom prst="rect">
+            <a:avLst/>
+          </a:prstGeom>
+          <a:noFill/>
+        </p:spPr>
+        <p:txBody>
+          <a:bodyPr wrap="square" lIns="45720" rIns="45720" tIns="36576" bIns="36576" anchor="t">
+            <a:spAutoFit/>
+          </a:bodyPr>
+          <a:lstStyle/>
+          <a:p>
+            <a:pPr algn="l">
+              <a:defRPr sz="1900" b="0">
+                <a:solidFill>
+                  <a:srgbClr val="1C2330"/>
+                </a:solidFill>
+                <a:latin typeface="Aptos"/>
+              </a:defRPr>
+            </a:pPr>
+            <a:r>
+              <a:t>El nombre elegido explica el dato que guarda.</a:t>
             </a:r>
           </a:p>
         </p:txBody>
@@ -7877,7 +8790,7 @@
               </a:defRPr>
             </a:pPr>
             <a:r>
-              <a:t>LÍMITES QUE PROTEGEN EL APRENDIZAJE</a:t>
+              <a:t>EXPLICAR Y DEFENDER</a:t>
             </a:r>
           </a:p>
         </p:txBody>
@@ -7913,7 +8826,7 @@
               </a:defRPr>
             </a:pPr>
             <a:r>
-              <a:t>Seguridad y uso responsable</a:t>
+              <a:t>Comprobación final</a:t>
             </a:r>
           </a:p>
         </p:txBody>
@@ -8006,17 +8919,17 @@
         <p:spPr>
           <a:xfrm>
             <a:off x="621792" y="1298448"/>
-            <a:ext cx="5230368" cy="4553712"/>
+            <a:ext cx="10927080" cy="1828800"/>
           </a:xfrm>
           <a:prstGeom prst="roundRect">
             <a:avLst/>
           </a:prstGeom>
           <a:solidFill>
-            <a:srgbClr val="FFFFFF"/>
+            <a:srgbClr val="2F5BA8"/>
           </a:solidFill>
           <a:ln>
             <a:solidFill>
-              <a:srgbClr val="E5E9EF"/>
+              <a:srgbClr val="2F5BA8"/>
             </a:solidFill>
           </a:ln>
         </p:spPr>
@@ -8044,57 +8957,14 @@
       </p:sp>
       <p:sp>
         <p:nvSpPr>
-          <p:cNvPr id="9" name="Rounded Rectangle 8"/>
-          <p:cNvSpPr/>
-          <p:nvPr/>
-        </p:nvSpPr>
-        <p:spPr>
-          <a:xfrm>
-            <a:off x="841248" y="1527048"/>
-            <a:ext cx="237744" cy="4096512"/>
-          </a:xfrm>
-          <a:prstGeom prst="roundRect">
-            <a:avLst/>
-          </a:prstGeom>
-          <a:solidFill>
-            <a:srgbClr val="247E5C"/>
-          </a:solidFill>
-          <a:ln>
-            <a:noFill/>
-          </a:ln>
-        </p:spPr>
-        <p:style>
-          <a:lnRef idx="1">
-            <a:schemeClr val="accent1"/>
-          </a:lnRef>
-          <a:fillRef idx="3">
-            <a:schemeClr val="accent1"/>
-          </a:fillRef>
-          <a:effectRef idx="2">
-            <a:schemeClr val="accent1"/>
-          </a:effectRef>
-          <a:fontRef idx="minor">
-            <a:schemeClr val="lt1"/>
-          </a:fontRef>
-        </p:style>
-        <p:txBody>
-          <a:bodyPr rtlCol="0" anchor="ctr"/>
-          <a:lstStyle/>
-          <a:p>
-            <a:pPr algn="ctr"/>
-          </a:p>
-        </p:txBody>
-      </p:sp>
-      <p:sp>
-        <p:nvSpPr>
-          <p:cNvPr id="10" name="TextBox 9"/>
+          <p:cNvPr id="9" name="TextBox 8"/>
           <p:cNvSpPr txBox="1"/>
           <p:nvPr/>
         </p:nvSpPr>
         <p:spPr>
           <a:xfrm>
-            <a:off x="1280160" y="1527048"/>
-            <a:ext cx="4224528" cy="4160520"/>
+            <a:off x="932688" y="1591056"/>
+            <a:ext cx="10241280" cy="256032"/>
           </a:xfrm>
           <a:prstGeom prst="rect">
             <a:avLst/>
@@ -8108,117 +8978,29 @@
           <a:lstStyle/>
           <a:p>
             <a:pPr algn="l">
-              <a:defRPr sz="1900" b="0">
+              <a:defRPr sz="1300" b="1">
                 <a:solidFill>
-                  <a:srgbClr val="1C2330"/>
+                  <a:srgbClr val="FFFFFF"/>
                 </a:solidFill>
                 <a:latin typeface="Aptos"/>
               </a:defRPr>
             </a:pPr>
             <a:r>
-              <a:t>Usa datos ficticios y no publiques credenciales ni información personal.</a:t>
-            </a:r>
-          </a:p>
-        </p:txBody>
-      </p:sp>
-      <p:sp>
-        <p:nvSpPr>
-          <p:cNvPr id="11" name="Rounded Rectangle 10"/>
-          <p:cNvSpPr/>
-          <p:nvPr/>
-        </p:nvSpPr>
-        <p:spPr>
-          <a:xfrm>
-            <a:off x="6126479" y="1298448"/>
-            <a:ext cx="5230368" cy="4553712"/>
-          </a:xfrm>
-          <a:prstGeom prst="roundRect">
-            <a:avLst/>
-          </a:prstGeom>
-          <a:solidFill>
-            <a:srgbClr val="FFFFFF"/>
-          </a:solidFill>
-          <a:ln>
-            <a:solidFill>
-              <a:srgbClr val="E5E9EF"/>
-            </a:solidFill>
-          </a:ln>
-        </p:spPr>
-        <p:style>
-          <a:lnRef idx="1">
-            <a:schemeClr val="accent1"/>
-          </a:lnRef>
-          <a:fillRef idx="3">
-            <a:schemeClr val="accent1"/>
-          </a:fillRef>
-          <a:effectRef idx="2">
-            <a:schemeClr val="accent1"/>
-          </a:effectRef>
-          <a:fontRef idx="minor">
-            <a:schemeClr val="lt1"/>
-          </a:fontRef>
-        </p:style>
-        <p:txBody>
-          <a:bodyPr rtlCol="0" anchor="ctr"/>
-          <a:lstStyle/>
-          <a:p>
-            <a:pPr algn="ctr"/>
-          </a:p>
-        </p:txBody>
-      </p:sp>
-      <p:sp>
-        <p:nvSpPr>
-          <p:cNvPr id="12" name="Rounded Rectangle 11"/>
-          <p:cNvSpPr/>
-          <p:nvPr/>
-        </p:nvSpPr>
-        <p:spPr>
-          <a:xfrm>
-            <a:off x="6345936" y="1527048"/>
-            <a:ext cx="237744" cy="4096512"/>
-          </a:xfrm>
-          <a:prstGeom prst="roundRect">
-            <a:avLst/>
-          </a:prstGeom>
-          <a:solidFill>
-            <a:srgbClr val="C07020"/>
-          </a:solidFill>
-          <a:ln>
-            <a:noFill/>
-          </a:ln>
-        </p:spPr>
-        <p:style>
-          <a:lnRef idx="1">
-            <a:schemeClr val="accent1"/>
-          </a:lnRef>
-          <a:fillRef idx="3">
-            <a:schemeClr val="accent1"/>
-          </a:fillRef>
-          <a:effectRef idx="2">
-            <a:schemeClr val="accent1"/>
-          </a:effectRef>
-          <a:fontRef idx="minor">
-            <a:schemeClr val="lt1"/>
-          </a:fontRef>
-        </p:style>
-        <p:txBody>
-          <a:bodyPr rtlCol="0" anchor="ctr"/>
-          <a:lstStyle/>
-          <a:p>
-            <a:pPr algn="ctr"/>
-          </a:p>
-        </p:txBody>
-      </p:sp>
-      <p:sp>
-        <p:nvSpPr>
-          <p:cNvPr id="13" name="TextBox 12"/>
+              <a:t>PREGUNTA O DECISIÓN DE SALIDA</a:t>
+            </a:r>
+          </a:p>
+        </p:txBody>
+      </p:sp>
+      <p:sp>
+        <p:nvSpPr>
+          <p:cNvPr id="10" name="TextBox 9"/>
           <p:cNvSpPr txBox="1"/>
           <p:nvPr/>
         </p:nvSpPr>
         <p:spPr>
           <a:xfrm>
-            <a:off x="6784847" y="1527048"/>
-            <a:ext cx="4224528" cy="4160520"/>
+            <a:off x="932688" y="1975104"/>
+            <a:ext cx="10058400" cy="822960"/>
           </a:xfrm>
           <a:prstGeom prst="rect">
             <a:avLst/>
@@ -8232,15 +9014,51 @@
           <a:lstStyle/>
           <a:p>
             <a:pPr algn="l">
-              <a:defRPr sz="1900" b="0">
+              <a:defRPr sz="2500" b="1">
                 <a:solidFill>
-                  <a:srgbClr val="1C2330"/>
+                  <a:srgbClr val="FFFFFF"/>
                 </a:solidFill>
                 <a:latin typeface="Aptos"/>
               </a:defRPr>
             </a:pPr>
             <a:r>
-              <a:t>Si utilizas IA de forma sustantiva, registra propósito, propuesta, cambios propios y validación en el registro de IA del hito.</a:t>
+              <a:t>Explica por qué studyHours = studyHours + 1 no es una igualdad matemática.</a:t>
+            </a:r>
+          </a:p>
+        </p:txBody>
+      </p:sp>
+      <p:sp>
+        <p:nvSpPr>
+          <p:cNvPr id="11" name="TextBox 10"/>
+          <p:cNvSpPr txBox="1"/>
+          <p:nvPr/>
+        </p:nvSpPr>
+        <p:spPr>
+          <a:xfrm>
+            <a:off x="749808" y="3886200"/>
+            <a:ext cx="10607040" cy="1280160"/>
+          </a:xfrm>
+          <a:prstGeom prst="rect">
+            <a:avLst/>
+          </a:prstGeom>
+          <a:noFill/>
+        </p:spPr>
+        <p:txBody>
+          <a:bodyPr wrap="square" lIns="45720" rIns="45720" tIns="36576" bIns="36576" anchor="ctr">
+            <a:spAutoFit/>
+          </a:bodyPr>
+          <a:lstStyle/>
+          <a:p>
+            <a:pPr algn="ctr">
+              <a:defRPr sz="2300" b="1">
+                <a:solidFill>
+                  <a:srgbClr val="247E5C"/>
+                </a:solidFill>
+                <a:latin typeface="Aptos"/>
+              </a:defRPr>
+            </a:pPr>
+            <a:r>
+              <a:t>La sesión termina cuando la evidencia existe, está comprobada y puede defenderse.</a:t>
             </a:r>
           </a:p>
         </p:txBody>
@@ -8380,7 +9198,7 @@
               </a:defRPr>
             </a:pPr>
             <a:r>
-              <a:t>EXPLICAR Y DEFENDER</a:t>
+              <a:t>TRAZABILIDAD DEL CONTENIDO</a:t>
             </a:r>
           </a:p>
         </p:txBody>
@@ -8416,7 +9234,7 @@
               </a:defRPr>
             </a:pPr>
             <a:r>
-              <a:t>Cierre y defensa</a:t>
+              <a:t>Fuentes utilizadas</a:t>
             </a:r>
           </a:p>
         </p:txBody>
@@ -8502,59 +9320,14 @@
       </p:sp>
       <p:sp>
         <p:nvSpPr>
-          <p:cNvPr id="8" name="Rounded Rectangle 7"/>
-          <p:cNvSpPr/>
-          <p:nvPr/>
-        </p:nvSpPr>
-        <p:spPr>
-          <a:xfrm>
-            <a:off x="621792" y="1298448"/>
-            <a:ext cx="10927080" cy="1828800"/>
-          </a:xfrm>
-          <a:prstGeom prst="roundRect">
-            <a:avLst/>
-          </a:prstGeom>
-          <a:solidFill>
-            <a:srgbClr val="2F5BA8"/>
-          </a:solidFill>
-          <a:ln>
-            <a:solidFill>
-              <a:srgbClr val="2F5BA8"/>
-            </a:solidFill>
-          </a:ln>
-        </p:spPr>
-        <p:style>
-          <a:lnRef idx="1">
-            <a:schemeClr val="accent1"/>
-          </a:lnRef>
-          <a:fillRef idx="3">
-            <a:schemeClr val="accent1"/>
-          </a:fillRef>
-          <a:effectRef idx="2">
-            <a:schemeClr val="accent1"/>
-          </a:effectRef>
-          <a:fontRef idx="minor">
-            <a:schemeClr val="lt1"/>
-          </a:fontRef>
-        </p:style>
-        <p:txBody>
-          <a:bodyPr rtlCol="0" anchor="ctr"/>
-          <a:lstStyle/>
-          <a:p>
-            <a:pPr algn="ctr"/>
-          </a:p>
-        </p:txBody>
-      </p:sp>
-      <p:sp>
-        <p:nvSpPr>
-          <p:cNvPr id="9" name="TextBox 8"/>
+          <p:cNvPr id="8" name="TextBox 7"/>
           <p:cNvSpPr txBox="1"/>
           <p:nvPr/>
         </p:nvSpPr>
         <p:spPr>
           <a:xfrm>
-            <a:off x="932688" y="1591056"/>
-            <a:ext cx="10241280" cy="256032"/>
+            <a:off x="777240" y="1417320"/>
+            <a:ext cx="10515600" cy="658368"/>
           </a:xfrm>
           <a:prstGeom prst="rect">
             <a:avLst/>
@@ -8567,30 +9340,30 @@
           </a:bodyPr>
           <a:lstStyle/>
           <a:p>
-            <a:pPr algn="l">
-              <a:defRPr sz="1300" b="1">
+            <a:pPr algn="ctr">
+              <a:defRPr sz="2300" b="1">
                 <a:solidFill>
-                  <a:srgbClr val="FFFFFF"/>
+                  <a:srgbClr val="1C2330"/>
                 </a:solidFill>
                 <a:latin typeface="Aptos"/>
               </a:defRPr>
             </a:pPr>
             <a:r>
-              <a:t>PREGUNTA O DECISIÓN DE SALIDA</a:t>
-            </a:r>
-          </a:p>
-        </p:txBody>
-      </p:sp>
-      <p:sp>
-        <p:nvSpPr>
-          <p:cNvPr id="10" name="TextBox 9"/>
+              <a:t>Esta presentación selecciona y adapta contenido; no sustituye al libro ni copia el PDF completo.</a:t>
+            </a:r>
+          </a:p>
+        </p:txBody>
+      </p:sp>
+      <p:sp>
+        <p:nvSpPr>
+          <p:cNvPr id="9" name="TextBox 8"/>
           <p:cNvSpPr txBox="1"/>
           <p:nvPr/>
         </p:nvSpPr>
         <p:spPr>
           <a:xfrm>
-            <a:off x="932688" y="1975104"/>
-            <a:ext cx="10058400" cy="822960"/>
+            <a:off x="1005840" y="2468880"/>
+            <a:ext cx="10058400" cy="2331720"/>
           </a:xfrm>
           <a:prstGeom prst="rect">
             <a:avLst/>
@@ -8598,57 +9371,92 @@
           <a:noFill/>
         </p:spPr>
         <p:txBody>
-          <a:bodyPr wrap="square" lIns="45720" rIns="45720" tIns="36576" bIns="36576" anchor="t">
+          <a:bodyPr wrap="square" lIns="73152" rIns="45720" tIns="36576">
             <a:spAutoFit/>
           </a:bodyPr>
           <a:lstStyle/>
           <a:p>
-            <a:pPr algn="l">
-              <a:defRPr sz="2500" b="1">
+            <a:pPr>
+              <a:spcAft>
+                <a:spcPts val="900"/>
+              </a:spcAft>
+              <a:defRPr sz="2000">
                 <a:solidFill>
-                  <a:srgbClr val="FFFFFF"/>
+                  <a:srgbClr val="1C2330"/>
                 </a:solidFill>
                 <a:latin typeface="Aptos"/>
               </a:defRPr>
             </a:pPr>
             <a:r>
-              <a:t>¿Qué puedes señalar, explicar y probar al terminar este checkpoint?</a:t>
-            </a:r>
-          </a:p>
-        </p:txBody>
-      </p:sp>
-      <p:sp>
-        <p:nvSpPr>
-          <p:cNvPr id="11" name="TextBox 10"/>
-          <p:cNvSpPr txBox="1"/>
-          <p:nvPr/>
-        </p:nvSpPr>
-        <p:spPr>
-          <a:xfrm>
-            <a:off x="749808" y="3886200"/>
-            <a:ext cx="10607040" cy="1280160"/>
-          </a:xfrm>
-          <a:prstGeom prst="rect">
-            <a:avLst/>
-          </a:prstGeom>
-          <a:noFill/>
-        </p:spPr>
-        <p:txBody>
-          <a:bodyPr wrap="square" lIns="45720" rIns="45720" tIns="36576" bIns="36576" anchor="ctr">
-            <a:spAutoFit/>
-          </a:bodyPr>
-          <a:lstStyle/>
-          <a:p>
-            <a:pPr algn="ctr">
-              <a:defRPr sz="2300" b="1">
+              <a:t>•  Libro: capítulo 02 · Tema 1: variables y tipos</a:t>
+            </a:r>
+          </a:p>
+          <a:p>
+            <a:pPr>
+              <a:spcAft>
+                <a:spcPts val="900"/>
+              </a:spcAft>
+              <a:defRPr sz="2000">
                 <a:solidFill>
-                  <a:srgbClr val="247E5C"/>
+                  <a:srgbClr val="1C2330"/>
                 </a:solidFill>
                 <a:latin typeface="Aptos"/>
               </a:defRPr>
             </a:pPr>
             <a:r>
-              <a:t>La sesión termina cuando la evidencia existe, está comprobada y puede defenderse.</a:t>
+              <a:t>•  Fichas S206-S215 y píldoras H1</a:t>
+            </a:r>
+          </a:p>
+          <a:p>
+            <a:pPr>
+              <a:spcAft>
+                <a:spcPts val="900"/>
+              </a:spcAft>
+              <a:defRPr sz="2000">
+                <a:solidFill>
+                  <a:srgbClr val="1C2330"/>
+                </a:solidFill>
+                <a:latin typeface="Aptos"/>
+              </a:defRPr>
+            </a:pPr>
+            <a:r>
+              <a:t>•  Ejemplos revisados y adaptados a MiniJarvis; no se copian errores ni capturas antiguas del PDF.</a:t>
+            </a:r>
+          </a:p>
+        </p:txBody>
+      </p:sp>
+      <p:sp>
+        <p:nvSpPr>
+          <p:cNvPr id="10" name="TextBox 9"/>
+          <p:cNvSpPr txBox="1"/>
+          <p:nvPr/>
+        </p:nvSpPr>
+        <p:spPr>
+          <a:xfrm>
+            <a:off x="960120" y="5257800"/>
+            <a:ext cx="10241280" cy="411480"/>
+          </a:xfrm>
+          <a:prstGeom prst="rect">
+            <a:avLst/>
+          </a:prstGeom>
+          <a:noFill/>
+        </p:spPr>
+        <p:txBody>
+          <a:bodyPr wrap="square" lIns="45720" rIns="45720" tIns="36576" bIns="36576" anchor="t">
+            <a:spAutoFit/>
+          </a:bodyPr>
+          <a:lstStyle/>
+          <a:p>
+            <a:pPr algn="ctr">
+              <a:defRPr sz="1800" b="1">
+                <a:solidFill>
+                  <a:srgbClr val="2F5BA8"/>
+                </a:solidFill>
+                <a:latin typeface="Aptos"/>
+              </a:defRPr>
+            </a:pPr>
+            <a:r>
+              <a:t>Consulta el libro para ampliar, practicar y repasar errores frecuentes.</a:t>
             </a:r>
           </a:p>
         </p:txBody>

--- a/02-PROFESORADO/03-PRESENTACIONES/POR-SESION/h1/S210-variables-presentacion.pptx
+++ b/02-PROFESORADO/03-PRESENTACIONES/POR-SESION/h1/S210-variables-presentacion.pptx
@@ -510,12 +510,12 @@
           <a:lstStyle/>
           <a:p>
             <a:r>
-              <a:t>Objetivo docente: Planificar datos y comprender variable, tipo, nombre, declaración, inicialización y asignación.</a:t>
-            </a:r>
-          </a:p>
-          <a:p>
-            <a:r>
-              <a:t>Diapositiva 1 de 9: Variables: guardar datos con nombre y tipo</a:t>
+              <a:t>Objetivo docente: Al terminar, debes planificar datos: qué se guarda, con qué tipo, con qué nombre y dónde se usa.</a:t>
+            </a:r>
+          </a:p>
+          <a:p>
+            <a:r>
+              <a:t>Diapositiva 1 de 9: Qué vas a aprender</a:t>
             </a:r>
           </a:p>
           <a:p>
@@ -525,7 +525,7 @@
           </a:p>
           <a:p>
             <a:r>
-              <a:t>Presenta el producto y anticipa la evidencia: Quede evidencia individual.</a:t>
+              <a:t>Presenta el producto y anticipa la evidencia: Hoy sí quiero una evidencia individual: cada persona debe poder señalar una variable propia y explicar tipo, nombre, valor inicial y una asignación posterior.</a:t>
             </a:r>
           </a:p>
           <a:p>
@@ -535,47 +535,7 @@
           </a:p>
           <a:p>
             <a:r>
-              <a:t>- 00:00–00:05 / D1: PLANIFICAR: Provoca la necesidad de almacenar datos.</a:t>
-            </a:r>
-          </a:p>
-          <a:p>
-            <a:r>
-              <a:t>- 00:05–00:11 / D2: PÍLDORA DOCENTE 1/4: Usa la metáfora de casilla etiquetada y conecta con RAM de Tema 1 sin profundizar en binario.</a:t>
-            </a:r>
-          </a:p>
-          <a:p>
-            <a:r>
-              <a:t>- 00:11–00:18 / D3: PÍLDORA DOCENTE 2/4: Presenta el mapa completo; para uso inmediato céntrate en int, double, boolean, char y String.</a:t>
-            </a:r>
-          </a:p>
-          <a:p>
-            <a:r>
-              <a:t>- 00:18–00:23 / D4: MICROPRÁCTICA: Pide respuesta y razón, no solo el nombre del tipo.</a:t>
-            </a:r>
-          </a:p>
-          <a:p>
-            <a:r>
-              <a:t>- 00:23–00:28 / D5: PÍLDORA DOCENTE 3/4: Conecta con identificadores de S208 y legibilidad.</a:t>
-            </a:r>
-          </a:p>
-          <a:p>
-            <a:r>
-              <a:t>- 00:28–00:33 / D6: PÍLDORA DOCENTE 4/4: Explica que el tipo se escribe al declarar, no cada vez que cambia el valor. Diferencia = de igualdad matemática.</a:t>
-            </a:r>
-          </a:p>
-          <a:p>
-            <a:r>
-              <a:t>- 00:33–00:36 / D7: PLANIFICACIÓN: Modela una fila y detente.</a:t>
-            </a:r>
-          </a:p>
-          <a:p>
-            <a:r>
-              <a:t>- 00:36–00:42 / D8: ACTIVIDAD: Circula y pregunta qué línea prueba el cambio.</a:t>
-            </a:r>
-          </a:p>
-          <a:p>
-            <a:r>
-              <a:t>- 00:42–00:45 / D9: CIERRE: Pregunta sobre su propio código.</a:t>
+              <a:t>- 45 minutos: Antes del código, haced la tabla de datos. Después implementad al menos tres variables, mostradlas por consola, cambiad una y volved a mostrarla para comprobar que entendéis la asignación.</a:t>
             </a:r>
           </a:p>
           <a:p>
@@ -585,12 +545,122 @@
           </a:p>
           <a:p>
             <a:r>
-              <a:t>- PÍLDORA DOCENTE 1/4: Usa la metáfora de casilla etiquetada y conecta con RAM de Tema 1 sin profundizar en binario, PÍLDORA DOCENTE 2/4: Presenta el mapa completo; para uso inmediato céntrate en int, double, boolean, char y String, PÍLDORA DOCENTE 3/4: Conecta con identificadores de S208 y legibilidad.</a:t>
-            </a:r>
-          </a:p>
-          <a:p>
-            <a:r>
-              <a:t>- PÍLDORA DOCENTE 4/4: Explica que el tipo se escribe al declarar, no cada vez que cambia el valor. Diferencia = de igualdad matemática.</a:t>
+              <a:t>- Úsala antes de la tabla de datos y antes de implementar variables.</a:t>
+            </a:r>
+          </a:p>
+          <a:p>
+            <a:r>
+              <a:t>- Una variable es una zona de memoria identificada por un nombre. El tipo indica qué clase de dato puede guardar. El valor puede cambiar. La variable no es lo mismo que su valor actual.</a:t>
+            </a:r>
+          </a:p>
+          <a:p>
+            <a:r>
+              <a:t>- Empieza con el cambio de valor:</a:t>
+            </a:r>
+          </a:p>
+          <a:p>
+            <a:r>
+              <a:t>- int horasEstudio = 4;</a:t>
+            </a:r>
+          </a:p>
+          <a:p>
+            <a:r>
+              <a:t>- horasEstudio = 5;</a:t>
+            </a:r>
+          </a:p>
+          <a:p>
+            <a:r>
+              <a:t>- Di:</a:t>
+            </a:r>
+          </a:p>
+          <a:p>
+            <a:r>
+              <a:t>- La variable permanece; lo que cambia es el valor guardado. Primero horasEstudio vale 4 y después vale 5.</a:t>
+            </a:r>
+          </a:p>
+          <a:p>
+            <a:r>
+              <a:t>- Contrasta variable y valor:</a:t>
+            </a:r>
+          </a:p>
+          <a:p>
+            <a:r>
+              <a:t>- String nombreUsuario = "Laura";</a:t>
+            </a:r>
+          </a:p>
+          <a:p>
+            <a:r>
+              <a:t>- Pregunta:</a:t>
+            </a:r>
+          </a:p>
+          <a:p>
+            <a:r>
+              <a:t>- Qué es nombreUsuario y qué es "Laura".</a:t>
+            </a:r>
+          </a:p>
+          <a:p>
+            <a:r>
+              <a:t>- Muestra dos variables con el mismo valor:</a:t>
+            </a:r>
+          </a:p>
+          <a:p>
+            <a:r>
+              <a:t>- int horasPractica = 4;</a:t>
+            </a:r>
+          </a:p>
+          <a:p>
+            <a:r>
+              <a:t>- Hay una variable o dos. Qué pasaría si después cambia solo horasEstudio.</a:t>
+            </a:r>
+          </a:p>
+          <a:p>
+            <a:r>
+              <a:t>- Traza una variable que cambia:</a:t>
+            </a:r>
+          </a:p>
+          <a:p>
+            <a:r>
+              <a:t>- int tareas = 2;</a:t>
+            </a:r>
+          </a:p>
+          <a:p>
+            <a:r>
+              <a:t>- System.out.println(tareas);</a:t>
+            </a:r>
+          </a:p>
+          <a:p>
+            <a:r>
+              <a:t>- tareas = 3;</a:t>
+            </a:r>
+          </a:p>
+          <a:p>
+            <a:r>
+              <a:t>- Predice la primera y la segunda salida.</a:t>
+            </a:r>
+          </a:p>
+          <a:p>
+            <a:r>
+              <a:t>- Presenta cinco tipos de uso inmediato:</a:t>
+            </a:r>
+          </a:p>
+          <a:p>
+            <a:r>
+              <a:t>- double notaMedia = 7.5;</a:t>
+            </a:r>
+          </a:p>
+          <a:p>
+            <a:r>
+              <a:t>- boolean objetivoAlcanzado = true;</a:t>
+            </a:r>
+          </a:p>
+          <a:p>
+            <a:r>
+              <a:t>- char inicial = 'L';</a:t>
+            </a:r>
+          </a:p>
+          <a:p>
+            <a:r>
+              <a:t>- Nombre -&gt; String</a:t>
             </a:r>
           </a:p>
           <a:p>
@@ -665,7 +735,7 @@
           <a:lstStyle/>
           <a:p>
             <a:r>
-              <a:t>Objetivo docente: Planificar datos y comprender variable, tipo, nombre, declaración, inicialización y asignación.</a:t>
+              <a:t>Objetivo docente: Al terminar, debes planificar datos: qué se guarda, con qué tipo, con qué nombre y dónde se usa.</a:t>
             </a:r>
           </a:p>
           <a:p>
@@ -680,12 +750,12 @@
           </a:p>
           <a:p>
             <a:r>
-              <a:t>- Objetivo: Planificar datos y comprender variable, tipo, nombre, declaración, inicialización y asignación.</a:t>
-            </a:r>
-          </a:p>
-          <a:p>
-            <a:r>
-              <a:t>- Comprobación: Quede evidencia individual.</a:t>
+              <a:t>- Objetivo: Al terminar, debes planificar datos: qué se guarda, con qué tipo, con qué nombre y dónde se usa.</a:t>
+            </a:r>
+          </a:p>
+          <a:p>
+            <a:r>
+              <a:t>- Comprobación: Hoy sí quiero una evidencia individual: cada persona debe poder señalar una variable propia y explicar tipo, nombre, valor inicial y una asignación posterior.</a:t>
             </a:r>
           </a:p>
           <a:p>
@@ -760,12 +830,12 @@
           <a:lstStyle/>
           <a:p>
             <a:r>
-              <a:t>Objetivo docente: Planificar datos y comprender variable, tipo, nombre, declaración, inicialización y asignación.</a:t>
-            </a:r>
-          </a:p>
-          <a:p>
-            <a:r>
-              <a:t>Diapositiva 3 de 9: Variable = tipo + nombre + valor</a:t>
+              <a:t>Objetivo docente: Al terminar, debes planificar datos: qué se guarda, con qué tipo, con qué nombre y dónde se usa.</a:t>
+            </a:r>
+          </a:p>
+          <a:p>
+            <a:r>
+              <a:t>Diapositiva 3 de 9: Una variable tiene tipo, nombre y valor</a:t>
             </a:r>
           </a:p>
           <a:p>
@@ -880,12 +950,12 @@
           <a:lstStyle/>
           <a:p>
             <a:r>
-              <a:t>Objetivo docente: Planificar datos y comprender variable, tipo, nombre, declaración, inicialización y asignación.</a:t>
-            </a:r>
-          </a:p>
-          <a:p>
-            <a:r>
-              <a:t>Diapositiva 4 de 9: Declarar, inicializar y asignar</a:t>
+              <a:t>Objetivo docente: Al terminar, debes planificar datos: qué se guarda, con qué tipo, con qué nombre y dónde se usa.</a:t>
+            </a:r>
+          </a:p>
+          <a:p>
+            <a:r>
+              <a:t>Diapositiva 4 de 9: Declarar e inicializar en una línea</a:t>
             </a:r>
           </a:p>
           <a:p>
@@ -900,22 +970,23 @@
           </a:p>
           <a:p>
             <a:r>
-              <a:t>- int studyHours;       // declaración</a:t>
-            </a:r>
-          </a:p>
-          <a:p>
-            <a:r>
-              <a:t>studyHours = 4;       // inicialización</a:t>
-            </a:r>
-          </a:p>
-          <a:p>
-            <a:r>
-              <a:t>studyHours = 5;       // nueva asignación</a:t>
-            </a:r>
-          </a:p>
-          <a:p>
-            <a:r>
-              <a:t>System.out.println(studyHours);</a:t>
+              <a:t>- int studyHours = 4;   // declaración e inicialización</a:t>
+            </a:r>
+          </a:p>
+          <a:p>
+            <a:r>
+              <a:t>studyHours = 5;       // asignación posterior</a:t>
+            </a:r>
+          </a:p>
+          <a:p/>
+          <a:p>
+            <a:r>
+              <a:t>int tasks;            // declaración</a:t>
+            </a:r>
+          </a:p>
+          <a:p>
+            <a:r>
+              <a:t>tasks = 3;            // primera asignación: inicialización</a:t>
             </a:r>
           </a:p>
           <a:p>
@@ -1000,7 +1071,7 @@
           <a:lstStyle/>
           <a:p>
             <a:r>
-              <a:t>Objetivo docente: Planificar datos y comprender variable, tipo, nombre, declaración, inicialización y asignación.</a:t>
+              <a:t>Objetivo docente: Al terminar, debes planificar datos: qué se guarda, con qué tipo, con qué nombre y dónde se usa.</a:t>
             </a:r>
           </a:p>
           <a:p>
@@ -1115,7 +1186,7 @@
           <a:lstStyle/>
           <a:p>
             <a:r>
-              <a:t>Objetivo docente: Planificar datos y comprender variable, tipo, nombre, declaración, inicialización y asignación.</a:t>
+              <a:t>Objetivo docente: Al terminar, debes planificar datos: qué se guarda, con qué tipo, con qué nombre y dónde se usa.</a:t>
             </a:r>
           </a:p>
           <a:p>
@@ -1225,7 +1296,7 @@
           <a:lstStyle/>
           <a:p>
             <a:r>
-              <a:t>Objetivo docente: Planificar datos y comprender variable, tipo, nombre, declaración, inicialización y asignación.</a:t>
+              <a:t>Objetivo docente: Al terminar, debes planificar datos: qué se guarda, con qué tipo, con qué nombre y dónde se usa.</a:t>
             </a:r>
           </a:p>
           <a:p>
@@ -1240,7 +1311,7 @@
           </a:p>
           <a:p>
             <a:r>
-              <a:t>Comprueba la evidencia en su fuente canónica: Quede evidencia individual.</a:t>
+              <a:t>Comprueba la evidencia en su fuente canónica: Hoy sí quiero una evidencia individual: cada persona debe poder señalar una variable propia y explicar tipo, nombre, valor inicial y una asignación posterior.</a:t>
             </a:r>
           </a:p>
           <a:p>
@@ -1335,7 +1406,7 @@
           <a:lstStyle/>
           <a:p>
             <a:r>
-              <a:t>Objetivo docente: Planificar datos y comprender variable, tipo, nombre, declaración, inicialización y asignación.</a:t>
+              <a:t>Objetivo docente: Al terminar, debes planificar datos: qué se guarda, con qué tipo, con qué nombre y dónde se usa.</a:t>
             </a:r>
           </a:p>
           <a:p>
@@ -1430,12 +1501,12 @@
           <a:lstStyle/>
           <a:p>
             <a:r>
-              <a:t>Objetivo docente: Planificar datos y comprender variable, tipo, nombre, declaración, inicialización y asignación.</a:t>
-            </a:r>
-          </a:p>
-          <a:p>
-            <a:r>
-              <a:t>Diapositiva 9 de 9: Fuentes utilizadas</a:t>
+              <a:t>Objetivo docente: Al terminar, debes planificar datos: qué se guarda, con qué tipo, con qué nombre y dónde se usa.</a:t>
+            </a:r>
+          </a:p>
+          <a:p>
+            <a:r>
+              <a:t>Diapositiva 9 de 9: Fuentes diferenciadas</a:t>
             </a:r>
           </a:p>
           <a:p>
@@ -1450,17 +1521,17 @@
           </a:p>
           <a:p>
             <a:r>
-              <a:t>- Libro: capítulo 02 · Tema 1: variables y tipos</a:t>
-            </a:r>
-          </a:p>
-          <a:p>
-            <a:r>
-              <a:t>- Fichas S206-S215 y píldoras H1</a:t>
-            </a:r>
-          </a:p>
-          <a:p>
-            <a:r>
-              <a:t>- Ejemplos revisados y adaptados a MiniJarvis; no se copian errores ni capturas antiguas del PDF.</a:t>
+              <a:t>- Libro por hitos · Capítulo 02: variables y tipos</a:t>
+            </a:r>
+          </a:p>
+          <a:p>
+            <a:r>
+              <a:t>- PDF Tema 1 · §4: almacenamiento de datos</a:t>
+            </a:r>
+          </a:p>
+          <a:p>
+            <a:r>
+              <a:t>- Proyecto MiniJarvis · fichas S206-S215, píldoras H1 y criterios de evidencia</a:t>
             </a:r>
           </a:p>
           <a:p>
@@ -4669,7 +4740,7 @@
               </a:defRPr>
             </a:pPr>
             <a:r>
-              <a:t>Variables: guardar datos con nombre y tipo</a:t>
+              <a:t>Qué vas a aprender</a:t>
             </a:r>
           </a:p>
         </p:txBody>
@@ -4705,7 +4776,7 @@
               </a:defRPr>
             </a:pPr>
             <a:r>
-              <a:t>H1 — Primer MiniJarvis</a:t>
+              <a:t>H1 — Primer asistente ejecutable</a:t>
             </a:r>
           </a:p>
         </p:txBody>
@@ -4749,42 +4820,6 @@
       <p:sp>
         <p:nvSpPr>
           <p:cNvPr id="9" name="TextBox 8"/>
-          <p:cNvSpPr txBox="1"/>
-          <p:nvPr/>
-        </p:nvSpPr>
-        <p:spPr>
-          <a:xfrm>
-            <a:off x="713232" y="4965192"/>
-            <a:ext cx="10241280" cy="594360"/>
-          </a:xfrm>
-          <a:prstGeom prst="rect">
-            <a:avLst/>
-          </a:prstGeom>
-          <a:noFill/>
-        </p:spPr>
-        <p:txBody>
-          <a:bodyPr wrap="square" lIns="45720" rIns="45720" tIns="36576" bIns="36576" anchor="t">
-            <a:spAutoFit/>
-          </a:bodyPr>
-          <a:lstStyle/>
-          <a:p>
-            <a:pPr algn="l">
-              <a:defRPr sz="1700" b="0">
-                <a:solidFill>
-                  <a:srgbClr val="D2D9E4"/>
-                </a:solidFill>
-                <a:latin typeface="Aptos"/>
-              </a:defRPr>
-            </a:pPr>
-            <a:r>
-              <a:t>Individual con contraste por parejas o equipo cuando la práctica lo requiera</a:t>
-            </a:r>
-          </a:p>
-        </p:txBody>
-      </p:sp>
-      <p:sp>
-        <p:nvSpPr>
-          <p:cNvPr id="10" name="TextBox 9"/>
           <p:cNvSpPr txBox="1"/>
           <p:nvPr/>
         </p:nvSpPr>
@@ -5068,7 +5103,7 @@
               </a:defRPr>
             </a:pPr>
             <a:r>
-              <a:t>MiniJarvis · 1.º DAW · Sesión 210 · H1 — Primer MiniJarvis</a:t>
+              <a:t>MiniJarvis · 1.º DAW · Sesión 210 · H1 — Primer asistente ejecutable</a:t>
             </a:r>
           </a:p>
         </p:txBody>
@@ -5149,7 +5184,7 @@
               </a:defRPr>
             </a:pPr>
             <a:r>
-              <a:t>Objetivo: Planificar datos y comprender variable, tipo, nombre, declaración, inicialización y asignación.</a:t>
+              <a:t>Objetivo: Al terminar, debes planificar datos: qué se guarda, con qué tipo, con qué nombre y dónde se usa.</a:t>
             </a:r>
           </a:p>
         </p:txBody>
@@ -5230,7 +5265,7 @@
               </a:defRPr>
             </a:pPr>
             <a:r>
-              <a:t>Comprobación: Quede evidencia individual.</a:t>
+              <a:t>Comprobación: Hoy sí quiero una evidencia individual: cada persona debe poder señalar una variable propia y explicar tipo, nombre, valor inicial y una asignación posterior.</a:t>
             </a:r>
           </a:p>
         </p:txBody>
@@ -5406,7 +5441,7 @@
               </a:defRPr>
             </a:pPr>
             <a:r>
-              <a:t>Variable = tipo + nombre + valor</a:t>
+              <a:t>Una variable tiene tipo, nombre y valor</a:t>
             </a:r>
           </a:p>
         </p:txBody>
@@ -5485,7 +5520,7 @@
               </a:defRPr>
             </a:pPr>
             <a:r>
-              <a:t>MiniJarvis · 1.º DAW · Sesión 210 · H1 — Primer MiniJarvis</a:t>
+              <a:t>MiniJarvis · 1.º DAW · Sesión 210 · H1 — Primer asistente ejecutable</a:t>
             </a:r>
           </a:p>
         </p:txBody>
@@ -6363,7 +6398,7 @@
               </a:defRPr>
             </a:pPr>
             <a:r>
-              <a:t>Declarar, inicializar y asignar</a:t>
+              <a:t>Declarar e inicializar en una línea</a:t>
             </a:r>
           </a:p>
         </p:txBody>
@@ -6442,7 +6477,7 @@
               </a:defRPr>
             </a:pPr>
             <a:r>
-              <a:t>MiniJarvis · 1.º DAW · Sesión 210 · H1 — Primer MiniJarvis</a:t>
+              <a:t>MiniJarvis · 1.º DAW · Sesión 210 · H1 — Primer asistente ejecutable</a:t>
             </a:r>
           </a:p>
         </p:txBody>
@@ -6518,7 +6553,7 @@
               <a:spcAft>
                 <a:spcPts val="0"/>
               </a:spcAft>
-              <a:defRPr sz="1800">
+              <a:defRPr sz="1400">
                 <a:solidFill>
                   <a:srgbClr val="FFFFFF"/>
                 </a:solidFill>
@@ -6526,19 +6561,20 @@
               </a:defRPr>
             </a:pPr>
             <a:r>
-              <a:t>int studyHours;       // declaración</a:t>
+              <a:t>int studyHours = 4;   // declaración e inicialización</a:t>
             </a:r>
             <a:br/>
             <a:r>
-              <a:t>studyHours = 4;       // inicialización</a:t>
+              <a:t>studyHours = 5;       // asignación posterior</a:t>
             </a:r>
             <a:br/>
-            <a:r>
-              <a:t>studyHours = 5;       // nueva asignación</a:t>
-            </a:r>
             <a:br/>
             <a:r>
-              <a:t>System.out.println(studyHours);</a:t>
+              <a:t>int tasks;            // declaración</a:t>
+            </a:r>
+            <a:br/>
+            <a:r>
+              <a:t>tasks = 3;            // primera asignación: inicialización</a:t>
             </a:r>
           </a:p>
         </p:txBody>
@@ -6929,7 +6965,7 @@
               </a:defRPr>
             </a:pPr>
             <a:r>
-              <a:t>MiniJarvis · 1.º DAW · Sesión 210 · H1 — Primer MiniJarvis</a:t>
+              <a:t>MiniJarvis · 1.º DAW · Sesión 210 · H1 — Primer asistente ejecutable</a:t>
             </a:r>
           </a:p>
         </p:txBody>
@@ -7603,7 +7639,7 @@
               </a:defRPr>
             </a:pPr>
             <a:r>
-              <a:t>MiniJarvis · 1.º DAW · Sesión 210 · H1 — Primer MiniJarvis</a:t>
+              <a:t>MiniJarvis · 1.º DAW · Sesión 210 · H1 — Primer asistente ejecutable</a:t>
             </a:r>
           </a:p>
         </p:txBody>
@@ -8326,7 +8362,7 @@
               </a:defRPr>
             </a:pPr>
             <a:r>
-              <a:t>MiniJarvis · 1.º DAW · Sesión 210 · H1 — Primer MiniJarvis</a:t>
+              <a:t>MiniJarvis · 1.º DAW · Sesión 210 · H1 — Primer asistente ejecutable</a:t>
             </a:r>
           </a:p>
         </p:txBody>
@@ -8905,7 +8941,7 @@
               </a:defRPr>
             </a:pPr>
             <a:r>
-              <a:t>MiniJarvis · 1.º DAW · Sesión 210 · H1 — Primer MiniJarvis</a:t>
+              <a:t>MiniJarvis · 1.º DAW · Sesión 210 · H1 — Primer asistente ejecutable</a:t>
             </a:r>
           </a:p>
         </p:txBody>
@@ -9234,7 +9270,7 @@
               </a:defRPr>
             </a:pPr>
             <a:r>
-              <a:t>Fuentes utilizadas</a:t>
+              <a:t>Fuentes diferenciadas</a:t>
             </a:r>
           </a:p>
         </p:txBody>
@@ -9313,7 +9349,7 @@
               </a:defRPr>
             </a:pPr>
             <a:r>
-              <a:t>MiniJarvis · 1.º DAW · Sesión 210 · H1 — Primer MiniJarvis</a:t>
+              <a:t>MiniJarvis · 1.º DAW · Sesión 210 · H1 — Primer asistente ejecutable</a:t>
             </a:r>
           </a:p>
         </p:txBody>
@@ -9388,7 +9424,7 @@
               </a:defRPr>
             </a:pPr>
             <a:r>
-              <a:t>•  Libro: capítulo 02 · Tema 1: variables y tipos</a:t>
+              <a:t>•  Libro por hitos · Capítulo 02: variables y tipos</a:t>
             </a:r>
           </a:p>
           <a:p>
@@ -9404,7 +9440,7 @@
               </a:defRPr>
             </a:pPr>
             <a:r>
-              <a:t>•  Fichas S206-S215 y píldoras H1</a:t>
+              <a:t>•  PDF Tema 1 · §4: almacenamiento de datos</a:t>
             </a:r>
           </a:p>
           <a:p>
@@ -9420,7 +9456,7 @@
               </a:defRPr>
             </a:pPr>
             <a:r>
-              <a:t>•  Ejemplos revisados y adaptados a MiniJarvis; no se copian errores ni capturas antiguas del PDF.</a:t>
+              <a:t>•  Proyecto MiniJarvis · fichas S206-S215, píldoras H1 y criterios de evidencia</a:t>
             </a:r>
           </a:p>
         </p:txBody>

--- a/02-PROFESORADO/03-PRESENTACIONES/POR-SESION/h1/S210-variables-presentacion.pptx
+++ b/02-PROFESORADO/03-PRESENTACIONES/POR-SESION/h1/S210-variables-presentacion.pptx
@@ -6081,7 +6081,7 @@
               </a:defRPr>
             </a:pPr>
             <a:r>
-              <a:t>He producido o actualizado: Código con variable usada correctamente.</a:t>
+              <a:t>Pueden explicar qué están intentando conseguir.</a:t>
             </a:r>
           </a:p>
         </p:txBody>
@@ -6162,7 +6162,7 @@
               </a:defRPr>
             </a:pPr>
             <a:r>
-              <a:t>Puedo señalar dónde está.</a:t>
+              <a:t>Registran una decisión, prueba o bloqueo; no muestran solo el resultado final.</a:t>
             </a:r>
           </a:p>
         </p:txBody>
@@ -6243,7 +6243,7 @@
               </a:defRPr>
             </a:pPr>
             <a:r>
-              <a:t>Puedo explicar una decisión tomada.</a:t>
+              <a:t>Todas las personas pueden describir su aportación.</a:t>
             </a:r>
           </a:p>
         </p:txBody>
@@ -6324,7 +6324,7 @@
               </a:defRPr>
             </a:pPr>
             <a:r>
-              <a:t>Puedo mostrar una prueba o comprobación.</a:t>
+              <a:t>Comprueban el producto con un criterio observable.</a:t>
             </a:r>
           </a:p>
         </p:txBody>
@@ -6405,7 +6405,7 @@
               </a:defRPr>
             </a:pPr>
             <a:r>
-              <a:t>He registrado mi aportación individual si el trabajo era de equipo.</a:t>
+              <a:t>No usan datos personales, credenciales ni respuestas de ejemplo antes del intento propio.</a:t>
             </a:r>
           </a:p>
         </p:txBody>

--- a/02-PROFESORADO/03-PRESENTACIONES/POR-SESION/h1/S210-variables-presentacion.pptx
+++ b/02-PROFESORADO/03-PRESENTACIONES/POR-SESION/h1/S210-variables-presentacion.pptx
@@ -3378,8 +3378,8 @@
         </p:nvSpPr>
         <p:spPr>
           <a:xfrm>
-            <a:off x="713232" y="6272784"/>
-            <a:ext cx="10607040" cy="201168"/>
+            <a:off x="713232" y="4965192"/>
+            <a:ext cx="10241280" cy="594360"/>
           </a:xfrm>
           <a:prstGeom prst="rect">
             <a:avLst/>
@@ -3393,6 +3393,42 @@
           <a:lstStyle/>
           <a:p>
             <a:pPr algn="l">
+              <a:defRPr sz="1700" b="0">
+                <a:solidFill>
+                  <a:srgbClr val="D2D9E4"/>
+                </a:solidFill>
+                <a:latin typeface="Aptos"/>
+              </a:defRPr>
+            </a:pPr>
+            <a:r>
+              <a:t>Individual</a:t>
+            </a:r>
+          </a:p>
+        </p:txBody>
+      </p:sp>
+      <p:sp>
+        <p:nvSpPr>
+          <p:cNvPr id="10" name="TextBox 9"/>
+          <p:cNvSpPr txBox="1"/>
+          <p:nvPr/>
+        </p:nvSpPr>
+        <p:spPr>
+          <a:xfrm>
+            <a:off x="713232" y="6272784"/>
+            <a:ext cx="10607040" cy="201168"/>
+          </a:xfrm>
+          <a:prstGeom prst="rect">
+            <a:avLst/>
+          </a:prstGeom>
+          <a:noFill/>
+        </p:spPr>
+        <p:txBody>
+          <a:bodyPr wrap="square" lIns="45720" rIns="45720" tIns="36576" bIns="36576" anchor="t">
+            <a:spAutoFit/>
+          </a:bodyPr>
+          <a:lstStyle/>
+          <a:p>
+            <a:pPr algn="l">
               <a:defRPr sz="1000" b="1">
                 <a:solidFill>
                   <a:srgbClr val="A0AAB9"/>
@@ -3401,7 +3437,7 @@
               </a:defRPr>
             </a:pPr>
             <a:r>
-              <a:t>MINIJARVIS · PROGRAMACIÓN + ENTORNOS DE DESARROLLO</a:t>
+              <a:t>MINIJARVIS · PROGRAMACIÓN</a:t>
             </a:r>
           </a:p>
         </p:txBody>

--- a/02-PROFESORADO/03-PRESENTACIONES/POR-SESION/h1/S210-variables-presentacion.pptx
+++ b/02-PROFESORADO/03-PRESENTACIONES/POR-SESION/h1/S210-variables-presentacion.pptx
@@ -5834,7 +5834,7 @@
               </a:defRPr>
             </a:pPr>
             <a:r>
-              <a:t>S210 · H1 — Primer asistente ejecutable</a:t>
+              <a:t>H1.5 · H1 — Primer asistente ejecutable</a:t>
             </a:r>
           </a:p>
         </p:txBody>
@@ -6156,7 +6156,7 @@
               </a:defRPr>
             </a:pPr>
             <a:r>
-              <a:t>S210 · H1 — Primer asistente ejecutable</a:t>
+              <a:t>H1.5 · H1 — Primer asistente ejecutable</a:t>
             </a:r>
           </a:p>
         </p:txBody>
@@ -6457,7 +6457,7 @@
               </a:defRPr>
             </a:pPr>
             <a:r>
-              <a:t>S210 · H1 — Primer asistente ejecutable</a:t>
+              <a:t>H1.5 · H1 — Primer asistente ejecutable</a:t>
             </a:r>
           </a:p>
         </p:txBody>
@@ -6810,7 +6810,7 @@
               </a:defRPr>
             </a:pPr>
             <a:r>
-              <a:t>S210 · H1 — Primer asistente ejecutable</a:t>
+              <a:t>H1.5 · H1 — Primer asistente ejecutable</a:t>
             </a:r>
           </a:p>
         </p:txBody>
@@ -7247,7 +7247,7 @@
               </a:defRPr>
             </a:pPr>
             <a:r>
-              <a:t>S210 · H1 — Primer asistente ejecutable</a:t>
+              <a:t>H1.5 · H1 — Primer asistente ejecutable</a:t>
             </a:r>
           </a:p>
         </p:txBody>
@@ -7530,7 +7530,7 @@
               </a:defRPr>
             </a:pPr>
             <a:r>
-              <a:t>S210 · H1 — Primer asistente ejecutable</a:t>
+              <a:t>H1.5 · H1 — Primer asistente ejecutable</a:t>
             </a:r>
           </a:p>
         </p:txBody>
@@ -7974,7 +7974,7 @@
               </a:defRPr>
             </a:pPr>
             <a:r>
-              <a:t>S210 · H1 — Primer asistente ejecutable</a:t>
+              <a:t>H1.5 · H1 — Primer asistente ejecutable</a:t>
             </a:r>
           </a:p>
         </p:txBody>
@@ -8418,7 +8418,7 @@
               </a:defRPr>
             </a:pPr>
             <a:r>
-              <a:t>S210 · H1 — Primer asistente ejecutable</a:t>
+              <a:t>H1.5 · H1 — Primer asistente ejecutable</a:t>
             </a:r>
           </a:p>
         </p:txBody>
@@ -8656,7 +8656,7 @@
               </a:defRPr>
             </a:pPr>
             <a:r>
-              <a:t>S210 · H1 — Primer asistente ejecutable</a:t>
+              <a:t>H1.5 · H1 — Primer asistente ejecutable</a:t>
             </a:r>
           </a:p>
         </p:txBody>
@@ -9028,7 +9028,7 @@
               </a:defRPr>
             </a:pPr>
             <a:r>
-              <a:t>S210 · H1 — Primer asistente ejecutable</a:t>
+              <a:t>H1.5 · H1 — Primer asistente ejecutable</a:t>
             </a:r>
           </a:p>
         </p:txBody>
@@ -9612,7 +9612,7 @@
               </a:defRPr>
             </a:pPr>
             <a:r>
-              <a:t>S210 · H1 — Primer asistente ejecutable</a:t>
+              <a:t>H1.5 · H1 — Primer asistente ejecutable</a:t>
             </a:r>
           </a:p>
         </p:txBody>
@@ -9850,7 +9850,7 @@
               </a:defRPr>
             </a:pPr>
             <a:r>
-              <a:t>S210 · H1 — Primer asistente ejecutable</a:t>
+              <a:t>H1.5 · H1 — Primer asistente ejecutable</a:t>
             </a:r>
           </a:p>
         </p:txBody>
@@ -10048,7 +10048,7 @@
               </a:defRPr>
             </a:pPr>
             <a:r>
-              <a:t>S210 · H1 — Primer asistente ejecutable</a:t>
+              <a:t>H1.5 · H1 — Primer asistente ejecutable</a:t>
             </a:r>
           </a:p>
         </p:txBody>
@@ -10342,7 +10342,7 @@
               </a:defRPr>
             </a:pPr>
             <a:r>
-              <a:t>S210 · H1 — Primer asistente ejecutable</a:t>
+              <a:t>H1.5 · H1 — Primer asistente ejecutable</a:t>
             </a:r>
           </a:p>
         </p:txBody>
@@ -10482,7 +10482,7 @@
               </a:defRPr>
             </a:pPr>
             <a:r>
-              <a:t>README: no requiere actualización específica en S210.</a:t>
+              <a:t>README: no requiere actualización específica en H1.5.</a:t>
             </a:r>
           </a:p>
         </p:txBody>
@@ -10531,7 +10531,7 @@
               </a:defRPr>
             </a:pPr>
             <a:r>
-              <a:t>Moodle / Drive / Site: no hay entrega o actualización específica en S210.</a:t>
+              <a:t>Moodle / Drive / Site: no hay entrega o actualización específica en H1.5.</a:t>
             </a:r>
           </a:p>
         </p:txBody>
@@ -10685,7 +10685,7 @@
               </a:defRPr>
             </a:pPr>
             <a:r>
-              <a:t>S210 · H1 — Primer asistente ejecutable</a:t>
+              <a:t>H1.5 · H1 — Primer asistente ejecutable</a:t>
             </a:r>
           </a:p>
         </p:txBody>
@@ -11077,7 +11077,7 @@
               </a:defRPr>
             </a:pPr>
             <a:r>
-              <a:t>S210 · H1 — Primer asistente ejecutable</a:t>
+              <a:t>H1.5 · H1 — Primer asistente ejecutable</a:t>
             </a:r>
           </a:p>
         </p:txBody>
@@ -11273,7 +11273,7 @@
               </a:defRPr>
             </a:pPr>
             <a:r>
-              <a:t>S210 · H1 — Primer asistente ejecutable</a:t>
+              <a:t>H1.5 · H1 — Primer asistente ejecutable</a:t>
             </a:r>
           </a:p>
         </p:txBody>
@@ -11660,7 +11660,7 @@
               </a:defRPr>
             </a:pPr>
             <a:r>
-              <a:t>S210 · H1 — Primer asistente ejecutable</a:t>
+              <a:t>H1.5 · H1 — Primer asistente ejecutable</a:t>
             </a:r>
           </a:p>
         </p:txBody>
@@ -12230,7 +12230,7 @@
               </a:defRPr>
             </a:pPr>
             <a:r>
-              <a:t>S210 · H1 — Primer asistente ejecutable</a:t>
+              <a:t>H1.5 · H1 — Primer asistente ejecutable</a:t>
             </a:r>
           </a:p>
         </p:txBody>
@@ -12502,7 +12502,7 @@
               </a:defRPr>
             </a:pPr>
             <a:r>
-              <a:t>S210 · H1 — Primer asistente ejecutable</a:t>
+              <a:t>H1.5 · H1 — Primer asistente ejecutable</a:t>
             </a:r>
           </a:p>
         </p:txBody>
@@ -12797,7 +12797,7 @@
               </a:defRPr>
             </a:pPr>
             <a:r>
-              <a:t>S210 · H1 — Primer asistente ejecutable</a:t>
+              <a:t>H1.5 · H1 — Primer asistente ejecutable</a:t>
             </a:r>
           </a:p>
         </p:txBody>
@@ -13096,7 +13096,7 @@
               </a:defRPr>
             </a:pPr>
             <a:r>
-              <a:t>S210 · H1 — Primer asistente ejecutable</a:t>
+              <a:t>H1.5 · H1 — Primer asistente ejecutable</a:t>
             </a:r>
           </a:p>
         </p:txBody>
@@ -13551,7 +13551,7 @@
               </a:defRPr>
             </a:pPr>
             <a:r>
-              <a:t>S210 · H1 — Primer asistente ejecutable</a:t>
+              <a:t>H1.5 · H1 — Primer asistente ejecutable</a:t>
             </a:r>
           </a:p>
         </p:txBody>
